--- a/lecons/F3/26_FORM4_LESSON22_Man_and_Floodplain_Interactions.pptx
+++ b/lecons/F3/26_FORM4_LESSON22_Man_and_Floodplain_Interactions.pptx
@@ -52,9 +52,14 @@
     <p:sldId id="300" r:id="rId46"/>
     <p:sldId id="301" r:id="rId47"/>
     <p:sldId id="302" r:id="rId48"/>
+    <p:sldId id="303" r:id="rId49"/>
+    <p:sldId id="304" r:id="rId50"/>
+    <p:sldId id="305" r:id="rId51"/>
+    <p:sldId id="306" r:id="rId52"/>
+    <p:sldId id="307" r:id="rId53"/>
   </p:sldIdLst>
   <p:notesMasterIdLst>
-    <p:notesMasterId r:id="rId49"/>
+    <p:notesMasterId r:id="rId54"/>
   </p:notesMasterIdLst>
   <p:sldSz cx="12192000" cy="6858000"/>
   <p:notesSz cx="6858000" cy="12192000"/>
@@ -636,7 +641,7 @@
           <a:p>
             <a:r>
               <a:rPr lang="en-US" dirty="0"/>
-              <a:t>Listen carefully to this situation from real life. In September, the Benue is very high at Garoua. In 2012, heavy rain and water from the Lagdo Dam flooded many villages. Farms and houses were destroyed. Think about it, because I am going to ask you some questions.</a:t>
+              <a:t>Listen carefully to this situation from real life. In September 2012, heavy rain and water released from the Lagdo Dam flooded many villages along the Benue near Garoua, destroying farms and houses. Yet every year farmers come back to plant rice and onions there. A farmer asks: "Why do we stay on the floodplain, and how can we live there safely?" Think about it, because I am going to ask you some questions.</a:t>
             </a:r>
             <a:endParaRPr lang="en-US" dirty="0"/>
           </a:p>
@@ -812,7 +817,7 @@
           <a:p>
             <a:r>
               <a:rPr lang="en-US" dirty="0"/>
-              <a:t>Good. Floods destroyed farms and houses.</a:t>
+              <a:t>Good. People farm and live on the floodplain although floods destroy their farms and houses.</a:t>
             </a:r>
             <a:endParaRPr lang="en-US" dirty="0"/>
           </a:p>
@@ -1076,7 +1081,7 @@
           <a:p>
             <a:r>
               <a:rPr lang="en-US" dirty="0"/>
-              <a:t>Question 3: Why do people live near the river? Think for a moment, then raise your hand to answer.</a:t>
+              <a:t>Question 3: Why do farmers come back? Think for a moment, then raise your hand to answer.</a:t>
             </a:r>
             <a:endParaRPr lang="en-US" dirty="0"/>
           </a:p>
@@ -1164,7 +1169,7 @@
           <a:p>
             <a:r>
               <a:rPr lang="en-US" dirty="0"/>
-              <a:t>Good. The soil is fertile and there is water.</a:t>
+              <a:t>Good. The floodplain soil is fertile and there is water.</a:t>
             </a:r>
             <a:endParaRPr lang="en-US" dirty="0"/>
           </a:p>
@@ -1428,7 +1433,7 @@
           <a:p>
             <a:r>
               <a:rPr lang="en-US" dirty="0"/>
-              <a:t>Activity 1. Look carefully at this picture: a woman in a rice field. Observe every detail before I ask the question.</a:t>
+              <a:t>Activity 1. Look carefully at this picture: rice fields on a floodplain. Observe every detail before I ask the question.</a:t>
             </a:r>
             <a:endParaRPr lang="en-US" dirty="0"/>
           </a:p>
@@ -1780,7 +1785,7 @@
           <a:p>
             <a:r>
               <a:rPr lang="en-US" dirty="0"/>
-              <a:t>Activity 2. Look carefully at this picture: a flooded street. Observe every detail before I ask the question.</a:t>
+              <a:t>Activity 2. Look carefully at this picture: a flooded area. Observe every detail before I ask the question.</a:t>
             </a:r>
             <a:endParaRPr lang="en-US" dirty="0"/>
           </a:p>
@@ -1868,7 +1873,7 @@
           <a:p>
             <a:r>
               <a:rPr lang="en-US" dirty="0"/>
-              <a:t>Here is the question for Activity 2: What problems do floods cause? Take one minute to think and write your answer in your rough notebook.</a:t>
+              <a:t>Here is the question for Activity 2: What problems do floods cause to people? Take one minute to think and write your answer in your rough notebook.</a:t>
             </a:r>
             <a:endParaRPr lang="en-US" dirty="0"/>
           </a:p>
@@ -1956,7 +1961,7 @@
           <a:p>
             <a:r>
               <a:rPr lang="en-US" dirty="0"/>
-              <a:t>Let us check the answer together. They destroy houses and crops, and bring diseases.</a:t>
+              <a:t>Let us check the answer together. They destroy houses and crops and spread diseases.</a:t>
             </a:r>
             <a:endParaRPr lang="en-US" dirty="0"/>
           </a:p>
@@ -2044,7 +2049,7 @@
           <a:p>
             <a:r>
               <a:rPr lang="en-US" dirty="0"/>
-              <a:t>Activity 3. Look carefully at this picture: a dyke (levee) along a river, USA, 1912. Observe every detail before I ask the question.</a:t>
+              <a:t>Activity 3. Look carefully at this picture: a raised bank along a river. Observe every detail before I ask the question.</a:t>
             </a:r>
             <a:endParaRPr lang="en-US" dirty="0"/>
           </a:p>
@@ -2132,7 +2137,7 @@
           <a:p>
             <a:r>
               <a:rPr lang="en-US" dirty="0"/>
-              <a:t>Here is the question for Activity 3: How does this bank protect the land? Take one minute to think and write your answer in your rough notebook.</a:t>
+              <a:t>Here is the question for Activity 3: How does this raised bank protect the land? Take one minute to think and write your answer in your rough notebook.</a:t>
             </a:r>
             <a:endParaRPr lang="en-US" dirty="0"/>
           </a:p>
@@ -2220,7 +2225,7 @@
           <a:p>
             <a:r>
               <a:rPr lang="en-US" dirty="0"/>
-              <a:t>Let us check the answer together. It stops the river from flooding the land.</a:t>
+              <a:t>Let us check the answer together. It stops the river from flooding the land behind it.</a:t>
             </a:r>
             <a:endParaRPr lang="en-US" dirty="0"/>
           </a:p>
@@ -2396,7 +2401,7 @@
           <a:p>
             <a:r>
               <a:rPr lang="en-US" dirty="0"/>
-              <a:t>Let us copy the definitions. The key terms of this lesson are defined as follows. On this slide we have Flood and Alluvium. Write each point on a new line, with the key term first, and explain it in your own words when we revise.</a:t>
+              <a:t>Let us copy the definitions. The key terms of this lesson are defined as follows. On this slide we have Floodplain and Flood. Write each point on a new line, with the key term first, and explain it in your own words when we revise. When you finish, we go to the next slide.</a:t>
             </a:r>
             <a:endParaRPr lang="en-US" dirty="0"/>
           </a:p>
@@ -2572,7 +2577,7 @@
           <a:p>
             <a:r>
               <a:rPr lang="en-US" dirty="0"/>
-              <a:t>Let us copy Importance of Rivers and Floodplains. Rivers and floodplains are important to man for the following reasons. On this slide we have Farming and Water and fishing. Write each point on a new line, with the key term first, and explain it in your own words when we revise. When you finish, we go to the next slide.</a:t>
+              <a:t>We continue with the definitions. On this slide we have Dyke. Write each point on a new line, with the key term first, and explain it in your own words when we revise.</a:t>
             </a:r>
             <a:endParaRPr lang="en-US" dirty="0"/>
           </a:p>
@@ -2660,7 +2665,7 @@
           <a:p>
             <a:r>
               <a:rPr lang="en-US" dirty="0"/>
-              <a:t>We continue with Importance of Rivers and Floodplains. On this slide we have Energy and transport. Write each point on a new line, with the key term first, and explain it in your own words when we revise.</a:t>
+              <a:t>Let us copy Importance of Rivers and Floodplains to Man. Rivers and floodplains are important to man for the following reasons. Copy the point on Farming on the left, then draw the diagram on the right: rice fields on a floodplain. Give it a title and label it clearly.</a:t>
             </a:r>
             <a:endParaRPr lang="en-US" dirty="0"/>
           </a:p>
@@ -2748,7 +2753,7 @@
           <a:p>
             <a:r>
               <a:rPr lang="en-US" dirty="0"/>
-              <a:t>Let us copy Problems of Living in Floodplains. People in floodplains face the following problems. On this slide we have Floods and Diseases. Write each point on a new line, with the key term first, and explain it in your own words when we revise. When you finish, we go to the next slide.</a:t>
+              <a:t>We continue with Importance of Rivers and Floodplains to Man. On this slide we have Water supply and Fishing. Write each point on a new line, with the key term first, and explain it in your own words when we revise.</a:t>
             </a:r>
             <a:endParaRPr lang="en-US" dirty="0"/>
           </a:p>
@@ -2836,7 +2841,7 @@
           <a:p>
             <a:r>
               <a:rPr lang="en-US" dirty="0"/>
-              <a:t>We continue with Problems of Living in Floodplains. On this slide we have Loss of life. Write each point on a new line, with the key term first, and explain it in your own words when we revise.</a:t>
+              <a:t>Copy the point on Energy on the left, then draw the diagram on the right: the Lagdo Dam. Give it a title and label it clearly.</a:t>
             </a:r>
             <a:endParaRPr lang="en-US" dirty="0"/>
           </a:p>
@@ -2924,7 +2929,7 @@
           <a:p>
             <a:r>
               <a:rPr lang="en-US" dirty="0"/>
-              <a:t>Let us copy Solutions. The following solutions reduce these problems. On this slide we have Dykes and dams and Warnings. Write each point on a new line, with the key term first, and explain it in your own words when we revise. When you finish, we go to the next slide.</a:t>
+              <a:t>We continue with Importance of Rivers and Floodplains to Man. On this slide we have Transport and Settlement. Write each point on a new line, with the key term first, and explain it in your own words when we revise.</a:t>
             </a:r>
             <a:endParaRPr lang="en-US" dirty="0"/>
           </a:p>
@@ -3012,7 +3017,7 @@
           <a:p>
             <a:r>
               <a:rPr lang="en-US" dirty="0"/>
-              <a:t>We continue with Solutions. On this slide we have Safe building and Trees. Write each point on a new line, with the key term first, and explain it in your own words when we revise.</a:t>
+              <a:t>Let us copy Problems of Living in Floodplains. People in floodplains face the following problems. Copy the point on Floods on the left, then draw the diagram on the right: a flooded area. Give it a title and label it clearly.</a:t>
             </a:r>
             <a:endParaRPr lang="en-US" dirty="0"/>
           </a:p>
@@ -3100,7 +3105,7 @@
           <a:p>
             <a:r>
               <a:rPr lang="en-US" dirty="0"/>
-              <a:t>Now let us check what you have understood. Question 1: Give one advantage of living on a floodplain. Answer in your exercise book.</a:t>
+              <a:t>We continue with Problems of Living in Floodplains. On this slide we have Loss of life, Diseases and Bank collapse and silting. Write each point on a new line, with the key term first, and explain it in your own words when we revise. When you finish, we go to the next slide.</a:t>
             </a:r>
             <a:endParaRPr lang="en-US" dirty="0"/>
           </a:p>
@@ -3188,7 +3193,7 @@
           <a:p>
             <a:r>
               <a:rPr lang="en-US" dirty="0"/>
-              <a:t>The expected answer is: the soil is fertile. If you got it right, well done.</a:t>
+              <a:t>We continue with Problems of Living in Floodplains. On this slide we have Displacement. Write each point on a new line, with the key term first, and explain it in your own words when we revise.</a:t>
             </a:r>
             <a:endParaRPr lang="en-US" dirty="0"/>
           </a:p>
@@ -3276,7 +3281,7 @@
           <a:p>
             <a:r>
               <a:rPr lang="en-US" dirty="0"/>
-              <a:t>Now let us check what you have understood. Question 2: Give two solutions to floods. Answer in your exercise book.</a:t>
+              <a:t>Let us copy Solutions to the Problems of Living in Floodplains. The following solutions reduce these problems. Copy the point on Dykes and raised banks on the left, then draw the diagram on the right: a raised bank. Give it a title and label it clearly.</a:t>
             </a:r>
             <a:endParaRPr lang="en-US" dirty="0"/>
           </a:p>
@@ -3364,7 +3369,7 @@
           <a:p>
             <a:r>
               <a:rPr lang="en-US" dirty="0"/>
-              <a:t>The expected answer is: build dykes and give flood warnings. If you got it right, well done.</a:t>
+              <a:t>We continue with Solutions to the Problems of Living in Floodplains. On this slide we have Dams, Warnings and Safe building. Write each point on a new line, with the key term first, and explain it in your own words when we revise. When you finish, we go to the next slide.</a:t>
             </a:r>
             <a:endParaRPr lang="en-US" dirty="0"/>
           </a:p>
@@ -3540,7 +3545,7 @@
           <a:p>
             <a:r>
               <a:rPr lang="en-US" dirty="0"/>
-              <a:t>For those who need more practice, fill in the blanks in your exercise book. The answers are: number 1, alluvium; number 2, dyke; number 3, Lagdo.</a:t>
+              <a:t>We continue with Solutions to the Problems of Living in Floodplains. On this slide we have Trees and clean channels. Write each point on a new line, with the key term first, and explain it in your own words when we revise.</a:t>
             </a:r>
             <a:endParaRPr lang="en-US" dirty="0"/>
           </a:p>
@@ -3628,7 +3633,7 @@
           <a:p>
             <a:r>
               <a:rPr lang="en-US" dirty="0"/>
-              <a:t>For your homework: Watch the wind blowing on the water of the Benue or of a big basin of water. Write how the waves form and in which direction they move. We shall correct it at the beginning of our next lesson.</a:t>
+              <a:t>Now let us check what you have understood. Question 1: Give one advantage of living on a floodplain. Answer in your exercise book.</a:t>
             </a:r>
             <a:endParaRPr lang="en-US" dirty="0"/>
           </a:p>
@@ -3716,7 +3721,7 @@
           <a:p>
             <a:r>
               <a:rPr lang="en-US" dirty="0"/>
-              <a:t>Our next lesson will be on Lesson 23: Wave Action in Coastal Areas. Thank you for your attention, and see you next time.</a:t>
+              <a:t>The expected answer is: the soil is fertile. If you got it right, well done.</a:t>
             </a:r>
             <a:endParaRPr lang="en-US" dirty="0"/>
           </a:p>
@@ -3804,7 +3809,7 @@
           <a:p>
             <a:r>
               <a:rPr lang="en-US" dirty="0"/>
-              <a:t>Let us play the bilingual game. I say a word in English, and you give me the French word. Then we do the reverse.</a:t>
+              <a:t>Now let us check what you have understood. Question 2: Give two solutions to floods. Answer in your exercise book.</a:t>
             </a:r>
             <a:endParaRPr lang="en-US" dirty="0"/>
           </a:p>
@@ -3892,7 +3897,7 @@
           <a:p>
             <a:r>
               <a:rPr lang="en-US" dirty="0"/>
-              <a:t>I record this information in the official logbook of the class after the lesson.</a:t>
+              <a:t>The expected answer is: build dykes and give flood warnings. If you got it right, well done.</a:t>
             </a:r>
             <a:endParaRPr lang="en-US" dirty="0"/>
           </a:p>
@@ -3980,7 +3985,7 @@
           <a:p>
             <a:r>
               <a:rPr lang="en-US" dirty="0"/>
-              <a:t>I complete the second page of the logbook: the matter taught, the evaluation, the homework and the attendance.</a:t>
+              <a:t>For those who need more practice, fill in the blanks in your exercise book. The answers are: number 1, alluvium; number 2, dyke; number 3, Lagdo.</a:t>
             </a:r>
             <a:endParaRPr lang="en-US" dirty="0"/>
           </a:p>
@@ -4068,7 +4073,7 @@
           <a:p>
             <a:r>
               <a:rPr lang="en-US" dirty="0"/>
-              <a:t>This slide is for me, the teacher: it gives the timing of the lesson and what to do if the projector is not available.</a:t>
+              <a:t>For your homework: Watch the wind blowing on the water of the Benue or of a big basin of water. Write how the waves form and in which direction they move. We shall correct it at the beginning of our next lesson.</a:t>
             </a:r>
             <a:endParaRPr lang="en-US" dirty="0"/>
           </a:p>
@@ -4156,7 +4161,7 @@
           <a:p>
             <a:r>
               <a:rPr lang="en-US" dirty="0"/>
-              <a:t>These are the references and picture credits used to prepare this lesson.</a:t>
+              <a:t>Our next lesson will be on Lesson 23: Wave Action in Coastal Areas. Thank you for your attention, and see you next time.</a:t>
             </a:r>
             <a:endParaRPr lang="en-US" dirty="0"/>
           </a:p>
@@ -4180,6 +4185,182 @@
             <a:fld id="{F7021451-1387-4CA6-816F-3879F97B5CBC}" type="slidenum">
               <a:rPr lang="en-US"/>
               <a:t>47</a:t>
+            </a:fld>
+            <a:endParaRPr lang="en-US"/>
+          </a:p>
+        </p:txBody>
+      </p:sp>
+    </p:spTree>
+    <p:extLst>
+      <p:ext uri="{BB962C8B-B14F-4D97-AF65-F5344CB8AC3E}">
+        <p14:creationId xmlns:p14="http://schemas.microsoft.com/office/powerpoint/2010/main" val="1024086991"/>
+      </p:ext>
+    </p:extLst>
+  </p:cSld>
+  <p:clrMapOvr>
+    <a:masterClrMapping/>
+  </p:clrMapOvr>
+</p:notes>
+</file>
+
+<file path=ppt/notesSlides/notesSlide48.xml><?xml version="1.0" encoding="utf-8"?>
+<p:notes xmlns:a="http://schemas.openxmlformats.org/drawingml/2006/main" xmlns:r="http://schemas.openxmlformats.org/officeDocument/2006/relationships" xmlns:p="http://schemas.openxmlformats.org/presentationml/2006/main">
+  <p:cSld>
+    <p:spTree>
+      <p:nvGrpSpPr>
+        <p:cNvPr id="1" name=""/>
+        <p:cNvGrpSpPr/>
+        <p:nvPr/>
+      </p:nvGrpSpPr>
+      <p:grpSpPr>
+        <a:xfrm>
+          <a:off x="0" y="0"/>
+          <a:ext cx="0" cy="0"/>
+          <a:chOff x="0" y="0"/>
+          <a:chExt cx="0" cy="0"/>
+        </a:xfrm>
+      </p:grpSpPr>
+      <p:sp>
+        <p:nvSpPr>
+          <p:cNvPr id="2" name="Slide Image Placeholder 1"/>
+          <p:cNvSpPr>
+            <a:spLocks noGrp="1" noRot="1" noChangeAspect="1"/>
+          </p:cNvSpPr>
+          <p:nvPr>
+            <p:ph type="sldImg"/>
+          </p:nvPr>
+        </p:nvSpPr>
+        <p:spPr/>
+      </p:sp>
+      <p:sp>
+        <p:nvSpPr>
+          <p:cNvPr id="3" name="Notes Placeholder 2"/>
+          <p:cNvSpPr>
+            <a:spLocks noGrp="1"/>
+          </p:cNvSpPr>
+          <p:nvPr>
+            <p:ph type="body" idx="1"/>
+          </p:nvPr>
+        </p:nvSpPr>
+        <p:spPr/>
+        <p:txBody>
+          <a:bodyPr/>
+          <a:lstStyle/>
+          <a:p>
+            <a:r>
+              <a:rPr lang="en-US" dirty="0"/>
+              <a:t>Let us play the bilingual game. I say a word in English, and you give me the French word. Then we do the reverse.</a:t>
+            </a:r>
+            <a:endParaRPr lang="en-US" dirty="0"/>
+          </a:p>
+        </p:txBody>
+      </p:sp>
+      <p:sp>
+        <p:nvSpPr>
+          <p:cNvPr id="4" name="Slide Number Placeholder 3"/>
+          <p:cNvSpPr>
+            <a:spLocks noGrp="1"/>
+          </p:cNvSpPr>
+          <p:nvPr>
+            <p:ph type="sldNum" sz="quarter" idx="10"/>
+          </p:nvPr>
+        </p:nvSpPr>
+        <p:spPr/>
+        <p:txBody>
+          <a:bodyPr/>
+          <a:lstStyle/>
+          <a:p>
+            <a:fld id="{F7021451-1387-4CA6-816F-3879F97B5CBC}" type="slidenum">
+              <a:rPr lang="en-US"/>
+              <a:t>48</a:t>
+            </a:fld>
+            <a:endParaRPr lang="en-US"/>
+          </a:p>
+        </p:txBody>
+      </p:sp>
+    </p:spTree>
+    <p:extLst>
+      <p:ext uri="{BB962C8B-B14F-4D97-AF65-F5344CB8AC3E}">
+        <p14:creationId xmlns:p14="http://schemas.microsoft.com/office/powerpoint/2010/main" val="1024086991"/>
+      </p:ext>
+    </p:extLst>
+  </p:cSld>
+  <p:clrMapOvr>
+    <a:masterClrMapping/>
+  </p:clrMapOvr>
+</p:notes>
+</file>
+
+<file path=ppt/notesSlides/notesSlide49.xml><?xml version="1.0" encoding="utf-8"?>
+<p:notes xmlns:a="http://schemas.openxmlformats.org/drawingml/2006/main" xmlns:r="http://schemas.openxmlformats.org/officeDocument/2006/relationships" xmlns:p="http://schemas.openxmlformats.org/presentationml/2006/main">
+  <p:cSld>
+    <p:spTree>
+      <p:nvGrpSpPr>
+        <p:cNvPr id="1" name=""/>
+        <p:cNvGrpSpPr/>
+        <p:nvPr/>
+      </p:nvGrpSpPr>
+      <p:grpSpPr>
+        <a:xfrm>
+          <a:off x="0" y="0"/>
+          <a:ext cx="0" cy="0"/>
+          <a:chOff x="0" y="0"/>
+          <a:chExt cx="0" cy="0"/>
+        </a:xfrm>
+      </p:grpSpPr>
+      <p:sp>
+        <p:nvSpPr>
+          <p:cNvPr id="2" name="Slide Image Placeholder 1"/>
+          <p:cNvSpPr>
+            <a:spLocks noGrp="1" noRot="1" noChangeAspect="1"/>
+          </p:cNvSpPr>
+          <p:nvPr>
+            <p:ph type="sldImg"/>
+          </p:nvPr>
+        </p:nvSpPr>
+        <p:spPr/>
+      </p:sp>
+      <p:sp>
+        <p:nvSpPr>
+          <p:cNvPr id="3" name="Notes Placeholder 2"/>
+          <p:cNvSpPr>
+            <a:spLocks noGrp="1"/>
+          </p:cNvSpPr>
+          <p:nvPr>
+            <p:ph type="body" idx="1"/>
+          </p:nvPr>
+        </p:nvSpPr>
+        <p:spPr/>
+        <p:txBody>
+          <a:bodyPr/>
+          <a:lstStyle/>
+          <a:p>
+            <a:r>
+              <a:rPr lang="en-US" dirty="0"/>
+              <a:t>I record this information in the official logbook of the class after the lesson.</a:t>
+            </a:r>
+            <a:endParaRPr lang="en-US" dirty="0"/>
+          </a:p>
+        </p:txBody>
+      </p:sp>
+      <p:sp>
+        <p:nvSpPr>
+          <p:cNvPr id="4" name="Slide Number Placeholder 3"/>
+          <p:cNvSpPr>
+            <a:spLocks noGrp="1"/>
+          </p:cNvSpPr>
+          <p:nvPr>
+            <p:ph type="sldNum" sz="quarter" idx="10"/>
+          </p:nvPr>
+        </p:nvSpPr>
+        <p:spPr/>
+        <p:txBody>
+          <a:bodyPr/>
+          <a:lstStyle/>
+          <a:p>
+            <a:fld id="{F7021451-1387-4CA6-816F-3879F97B5CBC}" type="slidenum">
+              <a:rPr lang="en-US"/>
+              <a:t>49</a:t>
             </a:fld>
             <a:endParaRPr lang="en-US"/>
           </a:p>
@@ -4268,6 +4449,270 @@
             <a:fld id="{F7021451-1387-4CA6-816F-3879F97B5CBC}" type="slidenum">
               <a:rPr lang="en-US"/>
               <a:t>5</a:t>
+            </a:fld>
+            <a:endParaRPr lang="en-US"/>
+          </a:p>
+        </p:txBody>
+      </p:sp>
+    </p:spTree>
+    <p:extLst>
+      <p:ext uri="{BB962C8B-B14F-4D97-AF65-F5344CB8AC3E}">
+        <p14:creationId xmlns:p14="http://schemas.microsoft.com/office/powerpoint/2010/main" val="1024086991"/>
+      </p:ext>
+    </p:extLst>
+  </p:cSld>
+  <p:clrMapOvr>
+    <a:masterClrMapping/>
+  </p:clrMapOvr>
+</p:notes>
+</file>
+
+<file path=ppt/notesSlides/notesSlide50.xml><?xml version="1.0" encoding="utf-8"?>
+<p:notes xmlns:a="http://schemas.openxmlformats.org/drawingml/2006/main" xmlns:r="http://schemas.openxmlformats.org/officeDocument/2006/relationships" xmlns:p="http://schemas.openxmlformats.org/presentationml/2006/main">
+  <p:cSld>
+    <p:spTree>
+      <p:nvGrpSpPr>
+        <p:cNvPr id="1" name=""/>
+        <p:cNvGrpSpPr/>
+        <p:nvPr/>
+      </p:nvGrpSpPr>
+      <p:grpSpPr>
+        <a:xfrm>
+          <a:off x="0" y="0"/>
+          <a:ext cx="0" cy="0"/>
+          <a:chOff x="0" y="0"/>
+          <a:chExt cx="0" cy="0"/>
+        </a:xfrm>
+      </p:grpSpPr>
+      <p:sp>
+        <p:nvSpPr>
+          <p:cNvPr id="2" name="Slide Image Placeholder 1"/>
+          <p:cNvSpPr>
+            <a:spLocks noGrp="1" noRot="1" noChangeAspect="1"/>
+          </p:cNvSpPr>
+          <p:nvPr>
+            <p:ph type="sldImg"/>
+          </p:nvPr>
+        </p:nvSpPr>
+        <p:spPr/>
+      </p:sp>
+      <p:sp>
+        <p:nvSpPr>
+          <p:cNvPr id="3" name="Notes Placeholder 2"/>
+          <p:cNvSpPr>
+            <a:spLocks noGrp="1"/>
+          </p:cNvSpPr>
+          <p:nvPr>
+            <p:ph type="body" idx="1"/>
+          </p:nvPr>
+        </p:nvSpPr>
+        <p:spPr/>
+        <p:txBody>
+          <a:bodyPr/>
+          <a:lstStyle/>
+          <a:p>
+            <a:r>
+              <a:rPr lang="en-US" dirty="0"/>
+              <a:t>I complete the second page of the logbook: the matter taught, the evaluation, the homework and the attendance.</a:t>
+            </a:r>
+            <a:endParaRPr lang="en-US" dirty="0"/>
+          </a:p>
+        </p:txBody>
+      </p:sp>
+      <p:sp>
+        <p:nvSpPr>
+          <p:cNvPr id="4" name="Slide Number Placeholder 3"/>
+          <p:cNvSpPr>
+            <a:spLocks noGrp="1"/>
+          </p:cNvSpPr>
+          <p:nvPr>
+            <p:ph type="sldNum" sz="quarter" idx="10"/>
+          </p:nvPr>
+        </p:nvSpPr>
+        <p:spPr/>
+        <p:txBody>
+          <a:bodyPr/>
+          <a:lstStyle/>
+          <a:p>
+            <a:fld id="{F7021451-1387-4CA6-816F-3879F97B5CBC}" type="slidenum">
+              <a:rPr lang="en-US"/>
+              <a:t>50</a:t>
+            </a:fld>
+            <a:endParaRPr lang="en-US"/>
+          </a:p>
+        </p:txBody>
+      </p:sp>
+    </p:spTree>
+    <p:extLst>
+      <p:ext uri="{BB962C8B-B14F-4D97-AF65-F5344CB8AC3E}">
+        <p14:creationId xmlns:p14="http://schemas.microsoft.com/office/powerpoint/2010/main" val="1024086991"/>
+      </p:ext>
+    </p:extLst>
+  </p:cSld>
+  <p:clrMapOvr>
+    <a:masterClrMapping/>
+  </p:clrMapOvr>
+</p:notes>
+</file>
+
+<file path=ppt/notesSlides/notesSlide51.xml><?xml version="1.0" encoding="utf-8"?>
+<p:notes xmlns:a="http://schemas.openxmlformats.org/drawingml/2006/main" xmlns:r="http://schemas.openxmlformats.org/officeDocument/2006/relationships" xmlns:p="http://schemas.openxmlformats.org/presentationml/2006/main">
+  <p:cSld>
+    <p:spTree>
+      <p:nvGrpSpPr>
+        <p:cNvPr id="1" name=""/>
+        <p:cNvGrpSpPr/>
+        <p:nvPr/>
+      </p:nvGrpSpPr>
+      <p:grpSpPr>
+        <a:xfrm>
+          <a:off x="0" y="0"/>
+          <a:ext cx="0" cy="0"/>
+          <a:chOff x="0" y="0"/>
+          <a:chExt cx="0" cy="0"/>
+        </a:xfrm>
+      </p:grpSpPr>
+      <p:sp>
+        <p:nvSpPr>
+          <p:cNvPr id="2" name="Slide Image Placeholder 1"/>
+          <p:cNvSpPr>
+            <a:spLocks noGrp="1" noRot="1" noChangeAspect="1"/>
+          </p:cNvSpPr>
+          <p:nvPr>
+            <p:ph type="sldImg"/>
+          </p:nvPr>
+        </p:nvSpPr>
+        <p:spPr/>
+      </p:sp>
+      <p:sp>
+        <p:nvSpPr>
+          <p:cNvPr id="3" name="Notes Placeholder 2"/>
+          <p:cNvSpPr>
+            <a:spLocks noGrp="1"/>
+          </p:cNvSpPr>
+          <p:nvPr>
+            <p:ph type="body" idx="1"/>
+          </p:nvPr>
+        </p:nvSpPr>
+        <p:spPr/>
+        <p:txBody>
+          <a:bodyPr/>
+          <a:lstStyle/>
+          <a:p>
+            <a:r>
+              <a:rPr lang="en-US" dirty="0"/>
+              <a:t>This slide is for me, the teacher: it gives the timing of the lesson and what to do if the projector is not available.</a:t>
+            </a:r>
+            <a:endParaRPr lang="en-US" dirty="0"/>
+          </a:p>
+        </p:txBody>
+      </p:sp>
+      <p:sp>
+        <p:nvSpPr>
+          <p:cNvPr id="4" name="Slide Number Placeholder 3"/>
+          <p:cNvSpPr>
+            <a:spLocks noGrp="1"/>
+          </p:cNvSpPr>
+          <p:nvPr>
+            <p:ph type="sldNum" sz="quarter" idx="10"/>
+          </p:nvPr>
+        </p:nvSpPr>
+        <p:spPr/>
+        <p:txBody>
+          <a:bodyPr/>
+          <a:lstStyle/>
+          <a:p>
+            <a:fld id="{F7021451-1387-4CA6-816F-3879F97B5CBC}" type="slidenum">
+              <a:rPr lang="en-US"/>
+              <a:t>51</a:t>
+            </a:fld>
+            <a:endParaRPr lang="en-US"/>
+          </a:p>
+        </p:txBody>
+      </p:sp>
+    </p:spTree>
+    <p:extLst>
+      <p:ext uri="{BB962C8B-B14F-4D97-AF65-F5344CB8AC3E}">
+        <p14:creationId xmlns:p14="http://schemas.microsoft.com/office/powerpoint/2010/main" val="1024086991"/>
+      </p:ext>
+    </p:extLst>
+  </p:cSld>
+  <p:clrMapOvr>
+    <a:masterClrMapping/>
+  </p:clrMapOvr>
+</p:notes>
+</file>
+
+<file path=ppt/notesSlides/notesSlide52.xml><?xml version="1.0" encoding="utf-8"?>
+<p:notes xmlns:a="http://schemas.openxmlformats.org/drawingml/2006/main" xmlns:r="http://schemas.openxmlformats.org/officeDocument/2006/relationships" xmlns:p="http://schemas.openxmlformats.org/presentationml/2006/main">
+  <p:cSld>
+    <p:spTree>
+      <p:nvGrpSpPr>
+        <p:cNvPr id="1" name=""/>
+        <p:cNvGrpSpPr/>
+        <p:nvPr/>
+      </p:nvGrpSpPr>
+      <p:grpSpPr>
+        <a:xfrm>
+          <a:off x="0" y="0"/>
+          <a:ext cx="0" cy="0"/>
+          <a:chOff x="0" y="0"/>
+          <a:chExt cx="0" cy="0"/>
+        </a:xfrm>
+      </p:grpSpPr>
+      <p:sp>
+        <p:nvSpPr>
+          <p:cNvPr id="2" name="Slide Image Placeholder 1"/>
+          <p:cNvSpPr>
+            <a:spLocks noGrp="1" noRot="1" noChangeAspect="1"/>
+          </p:cNvSpPr>
+          <p:nvPr>
+            <p:ph type="sldImg"/>
+          </p:nvPr>
+        </p:nvSpPr>
+        <p:spPr/>
+      </p:sp>
+      <p:sp>
+        <p:nvSpPr>
+          <p:cNvPr id="3" name="Notes Placeholder 2"/>
+          <p:cNvSpPr>
+            <a:spLocks noGrp="1"/>
+          </p:cNvSpPr>
+          <p:nvPr>
+            <p:ph type="body" idx="1"/>
+          </p:nvPr>
+        </p:nvSpPr>
+        <p:spPr/>
+        <p:txBody>
+          <a:bodyPr/>
+          <a:lstStyle/>
+          <a:p>
+            <a:r>
+              <a:rPr lang="en-US" dirty="0"/>
+              <a:t>These are the references and picture credits used to prepare this lesson.</a:t>
+            </a:r>
+            <a:endParaRPr lang="en-US" dirty="0"/>
+          </a:p>
+        </p:txBody>
+      </p:sp>
+      <p:sp>
+        <p:nvSpPr>
+          <p:cNvPr id="4" name="Slide Number Placeholder 3"/>
+          <p:cNvSpPr>
+            <a:spLocks noGrp="1"/>
+          </p:cNvSpPr>
+          <p:nvPr>
+            <p:ph type="sldNum" sz="quarter" idx="10"/>
+          </p:nvPr>
+        </p:nvSpPr>
+        <p:spPr/>
+        <p:txBody>
+          <a:bodyPr/>
+          <a:lstStyle/>
+          <a:p>
+            <a:fld id="{F7021451-1387-4CA6-816F-3879F97B5CBC}" type="slidenum">
+              <a:rPr lang="en-US"/>
+              <a:t>52</a:t>
             </a:fld>
             <a:endParaRPr lang="en-US"/>
           </a:p>
@@ -5976,7 +6421,7 @@
         <p:spPr>
           <a:xfrm>
             <a:off x="0" y="658368"/>
-            <a:ext cx="5120640" cy="5833872"/>
+            <a:ext cx="2468880" cy="5833872"/>
           </a:xfrm>
           <a:prstGeom prst="rect">
             <a:avLst/>
@@ -5991,8 +6436,8 @@
         </p:nvSpPr>
         <p:spPr>
           <a:xfrm>
-            <a:off x="5349240" y="1005840"/>
-            <a:ext cx="6522415" cy="731520"/>
+            <a:off x="2697480" y="1005840"/>
+            <a:ext cx="9174175" cy="731520"/>
           </a:xfrm>
           <a:prstGeom prst="rect">
             <a:avLst/>
@@ -6032,8 +6477,8 @@
         </p:nvSpPr>
         <p:spPr>
           <a:xfrm>
-            <a:off x="5349240" y="1783080"/>
-            <a:ext cx="6522415" cy="4663440"/>
+            <a:off x="2697480" y="1783080"/>
+            <a:ext cx="9174175" cy="4663440"/>
           </a:xfrm>
           <a:prstGeom prst="rect">
             <a:avLst/>
@@ -6060,7 +6505,47 @@
                 <a:ea typeface="Times New Roman" pitchFamily="34" charset="-122"/>
                 <a:cs typeface="Times New Roman" pitchFamily="34" charset="-120"/>
               </a:rPr>
-              <a:t>In September, the Benue is very high at Garoua. In 2012, heavy rain and water from the Lagdo Dam flooded many villages. Farms and houses were destroyed.</a:t>
+              <a:t>In September 2012, heavy rain and water released from the Lagdo Dam flooded many villages along the Benue near Garoua, destroying farms and houses.</a:t>
+            </a:r>
+            <a:endParaRPr lang="en-US" sz="4000" dirty="0"/>
+          </a:p>
+          <a:p>
+            <a:pPr algn="l" indent="0" marL="0">
+              <a:spcAft>
+                <a:spcPts val="800"/>
+              </a:spcAft>
+              <a:buNone/>
+            </a:pPr>
+            <a:r>
+              <a:rPr lang="en-US" sz="4000" dirty="0">
+                <a:solidFill>
+                  <a:srgbClr val="111111"/>
+                </a:solidFill>
+                <a:latin typeface="Times New Roman" pitchFamily="34" charset="0"/>
+                <a:ea typeface="Times New Roman" pitchFamily="34" charset="-122"/>
+                <a:cs typeface="Times New Roman" pitchFamily="34" charset="-120"/>
+              </a:rPr>
+              <a:t>Yet every year farmers come back to plant rice and onions there.</a:t>
+            </a:r>
+            <a:endParaRPr lang="en-US" sz="4000" dirty="0"/>
+          </a:p>
+          <a:p>
+            <a:pPr algn="l" indent="0" marL="0">
+              <a:spcAft>
+                <a:spcPts val="800"/>
+              </a:spcAft>
+              <a:buNone/>
+            </a:pPr>
+            <a:r>
+              <a:rPr lang="en-US" sz="4000" dirty="0">
+                <a:solidFill>
+                  <a:srgbClr val="111111"/>
+                </a:solidFill>
+                <a:latin typeface="Times New Roman" pitchFamily="34" charset="0"/>
+                <a:ea typeface="Times New Roman" pitchFamily="34" charset="-122"/>
+                <a:cs typeface="Times New Roman" pitchFamily="34" charset="-120"/>
+              </a:rPr>
+              <a:t>"</a:t>
             </a:r>
             <a:endParaRPr lang="en-US" sz="4000" dirty="0"/>
           </a:p>
@@ -6498,7 +6983,7 @@
                 <a:ea typeface="Times New Roman" pitchFamily="34" charset="-122"/>
                 <a:cs typeface="Times New Roman" pitchFamily="34" charset="-120"/>
               </a:rPr>
-              <a:t>Floods destroyed farms and houses.</a:t>
+              <a:t>People farm and live on the floodplain although floods destroy their farms and houses.</a:t>
             </a:r>
             <a:endParaRPr lang="en-US" sz="4000" dirty="0"/>
           </a:p>
@@ -7155,7 +7640,7 @@
                 <a:ea typeface="Times New Roman" pitchFamily="34" charset="-122"/>
                 <a:cs typeface="Times New Roman" pitchFamily="34" charset="-120"/>
               </a:rPr>
-              <a:t>Why do people live near the river?</a:t>
+              <a:t>Why do farmers come back?</a:t>
             </a:r>
             <a:endParaRPr lang="en-US" sz="4000" dirty="0"/>
           </a:p>
@@ -7374,7 +7859,7 @@
                 <a:ea typeface="Times New Roman" pitchFamily="34" charset="-122"/>
                 <a:cs typeface="Times New Roman" pitchFamily="34" charset="-120"/>
               </a:rPr>
-              <a:t>The soil is fertile and there is water.</a:t>
+              <a:t>The floodplain soil is fertile and there is water.</a:t>
             </a:r>
             <a:endParaRPr lang="en-US" sz="4000" dirty="0"/>
           </a:p>
@@ -7924,7 +8409,7 @@
                 <a:ea typeface="Calibri" pitchFamily="34" charset="-122"/>
                 <a:cs typeface="Calibri" pitchFamily="34" charset="-120"/>
               </a:rPr>
-              <a:t>1. IMPORTANCE OF FLOODPLAINS</a:t>
+              <a:t>1. IMPORTANCE</a:t>
             </a:r>
             <a:endParaRPr lang="en-US" sz="1400" dirty="0"/>
           </a:p>
@@ -8026,7 +8511,7 @@
                 <a:ea typeface="Times New Roman" pitchFamily="34" charset="-122"/>
                 <a:cs typeface="Times New Roman" pitchFamily="34" charset="-120"/>
               </a:rPr>
-              <a:t>A woman in a rice field.</a:t>
+              <a:t>Rice fields on a floodplain.</a:t>
             </a:r>
             <a:endParaRPr lang="en-US" sz="1800" dirty="0"/>
           </a:p>
@@ -8733,7 +9218,7 @@
                 <a:ea typeface="Calibri" pitchFamily="34" charset="-122"/>
                 <a:cs typeface="Calibri" pitchFamily="34" charset="-120"/>
               </a:rPr>
-              <a:t>1. IMPORTANCE OF FLOODPLAINS</a:t>
+              <a:t>1. IMPORTANCE</a:t>
             </a:r>
             <a:endParaRPr lang="en-US" sz="1400" dirty="0"/>
           </a:p>
@@ -8952,7 +9437,7 @@
                 <a:ea typeface="Calibri" pitchFamily="34" charset="-122"/>
                 <a:cs typeface="Calibri" pitchFamily="34" charset="-120"/>
               </a:rPr>
-              <a:t>1. IMPORTANCE OF FLOODPLAINS</a:t>
+              <a:t>1. IMPORTANCE</a:t>
             </a:r>
             <a:endParaRPr lang="en-US" sz="1400" dirty="0"/>
           </a:p>
@@ -9273,7 +9758,7 @@
                 <a:ea typeface="Times New Roman" pitchFamily="34" charset="-122"/>
                 <a:cs typeface="Times New Roman" pitchFamily="34" charset="-120"/>
               </a:rPr>
-              <a:t>A flooded street.</a:t>
+              <a:t>A flooded area.</a:t>
             </a:r>
             <a:endParaRPr lang="en-US" sz="1800" dirty="0"/>
           </a:p>
@@ -9492,7 +9977,7 @@
                 <a:ea typeface="Times New Roman" pitchFamily="34" charset="-122"/>
                 <a:cs typeface="Times New Roman" pitchFamily="34" charset="-120"/>
               </a:rPr>
-              <a:t>What problems do floods cause?</a:t>
+              <a:t>What problems do floods cause to people?</a:t>
             </a:r>
             <a:endParaRPr lang="en-US" sz="4000" dirty="0"/>
           </a:p>
@@ -9711,7 +10196,7 @@
                 <a:ea typeface="Times New Roman" pitchFamily="34" charset="-122"/>
                 <a:cs typeface="Times New Roman" pitchFamily="34" charset="-120"/>
               </a:rPr>
-              <a:t>They destroy houses and crops, and bring diseases.</a:t>
+              <a:t>They destroy houses and crops and spread diseases.</a:t>
             </a:r>
             <a:endParaRPr lang="en-US" sz="4000" dirty="0"/>
           </a:p>
@@ -9925,7 +10410,7 @@
                 <a:ea typeface="Times New Roman" pitchFamily="34" charset="-122"/>
                 <a:cs typeface="Times New Roman" pitchFamily="34" charset="-120"/>
               </a:rPr>
-              <a:t>A dyke (levee) along a river, USA, 1912.</a:t>
+              <a:t>A raised bank along a river.</a:t>
             </a:r>
             <a:endParaRPr lang="en-US" sz="1800" dirty="0"/>
           </a:p>
@@ -10144,7 +10629,7 @@
                 <a:ea typeface="Times New Roman" pitchFamily="34" charset="-122"/>
                 <a:cs typeface="Times New Roman" pitchFamily="34" charset="-120"/>
               </a:rPr>
-              <a:t>How does this bank protect the land?</a:t>
+              <a:t>How does this raised bank protect the land?</a:t>
             </a:r>
             <a:endParaRPr lang="en-US" sz="4000" dirty="0"/>
           </a:p>
@@ -10363,7 +10848,7 @@
                 <a:ea typeface="Times New Roman" pitchFamily="34" charset="-122"/>
                 <a:cs typeface="Times New Roman" pitchFamily="34" charset="-120"/>
               </a:rPr>
-              <a:t>It stops the river from flooding the land.</a:t>
+              <a:t>It stops the river from flooding the land behind it.</a:t>
             </a:r>
             <a:endParaRPr lang="en-US" sz="4000" dirty="0"/>
           </a:p>
@@ -10757,7 +11242,7 @@
         <p:spPr>
           <a:xfrm>
             <a:off x="0" y="658368"/>
-            <a:ext cx="5120640" cy="5833872"/>
+            <a:ext cx="3840480" cy="5833872"/>
           </a:xfrm>
           <a:prstGeom prst="rect">
             <a:avLst/>
@@ -10772,8 +11257,8 @@
         </p:nvSpPr>
         <p:spPr>
           <a:xfrm>
-            <a:off x="5349240" y="1005840"/>
-            <a:ext cx="6522415" cy="731520"/>
+            <a:off x="4069080" y="1005840"/>
+            <a:ext cx="7802575" cy="731520"/>
           </a:xfrm>
           <a:prstGeom prst="rect">
             <a:avLst/>
@@ -10813,8 +11298,8 @@
         </p:nvSpPr>
         <p:spPr>
           <a:xfrm>
-            <a:off x="5349240" y="1783080"/>
-            <a:ext cx="6522415" cy="4663440"/>
+            <a:off x="4069080" y="1783080"/>
+            <a:ext cx="7802575" cy="4663440"/>
           </a:xfrm>
           <a:prstGeom prst="rect">
             <a:avLst/>
@@ -10861,7 +11346,7 @@
                 <a:ea typeface="Times New Roman" pitchFamily="34" charset="-122"/>
                 <a:cs typeface="Times New Roman" pitchFamily="34" charset="-120"/>
               </a:rPr>
-              <a:t>Flood: </a:t>
+              <a:t>Floodplain: </a:t>
             </a:r>
             <a:pPr algn="l" indent="0" marL="0">
               <a:spcAft>
@@ -10878,7 +11363,7 @@
                 <a:ea typeface="Times New Roman" pitchFamily="34" charset="-122"/>
                 <a:cs typeface="Times New Roman" pitchFamily="34" charset="-120"/>
               </a:rPr>
-              <a:t>It is when water covers land that is usually dry.</a:t>
+              <a:t>It is the flat land beside a river that is covered by water during floods.</a:t>
             </a:r>
             <a:endParaRPr lang="en-US" sz="4000" dirty="0"/>
           </a:p>
@@ -10898,7 +11383,7 @@
                 <a:ea typeface="Times New Roman" pitchFamily="34" charset="-122"/>
                 <a:cs typeface="Times New Roman" pitchFamily="34" charset="-120"/>
               </a:rPr>
-              <a:t>Alluvium: </a:t>
+              <a:t>Flood: </a:t>
             </a:r>
             <a:pPr algn="l" indent="0" marL="0">
               <a:spcAft>
@@ -10915,7 +11400,7 @@
                 <a:ea typeface="Times New Roman" pitchFamily="34" charset="-122"/>
                 <a:cs typeface="Times New Roman" pitchFamily="34" charset="-120"/>
               </a:rPr>
-              <a:t>It is the fertile mud deposited by a river.</a:t>
+              <a:t>It is the covering by water of land that is usually dry.</a:t>
             </a:r>
             <a:endParaRPr lang="en-US" sz="4000" dirty="0"/>
           </a:p>
@@ -12059,7 +12544,7 @@
         <p:spPr>
           <a:xfrm>
             <a:off x="0" y="658368"/>
-            <a:ext cx="2468880" cy="5833872"/>
+            <a:ext cx="5120640" cy="5833872"/>
           </a:xfrm>
           <a:prstGeom prst="rect">
             <a:avLst/>
@@ -12074,8 +12559,8 @@
         </p:nvSpPr>
         <p:spPr>
           <a:xfrm>
-            <a:off x="2697480" y="1005840"/>
-            <a:ext cx="9174175" cy="731520"/>
+            <a:off x="5349240" y="1005840"/>
+            <a:ext cx="6522415" cy="731520"/>
           </a:xfrm>
           <a:prstGeom prst="rect">
             <a:avLst/>
@@ -12101,7 +12586,7 @@
                 <a:ea typeface="Times New Roman" pitchFamily="34" charset="-122"/>
                 <a:cs typeface="Times New Roman" pitchFamily="34" charset="-120"/>
               </a:rPr>
-              <a:t>1. Importance of Rivers and Floodplains</a:t>
+              <a:t>DEFINITIONS (continued)</a:t>
             </a:r>
             <a:endParaRPr lang="en-US" sz="3600" dirty="0"/>
           </a:p>
@@ -12115,8 +12600,8 @@
         </p:nvSpPr>
         <p:spPr>
           <a:xfrm>
-            <a:off x="2697480" y="1783080"/>
-            <a:ext cx="9174175" cy="4663440"/>
+            <a:off x="5349240" y="1783080"/>
+            <a:ext cx="6522415" cy="4663440"/>
           </a:xfrm>
           <a:prstGeom prst="rect">
             <a:avLst/>
@@ -12135,7 +12620,7 @@
               <a:buNone/>
             </a:pPr>
             <a:r>
-              <a:rPr lang="en-US" sz="4000" i="1" dirty="0">
+              <a:rPr lang="en-US" sz="4000" b="1" dirty="0">
                 <a:solidFill>
                   <a:srgbClr val="111111"/>
                 </a:solidFill>
@@ -12143,11 +12628,8 @@
                 <a:ea typeface="Times New Roman" pitchFamily="34" charset="-122"/>
                 <a:cs typeface="Times New Roman" pitchFamily="34" charset="-120"/>
               </a:rPr>
-              <a:t>Rivers and floodplains are important to man for the following reasons:</a:t>
-            </a:r>
-            <a:endParaRPr lang="en-US" sz="4000" dirty="0"/>
-          </a:p>
-          <a:p>
+              <a:t>Dyke: </a:t>
+            </a:r>
             <a:pPr algn="l" indent="0" marL="0">
               <a:spcAft>
                 <a:spcPts val="800"/>
@@ -12155,7 +12637,7 @@
               <a:buNone/>
             </a:pPr>
             <a:r>
-              <a:rPr lang="en-US" sz="4000" b="1" dirty="0">
+              <a:rPr lang="en-US" sz="4000" dirty="0">
                 <a:solidFill>
                   <a:srgbClr val="111111"/>
                 </a:solidFill>
@@ -12163,61 +12645,7 @@
                 <a:ea typeface="Times New Roman" pitchFamily="34" charset="-122"/>
                 <a:cs typeface="Times New Roman" pitchFamily="34" charset="-120"/>
               </a:rPr>
-              <a:t>Farming: </a:t>
-            </a:r>
-            <a:pPr algn="l" indent="0" marL="0">
-              <a:spcAft>
-                <a:spcPts val="800"/>
-              </a:spcAft>
-              <a:buNone/>
-            </a:pPr>
-            <a:r>
-              <a:rPr lang="en-US" sz="4000" dirty="0">
-                <a:solidFill>
-                  <a:srgbClr val="111111"/>
-                </a:solidFill>
-                <a:latin typeface="Times New Roman" pitchFamily="34" charset="0"/>
-                <a:ea typeface="Times New Roman" pitchFamily="34" charset="-122"/>
-                <a:cs typeface="Times New Roman" pitchFamily="34" charset="-120"/>
-              </a:rPr>
-              <a:t>Floodplains have fertile alluvium for rice, onions and vegetables.</a:t>
-            </a:r>
-            <a:endParaRPr lang="en-US" sz="4000" dirty="0"/>
-          </a:p>
-          <a:p>
-            <a:pPr algn="l" indent="0" marL="0">
-              <a:spcAft>
-                <a:spcPts val="800"/>
-              </a:spcAft>
-              <a:buNone/>
-            </a:pPr>
-            <a:r>
-              <a:rPr lang="en-US" sz="4000" b="1" dirty="0">
-                <a:solidFill>
-                  <a:srgbClr val="111111"/>
-                </a:solidFill>
-                <a:latin typeface="Times New Roman" pitchFamily="34" charset="0"/>
-                <a:ea typeface="Times New Roman" pitchFamily="34" charset="-122"/>
-                <a:cs typeface="Times New Roman" pitchFamily="34" charset="-120"/>
-              </a:rPr>
-              <a:t>Water and fishing: </a:t>
-            </a:r>
-            <a:pPr algn="l" indent="0" marL="0">
-              <a:spcAft>
-                <a:spcPts val="800"/>
-              </a:spcAft>
-              <a:buNone/>
-            </a:pPr>
-            <a:r>
-              <a:rPr lang="en-US" sz="4000" dirty="0">
-                <a:solidFill>
-                  <a:srgbClr val="111111"/>
-                </a:solidFill>
-                <a:latin typeface="Times New Roman" pitchFamily="34" charset="0"/>
-                <a:ea typeface="Times New Roman" pitchFamily="34" charset="-122"/>
-                <a:cs typeface="Times New Roman" pitchFamily="34" charset="-120"/>
-              </a:rPr>
-              <a:t>Rivers supply water for drinking, animals and fishing.</a:t>
+              <a:t>It is an artificial bank built to stop a river or the sea from flooding the land.</a:t>
             </a:r>
             <a:endParaRPr lang="en-US" sz="4000" dirty="0"/>
           </a:p>
@@ -12335,9 +12763,129 @@
           </a:p>
         </p:txBody>
       </p:sp>
+      <p:sp>
+        <p:nvSpPr>
+          <p:cNvPr id="3" name="Text 1"/>
+          <p:cNvSpPr/>
+          <p:nvPr/>
+        </p:nvSpPr>
+        <p:spPr>
+          <a:xfrm>
+            <a:off x="365760" y="1005840"/>
+            <a:ext cx="11460175" cy="731520"/>
+          </a:xfrm>
+          <a:prstGeom prst="rect">
+            <a:avLst/>
+          </a:prstGeom>
+          <a:noFill/>
+          <a:ln/>
+        </p:spPr>
+        <p:txBody>
+          <a:bodyPr wrap="square" lIns="0" tIns="0" rIns="0" bIns="0" rtlCol="0" anchor="ctr">
+            <a:normAutofit/>
+          </a:bodyPr>
+          <a:lstStyle/>
+          <a:p>
+            <a:pPr algn="ctr" indent="0" marL="0">
+              <a:buNone/>
+            </a:pPr>
+            <a:r>
+              <a:rPr lang="en-US" sz="3600" b="1" dirty="0">
+                <a:solidFill>
+                  <a:srgbClr val="990011"/>
+                </a:solidFill>
+                <a:latin typeface="Times New Roman" pitchFamily="34" charset="0"/>
+                <a:ea typeface="Times New Roman" pitchFamily="34" charset="-122"/>
+                <a:cs typeface="Times New Roman" pitchFamily="34" charset="-120"/>
+              </a:rPr>
+              <a:t>1. Importance of Rivers and Floodplains to Man</a:t>
+            </a:r>
+            <a:endParaRPr lang="en-US" sz="3600" dirty="0"/>
+          </a:p>
+        </p:txBody>
+      </p:sp>
+      <p:sp>
+        <p:nvSpPr>
+          <p:cNvPr id="4" name="Text 2"/>
+          <p:cNvSpPr/>
+          <p:nvPr/>
+        </p:nvSpPr>
+        <p:spPr>
+          <a:xfrm>
+            <a:off x="365760" y="1783080"/>
+            <a:ext cx="4846320" cy="4617720"/>
+          </a:xfrm>
+          <a:prstGeom prst="rect">
+            <a:avLst/>
+          </a:prstGeom>
+          <a:noFill/>
+          <a:ln/>
+        </p:spPr>
+        <p:txBody>
+          <a:bodyPr wrap="square" lIns="0" tIns="0" rIns="0" bIns="0" rtlCol="0" anchor="t"/>
+          <a:lstStyle/>
+          <a:p>
+            <a:pPr algn="l" indent="0" marL="0">
+              <a:spcAft>
+                <a:spcPts val="800"/>
+              </a:spcAft>
+              <a:buNone/>
+            </a:pPr>
+            <a:r>
+              <a:rPr lang="en-US" sz="3600" i="1" dirty="0">
+                <a:solidFill>
+                  <a:srgbClr val="111111"/>
+                </a:solidFill>
+                <a:latin typeface="Times New Roman" pitchFamily="34" charset="0"/>
+                <a:ea typeface="Times New Roman" pitchFamily="34" charset="-122"/>
+                <a:cs typeface="Times New Roman" pitchFamily="34" charset="-120"/>
+              </a:rPr>
+              <a:t>Rivers and floodplains are important to man for the following reasons:</a:t>
+            </a:r>
+            <a:endParaRPr lang="en-US" sz="3600" dirty="0"/>
+          </a:p>
+          <a:p>
+            <a:pPr algn="l" indent="0" marL="0">
+              <a:spcAft>
+                <a:spcPts val="800"/>
+              </a:spcAft>
+              <a:buNone/>
+            </a:pPr>
+            <a:r>
+              <a:rPr lang="en-US" sz="3600" b="1" dirty="0">
+                <a:solidFill>
+                  <a:srgbClr val="111111"/>
+                </a:solidFill>
+                <a:latin typeface="Times New Roman" pitchFamily="34" charset="0"/>
+                <a:ea typeface="Times New Roman" pitchFamily="34" charset="-122"/>
+                <a:cs typeface="Times New Roman" pitchFamily="34" charset="-120"/>
+              </a:rPr>
+              <a:t>Farming: </a:t>
+            </a:r>
+            <a:pPr algn="l" indent="0" marL="0">
+              <a:spcAft>
+                <a:spcPts val="800"/>
+              </a:spcAft>
+              <a:buNone/>
+            </a:pPr>
+            <a:r>
+              <a:rPr lang="en-US" sz="3600" dirty="0">
+                <a:solidFill>
+                  <a:srgbClr val="111111"/>
+                </a:solidFill>
+                <a:latin typeface="Times New Roman" pitchFamily="34" charset="0"/>
+                <a:ea typeface="Times New Roman" pitchFamily="34" charset="-122"/>
+                <a:cs typeface="Times New Roman" pitchFamily="34" charset="-120"/>
+              </a:rPr>
+              <a:t>Floodplains have fertile alluvium for rice, onions, maize and vegetables.</a:t>
+            </a:r>
+            <a:endParaRPr lang="en-US" sz="3600" dirty="0"/>
+          </a:p>
+        </p:txBody>
+      </p:sp>
       <p:pic>
         <p:nvPicPr>
-          <p:cNvPr id="3" name="Image 0" descr="/home/claude/f4/img/minesec_sheet.png">    </p:cNvPr>
+          <p:cNvPr id="5" name="Image 0" descr="/home/claude/f4/img/v2/f4_ricefield.jpg">    </p:cNvPr>
           <p:cNvPicPr>
             <a:picLocks noChangeAspect="1"/>
           </p:cNvPicPr>
@@ -12351,8 +12899,8 @@
         </p:blipFill>
         <p:spPr>
           <a:xfrm>
-            <a:off x="0" y="658368"/>
-            <a:ext cx="5120640" cy="5833872"/>
+            <a:off x="5349240" y="2071212"/>
+            <a:ext cx="6659575" cy="3693983"/>
           </a:xfrm>
           <a:prstGeom prst="rect">
             <a:avLst/>
@@ -12361,14 +12909,14 @@
       </p:pic>
       <p:sp>
         <p:nvSpPr>
-          <p:cNvPr id="4" name="Text 1"/>
+          <p:cNvPr id="6" name="Text 3"/>
           <p:cNvSpPr/>
           <p:nvPr/>
         </p:nvSpPr>
         <p:spPr>
           <a:xfrm>
-            <a:off x="5349240" y="1005840"/>
-            <a:ext cx="6522415" cy="731520"/>
+            <a:off x="5349240" y="6089904"/>
+            <a:ext cx="6659575" cy="347472"/>
           </a:xfrm>
           <a:prstGeom prst="rect">
             <a:avLst/>
@@ -12377,85 +12925,24 @@
           <a:ln/>
         </p:spPr>
         <p:txBody>
-          <a:bodyPr wrap="square" lIns="0" tIns="0" rIns="0" bIns="0" rtlCol="0" anchor="ctr">
-            <a:normAutofit/>
-          </a:bodyPr>
+          <a:bodyPr wrap="square" lIns="0" tIns="0" rIns="0" bIns="0" rtlCol="0" anchor="ctr"/>
           <a:lstStyle/>
           <a:p>
             <a:pPr algn="ctr" indent="0" marL="0">
               <a:buNone/>
             </a:pPr>
             <a:r>
-              <a:rPr lang="en-US" sz="3600" b="1" dirty="0">
-                <a:solidFill>
-                  <a:srgbClr val="990011"/>
+              <a:rPr lang="en-US" sz="1600" i="1" dirty="0">
+                <a:solidFill>
+                  <a:srgbClr val="555555"/>
                 </a:solidFill>
                 <a:latin typeface="Times New Roman" pitchFamily="34" charset="0"/>
                 <a:ea typeface="Times New Roman" pitchFamily="34" charset="-122"/>
                 <a:cs typeface="Times New Roman" pitchFamily="34" charset="-120"/>
               </a:rPr>
-              <a:t>1. Importance of Rivers and Floodplains (continued)</a:t>
-            </a:r>
-            <a:endParaRPr lang="en-US" sz="3600" dirty="0"/>
-          </a:p>
-        </p:txBody>
-      </p:sp>
-      <p:sp>
-        <p:nvSpPr>
-          <p:cNvPr id="5" name="Text 2"/>
-          <p:cNvSpPr/>
-          <p:nvPr/>
-        </p:nvSpPr>
-        <p:spPr>
-          <a:xfrm>
-            <a:off x="5349240" y="1783080"/>
-            <a:ext cx="6522415" cy="4663440"/>
-          </a:xfrm>
-          <a:prstGeom prst="rect">
-            <a:avLst/>
-          </a:prstGeom>
-          <a:noFill/>
-          <a:ln/>
-        </p:spPr>
-        <p:txBody>
-          <a:bodyPr wrap="square" lIns="0" tIns="0" rIns="0" bIns="0" rtlCol="0" anchor="t"/>
-          <a:lstStyle/>
-          <a:p>
-            <a:pPr algn="l" indent="0" marL="0">
-              <a:spcAft>
-                <a:spcPts val="800"/>
-              </a:spcAft>
-              <a:buNone/>
-            </a:pPr>
-            <a:r>
-              <a:rPr lang="en-US" sz="4000" b="1" dirty="0">
-                <a:solidFill>
-                  <a:srgbClr val="111111"/>
-                </a:solidFill>
-                <a:latin typeface="Times New Roman" pitchFamily="34" charset="0"/>
-                <a:ea typeface="Times New Roman" pitchFamily="34" charset="-122"/>
-                <a:cs typeface="Times New Roman" pitchFamily="34" charset="-120"/>
-              </a:rPr>
-              <a:t>Energy and transport: </a:t>
-            </a:r>
-            <a:pPr algn="l" indent="0" marL="0">
-              <a:spcAft>
-                <a:spcPts val="800"/>
-              </a:spcAft>
-              <a:buNone/>
-            </a:pPr>
-            <a:r>
-              <a:rPr lang="en-US" sz="4000" dirty="0">
-                <a:solidFill>
-                  <a:srgbClr val="111111"/>
-                </a:solidFill>
-                <a:latin typeface="Times New Roman" pitchFamily="34" charset="0"/>
-                <a:ea typeface="Times New Roman" pitchFamily="34" charset="-122"/>
-                <a:cs typeface="Times New Roman" pitchFamily="34" charset="-120"/>
-              </a:rPr>
-              <a:t>Rivers give electricity, like the Lagdo Dam, and are used for transport.</a:t>
-            </a:r>
-            <a:endParaRPr lang="en-US" sz="4000" dirty="0"/>
+              <a:t>Illustration: rice fields on a floodplain</a:t>
+            </a:r>
+            <a:endParaRPr lang="en-US" sz="1600" dirty="0"/>
           </a:p>
         </p:txBody>
       </p:sp>
@@ -12630,7 +13117,7 @@
                 <a:ea typeface="Times New Roman" pitchFamily="34" charset="-122"/>
                 <a:cs typeface="Times New Roman" pitchFamily="34" charset="-120"/>
               </a:rPr>
-              <a:t>2. Problems of Living in Floodplains</a:t>
+              <a:t>1. Importance of Rivers and Floodplains to Man</a:t>
             </a:r>
             <a:endParaRPr lang="en-US" sz="3600" dirty="0"/>
           </a:p>
@@ -12664,7 +13151,7 @@
               <a:buNone/>
             </a:pPr>
             <a:r>
-              <a:rPr lang="en-US" sz="4000" i="1" dirty="0">
+              <a:rPr lang="en-US" sz="4000" b="1" dirty="0">
                 <a:solidFill>
                   <a:srgbClr val="111111"/>
                 </a:solidFill>
@@ -12672,11 +13159,8 @@
                 <a:ea typeface="Times New Roman" pitchFamily="34" charset="-122"/>
                 <a:cs typeface="Times New Roman" pitchFamily="34" charset="-120"/>
               </a:rPr>
-              <a:t>People in floodplains face the following problems:</a:t>
-            </a:r>
-            <a:endParaRPr lang="en-US" sz="4000" dirty="0"/>
-          </a:p>
-          <a:p>
+              <a:t>Water supply: </a:t>
+            </a:r>
             <a:pPr algn="l" indent="0" marL="0">
               <a:spcAft>
                 <a:spcPts val="800"/>
@@ -12684,7 +13168,7 @@
               <a:buNone/>
             </a:pPr>
             <a:r>
-              <a:rPr lang="en-US" sz="4000" b="1" dirty="0">
+              <a:rPr lang="en-US" sz="4000" dirty="0">
                 <a:solidFill>
                   <a:srgbClr val="111111"/>
                 </a:solidFill>
@@ -12692,8 +13176,11 @@
                 <a:ea typeface="Times New Roman" pitchFamily="34" charset="-122"/>
                 <a:cs typeface="Times New Roman" pitchFamily="34" charset="-120"/>
               </a:rPr>
-              <a:t>Floods: </a:t>
-            </a:r>
+              <a:t>Rivers supply water for drinking, animals and irrigation.</a:t>
+            </a:r>
+            <a:endParaRPr lang="en-US" sz="4000" dirty="0"/>
+          </a:p>
+          <a:p>
             <a:pPr algn="l" indent="0" marL="0">
               <a:spcAft>
                 <a:spcPts val="800"/>
@@ -12701,7 +13188,7 @@
               <a:buNone/>
             </a:pPr>
             <a:r>
-              <a:rPr lang="en-US" sz="4000" dirty="0">
+              <a:rPr lang="en-US" sz="4000" b="1" dirty="0">
                 <a:solidFill>
                   <a:srgbClr val="111111"/>
                 </a:solidFill>
@@ -12709,11 +13196,8 @@
                 <a:ea typeface="Times New Roman" pitchFamily="34" charset="-122"/>
                 <a:cs typeface="Times New Roman" pitchFamily="34" charset="-120"/>
               </a:rPr>
-              <a:t>Floods destroy houses, crops and roads.</a:t>
-            </a:r>
-            <a:endParaRPr lang="en-US" sz="4000" dirty="0"/>
-          </a:p>
-          <a:p>
+              <a:t>Fishing: </a:t>
+            </a:r>
             <a:pPr algn="l" indent="0" marL="0">
               <a:spcAft>
                 <a:spcPts val="800"/>
@@ -12721,7 +13205,7 @@
               <a:buNone/>
             </a:pPr>
             <a:r>
-              <a:rPr lang="en-US" sz="4000" b="1" dirty="0">
+              <a:rPr lang="en-US" sz="4000" dirty="0">
                 <a:solidFill>
                   <a:srgbClr val="111111"/>
                 </a:solidFill>
@@ -12729,24 +13213,7 @@
                 <a:ea typeface="Times New Roman" pitchFamily="34" charset="-122"/>
                 <a:cs typeface="Times New Roman" pitchFamily="34" charset="-120"/>
               </a:rPr>
-              <a:t>Diseases: </a:t>
-            </a:r>
-            <a:pPr algn="l" indent="0" marL="0">
-              <a:spcAft>
-                <a:spcPts val="800"/>
-              </a:spcAft>
-              <a:buNone/>
-            </a:pPr>
-            <a:r>
-              <a:rPr lang="en-US" sz="4000" dirty="0">
-                <a:solidFill>
-                  <a:srgbClr val="111111"/>
-                </a:solidFill>
-                <a:latin typeface="Times New Roman" pitchFamily="34" charset="0"/>
-                <a:ea typeface="Times New Roman" pitchFamily="34" charset="-122"/>
-                <a:cs typeface="Times New Roman" pitchFamily="34" charset="-120"/>
-              </a:rPr>
-              <a:t>Stagnant water spreads diseases such as cholera and malaria.</a:t>
+              <a:t>Rivers and flooded lands are rich in fish.</a:t>
             </a:r>
             <a:endParaRPr lang="en-US" sz="4000" dirty="0"/>
           </a:p>
@@ -12864,9 +13331,109 @@
           </a:p>
         </p:txBody>
       </p:sp>
+      <p:sp>
+        <p:nvSpPr>
+          <p:cNvPr id="3" name="Text 1"/>
+          <p:cNvSpPr/>
+          <p:nvPr/>
+        </p:nvSpPr>
+        <p:spPr>
+          <a:xfrm>
+            <a:off x="365760" y="1005840"/>
+            <a:ext cx="11460175" cy="731520"/>
+          </a:xfrm>
+          <a:prstGeom prst="rect">
+            <a:avLst/>
+          </a:prstGeom>
+          <a:noFill/>
+          <a:ln/>
+        </p:spPr>
+        <p:txBody>
+          <a:bodyPr wrap="square" lIns="0" tIns="0" rIns="0" bIns="0" rtlCol="0" anchor="ctr">
+            <a:normAutofit/>
+          </a:bodyPr>
+          <a:lstStyle/>
+          <a:p>
+            <a:pPr algn="ctr" indent="0" marL="0">
+              <a:buNone/>
+            </a:pPr>
+            <a:r>
+              <a:rPr lang="en-US" sz="3600" b="1" dirty="0">
+                <a:solidFill>
+                  <a:srgbClr val="990011"/>
+                </a:solidFill>
+                <a:latin typeface="Times New Roman" pitchFamily="34" charset="0"/>
+                <a:ea typeface="Times New Roman" pitchFamily="34" charset="-122"/>
+                <a:cs typeface="Times New Roman" pitchFamily="34" charset="-120"/>
+              </a:rPr>
+              <a:t>1. Importance of Rivers and Floodplains to Man</a:t>
+            </a:r>
+            <a:endParaRPr lang="en-US" sz="3600" dirty="0"/>
+          </a:p>
+        </p:txBody>
+      </p:sp>
+      <p:sp>
+        <p:nvSpPr>
+          <p:cNvPr id="4" name="Text 2"/>
+          <p:cNvSpPr/>
+          <p:nvPr/>
+        </p:nvSpPr>
+        <p:spPr>
+          <a:xfrm>
+            <a:off x="365760" y="1783080"/>
+            <a:ext cx="4846320" cy="4617720"/>
+          </a:xfrm>
+          <a:prstGeom prst="rect">
+            <a:avLst/>
+          </a:prstGeom>
+          <a:noFill/>
+          <a:ln/>
+        </p:spPr>
+        <p:txBody>
+          <a:bodyPr wrap="square" lIns="0" tIns="0" rIns="0" bIns="0" rtlCol="0" anchor="t"/>
+          <a:lstStyle/>
+          <a:p>
+            <a:pPr algn="l" indent="0" marL="0">
+              <a:spcAft>
+                <a:spcPts val="800"/>
+              </a:spcAft>
+              <a:buNone/>
+            </a:pPr>
+            <a:r>
+              <a:rPr lang="en-US" sz="3600" b="1" dirty="0">
+                <a:solidFill>
+                  <a:srgbClr val="111111"/>
+                </a:solidFill>
+                <a:latin typeface="Times New Roman" pitchFamily="34" charset="0"/>
+                <a:ea typeface="Times New Roman" pitchFamily="34" charset="-122"/>
+                <a:cs typeface="Times New Roman" pitchFamily="34" charset="-120"/>
+              </a:rPr>
+              <a:t>Energy: </a:t>
+            </a:r>
+            <a:pPr algn="l" indent="0" marL="0">
+              <a:spcAft>
+                <a:spcPts val="800"/>
+              </a:spcAft>
+              <a:buNone/>
+            </a:pPr>
+            <a:r>
+              <a:rPr lang="en-US" sz="3600" dirty="0">
+                <a:solidFill>
+                  <a:srgbClr val="111111"/>
+                </a:solidFill>
+                <a:latin typeface="Times New Roman" pitchFamily="34" charset="0"/>
+                <a:ea typeface="Times New Roman" pitchFamily="34" charset="-122"/>
+                <a:cs typeface="Times New Roman" pitchFamily="34" charset="-120"/>
+              </a:rPr>
+              <a:t>Dams on rivers produce electricity, like the Lagdo Dam on the Benue.</a:t>
+            </a:r>
+            <a:endParaRPr lang="en-US" sz="3600" dirty="0"/>
+          </a:p>
+        </p:txBody>
+      </p:sp>
       <p:pic>
         <p:nvPicPr>
-          <p:cNvPr id="3" name="Image 0" descr="/home/claude/f4/img/minesec_sheet.png">    </p:cNvPr>
+          <p:cNvPr id="5" name="Image 0" descr="/home/claude/f4/img/v2/f2t_lagdo.jpg">    </p:cNvPr>
           <p:cNvPicPr>
             <a:picLocks noChangeAspect="1"/>
           </p:cNvPicPr>
@@ -12880,8 +13447,8 @@
         </p:blipFill>
         <p:spPr>
           <a:xfrm>
-            <a:off x="0" y="658368"/>
-            <a:ext cx="5120640" cy="5833872"/>
+            <a:off x="5349240" y="2071212"/>
+            <a:ext cx="6659575" cy="3693983"/>
           </a:xfrm>
           <a:prstGeom prst="rect">
             <a:avLst/>
@@ -12890,14 +13457,14 @@
       </p:pic>
       <p:sp>
         <p:nvSpPr>
-          <p:cNvPr id="4" name="Text 1"/>
+          <p:cNvPr id="6" name="Text 3"/>
           <p:cNvSpPr/>
           <p:nvPr/>
         </p:nvSpPr>
         <p:spPr>
           <a:xfrm>
-            <a:off x="5349240" y="1005840"/>
-            <a:ext cx="6522415" cy="731520"/>
+            <a:off x="5349240" y="6089904"/>
+            <a:ext cx="6659575" cy="347472"/>
           </a:xfrm>
           <a:prstGeom prst="rect">
             <a:avLst/>
@@ -12906,85 +13473,24 @@
           <a:ln/>
         </p:spPr>
         <p:txBody>
-          <a:bodyPr wrap="square" lIns="0" tIns="0" rIns="0" bIns="0" rtlCol="0" anchor="ctr">
-            <a:normAutofit/>
-          </a:bodyPr>
+          <a:bodyPr wrap="square" lIns="0" tIns="0" rIns="0" bIns="0" rtlCol="0" anchor="ctr"/>
           <a:lstStyle/>
           <a:p>
             <a:pPr algn="ctr" indent="0" marL="0">
               <a:buNone/>
             </a:pPr>
             <a:r>
-              <a:rPr lang="en-US" sz="3600" b="1" dirty="0">
-                <a:solidFill>
-                  <a:srgbClr val="990011"/>
+              <a:rPr lang="en-US" sz="1600" i="1" dirty="0">
+                <a:solidFill>
+                  <a:srgbClr val="555555"/>
                 </a:solidFill>
                 <a:latin typeface="Times New Roman" pitchFamily="34" charset="0"/>
                 <a:ea typeface="Times New Roman" pitchFamily="34" charset="-122"/>
                 <a:cs typeface="Times New Roman" pitchFamily="34" charset="-120"/>
               </a:rPr>
-              <a:t>2. Problems of Living in Floodplains (continued)</a:t>
-            </a:r>
-            <a:endParaRPr lang="en-US" sz="3600" dirty="0"/>
-          </a:p>
-        </p:txBody>
-      </p:sp>
-      <p:sp>
-        <p:nvSpPr>
-          <p:cNvPr id="5" name="Text 2"/>
-          <p:cNvSpPr/>
-          <p:nvPr/>
-        </p:nvSpPr>
-        <p:spPr>
-          <a:xfrm>
-            <a:off x="5349240" y="1783080"/>
-            <a:ext cx="6522415" cy="4663440"/>
-          </a:xfrm>
-          <a:prstGeom prst="rect">
-            <a:avLst/>
-          </a:prstGeom>
-          <a:noFill/>
-          <a:ln/>
-        </p:spPr>
-        <p:txBody>
-          <a:bodyPr wrap="square" lIns="0" tIns="0" rIns="0" bIns="0" rtlCol="0" anchor="t"/>
-          <a:lstStyle/>
-          <a:p>
-            <a:pPr algn="l" indent="0" marL="0">
-              <a:spcAft>
-                <a:spcPts val="800"/>
-              </a:spcAft>
-              <a:buNone/>
-            </a:pPr>
-            <a:r>
-              <a:rPr lang="en-US" sz="4000" b="1" dirty="0">
-                <a:solidFill>
-                  <a:srgbClr val="111111"/>
-                </a:solidFill>
-                <a:latin typeface="Times New Roman" pitchFamily="34" charset="0"/>
-                <a:ea typeface="Times New Roman" pitchFamily="34" charset="-122"/>
-                <a:cs typeface="Times New Roman" pitchFamily="34" charset="-120"/>
-              </a:rPr>
-              <a:t>Loss of life: </a:t>
-            </a:r>
-            <a:pPr algn="l" indent="0" marL="0">
-              <a:spcAft>
-                <a:spcPts val="800"/>
-              </a:spcAft>
-              <a:buNone/>
-            </a:pPr>
-            <a:r>
-              <a:rPr lang="en-US" sz="4000" dirty="0">
-                <a:solidFill>
-                  <a:srgbClr val="111111"/>
-                </a:solidFill>
-                <a:latin typeface="Times New Roman" pitchFamily="34" charset="0"/>
-                <a:ea typeface="Times New Roman" pitchFamily="34" charset="-122"/>
-                <a:cs typeface="Times New Roman" pitchFamily="34" charset="-120"/>
-              </a:rPr>
-              <a:t>People and animals can drown during floods.</a:t>
-            </a:r>
-            <a:endParaRPr lang="en-US" sz="4000" dirty="0"/>
+              <a:t>Illustration: the Lagdo Dam</a:t>
+            </a:r>
+            <a:endParaRPr lang="en-US" sz="1600" dirty="0"/>
           </a:p>
         </p:txBody>
       </p:sp>
@@ -13159,7 +13665,7 @@
                 <a:ea typeface="Times New Roman" pitchFamily="34" charset="-122"/>
                 <a:cs typeface="Times New Roman" pitchFamily="34" charset="-120"/>
               </a:rPr>
-              <a:t>3. Solutions</a:t>
+              <a:t>1. Importance of Rivers and Floodplains to Man</a:t>
             </a:r>
             <a:endParaRPr lang="en-US" sz="3600" dirty="0"/>
           </a:p>
@@ -13193,7 +13699,7 @@
               <a:buNone/>
             </a:pPr>
             <a:r>
-              <a:rPr lang="en-US" sz="4000" i="1" dirty="0">
+              <a:rPr lang="en-US" sz="4000" b="1" dirty="0">
                 <a:solidFill>
                   <a:srgbClr val="111111"/>
                 </a:solidFill>
@@ -13201,11 +13707,8 @@
                 <a:ea typeface="Times New Roman" pitchFamily="34" charset="-122"/>
                 <a:cs typeface="Times New Roman" pitchFamily="34" charset="-120"/>
               </a:rPr>
-              <a:t>The following solutions reduce these problems:</a:t>
-            </a:r>
-            <a:endParaRPr lang="en-US" sz="4000" dirty="0"/>
-          </a:p>
-          <a:p>
+              <a:t>Transport: </a:t>
+            </a:r>
             <a:pPr algn="l" indent="0" marL="0">
               <a:spcAft>
                 <a:spcPts val="800"/>
@@ -13213,7 +13716,7 @@
               <a:buNone/>
             </a:pPr>
             <a:r>
-              <a:rPr lang="en-US" sz="4000" b="1" dirty="0">
+              <a:rPr lang="en-US" sz="4000" dirty="0">
                 <a:solidFill>
                   <a:srgbClr val="111111"/>
                 </a:solidFill>
@@ -13221,8 +13724,11 @@
                 <a:ea typeface="Times New Roman" pitchFamily="34" charset="-122"/>
                 <a:cs typeface="Times New Roman" pitchFamily="34" charset="-120"/>
               </a:rPr>
-              <a:t>Dykes and dams: </a:t>
-            </a:r>
+              <a:t>Rivers are used to carry people and goods, as on the Benue to Nigeria in the rainy season.</a:t>
+            </a:r>
+            <a:endParaRPr lang="en-US" sz="4000" dirty="0"/>
+          </a:p>
+          <a:p>
             <a:pPr algn="l" indent="0" marL="0">
               <a:spcAft>
                 <a:spcPts val="800"/>
@@ -13230,7 +13736,7 @@
               <a:buNone/>
             </a:pPr>
             <a:r>
-              <a:rPr lang="en-US" sz="4000" dirty="0">
+              <a:rPr lang="en-US" sz="4000" b="1" dirty="0">
                 <a:solidFill>
                   <a:srgbClr val="111111"/>
                 </a:solidFill>
@@ -13238,11 +13744,8 @@
                 <a:ea typeface="Times New Roman" pitchFamily="34" charset="-122"/>
                 <a:cs typeface="Times New Roman" pitchFamily="34" charset="-120"/>
               </a:rPr>
-              <a:t>They control the water and hold back floods.</a:t>
-            </a:r>
-            <a:endParaRPr lang="en-US" sz="4000" dirty="0"/>
-          </a:p>
-          <a:p>
+              <a:t>Settlement: </a:t>
+            </a:r>
             <a:pPr algn="l" indent="0" marL="0">
               <a:spcAft>
                 <a:spcPts val="800"/>
@@ -13250,7 +13753,7 @@
               <a:buNone/>
             </a:pPr>
             <a:r>
-              <a:rPr lang="en-US" sz="4000" b="1" dirty="0">
+              <a:rPr lang="en-US" sz="4000" dirty="0">
                 <a:solidFill>
                   <a:srgbClr val="111111"/>
                 </a:solidFill>
@@ -13258,24 +13761,7 @@
                 <a:ea typeface="Times New Roman" pitchFamily="34" charset="-122"/>
                 <a:cs typeface="Times New Roman" pitchFamily="34" charset="-120"/>
               </a:rPr>
-              <a:t>Warnings: </a:t>
-            </a:r>
-            <a:pPr algn="l" indent="0" marL="0">
-              <a:spcAft>
-                <a:spcPts val="800"/>
-              </a:spcAft>
-              <a:buNone/>
-            </a:pPr>
-            <a:r>
-              <a:rPr lang="en-US" sz="4000" dirty="0">
-                <a:solidFill>
-                  <a:srgbClr val="111111"/>
-                </a:solidFill>
-                <a:latin typeface="Times New Roman" pitchFamily="34" charset="0"/>
-                <a:ea typeface="Times New Roman" pitchFamily="34" charset="-122"/>
-                <a:cs typeface="Times New Roman" pitchFamily="34" charset="-120"/>
-              </a:rPr>
-              <a:t>Radio messages warn people before floods.</a:t>
+              <a:t>Flat, fertile land near water attracts villages and towns.</a:t>
             </a:r>
             <a:endParaRPr lang="en-US" sz="4000" dirty="0"/>
           </a:p>
@@ -13393,9 +13879,129 @@
           </a:p>
         </p:txBody>
       </p:sp>
+      <p:sp>
+        <p:nvSpPr>
+          <p:cNvPr id="3" name="Text 1"/>
+          <p:cNvSpPr/>
+          <p:nvPr/>
+        </p:nvSpPr>
+        <p:spPr>
+          <a:xfrm>
+            <a:off x="365760" y="1005840"/>
+            <a:ext cx="11460175" cy="731520"/>
+          </a:xfrm>
+          <a:prstGeom prst="rect">
+            <a:avLst/>
+          </a:prstGeom>
+          <a:noFill/>
+          <a:ln/>
+        </p:spPr>
+        <p:txBody>
+          <a:bodyPr wrap="square" lIns="0" tIns="0" rIns="0" bIns="0" rtlCol="0" anchor="ctr">
+            <a:normAutofit/>
+          </a:bodyPr>
+          <a:lstStyle/>
+          <a:p>
+            <a:pPr algn="ctr" indent="0" marL="0">
+              <a:buNone/>
+            </a:pPr>
+            <a:r>
+              <a:rPr lang="en-US" sz="3600" b="1" dirty="0">
+                <a:solidFill>
+                  <a:srgbClr val="990011"/>
+                </a:solidFill>
+                <a:latin typeface="Times New Roman" pitchFamily="34" charset="0"/>
+                <a:ea typeface="Times New Roman" pitchFamily="34" charset="-122"/>
+                <a:cs typeface="Times New Roman" pitchFamily="34" charset="-120"/>
+              </a:rPr>
+              <a:t>2. Problems of Living in Floodplains</a:t>
+            </a:r>
+            <a:endParaRPr lang="en-US" sz="3600" dirty="0"/>
+          </a:p>
+        </p:txBody>
+      </p:sp>
+      <p:sp>
+        <p:nvSpPr>
+          <p:cNvPr id="4" name="Text 2"/>
+          <p:cNvSpPr/>
+          <p:nvPr/>
+        </p:nvSpPr>
+        <p:spPr>
+          <a:xfrm>
+            <a:off x="365760" y="1783080"/>
+            <a:ext cx="4846320" cy="4617720"/>
+          </a:xfrm>
+          <a:prstGeom prst="rect">
+            <a:avLst/>
+          </a:prstGeom>
+          <a:noFill/>
+          <a:ln/>
+        </p:spPr>
+        <p:txBody>
+          <a:bodyPr wrap="square" lIns="0" tIns="0" rIns="0" bIns="0" rtlCol="0" anchor="t"/>
+          <a:lstStyle/>
+          <a:p>
+            <a:pPr algn="l" indent="0" marL="0">
+              <a:spcAft>
+                <a:spcPts val="800"/>
+              </a:spcAft>
+              <a:buNone/>
+            </a:pPr>
+            <a:r>
+              <a:rPr lang="en-US" sz="3600" i="1" dirty="0">
+                <a:solidFill>
+                  <a:srgbClr val="111111"/>
+                </a:solidFill>
+                <a:latin typeface="Times New Roman" pitchFamily="34" charset="0"/>
+                <a:ea typeface="Times New Roman" pitchFamily="34" charset="-122"/>
+                <a:cs typeface="Times New Roman" pitchFamily="34" charset="-120"/>
+              </a:rPr>
+              <a:t>People in floodplains face the following problems:</a:t>
+            </a:r>
+            <a:endParaRPr lang="en-US" sz="3600" dirty="0"/>
+          </a:p>
+          <a:p>
+            <a:pPr algn="l" indent="0" marL="0">
+              <a:spcAft>
+                <a:spcPts val="800"/>
+              </a:spcAft>
+              <a:buNone/>
+            </a:pPr>
+            <a:r>
+              <a:rPr lang="en-US" sz="3600" b="1" dirty="0">
+                <a:solidFill>
+                  <a:srgbClr val="111111"/>
+                </a:solidFill>
+                <a:latin typeface="Times New Roman" pitchFamily="34" charset="0"/>
+                <a:ea typeface="Times New Roman" pitchFamily="34" charset="-122"/>
+                <a:cs typeface="Times New Roman" pitchFamily="34" charset="-120"/>
+              </a:rPr>
+              <a:t>Floods: </a:t>
+            </a:r>
+            <a:pPr algn="l" indent="0" marL="0">
+              <a:spcAft>
+                <a:spcPts val="800"/>
+              </a:spcAft>
+              <a:buNone/>
+            </a:pPr>
+            <a:r>
+              <a:rPr lang="en-US" sz="3600" dirty="0">
+                <a:solidFill>
+                  <a:srgbClr val="111111"/>
+                </a:solidFill>
+                <a:latin typeface="Times New Roman" pitchFamily="34" charset="0"/>
+                <a:ea typeface="Times New Roman" pitchFamily="34" charset="-122"/>
+                <a:cs typeface="Times New Roman" pitchFamily="34" charset="-120"/>
+              </a:rPr>
+              <a:t>Floods destroy houses, crops, roads and bridges.</a:t>
+            </a:r>
+            <a:endParaRPr lang="en-US" sz="3600" dirty="0"/>
+          </a:p>
+        </p:txBody>
+      </p:sp>
       <p:pic>
         <p:nvPicPr>
-          <p:cNvPr id="3" name="Image 0" descr="/home/claude/f4/img/minesec_sheet.png">    </p:cNvPr>
+          <p:cNvPr id="5" name="Image 0" descr="/home/claude/f4/img/v2/f4_flood.jpg">    </p:cNvPr>
           <p:cNvPicPr>
             <a:picLocks noChangeAspect="1"/>
           </p:cNvPicPr>
@@ -13409,8 +14015,8 @@
         </p:blipFill>
         <p:spPr>
           <a:xfrm>
-            <a:off x="0" y="658368"/>
-            <a:ext cx="5120640" cy="5833872"/>
+            <a:off x="5349240" y="2071212"/>
+            <a:ext cx="6659575" cy="3693983"/>
           </a:xfrm>
           <a:prstGeom prst="rect">
             <a:avLst/>
@@ -13419,14 +14025,14 @@
       </p:pic>
       <p:sp>
         <p:nvSpPr>
-          <p:cNvPr id="4" name="Text 1"/>
+          <p:cNvPr id="6" name="Text 3"/>
           <p:cNvSpPr/>
           <p:nvPr/>
         </p:nvSpPr>
         <p:spPr>
           <a:xfrm>
-            <a:off x="5349240" y="1005840"/>
-            <a:ext cx="6522415" cy="731520"/>
+            <a:off x="5349240" y="6089904"/>
+            <a:ext cx="6659575" cy="347472"/>
           </a:xfrm>
           <a:prstGeom prst="rect">
             <a:avLst/>
@@ -13435,122 +14041,24 @@
           <a:ln/>
         </p:spPr>
         <p:txBody>
-          <a:bodyPr wrap="square" lIns="0" tIns="0" rIns="0" bIns="0" rtlCol="0" anchor="ctr">
-            <a:normAutofit/>
-          </a:bodyPr>
+          <a:bodyPr wrap="square" lIns="0" tIns="0" rIns="0" bIns="0" rtlCol="0" anchor="ctr"/>
           <a:lstStyle/>
           <a:p>
             <a:pPr algn="ctr" indent="0" marL="0">
               <a:buNone/>
             </a:pPr>
             <a:r>
-              <a:rPr lang="en-US" sz="3600" b="1" dirty="0">
-                <a:solidFill>
-                  <a:srgbClr val="990011"/>
+              <a:rPr lang="en-US" sz="1600" i="1" dirty="0">
+                <a:solidFill>
+                  <a:srgbClr val="555555"/>
                 </a:solidFill>
                 <a:latin typeface="Times New Roman" pitchFamily="34" charset="0"/>
                 <a:ea typeface="Times New Roman" pitchFamily="34" charset="-122"/>
                 <a:cs typeface="Times New Roman" pitchFamily="34" charset="-120"/>
               </a:rPr>
-              <a:t>3. Solutions (continued)</a:t>
-            </a:r>
-            <a:endParaRPr lang="en-US" sz="3600" dirty="0"/>
-          </a:p>
-        </p:txBody>
-      </p:sp>
-      <p:sp>
-        <p:nvSpPr>
-          <p:cNvPr id="5" name="Text 2"/>
-          <p:cNvSpPr/>
-          <p:nvPr/>
-        </p:nvSpPr>
-        <p:spPr>
-          <a:xfrm>
-            <a:off x="5349240" y="1783080"/>
-            <a:ext cx="6522415" cy="4663440"/>
-          </a:xfrm>
-          <a:prstGeom prst="rect">
-            <a:avLst/>
-          </a:prstGeom>
-          <a:noFill/>
-          <a:ln/>
-        </p:spPr>
-        <p:txBody>
-          <a:bodyPr wrap="square" lIns="0" tIns="0" rIns="0" bIns="0" rtlCol="0" anchor="t"/>
-          <a:lstStyle/>
-          <a:p>
-            <a:pPr algn="l" indent="0" marL="0">
-              <a:spcAft>
-                <a:spcPts val="800"/>
-              </a:spcAft>
-              <a:buNone/>
-            </a:pPr>
-            <a:r>
-              <a:rPr lang="en-US" sz="4000" b="1" dirty="0">
-                <a:solidFill>
-                  <a:srgbClr val="111111"/>
-                </a:solidFill>
-                <a:latin typeface="Times New Roman" pitchFamily="34" charset="0"/>
-                <a:ea typeface="Times New Roman" pitchFamily="34" charset="-122"/>
-                <a:cs typeface="Times New Roman" pitchFamily="34" charset="-120"/>
-              </a:rPr>
-              <a:t>Safe building: </a:t>
-            </a:r>
-            <a:pPr algn="l" indent="0" marL="0">
-              <a:spcAft>
-                <a:spcPts val="800"/>
-              </a:spcAft>
-              <a:buNone/>
-            </a:pPr>
-            <a:r>
-              <a:rPr lang="en-US" sz="4000" dirty="0">
-                <a:solidFill>
-                  <a:srgbClr val="111111"/>
-                </a:solidFill>
-                <a:latin typeface="Times New Roman" pitchFamily="34" charset="0"/>
-                <a:ea typeface="Times New Roman" pitchFamily="34" charset="-122"/>
-                <a:cs typeface="Times New Roman" pitchFamily="34" charset="-120"/>
-              </a:rPr>
-              <a:t>Houses should be built on higher ground far from the river.</a:t>
-            </a:r>
-            <a:endParaRPr lang="en-US" sz="4000" dirty="0"/>
-          </a:p>
-          <a:p>
-            <a:pPr algn="l" indent="0" marL="0">
-              <a:spcAft>
-                <a:spcPts val="800"/>
-              </a:spcAft>
-              <a:buNone/>
-            </a:pPr>
-            <a:r>
-              <a:rPr lang="en-US" sz="4000" b="1" dirty="0">
-                <a:solidFill>
-                  <a:srgbClr val="111111"/>
-                </a:solidFill>
-                <a:latin typeface="Times New Roman" pitchFamily="34" charset="0"/>
-                <a:ea typeface="Times New Roman" pitchFamily="34" charset="-122"/>
-                <a:cs typeface="Times New Roman" pitchFamily="34" charset="-120"/>
-              </a:rPr>
-              <a:t>Trees: </a:t>
-            </a:r>
-            <a:pPr algn="l" indent="0" marL="0">
-              <a:spcAft>
-                <a:spcPts val="800"/>
-              </a:spcAft>
-              <a:buNone/>
-            </a:pPr>
-            <a:r>
-              <a:rPr lang="en-US" sz="4000" dirty="0">
-                <a:solidFill>
-                  <a:srgbClr val="111111"/>
-                </a:solidFill>
-                <a:latin typeface="Times New Roman" pitchFamily="34" charset="0"/>
-                <a:ea typeface="Times New Roman" pitchFamily="34" charset="-122"/>
-                <a:cs typeface="Times New Roman" pitchFamily="34" charset="-120"/>
-              </a:rPr>
-              <a:t>Trees along the banks hold the soil and slow down the water.</a:t>
-            </a:r>
-            <a:endParaRPr lang="en-US" sz="4000" dirty="0"/>
+              <a:t>Illustration: a flooded area</a:t>
+            </a:r>
+            <a:endParaRPr lang="en-US" sz="1600" dirty="0"/>
           </a:p>
         </p:txBody>
       </p:sp>
@@ -13660,7 +14168,7 @@
                 <a:ea typeface="Calibri" pitchFamily="34" charset="-122"/>
                 <a:cs typeface="Calibri" pitchFamily="34" charset="-120"/>
               </a:rPr>
-              <a:t>FORMATIVE EVALUATION</a:t>
+              <a:t>BOARD SUMMARY</a:t>
             </a:r>
             <a:endParaRPr lang="en-US" sz="1400" dirty="0"/>
           </a:p>
@@ -13683,7 +14191,7 @@
         <p:spPr>
           <a:xfrm>
             <a:off x="0" y="658368"/>
-            <a:ext cx="5120640" cy="5833872"/>
+            <a:ext cx="3840480" cy="5833872"/>
           </a:xfrm>
           <a:prstGeom prst="rect">
             <a:avLst/>
@@ -13698,8 +14206,8 @@
         </p:nvSpPr>
         <p:spPr>
           <a:xfrm>
-            <a:off x="5349240" y="1005840"/>
-            <a:ext cx="6522415" cy="731520"/>
+            <a:off x="4069080" y="1005840"/>
+            <a:ext cx="7802575" cy="731520"/>
           </a:xfrm>
           <a:prstGeom prst="rect">
             <a:avLst/>
@@ -13725,7 +14233,7 @@
                 <a:ea typeface="Times New Roman" pitchFamily="34" charset="-122"/>
                 <a:cs typeface="Times New Roman" pitchFamily="34" charset="-120"/>
               </a:rPr>
-              <a:t>Evaluation 1</a:t>
+              <a:t>2. Problems of Living in Floodplains</a:t>
             </a:r>
             <a:endParaRPr lang="en-US" sz="3600" dirty="0"/>
           </a:p>
@@ -13739,8 +14247,8 @@
         </p:nvSpPr>
         <p:spPr>
           <a:xfrm>
-            <a:off x="5349240" y="1783080"/>
-            <a:ext cx="6522415" cy="4663440"/>
+            <a:off x="4069080" y="1783080"/>
+            <a:ext cx="7802575" cy="4663440"/>
           </a:xfrm>
           <a:prstGeom prst="rect">
             <a:avLst/>
@@ -13759,7 +14267,7 @@
               <a:buNone/>
             </a:pPr>
             <a:r>
-              <a:rPr lang="en-US" sz="4000" dirty="0">
+              <a:rPr lang="en-US" sz="4000" b="1" dirty="0">
                 <a:solidFill>
                   <a:srgbClr val="111111"/>
                 </a:solidFill>
@@ -13767,7 +14275,98 @@
                 <a:ea typeface="Times New Roman" pitchFamily="34" charset="-122"/>
                 <a:cs typeface="Times New Roman" pitchFamily="34" charset="-120"/>
               </a:rPr>
-              <a:t>Give one advantage of living on a floodplain.</a:t>
+              <a:t>Loss of life: </a:t>
+            </a:r>
+            <a:pPr algn="l" indent="0" marL="0">
+              <a:spcAft>
+                <a:spcPts val="800"/>
+              </a:spcAft>
+              <a:buNone/>
+            </a:pPr>
+            <a:r>
+              <a:rPr lang="en-US" sz="4000" dirty="0">
+                <a:solidFill>
+                  <a:srgbClr val="111111"/>
+                </a:solidFill>
+                <a:latin typeface="Times New Roman" pitchFamily="34" charset="0"/>
+                <a:ea typeface="Times New Roman" pitchFamily="34" charset="-122"/>
+                <a:cs typeface="Times New Roman" pitchFamily="34" charset="-120"/>
+              </a:rPr>
+              <a:t>People and animals can drown during floods.</a:t>
+            </a:r>
+            <a:endParaRPr lang="en-US" sz="4000" dirty="0"/>
+          </a:p>
+          <a:p>
+            <a:pPr algn="l" indent="0" marL="0">
+              <a:spcAft>
+                <a:spcPts val="800"/>
+              </a:spcAft>
+              <a:buNone/>
+            </a:pPr>
+            <a:r>
+              <a:rPr lang="en-US" sz="4000" b="1" dirty="0">
+                <a:solidFill>
+                  <a:srgbClr val="111111"/>
+                </a:solidFill>
+                <a:latin typeface="Times New Roman" pitchFamily="34" charset="0"/>
+                <a:ea typeface="Times New Roman" pitchFamily="34" charset="-122"/>
+                <a:cs typeface="Times New Roman" pitchFamily="34" charset="-120"/>
+              </a:rPr>
+              <a:t>Diseases: </a:t>
+            </a:r>
+            <a:pPr algn="l" indent="0" marL="0">
+              <a:spcAft>
+                <a:spcPts val="800"/>
+              </a:spcAft>
+              <a:buNone/>
+            </a:pPr>
+            <a:r>
+              <a:rPr lang="en-US" sz="4000" dirty="0">
+                <a:solidFill>
+                  <a:srgbClr val="111111"/>
+                </a:solidFill>
+                <a:latin typeface="Times New Roman" pitchFamily="34" charset="0"/>
+                <a:ea typeface="Times New Roman" pitchFamily="34" charset="-122"/>
+                <a:cs typeface="Times New Roman" pitchFamily="34" charset="-120"/>
+              </a:rPr>
+              <a:t>Stagnant water spreads cholera, malaria and bilharzia.</a:t>
+            </a:r>
+            <a:endParaRPr lang="en-US" sz="4000" dirty="0"/>
+          </a:p>
+          <a:p>
+            <a:pPr algn="l" indent="0" marL="0">
+              <a:spcAft>
+                <a:spcPts val="800"/>
+              </a:spcAft>
+              <a:buNone/>
+            </a:pPr>
+            <a:r>
+              <a:rPr lang="en-US" sz="4000" b="1" dirty="0">
+                <a:solidFill>
+                  <a:srgbClr val="111111"/>
+                </a:solidFill>
+                <a:latin typeface="Times New Roman" pitchFamily="34" charset="0"/>
+                <a:ea typeface="Times New Roman" pitchFamily="34" charset="-122"/>
+                <a:cs typeface="Times New Roman" pitchFamily="34" charset="-120"/>
+              </a:rPr>
+              <a:t>Bank collapse and silting: </a:t>
+            </a:r>
+            <a:pPr algn="l" indent="0" marL="0">
+              <a:spcAft>
+                <a:spcPts val="800"/>
+              </a:spcAft>
+              <a:buNone/>
+            </a:pPr>
+            <a:r>
+              <a:rPr lang="en-US" sz="4000" dirty="0">
+                <a:solidFill>
+                  <a:srgbClr val="111111"/>
+                </a:solidFill>
+                <a:latin typeface="Times New Roman" pitchFamily="34" charset="0"/>
+                <a:ea typeface="Times New Roman" pitchFamily="34" charset="-122"/>
+                <a:cs typeface="Times New Roman" pitchFamily="34" charset="-120"/>
+              </a:rPr>
+              <a:t>River banks collapse, and silt fills drains and river beds.</a:t>
             </a:r>
             <a:endParaRPr lang="en-US" sz="4000" dirty="0"/>
           </a:p>
@@ -13879,7 +14478,7 @@
                 <a:ea typeface="Calibri" pitchFamily="34" charset="-122"/>
                 <a:cs typeface="Calibri" pitchFamily="34" charset="-120"/>
               </a:rPr>
-              <a:t>FORMATIVE EVALUATION</a:t>
+              <a:t>BOARD SUMMARY</a:t>
             </a:r>
             <a:endParaRPr lang="en-US" sz="1400" dirty="0"/>
           </a:p>
@@ -13944,7 +14543,7 @@
                 <a:ea typeface="Times New Roman" pitchFamily="34" charset="-122"/>
                 <a:cs typeface="Times New Roman" pitchFamily="34" charset="-120"/>
               </a:rPr>
-              <a:t>Expected Answer</a:t>
+              <a:t>2. Problems of Living in Floodplains (continued)</a:t>
             </a:r>
             <a:endParaRPr lang="en-US" sz="3600" dirty="0"/>
           </a:p>
@@ -13978,7 +14577,7 @@
               <a:buNone/>
             </a:pPr>
             <a:r>
-              <a:rPr lang="en-US" sz="4000" dirty="0">
+              <a:rPr lang="en-US" sz="4000" b="1" dirty="0">
                 <a:solidFill>
                   <a:srgbClr val="111111"/>
                 </a:solidFill>
@@ -13986,7 +14585,24 @@
                 <a:ea typeface="Times New Roman" pitchFamily="34" charset="-122"/>
                 <a:cs typeface="Times New Roman" pitchFamily="34" charset="-120"/>
               </a:rPr>
-              <a:t>The soil is fertile.</a:t>
+              <a:t>Displacement: </a:t>
+            </a:r>
+            <a:pPr algn="l" indent="0" marL="0">
+              <a:spcAft>
+                <a:spcPts val="800"/>
+              </a:spcAft>
+              <a:buNone/>
+            </a:pPr>
+            <a:r>
+              <a:rPr lang="en-US" sz="4000" dirty="0">
+                <a:solidFill>
+                  <a:srgbClr val="111111"/>
+                </a:solidFill>
+                <a:latin typeface="Times New Roman" pitchFamily="34" charset="0"/>
+                <a:ea typeface="Times New Roman" pitchFamily="34" charset="-122"/>
+                <a:cs typeface="Times New Roman" pitchFamily="34" charset="-120"/>
+              </a:rPr>
+              <a:t>Families lose their homes and must move.</a:t>
             </a:r>
             <a:endParaRPr lang="en-US" sz="4000" dirty="0"/>
           </a:p>
@@ -14098,15 +14714,135 @@
                 <a:ea typeface="Calibri" pitchFamily="34" charset="-122"/>
                 <a:cs typeface="Calibri" pitchFamily="34" charset="-120"/>
               </a:rPr>
-              <a:t>FORMATIVE EVALUATION</a:t>
+              <a:t>BOARD SUMMARY</a:t>
             </a:r>
             <a:endParaRPr lang="en-US" sz="1400" dirty="0"/>
+          </a:p>
+        </p:txBody>
+      </p:sp>
+      <p:sp>
+        <p:nvSpPr>
+          <p:cNvPr id="3" name="Text 1"/>
+          <p:cNvSpPr/>
+          <p:nvPr/>
+        </p:nvSpPr>
+        <p:spPr>
+          <a:xfrm>
+            <a:off x="365760" y="1005840"/>
+            <a:ext cx="11460175" cy="731520"/>
+          </a:xfrm>
+          <a:prstGeom prst="rect">
+            <a:avLst/>
+          </a:prstGeom>
+          <a:noFill/>
+          <a:ln/>
+        </p:spPr>
+        <p:txBody>
+          <a:bodyPr wrap="square" lIns="0" tIns="0" rIns="0" bIns="0" rtlCol="0" anchor="ctr">
+            <a:normAutofit/>
+          </a:bodyPr>
+          <a:lstStyle/>
+          <a:p>
+            <a:pPr algn="ctr" indent="0" marL="0">
+              <a:buNone/>
+            </a:pPr>
+            <a:r>
+              <a:rPr lang="en-US" sz="3600" b="1" dirty="0">
+                <a:solidFill>
+                  <a:srgbClr val="990011"/>
+                </a:solidFill>
+                <a:latin typeface="Times New Roman" pitchFamily="34" charset="0"/>
+                <a:ea typeface="Times New Roman" pitchFamily="34" charset="-122"/>
+                <a:cs typeface="Times New Roman" pitchFamily="34" charset="-120"/>
+              </a:rPr>
+              <a:t>3. Solutions to the Problems of Living in Floodplains</a:t>
+            </a:r>
+            <a:endParaRPr lang="en-US" sz="3600" dirty="0"/>
+          </a:p>
+        </p:txBody>
+      </p:sp>
+      <p:sp>
+        <p:nvSpPr>
+          <p:cNvPr id="4" name="Text 2"/>
+          <p:cNvSpPr/>
+          <p:nvPr/>
+        </p:nvSpPr>
+        <p:spPr>
+          <a:xfrm>
+            <a:off x="365760" y="1783080"/>
+            <a:ext cx="4846320" cy="4617720"/>
+          </a:xfrm>
+          <a:prstGeom prst="rect">
+            <a:avLst/>
+          </a:prstGeom>
+          <a:noFill/>
+          <a:ln/>
+        </p:spPr>
+        <p:txBody>
+          <a:bodyPr wrap="square" lIns="0" tIns="0" rIns="0" bIns="0" rtlCol="0" anchor="t"/>
+          <a:lstStyle/>
+          <a:p>
+            <a:pPr algn="l" indent="0" marL="0">
+              <a:spcAft>
+                <a:spcPts val="800"/>
+              </a:spcAft>
+              <a:buNone/>
+            </a:pPr>
+            <a:r>
+              <a:rPr lang="en-US" sz="3600" i="1" dirty="0">
+                <a:solidFill>
+                  <a:srgbClr val="111111"/>
+                </a:solidFill>
+                <a:latin typeface="Times New Roman" pitchFamily="34" charset="0"/>
+                <a:ea typeface="Times New Roman" pitchFamily="34" charset="-122"/>
+                <a:cs typeface="Times New Roman" pitchFamily="34" charset="-120"/>
+              </a:rPr>
+              <a:t>The following solutions reduce these problems:</a:t>
+            </a:r>
+            <a:endParaRPr lang="en-US" sz="3600" dirty="0"/>
+          </a:p>
+          <a:p>
+            <a:pPr algn="l" indent="0" marL="0">
+              <a:spcAft>
+                <a:spcPts val="800"/>
+              </a:spcAft>
+              <a:buNone/>
+            </a:pPr>
+            <a:r>
+              <a:rPr lang="en-US" sz="3600" b="1" dirty="0">
+                <a:solidFill>
+                  <a:srgbClr val="111111"/>
+                </a:solidFill>
+                <a:latin typeface="Times New Roman" pitchFamily="34" charset="0"/>
+                <a:ea typeface="Times New Roman" pitchFamily="34" charset="-122"/>
+                <a:cs typeface="Times New Roman" pitchFamily="34" charset="-120"/>
+              </a:rPr>
+              <a:t>Dykes and raised banks: </a:t>
+            </a:r>
+            <a:pPr algn="l" indent="0" marL="0">
+              <a:spcAft>
+                <a:spcPts val="800"/>
+              </a:spcAft>
+              <a:buNone/>
+            </a:pPr>
+            <a:r>
+              <a:rPr lang="en-US" sz="3600" dirty="0">
+                <a:solidFill>
+                  <a:srgbClr val="111111"/>
+                </a:solidFill>
+                <a:latin typeface="Times New Roman" pitchFamily="34" charset="0"/>
+                <a:ea typeface="Times New Roman" pitchFamily="34" charset="-122"/>
+                <a:cs typeface="Times New Roman" pitchFamily="34" charset="-120"/>
+              </a:rPr>
+              <a:t>They hold back the river during floods.</a:t>
+            </a:r>
+            <a:endParaRPr lang="en-US" sz="3600" dirty="0"/>
           </a:p>
         </p:txBody>
       </p:sp>
       <p:pic>
         <p:nvPicPr>
-          <p:cNvPr id="3" name="Image 0" descr="/home/claude/f4/img/minesec_sheet.png">    </p:cNvPr>
+          <p:cNvPr id="5" name="Image 0" descr="/home/claude/f4/img/v2/f4_dyke.jpg">    </p:cNvPr>
           <p:cNvPicPr>
             <a:picLocks noChangeAspect="1"/>
           </p:cNvPicPr>
@@ -14120,8 +14856,8 @@
         </p:blipFill>
         <p:spPr>
           <a:xfrm>
-            <a:off x="0" y="658368"/>
-            <a:ext cx="5120640" cy="5833872"/>
+            <a:off x="5349240" y="2069407"/>
+            <a:ext cx="6659575" cy="3697594"/>
           </a:xfrm>
           <a:prstGeom prst="rect">
             <a:avLst/>
@@ -14130,14 +14866,14 @@
       </p:pic>
       <p:sp>
         <p:nvSpPr>
-          <p:cNvPr id="4" name="Text 1"/>
+          <p:cNvPr id="6" name="Text 3"/>
           <p:cNvSpPr/>
           <p:nvPr/>
         </p:nvSpPr>
         <p:spPr>
           <a:xfrm>
-            <a:off x="5349240" y="1005840"/>
-            <a:ext cx="6522415" cy="731520"/>
+            <a:off x="5349240" y="6089904"/>
+            <a:ext cx="6659575" cy="347472"/>
           </a:xfrm>
           <a:prstGeom prst="rect">
             <a:avLst/>
@@ -14146,68 +14882,24 @@
           <a:ln/>
         </p:spPr>
         <p:txBody>
-          <a:bodyPr wrap="square" lIns="0" tIns="0" rIns="0" bIns="0" rtlCol="0" anchor="ctr">
-            <a:normAutofit/>
-          </a:bodyPr>
+          <a:bodyPr wrap="square" lIns="0" tIns="0" rIns="0" bIns="0" rtlCol="0" anchor="ctr"/>
           <a:lstStyle/>
           <a:p>
             <a:pPr algn="ctr" indent="0" marL="0">
               <a:buNone/>
             </a:pPr>
             <a:r>
-              <a:rPr lang="en-US" sz="3600" b="1" dirty="0">
-                <a:solidFill>
-                  <a:srgbClr val="990011"/>
+              <a:rPr lang="en-US" sz="1600" i="1" dirty="0">
+                <a:solidFill>
+                  <a:srgbClr val="555555"/>
                 </a:solidFill>
                 <a:latin typeface="Times New Roman" pitchFamily="34" charset="0"/>
                 <a:ea typeface="Times New Roman" pitchFamily="34" charset="-122"/>
                 <a:cs typeface="Times New Roman" pitchFamily="34" charset="-120"/>
               </a:rPr>
-              <a:t>Evaluation 2</a:t>
-            </a:r>
-            <a:endParaRPr lang="en-US" sz="3600" dirty="0"/>
-          </a:p>
-        </p:txBody>
-      </p:sp>
-      <p:sp>
-        <p:nvSpPr>
-          <p:cNvPr id="5" name="Text 2"/>
-          <p:cNvSpPr/>
-          <p:nvPr/>
-        </p:nvSpPr>
-        <p:spPr>
-          <a:xfrm>
-            <a:off x="5349240" y="1783080"/>
-            <a:ext cx="6522415" cy="4663440"/>
-          </a:xfrm>
-          <a:prstGeom prst="rect">
-            <a:avLst/>
-          </a:prstGeom>
-          <a:noFill/>
-          <a:ln/>
-        </p:spPr>
-        <p:txBody>
-          <a:bodyPr wrap="square" lIns="0" tIns="0" rIns="0" bIns="0" rtlCol="0" anchor="t"/>
-          <a:lstStyle/>
-          <a:p>
-            <a:pPr algn="l" indent="0" marL="0">
-              <a:spcAft>
-                <a:spcPts val="800"/>
-              </a:spcAft>
-              <a:buNone/>
-            </a:pPr>
-            <a:r>
-              <a:rPr lang="en-US" sz="4000" dirty="0">
-                <a:solidFill>
-                  <a:srgbClr val="111111"/>
-                </a:solidFill>
-                <a:latin typeface="Times New Roman" pitchFamily="34" charset="0"/>
-                <a:ea typeface="Times New Roman" pitchFamily="34" charset="-122"/>
-                <a:cs typeface="Times New Roman" pitchFamily="34" charset="-120"/>
-              </a:rPr>
-              <a:t>Give two solutions to floods.</a:t>
-            </a:r>
-            <a:endParaRPr lang="en-US" sz="4000" dirty="0"/>
+              <a:t>Illustration: a raised bank</a:t>
+            </a:r>
+            <a:endParaRPr lang="en-US" sz="1600" dirty="0"/>
           </a:p>
         </p:txBody>
       </p:sp>
@@ -14317,7 +15009,7 @@
                 <a:ea typeface="Calibri" pitchFamily="34" charset="-122"/>
                 <a:cs typeface="Calibri" pitchFamily="34" charset="-120"/>
               </a:rPr>
-              <a:t>FORMATIVE EVALUATION</a:t>
+              <a:t>BOARD SUMMARY</a:t>
             </a:r>
             <a:endParaRPr lang="en-US" sz="1400" dirty="0"/>
           </a:p>
@@ -14340,7 +15032,7 @@
         <p:spPr>
           <a:xfrm>
             <a:off x="0" y="658368"/>
-            <a:ext cx="5120640" cy="5833872"/>
+            <a:ext cx="2468880" cy="5833872"/>
           </a:xfrm>
           <a:prstGeom prst="rect">
             <a:avLst/>
@@ -14355,8 +15047,8 @@
         </p:nvSpPr>
         <p:spPr>
           <a:xfrm>
-            <a:off x="5349240" y="1005840"/>
-            <a:ext cx="6522415" cy="731520"/>
+            <a:off x="2697480" y="1005840"/>
+            <a:ext cx="9174175" cy="731520"/>
           </a:xfrm>
           <a:prstGeom prst="rect">
             <a:avLst/>
@@ -14382,7 +15074,7 @@
                 <a:ea typeface="Times New Roman" pitchFamily="34" charset="-122"/>
                 <a:cs typeface="Times New Roman" pitchFamily="34" charset="-120"/>
               </a:rPr>
-              <a:t>Expected Answer</a:t>
+              <a:t>3. Solutions to the Problems of Living in Floodplains</a:t>
             </a:r>
             <a:endParaRPr lang="en-US" sz="3600" dirty="0"/>
           </a:p>
@@ -14396,8 +15088,8 @@
         </p:nvSpPr>
         <p:spPr>
           <a:xfrm>
-            <a:off x="5349240" y="1783080"/>
-            <a:ext cx="6522415" cy="4663440"/>
+            <a:off x="2697480" y="1783080"/>
+            <a:ext cx="9174175" cy="4663440"/>
           </a:xfrm>
           <a:prstGeom prst="rect">
             <a:avLst/>
@@ -14416,7 +15108,7 @@
               <a:buNone/>
             </a:pPr>
             <a:r>
-              <a:rPr lang="en-US" sz="4000" dirty="0">
+              <a:rPr lang="en-US" sz="4000" b="1" dirty="0">
                 <a:solidFill>
                   <a:srgbClr val="111111"/>
                 </a:solidFill>
@@ -14424,7 +15116,98 @@
                 <a:ea typeface="Times New Roman" pitchFamily="34" charset="-122"/>
                 <a:cs typeface="Times New Roman" pitchFamily="34" charset="-120"/>
               </a:rPr>
-              <a:t>Build dykes and give flood warnings.</a:t>
+              <a:t>Dams: </a:t>
+            </a:r>
+            <a:pPr algn="l" indent="0" marL="0">
+              <a:spcAft>
+                <a:spcPts val="800"/>
+              </a:spcAft>
+              <a:buNone/>
+            </a:pPr>
+            <a:r>
+              <a:rPr lang="en-US" sz="4000" dirty="0">
+                <a:solidFill>
+                  <a:srgbClr val="111111"/>
+                </a:solidFill>
+                <a:latin typeface="Times New Roman" pitchFamily="34" charset="0"/>
+                <a:ea typeface="Times New Roman" pitchFamily="34" charset="-122"/>
+                <a:cs typeface="Times New Roman" pitchFamily="34" charset="-120"/>
+              </a:rPr>
+              <a:t>Dams store flood water and release it slowly, with warnings to people downstream.</a:t>
+            </a:r>
+            <a:endParaRPr lang="en-US" sz="4000" dirty="0"/>
+          </a:p>
+          <a:p>
+            <a:pPr algn="l" indent="0" marL="0">
+              <a:spcAft>
+                <a:spcPts val="800"/>
+              </a:spcAft>
+              <a:buNone/>
+            </a:pPr>
+            <a:r>
+              <a:rPr lang="en-US" sz="4000" b="1" dirty="0">
+                <a:solidFill>
+                  <a:srgbClr val="111111"/>
+                </a:solidFill>
+                <a:latin typeface="Times New Roman" pitchFamily="34" charset="0"/>
+                <a:ea typeface="Times New Roman" pitchFamily="34" charset="-122"/>
+                <a:cs typeface="Times New Roman" pitchFamily="34" charset="-120"/>
+              </a:rPr>
+              <a:t>Warnings: </a:t>
+            </a:r>
+            <a:pPr algn="l" indent="0" marL="0">
+              <a:spcAft>
+                <a:spcPts val="800"/>
+              </a:spcAft>
+              <a:buNone/>
+            </a:pPr>
+            <a:r>
+              <a:rPr lang="en-US" sz="4000" dirty="0">
+                <a:solidFill>
+                  <a:srgbClr val="111111"/>
+                </a:solidFill>
+                <a:latin typeface="Times New Roman" pitchFamily="34" charset="0"/>
+                <a:ea typeface="Times New Roman" pitchFamily="34" charset="-122"/>
+                <a:cs typeface="Times New Roman" pitchFamily="34" charset="-120"/>
+              </a:rPr>
+              <a:t>Radio and phone messages warn people before floods.</a:t>
+            </a:r>
+            <a:endParaRPr lang="en-US" sz="4000" dirty="0"/>
+          </a:p>
+          <a:p>
+            <a:pPr algn="l" indent="0" marL="0">
+              <a:spcAft>
+                <a:spcPts val="800"/>
+              </a:spcAft>
+              <a:buNone/>
+            </a:pPr>
+            <a:r>
+              <a:rPr lang="en-US" sz="4000" b="1" dirty="0">
+                <a:solidFill>
+                  <a:srgbClr val="111111"/>
+                </a:solidFill>
+                <a:latin typeface="Times New Roman" pitchFamily="34" charset="0"/>
+                <a:ea typeface="Times New Roman" pitchFamily="34" charset="-122"/>
+                <a:cs typeface="Times New Roman" pitchFamily="34" charset="-120"/>
+              </a:rPr>
+              <a:t>Safe building: </a:t>
+            </a:r>
+            <a:pPr algn="l" indent="0" marL="0">
+              <a:spcAft>
+                <a:spcPts val="800"/>
+              </a:spcAft>
+              <a:buNone/>
+            </a:pPr>
+            <a:r>
+              <a:rPr lang="en-US" sz="4000" dirty="0">
+                <a:solidFill>
+                  <a:srgbClr val="111111"/>
+                </a:solidFill>
+                <a:latin typeface="Times New Roman" pitchFamily="34" charset="0"/>
+                <a:ea typeface="Times New Roman" pitchFamily="34" charset="-122"/>
+                <a:cs typeface="Times New Roman" pitchFamily="34" charset="-120"/>
+              </a:rPr>
+              <a:t>Houses should be built on higher ground or on raised foundations.</a:t>
             </a:r>
             <a:endParaRPr lang="en-US" sz="4000" dirty="0"/>
           </a:p>
@@ -14775,7 +15558,7 @@
                 <a:ea typeface="Calibri" pitchFamily="34" charset="-122"/>
                 <a:cs typeface="Calibri" pitchFamily="34" charset="-120"/>
               </a:rPr>
-              <a:t>REMEDIATION</a:t>
+              <a:t>BOARD SUMMARY</a:t>
             </a:r>
             <a:endParaRPr lang="en-US" sz="1400" dirty="0"/>
           </a:p>
@@ -14798,7 +15581,7 @@
         <p:spPr>
           <a:xfrm>
             <a:off x="0" y="658368"/>
-            <a:ext cx="1463040" cy="5833872"/>
+            <a:ext cx="5120640" cy="5833872"/>
           </a:xfrm>
           <a:prstGeom prst="rect">
             <a:avLst/>
@@ -14813,8 +15596,8 @@
         </p:nvSpPr>
         <p:spPr>
           <a:xfrm>
-            <a:off x="1691640" y="1005840"/>
-            <a:ext cx="10180015" cy="731520"/>
+            <a:off x="5349240" y="1005840"/>
+            <a:ext cx="6522415" cy="731520"/>
           </a:xfrm>
           <a:prstGeom prst="rect">
             <a:avLst/>
@@ -14840,7 +15623,7 @@
                 <a:ea typeface="Times New Roman" pitchFamily="34" charset="-122"/>
                 <a:cs typeface="Times New Roman" pitchFamily="34" charset="-120"/>
               </a:rPr>
-              <a:t>Remediation</a:t>
+              <a:t>3. Solutions to the Problems of Living in Floodplains (continued)</a:t>
             </a:r>
             <a:endParaRPr lang="en-US" sz="3600" dirty="0"/>
           </a:p>
@@ -14854,8 +15637,8 @@
         </p:nvSpPr>
         <p:spPr>
           <a:xfrm>
-            <a:off x="1691640" y="1783080"/>
-            <a:ext cx="10180015" cy="4663440"/>
+            <a:off x="5349240" y="1783080"/>
+            <a:ext cx="6522415" cy="4663440"/>
           </a:xfrm>
           <a:prstGeom prst="rect">
             <a:avLst/>
@@ -14882,18 +15665,13 @@
                 <a:ea typeface="Times New Roman" pitchFamily="34" charset="-122"/>
                 <a:cs typeface="Times New Roman" pitchFamily="34" charset="-120"/>
               </a:rPr>
-              <a:t>Fill in the blanks:</a:t>
-            </a:r>
-            <a:endParaRPr lang="en-US" sz="4000" dirty="0"/>
-          </a:p>
-          <a:p>
-            <a:pPr algn="l" marL="342900" indent="-342900">
+              <a:t>Trees and clean channels: </a:t>
+            </a:r>
+            <a:pPr algn="l" indent="0" marL="0">
               <a:spcAft>
                 <a:spcPts val="800"/>
               </a:spcAft>
-              <a:buSzPct val="100000"/>
-              <a:buFont typeface="+mj-lt"/>
-              <a:buAutoNum type="arabicPeriod" startAt="1"/>
+              <a:buNone/>
             </a:pPr>
             <a:r>
               <a:rPr lang="en-US" sz="4000" dirty="0">
@@ -14904,51 +15682,7 @@
                 <a:ea typeface="Times New Roman" pitchFamily="34" charset="-122"/>
                 <a:cs typeface="Times New Roman" pitchFamily="34" charset="-120"/>
               </a:rPr>
-              <a:t>Fertile mud dropped by a river is ______.</a:t>
-            </a:r>
-            <a:endParaRPr lang="en-US" sz="4000" dirty="0"/>
-          </a:p>
-          <a:p>
-            <a:pPr algn="l" marL="342900" indent="-342900">
-              <a:spcAft>
-                <a:spcPts val="800"/>
-              </a:spcAft>
-              <a:buSzPct val="100000"/>
-              <a:buFont typeface="+mj-lt"/>
-              <a:buAutoNum type="arabicPeriod" startAt="1"/>
-            </a:pPr>
-            <a:r>
-              <a:rPr lang="en-US" sz="4000" dirty="0">
-                <a:solidFill>
-                  <a:srgbClr val="111111"/>
-                </a:solidFill>
-                <a:latin typeface="Times New Roman" pitchFamily="34" charset="0"/>
-                <a:ea typeface="Times New Roman" pitchFamily="34" charset="-122"/>
-                <a:cs typeface="Times New Roman" pitchFamily="34" charset="-120"/>
-              </a:rPr>
-              <a:t>A high bank built to stop floods is a ______.</a:t>
-            </a:r>
-            <a:endParaRPr lang="en-US" sz="4000" dirty="0"/>
-          </a:p>
-          <a:p>
-            <a:pPr algn="l" marL="342900" indent="-342900">
-              <a:spcAft>
-                <a:spcPts val="800"/>
-              </a:spcAft>
-              <a:buSzPct val="100000"/>
-              <a:buFont typeface="+mj-lt"/>
-              <a:buAutoNum type="arabicPeriod" startAt="1"/>
-            </a:pPr>
-            <a:r>
-              <a:rPr lang="en-US" sz="4000" dirty="0">
-                <a:solidFill>
-                  <a:srgbClr val="111111"/>
-                </a:solidFill>
-                <a:latin typeface="Times New Roman" pitchFamily="34" charset="0"/>
-                <a:ea typeface="Times New Roman" pitchFamily="34" charset="-122"/>
-                <a:cs typeface="Times New Roman" pitchFamily="34" charset="-120"/>
-              </a:rPr>
-              <a:t>In 2012, water from the ______ Dam flooded villages.</a:t>
+              <a:t>Trees along the banks hold the soil, and clearing silt from drains and river beds lets water flow.</a:t>
             </a:r>
             <a:endParaRPr lang="en-US" sz="4000" dirty="0"/>
           </a:p>
@@ -15060,7 +15794,7 @@
                 <a:ea typeface="Calibri" pitchFamily="34" charset="-122"/>
                 <a:cs typeface="Calibri" pitchFamily="34" charset="-120"/>
               </a:rPr>
-              <a:t>HOMEWORK</a:t>
+              <a:t>FORMATIVE EVALUATION</a:t>
             </a:r>
             <a:endParaRPr lang="en-US" sz="1400" dirty="0"/>
           </a:p>
@@ -15125,7 +15859,7 @@
                 <a:ea typeface="Times New Roman" pitchFamily="34" charset="-122"/>
                 <a:cs typeface="Times New Roman" pitchFamily="34" charset="-120"/>
               </a:rPr>
-              <a:t>Homework</a:t>
+              <a:t>Evaluation 1</a:t>
             </a:r>
             <a:endParaRPr lang="en-US" sz="3600" dirty="0"/>
           </a:p>
@@ -15167,7 +15901,7 @@
                 <a:ea typeface="Times New Roman" pitchFamily="34" charset="-122"/>
                 <a:cs typeface="Times New Roman" pitchFamily="34" charset="-120"/>
               </a:rPr>
-              <a:t>Watch the wind blowing on the water of the Benue or of a big basin of water. Write how the waves form and in which direction they move.</a:t>
+              <a:t>Give one advantage of living on a floodplain.</a:t>
             </a:r>
             <a:endParaRPr lang="en-US" sz="4000" dirty="0"/>
           </a:p>
@@ -15279,7 +16013,7 @@
                 <a:ea typeface="Calibri" pitchFamily="34" charset="-122"/>
                 <a:cs typeface="Calibri" pitchFamily="34" charset="-120"/>
               </a:rPr>
-              <a:t>NEXT LESSON</a:t>
+              <a:t>FORMATIVE EVALUATION</a:t>
             </a:r>
             <a:endParaRPr lang="en-US" sz="1400" dirty="0"/>
           </a:p>
@@ -15344,7 +16078,7 @@
                 <a:ea typeface="Times New Roman" pitchFamily="34" charset="-122"/>
                 <a:cs typeface="Times New Roman" pitchFamily="34" charset="-120"/>
               </a:rPr>
-              <a:t>Next Lesson</a:t>
+              <a:t>Expected Answer</a:t>
             </a:r>
             <a:endParaRPr lang="en-US" sz="3600" dirty="0"/>
           </a:p>
@@ -15368,17 +16102,17 @@
           <a:ln/>
         </p:spPr>
         <p:txBody>
-          <a:bodyPr wrap="square" lIns="0" tIns="0" rIns="0" bIns="0" rtlCol="0" anchor="ctr"/>
-          <a:lstStyle/>
-          <a:p>
-            <a:pPr algn="ctr" indent="0" marL="0">
+          <a:bodyPr wrap="square" lIns="0" tIns="0" rIns="0" bIns="0" rtlCol="0" anchor="t"/>
+          <a:lstStyle/>
+          <a:p>
+            <a:pPr algn="l" indent="0" marL="0">
               <a:spcAft>
                 <a:spcPts val="800"/>
               </a:spcAft>
               <a:buNone/>
             </a:pPr>
             <a:r>
-              <a:rPr lang="en-US" sz="4000" b="1" dirty="0">
+              <a:rPr lang="en-US" sz="4000" dirty="0">
                 <a:solidFill>
                   <a:srgbClr val="111111"/>
                 </a:solidFill>
@@ -15386,27 +16120,7 @@
                 <a:ea typeface="Times New Roman" pitchFamily="34" charset="-122"/>
                 <a:cs typeface="Times New Roman" pitchFamily="34" charset="-120"/>
               </a:rPr>
-              <a:t>Our next lesson will be on:</a:t>
-            </a:r>
-            <a:endParaRPr lang="en-US" sz="4000" dirty="0"/>
-          </a:p>
-          <a:p>
-            <a:pPr algn="ctr" indent="0" marL="0">
-              <a:spcAft>
-                <a:spcPts val="800"/>
-              </a:spcAft>
-              <a:buNone/>
-            </a:pPr>
-            <a:r>
-              <a:rPr lang="en-US" sz="4000" b="1" dirty="0">
-                <a:solidFill>
-                  <a:srgbClr val="990011"/>
-                </a:solidFill>
-                <a:latin typeface="Times New Roman" pitchFamily="34" charset="0"/>
-                <a:ea typeface="Times New Roman" pitchFamily="34" charset="-122"/>
-                <a:cs typeface="Times New Roman" pitchFamily="34" charset="-120"/>
-              </a:rPr>
-              <a:t>Lesson 23: Wave Action in Coastal Areas</a:t>
+              <a:t>The soil is fertile.</a:t>
             </a:r>
             <a:endParaRPr lang="en-US" sz="4000" dirty="0"/>
           </a:p>
@@ -15518,6 +16232,1187 @@
                 <a:ea typeface="Calibri" pitchFamily="34" charset="-122"/>
                 <a:cs typeface="Calibri" pitchFamily="34" charset="-120"/>
               </a:rPr>
+              <a:t>FORMATIVE EVALUATION</a:t>
+            </a:r>
+            <a:endParaRPr lang="en-US" sz="1400" dirty="0"/>
+          </a:p>
+        </p:txBody>
+      </p:sp>
+      <p:pic>
+        <p:nvPicPr>
+          <p:cNvPr id="3" name="Image 0" descr="/home/claude/f4/img/minesec_sheet.png">    </p:cNvPr>
+          <p:cNvPicPr>
+            <a:picLocks noChangeAspect="1"/>
+          </p:cNvPicPr>
+          <p:nvPr/>
+        </p:nvPicPr>
+        <p:blipFill>
+          <a:blip r:embed="rId1"/>
+          <a:stretch>
+            <a:fillRect/>
+          </a:stretch>
+        </p:blipFill>
+        <p:spPr>
+          <a:xfrm>
+            <a:off x="0" y="658368"/>
+            <a:ext cx="5120640" cy="5833872"/>
+          </a:xfrm>
+          <a:prstGeom prst="rect">
+            <a:avLst/>
+          </a:prstGeom>
+        </p:spPr>
+      </p:pic>
+      <p:sp>
+        <p:nvSpPr>
+          <p:cNvPr id="4" name="Text 1"/>
+          <p:cNvSpPr/>
+          <p:nvPr/>
+        </p:nvSpPr>
+        <p:spPr>
+          <a:xfrm>
+            <a:off x="5349240" y="1005840"/>
+            <a:ext cx="6522415" cy="731520"/>
+          </a:xfrm>
+          <a:prstGeom prst="rect">
+            <a:avLst/>
+          </a:prstGeom>
+          <a:noFill/>
+          <a:ln/>
+        </p:spPr>
+        <p:txBody>
+          <a:bodyPr wrap="square" lIns="0" tIns="0" rIns="0" bIns="0" rtlCol="0" anchor="ctr">
+            <a:normAutofit/>
+          </a:bodyPr>
+          <a:lstStyle/>
+          <a:p>
+            <a:pPr algn="ctr" indent="0" marL="0">
+              <a:buNone/>
+            </a:pPr>
+            <a:r>
+              <a:rPr lang="en-US" sz="3600" b="1" dirty="0">
+                <a:solidFill>
+                  <a:srgbClr val="990011"/>
+                </a:solidFill>
+                <a:latin typeface="Times New Roman" pitchFamily="34" charset="0"/>
+                <a:ea typeface="Times New Roman" pitchFamily="34" charset="-122"/>
+                <a:cs typeface="Times New Roman" pitchFamily="34" charset="-120"/>
+              </a:rPr>
+              <a:t>Evaluation 2</a:t>
+            </a:r>
+            <a:endParaRPr lang="en-US" sz="3600" dirty="0"/>
+          </a:p>
+        </p:txBody>
+      </p:sp>
+      <p:sp>
+        <p:nvSpPr>
+          <p:cNvPr id="5" name="Text 2"/>
+          <p:cNvSpPr/>
+          <p:nvPr/>
+        </p:nvSpPr>
+        <p:spPr>
+          <a:xfrm>
+            <a:off x="5349240" y="1783080"/>
+            <a:ext cx="6522415" cy="4663440"/>
+          </a:xfrm>
+          <a:prstGeom prst="rect">
+            <a:avLst/>
+          </a:prstGeom>
+          <a:noFill/>
+          <a:ln/>
+        </p:spPr>
+        <p:txBody>
+          <a:bodyPr wrap="square" lIns="0" tIns="0" rIns="0" bIns="0" rtlCol="0" anchor="t"/>
+          <a:lstStyle/>
+          <a:p>
+            <a:pPr algn="l" indent="0" marL="0">
+              <a:spcAft>
+                <a:spcPts val="800"/>
+              </a:spcAft>
+              <a:buNone/>
+            </a:pPr>
+            <a:r>
+              <a:rPr lang="en-US" sz="4000" dirty="0">
+                <a:solidFill>
+                  <a:srgbClr val="111111"/>
+                </a:solidFill>
+                <a:latin typeface="Times New Roman" pitchFamily="34" charset="0"/>
+                <a:ea typeface="Times New Roman" pitchFamily="34" charset="-122"/>
+                <a:cs typeface="Times New Roman" pitchFamily="34" charset="-120"/>
+              </a:rPr>
+              <a:t>Give two solutions to floods.</a:t>
+            </a:r>
+            <a:endParaRPr lang="en-US" sz="4000" dirty="0"/>
+          </a:p>
+        </p:txBody>
+      </p:sp>
+      <p:sp>
+        <p:nvSpPr>
+          <p:cNvPr id="25" name="Slide Number Placeholder 0"/>
+          <p:cNvSpPr>
+            <a:spLocks noGrp="1"/>
+          </p:cNvSpPr>
+          <p:nvPr>
+            <p:ph type="sldNum" sz="quarter" idx="4294967295"/>
+          </p:nvPr>
+        </p:nvSpPr>
+        <p:spPr>
+          <a:xfrm>
+            <a:off x="27432" y="91440"/>
+            <a:ext cx="585216" cy="475488"/>
+          </a:xfrm>
+          <a:prstGeom prst="rect">
+            <a:avLst/>
+          </a:prstGeom>
+          <a:extLst>
+            <a:ext uri="{C572A759-6A51-4108-AA02-DFA0A04FC94B}">
+              <ma14:wrappingTextBoxFlag xmlns:ma14="http://schemas.microsoft.com/office/mac/drawingml/2011/main" val="0"/>
+            </a:ext>
+          </a:extLst>
+        </p:spPr>
+        <p:txBody>
+          <a:bodyPr/>
+          <a:lstStyle>
+            <a:lvl1pPr>
+              <a:defRPr sz="2000">
+                <a:solidFill>
+                  <a:srgbClr val="FFFFFF"/>
+                </a:solidFill>
+                <a:latin typeface="Calibri"/>
+                <a:ea typeface="Calibri"/>
+                <a:cs typeface="Calibri"/>
+              </a:defRPr>
+            </a:lvl1pPr>
+          </a:lstStyle>
+          <a:p>
+            <a:pPr algn="ctr"/>
+            <a:fld id="{F7021451-1387-4CA6-816F-3879F97B5CBC}" type="slidenum">
+              <a:rPr b="1" lang="en-US"/>
+              <a:t>43</a:t>
+            </a:fld>
+            <a:endParaRPr lang="en-US"/>
+          </a:p>
+        </p:txBody>
+      </p:sp>
+    </p:spTree>
+  </p:cSld>
+  <p:clrMapOvr>
+    <a:masterClrMapping/>
+  </p:clrMapOvr>
+</p:sld>
+</file>
+
+<file path=ppt/slides/slide44.xml><?xml version="1.0" encoding="utf-8"?>
+<p:sld xmlns:a="http://schemas.openxmlformats.org/drawingml/2006/main" xmlns:r="http://schemas.openxmlformats.org/officeDocument/2006/relationships" xmlns:p="http://schemas.openxmlformats.org/presentationml/2006/main">
+  <p:cSld name="Slide 44">
+    <p:spTree>
+      <p:nvGrpSpPr>
+        <p:cNvPr id="1" name=""/>
+        <p:cNvGrpSpPr/>
+        <p:nvPr/>
+      </p:nvGrpSpPr>
+      <p:grpSpPr>
+        <a:xfrm>
+          <a:off x="0" y="0"/>
+          <a:ext cx="0" cy="0"/>
+          <a:chOff x="0" y="0"/>
+          <a:chExt cx="0" cy="0"/>
+        </a:xfrm>
+      </p:grpSpPr>
+      <p:sp>
+        <p:nvSpPr>
+          <p:cNvPr id="2" name="Text 0"/>
+          <p:cNvSpPr/>
+          <p:nvPr/>
+        </p:nvSpPr>
+        <p:spPr>
+          <a:xfrm>
+            <a:off x="457200" y="713232"/>
+            <a:ext cx="11368735" cy="274320"/>
+          </a:xfrm>
+          <a:prstGeom prst="rect">
+            <a:avLst/>
+          </a:prstGeom>
+          <a:noFill/>
+          <a:ln/>
+        </p:spPr>
+        <p:txBody>
+          <a:bodyPr wrap="square" lIns="0" tIns="0" rIns="0" bIns="0" rtlCol="0" anchor="ctr"/>
+          <a:lstStyle/>
+          <a:p>
+            <a:pPr algn="r" indent="0" marL="0">
+              <a:buNone/>
+            </a:pPr>
+            <a:r>
+              <a:rPr lang="en-US" sz="1400" b="1" dirty="0">
+                <a:solidFill>
+                  <a:srgbClr val="1C3F6E"/>
+                </a:solidFill>
+                <a:latin typeface="Calibri" pitchFamily="34" charset="0"/>
+                <a:ea typeface="Calibri" pitchFamily="34" charset="-122"/>
+                <a:cs typeface="Calibri" pitchFamily="34" charset="-120"/>
+              </a:rPr>
+              <a:t>FORMATIVE EVALUATION</a:t>
+            </a:r>
+            <a:endParaRPr lang="en-US" sz="1400" dirty="0"/>
+          </a:p>
+        </p:txBody>
+      </p:sp>
+      <p:pic>
+        <p:nvPicPr>
+          <p:cNvPr id="3" name="Image 0" descr="/home/claude/f4/img/minesec_sheet.png">    </p:cNvPr>
+          <p:cNvPicPr>
+            <a:picLocks noChangeAspect="1"/>
+          </p:cNvPicPr>
+          <p:nvPr/>
+        </p:nvPicPr>
+        <p:blipFill>
+          <a:blip r:embed="rId1"/>
+          <a:stretch>
+            <a:fillRect/>
+          </a:stretch>
+        </p:blipFill>
+        <p:spPr>
+          <a:xfrm>
+            <a:off x="0" y="658368"/>
+            <a:ext cx="5120640" cy="5833872"/>
+          </a:xfrm>
+          <a:prstGeom prst="rect">
+            <a:avLst/>
+          </a:prstGeom>
+        </p:spPr>
+      </p:pic>
+      <p:sp>
+        <p:nvSpPr>
+          <p:cNvPr id="4" name="Text 1"/>
+          <p:cNvSpPr/>
+          <p:nvPr/>
+        </p:nvSpPr>
+        <p:spPr>
+          <a:xfrm>
+            <a:off x="5349240" y="1005840"/>
+            <a:ext cx="6522415" cy="731520"/>
+          </a:xfrm>
+          <a:prstGeom prst="rect">
+            <a:avLst/>
+          </a:prstGeom>
+          <a:noFill/>
+          <a:ln/>
+        </p:spPr>
+        <p:txBody>
+          <a:bodyPr wrap="square" lIns="0" tIns="0" rIns="0" bIns="0" rtlCol="0" anchor="ctr">
+            <a:normAutofit/>
+          </a:bodyPr>
+          <a:lstStyle/>
+          <a:p>
+            <a:pPr algn="ctr" indent="0" marL="0">
+              <a:buNone/>
+            </a:pPr>
+            <a:r>
+              <a:rPr lang="en-US" sz="3600" b="1" dirty="0">
+                <a:solidFill>
+                  <a:srgbClr val="990011"/>
+                </a:solidFill>
+                <a:latin typeface="Times New Roman" pitchFamily="34" charset="0"/>
+                <a:ea typeface="Times New Roman" pitchFamily="34" charset="-122"/>
+                <a:cs typeface="Times New Roman" pitchFamily="34" charset="-120"/>
+              </a:rPr>
+              <a:t>Expected Answer</a:t>
+            </a:r>
+            <a:endParaRPr lang="en-US" sz="3600" dirty="0"/>
+          </a:p>
+        </p:txBody>
+      </p:sp>
+      <p:sp>
+        <p:nvSpPr>
+          <p:cNvPr id="5" name="Text 2"/>
+          <p:cNvSpPr/>
+          <p:nvPr/>
+        </p:nvSpPr>
+        <p:spPr>
+          <a:xfrm>
+            <a:off x="5349240" y="1783080"/>
+            <a:ext cx="6522415" cy="4663440"/>
+          </a:xfrm>
+          <a:prstGeom prst="rect">
+            <a:avLst/>
+          </a:prstGeom>
+          <a:noFill/>
+          <a:ln/>
+        </p:spPr>
+        <p:txBody>
+          <a:bodyPr wrap="square" lIns="0" tIns="0" rIns="0" bIns="0" rtlCol="0" anchor="t"/>
+          <a:lstStyle/>
+          <a:p>
+            <a:pPr algn="l" indent="0" marL="0">
+              <a:spcAft>
+                <a:spcPts val="800"/>
+              </a:spcAft>
+              <a:buNone/>
+            </a:pPr>
+            <a:r>
+              <a:rPr lang="en-US" sz="4000" dirty="0">
+                <a:solidFill>
+                  <a:srgbClr val="111111"/>
+                </a:solidFill>
+                <a:latin typeface="Times New Roman" pitchFamily="34" charset="0"/>
+                <a:ea typeface="Times New Roman" pitchFamily="34" charset="-122"/>
+                <a:cs typeface="Times New Roman" pitchFamily="34" charset="-120"/>
+              </a:rPr>
+              <a:t>Build dykes and give flood warnings.</a:t>
+            </a:r>
+            <a:endParaRPr lang="en-US" sz="4000" dirty="0"/>
+          </a:p>
+        </p:txBody>
+      </p:sp>
+      <p:sp>
+        <p:nvSpPr>
+          <p:cNvPr id="25" name="Slide Number Placeholder 0"/>
+          <p:cNvSpPr>
+            <a:spLocks noGrp="1"/>
+          </p:cNvSpPr>
+          <p:nvPr>
+            <p:ph type="sldNum" sz="quarter" idx="4294967295"/>
+          </p:nvPr>
+        </p:nvSpPr>
+        <p:spPr>
+          <a:xfrm>
+            <a:off x="27432" y="91440"/>
+            <a:ext cx="585216" cy="475488"/>
+          </a:xfrm>
+          <a:prstGeom prst="rect">
+            <a:avLst/>
+          </a:prstGeom>
+          <a:extLst>
+            <a:ext uri="{C572A759-6A51-4108-AA02-DFA0A04FC94B}">
+              <ma14:wrappingTextBoxFlag xmlns:ma14="http://schemas.microsoft.com/office/mac/drawingml/2011/main" val="0"/>
+            </a:ext>
+          </a:extLst>
+        </p:spPr>
+        <p:txBody>
+          <a:bodyPr/>
+          <a:lstStyle>
+            <a:lvl1pPr>
+              <a:defRPr sz="2000">
+                <a:solidFill>
+                  <a:srgbClr val="FFFFFF"/>
+                </a:solidFill>
+                <a:latin typeface="Calibri"/>
+                <a:ea typeface="Calibri"/>
+                <a:cs typeface="Calibri"/>
+              </a:defRPr>
+            </a:lvl1pPr>
+          </a:lstStyle>
+          <a:p>
+            <a:pPr algn="ctr"/>
+            <a:fld id="{F7021451-1387-4CA6-816F-3879F97B5CBC}" type="slidenum">
+              <a:rPr b="1" lang="en-US"/>
+              <a:t>44</a:t>
+            </a:fld>
+            <a:endParaRPr lang="en-US"/>
+          </a:p>
+        </p:txBody>
+      </p:sp>
+    </p:spTree>
+  </p:cSld>
+  <p:clrMapOvr>
+    <a:masterClrMapping/>
+  </p:clrMapOvr>
+</p:sld>
+</file>
+
+<file path=ppt/slides/slide45.xml><?xml version="1.0" encoding="utf-8"?>
+<p:sld xmlns:a="http://schemas.openxmlformats.org/drawingml/2006/main" xmlns:r="http://schemas.openxmlformats.org/officeDocument/2006/relationships" xmlns:p="http://schemas.openxmlformats.org/presentationml/2006/main">
+  <p:cSld name="Slide 45">
+    <p:spTree>
+      <p:nvGrpSpPr>
+        <p:cNvPr id="1" name=""/>
+        <p:cNvGrpSpPr/>
+        <p:nvPr/>
+      </p:nvGrpSpPr>
+      <p:grpSpPr>
+        <a:xfrm>
+          <a:off x="0" y="0"/>
+          <a:ext cx="0" cy="0"/>
+          <a:chOff x="0" y="0"/>
+          <a:chExt cx="0" cy="0"/>
+        </a:xfrm>
+      </p:grpSpPr>
+      <p:sp>
+        <p:nvSpPr>
+          <p:cNvPr id="2" name="Text 0"/>
+          <p:cNvSpPr/>
+          <p:nvPr/>
+        </p:nvSpPr>
+        <p:spPr>
+          <a:xfrm>
+            <a:off x="457200" y="713232"/>
+            <a:ext cx="11368735" cy="274320"/>
+          </a:xfrm>
+          <a:prstGeom prst="rect">
+            <a:avLst/>
+          </a:prstGeom>
+          <a:noFill/>
+          <a:ln/>
+        </p:spPr>
+        <p:txBody>
+          <a:bodyPr wrap="square" lIns="0" tIns="0" rIns="0" bIns="0" rtlCol="0" anchor="ctr"/>
+          <a:lstStyle/>
+          <a:p>
+            <a:pPr algn="r" indent="0" marL="0">
+              <a:buNone/>
+            </a:pPr>
+            <a:r>
+              <a:rPr lang="en-US" sz="1400" b="1" dirty="0">
+                <a:solidFill>
+                  <a:srgbClr val="1C3F6E"/>
+                </a:solidFill>
+                <a:latin typeface="Calibri" pitchFamily="34" charset="0"/>
+                <a:ea typeface="Calibri" pitchFamily="34" charset="-122"/>
+                <a:cs typeface="Calibri" pitchFamily="34" charset="-120"/>
+              </a:rPr>
+              <a:t>REMEDIATION</a:t>
+            </a:r>
+            <a:endParaRPr lang="en-US" sz="1400" dirty="0"/>
+          </a:p>
+        </p:txBody>
+      </p:sp>
+      <p:pic>
+        <p:nvPicPr>
+          <p:cNvPr id="3" name="Image 0" descr="/home/claude/f4/img/minesec_sheet.png">    </p:cNvPr>
+          <p:cNvPicPr>
+            <a:picLocks noChangeAspect="1"/>
+          </p:cNvPicPr>
+          <p:nvPr/>
+        </p:nvPicPr>
+        <p:blipFill>
+          <a:blip r:embed="rId1"/>
+          <a:stretch>
+            <a:fillRect/>
+          </a:stretch>
+        </p:blipFill>
+        <p:spPr>
+          <a:xfrm>
+            <a:off x="0" y="658368"/>
+            <a:ext cx="1463040" cy="5833872"/>
+          </a:xfrm>
+          <a:prstGeom prst="rect">
+            <a:avLst/>
+          </a:prstGeom>
+        </p:spPr>
+      </p:pic>
+      <p:sp>
+        <p:nvSpPr>
+          <p:cNvPr id="4" name="Text 1"/>
+          <p:cNvSpPr/>
+          <p:nvPr/>
+        </p:nvSpPr>
+        <p:spPr>
+          <a:xfrm>
+            <a:off x="1691640" y="1005840"/>
+            <a:ext cx="10180015" cy="731520"/>
+          </a:xfrm>
+          <a:prstGeom prst="rect">
+            <a:avLst/>
+          </a:prstGeom>
+          <a:noFill/>
+          <a:ln/>
+        </p:spPr>
+        <p:txBody>
+          <a:bodyPr wrap="square" lIns="0" tIns="0" rIns="0" bIns="0" rtlCol="0" anchor="ctr">
+            <a:normAutofit/>
+          </a:bodyPr>
+          <a:lstStyle/>
+          <a:p>
+            <a:pPr algn="ctr" indent="0" marL="0">
+              <a:buNone/>
+            </a:pPr>
+            <a:r>
+              <a:rPr lang="en-US" sz="3600" b="1" dirty="0">
+                <a:solidFill>
+                  <a:srgbClr val="990011"/>
+                </a:solidFill>
+                <a:latin typeface="Times New Roman" pitchFamily="34" charset="0"/>
+                <a:ea typeface="Times New Roman" pitchFamily="34" charset="-122"/>
+                <a:cs typeface="Times New Roman" pitchFamily="34" charset="-120"/>
+              </a:rPr>
+              <a:t>Remediation</a:t>
+            </a:r>
+            <a:endParaRPr lang="en-US" sz="3600" dirty="0"/>
+          </a:p>
+        </p:txBody>
+      </p:sp>
+      <p:sp>
+        <p:nvSpPr>
+          <p:cNvPr id="5" name="Text 2"/>
+          <p:cNvSpPr/>
+          <p:nvPr/>
+        </p:nvSpPr>
+        <p:spPr>
+          <a:xfrm>
+            <a:off x="1691640" y="1783080"/>
+            <a:ext cx="10180015" cy="4663440"/>
+          </a:xfrm>
+          <a:prstGeom prst="rect">
+            <a:avLst/>
+          </a:prstGeom>
+          <a:noFill/>
+          <a:ln/>
+        </p:spPr>
+        <p:txBody>
+          <a:bodyPr wrap="square" lIns="0" tIns="0" rIns="0" bIns="0" rtlCol="0" anchor="t"/>
+          <a:lstStyle/>
+          <a:p>
+            <a:pPr algn="l" indent="0" marL="0">
+              <a:spcAft>
+                <a:spcPts val="800"/>
+              </a:spcAft>
+              <a:buNone/>
+            </a:pPr>
+            <a:r>
+              <a:rPr lang="en-US" sz="4000" b="1" dirty="0">
+                <a:solidFill>
+                  <a:srgbClr val="111111"/>
+                </a:solidFill>
+                <a:latin typeface="Times New Roman" pitchFamily="34" charset="0"/>
+                <a:ea typeface="Times New Roman" pitchFamily="34" charset="-122"/>
+                <a:cs typeface="Times New Roman" pitchFamily="34" charset="-120"/>
+              </a:rPr>
+              <a:t>Fill in the blanks:</a:t>
+            </a:r>
+            <a:endParaRPr lang="en-US" sz="4000" dirty="0"/>
+          </a:p>
+          <a:p>
+            <a:pPr algn="l" marL="342900" indent="-342900">
+              <a:spcAft>
+                <a:spcPts val="800"/>
+              </a:spcAft>
+              <a:buSzPct val="100000"/>
+              <a:buFont typeface="+mj-lt"/>
+              <a:buAutoNum type="arabicPeriod" startAt="1"/>
+            </a:pPr>
+            <a:r>
+              <a:rPr lang="en-US" sz="4000" dirty="0">
+                <a:solidFill>
+                  <a:srgbClr val="111111"/>
+                </a:solidFill>
+                <a:latin typeface="Times New Roman" pitchFamily="34" charset="0"/>
+                <a:ea typeface="Times New Roman" pitchFamily="34" charset="-122"/>
+                <a:cs typeface="Times New Roman" pitchFamily="34" charset="-120"/>
+              </a:rPr>
+              <a:t>Fertile mud dropped by a river is ______.</a:t>
+            </a:r>
+            <a:endParaRPr lang="en-US" sz="4000" dirty="0"/>
+          </a:p>
+          <a:p>
+            <a:pPr algn="l" marL="342900" indent="-342900">
+              <a:spcAft>
+                <a:spcPts val="800"/>
+              </a:spcAft>
+              <a:buSzPct val="100000"/>
+              <a:buFont typeface="+mj-lt"/>
+              <a:buAutoNum type="arabicPeriod" startAt="1"/>
+            </a:pPr>
+            <a:r>
+              <a:rPr lang="en-US" sz="4000" dirty="0">
+                <a:solidFill>
+                  <a:srgbClr val="111111"/>
+                </a:solidFill>
+                <a:latin typeface="Times New Roman" pitchFamily="34" charset="0"/>
+                <a:ea typeface="Times New Roman" pitchFamily="34" charset="-122"/>
+                <a:cs typeface="Times New Roman" pitchFamily="34" charset="-120"/>
+              </a:rPr>
+              <a:t>A high bank built to stop floods is a ______.</a:t>
+            </a:r>
+            <a:endParaRPr lang="en-US" sz="4000" dirty="0"/>
+          </a:p>
+          <a:p>
+            <a:pPr algn="l" marL="342900" indent="-342900">
+              <a:spcAft>
+                <a:spcPts val="800"/>
+              </a:spcAft>
+              <a:buSzPct val="100000"/>
+              <a:buFont typeface="+mj-lt"/>
+              <a:buAutoNum type="arabicPeriod" startAt="1"/>
+            </a:pPr>
+            <a:r>
+              <a:rPr lang="en-US" sz="4000" dirty="0">
+                <a:solidFill>
+                  <a:srgbClr val="111111"/>
+                </a:solidFill>
+                <a:latin typeface="Times New Roman" pitchFamily="34" charset="0"/>
+                <a:ea typeface="Times New Roman" pitchFamily="34" charset="-122"/>
+                <a:cs typeface="Times New Roman" pitchFamily="34" charset="-120"/>
+              </a:rPr>
+              <a:t>In 2012, water from the ______ Dam flooded villages.</a:t>
+            </a:r>
+            <a:endParaRPr lang="en-US" sz="4000" dirty="0"/>
+          </a:p>
+        </p:txBody>
+      </p:sp>
+      <p:sp>
+        <p:nvSpPr>
+          <p:cNvPr id="25" name="Slide Number Placeholder 0"/>
+          <p:cNvSpPr>
+            <a:spLocks noGrp="1"/>
+          </p:cNvSpPr>
+          <p:nvPr>
+            <p:ph type="sldNum" sz="quarter" idx="4294967295"/>
+          </p:nvPr>
+        </p:nvSpPr>
+        <p:spPr>
+          <a:xfrm>
+            <a:off x="27432" y="91440"/>
+            <a:ext cx="585216" cy="475488"/>
+          </a:xfrm>
+          <a:prstGeom prst="rect">
+            <a:avLst/>
+          </a:prstGeom>
+          <a:extLst>
+            <a:ext uri="{C572A759-6A51-4108-AA02-DFA0A04FC94B}">
+              <ma14:wrappingTextBoxFlag xmlns:ma14="http://schemas.microsoft.com/office/mac/drawingml/2011/main" val="0"/>
+            </a:ext>
+          </a:extLst>
+        </p:spPr>
+        <p:txBody>
+          <a:bodyPr/>
+          <a:lstStyle>
+            <a:lvl1pPr>
+              <a:defRPr sz="2000">
+                <a:solidFill>
+                  <a:srgbClr val="FFFFFF"/>
+                </a:solidFill>
+                <a:latin typeface="Calibri"/>
+                <a:ea typeface="Calibri"/>
+                <a:cs typeface="Calibri"/>
+              </a:defRPr>
+            </a:lvl1pPr>
+          </a:lstStyle>
+          <a:p>
+            <a:pPr algn="ctr"/>
+            <a:fld id="{F7021451-1387-4CA6-816F-3879F97B5CBC}" type="slidenum">
+              <a:rPr b="1" lang="en-US"/>
+              <a:t>45</a:t>
+            </a:fld>
+            <a:endParaRPr lang="en-US"/>
+          </a:p>
+        </p:txBody>
+      </p:sp>
+    </p:spTree>
+  </p:cSld>
+  <p:clrMapOvr>
+    <a:masterClrMapping/>
+  </p:clrMapOvr>
+</p:sld>
+</file>
+
+<file path=ppt/slides/slide46.xml><?xml version="1.0" encoding="utf-8"?>
+<p:sld xmlns:a="http://schemas.openxmlformats.org/drawingml/2006/main" xmlns:r="http://schemas.openxmlformats.org/officeDocument/2006/relationships" xmlns:p="http://schemas.openxmlformats.org/presentationml/2006/main">
+  <p:cSld name="Slide 46">
+    <p:spTree>
+      <p:nvGrpSpPr>
+        <p:cNvPr id="1" name=""/>
+        <p:cNvGrpSpPr/>
+        <p:nvPr/>
+      </p:nvGrpSpPr>
+      <p:grpSpPr>
+        <a:xfrm>
+          <a:off x="0" y="0"/>
+          <a:ext cx="0" cy="0"/>
+          <a:chOff x="0" y="0"/>
+          <a:chExt cx="0" cy="0"/>
+        </a:xfrm>
+      </p:grpSpPr>
+      <p:sp>
+        <p:nvSpPr>
+          <p:cNvPr id="2" name="Text 0"/>
+          <p:cNvSpPr/>
+          <p:nvPr/>
+        </p:nvSpPr>
+        <p:spPr>
+          <a:xfrm>
+            <a:off x="457200" y="713232"/>
+            <a:ext cx="11368735" cy="274320"/>
+          </a:xfrm>
+          <a:prstGeom prst="rect">
+            <a:avLst/>
+          </a:prstGeom>
+          <a:noFill/>
+          <a:ln/>
+        </p:spPr>
+        <p:txBody>
+          <a:bodyPr wrap="square" lIns="0" tIns="0" rIns="0" bIns="0" rtlCol="0" anchor="ctr"/>
+          <a:lstStyle/>
+          <a:p>
+            <a:pPr algn="r" indent="0" marL="0">
+              <a:buNone/>
+            </a:pPr>
+            <a:r>
+              <a:rPr lang="en-US" sz="1400" b="1" dirty="0">
+                <a:solidFill>
+                  <a:srgbClr val="1C3F6E"/>
+                </a:solidFill>
+                <a:latin typeface="Calibri" pitchFamily="34" charset="0"/>
+                <a:ea typeface="Calibri" pitchFamily="34" charset="-122"/>
+                <a:cs typeface="Calibri" pitchFamily="34" charset="-120"/>
+              </a:rPr>
+              <a:t>HOMEWORK</a:t>
+            </a:r>
+            <a:endParaRPr lang="en-US" sz="1400" dirty="0"/>
+          </a:p>
+        </p:txBody>
+      </p:sp>
+      <p:pic>
+        <p:nvPicPr>
+          <p:cNvPr id="3" name="Image 0" descr="/home/claude/f4/img/minesec_sheet.png">    </p:cNvPr>
+          <p:cNvPicPr>
+            <a:picLocks noChangeAspect="1"/>
+          </p:cNvPicPr>
+          <p:nvPr/>
+        </p:nvPicPr>
+        <p:blipFill>
+          <a:blip r:embed="rId1"/>
+          <a:stretch>
+            <a:fillRect/>
+          </a:stretch>
+        </p:blipFill>
+        <p:spPr>
+          <a:xfrm>
+            <a:off x="0" y="658368"/>
+            <a:ext cx="5120640" cy="5833872"/>
+          </a:xfrm>
+          <a:prstGeom prst="rect">
+            <a:avLst/>
+          </a:prstGeom>
+        </p:spPr>
+      </p:pic>
+      <p:sp>
+        <p:nvSpPr>
+          <p:cNvPr id="4" name="Text 1"/>
+          <p:cNvSpPr/>
+          <p:nvPr/>
+        </p:nvSpPr>
+        <p:spPr>
+          <a:xfrm>
+            <a:off x="5349240" y="1005840"/>
+            <a:ext cx="6522415" cy="731520"/>
+          </a:xfrm>
+          <a:prstGeom prst="rect">
+            <a:avLst/>
+          </a:prstGeom>
+          <a:noFill/>
+          <a:ln/>
+        </p:spPr>
+        <p:txBody>
+          <a:bodyPr wrap="square" lIns="0" tIns="0" rIns="0" bIns="0" rtlCol="0" anchor="ctr">
+            <a:normAutofit/>
+          </a:bodyPr>
+          <a:lstStyle/>
+          <a:p>
+            <a:pPr algn="ctr" indent="0" marL="0">
+              <a:buNone/>
+            </a:pPr>
+            <a:r>
+              <a:rPr lang="en-US" sz="3600" b="1" dirty="0">
+                <a:solidFill>
+                  <a:srgbClr val="990011"/>
+                </a:solidFill>
+                <a:latin typeface="Times New Roman" pitchFamily="34" charset="0"/>
+                <a:ea typeface="Times New Roman" pitchFamily="34" charset="-122"/>
+                <a:cs typeface="Times New Roman" pitchFamily="34" charset="-120"/>
+              </a:rPr>
+              <a:t>Homework</a:t>
+            </a:r>
+            <a:endParaRPr lang="en-US" sz="3600" dirty="0"/>
+          </a:p>
+        </p:txBody>
+      </p:sp>
+      <p:sp>
+        <p:nvSpPr>
+          <p:cNvPr id="5" name="Text 2"/>
+          <p:cNvSpPr/>
+          <p:nvPr/>
+        </p:nvSpPr>
+        <p:spPr>
+          <a:xfrm>
+            <a:off x="5349240" y="1783080"/>
+            <a:ext cx="6522415" cy="4663440"/>
+          </a:xfrm>
+          <a:prstGeom prst="rect">
+            <a:avLst/>
+          </a:prstGeom>
+          <a:noFill/>
+          <a:ln/>
+        </p:spPr>
+        <p:txBody>
+          <a:bodyPr wrap="square" lIns="0" tIns="0" rIns="0" bIns="0" rtlCol="0" anchor="t"/>
+          <a:lstStyle/>
+          <a:p>
+            <a:pPr algn="l" indent="0" marL="0">
+              <a:spcAft>
+                <a:spcPts val="800"/>
+              </a:spcAft>
+              <a:buNone/>
+            </a:pPr>
+            <a:r>
+              <a:rPr lang="en-US" sz="4000" dirty="0">
+                <a:solidFill>
+                  <a:srgbClr val="111111"/>
+                </a:solidFill>
+                <a:latin typeface="Times New Roman" pitchFamily="34" charset="0"/>
+                <a:ea typeface="Times New Roman" pitchFamily="34" charset="-122"/>
+                <a:cs typeface="Times New Roman" pitchFamily="34" charset="-120"/>
+              </a:rPr>
+              <a:t>Watch the wind blowing on the water of the Benue or of a big basin of water. Write how the waves form and in which direction they move.</a:t>
+            </a:r>
+            <a:endParaRPr lang="en-US" sz="4000" dirty="0"/>
+          </a:p>
+        </p:txBody>
+      </p:sp>
+      <p:sp>
+        <p:nvSpPr>
+          <p:cNvPr id="25" name="Slide Number Placeholder 0"/>
+          <p:cNvSpPr>
+            <a:spLocks noGrp="1"/>
+          </p:cNvSpPr>
+          <p:nvPr>
+            <p:ph type="sldNum" sz="quarter" idx="4294967295"/>
+          </p:nvPr>
+        </p:nvSpPr>
+        <p:spPr>
+          <a:xfrm>
+            <a:off x="27432" y="91440"/>
+            <a:ext cx="585216" cy="475488"/>
+          </a:xfrm>
+          <a:prstGeom prst="rect">
+            <a:avLst/>
+          </a:prstGeom>
+          <a:extLst>
+            <a:ext uri="{C572A759-6A51-4108-AA02-DFA0A04FC94B}">
+              <ma14:wrappingTextBoxFlag xmlns:ma14="http://schemas.microsoft.com/office/mac/drawingml/2011/main" val="0"/>
+            </a:ext>
+          </a:extLst>
+        </p:spPr>
+        <p:txBody>
+          <a:bodyPr/>
+          <a:lstStyle>
+            <a:lvl1pPr>
+              <a:defRPr sz="2000">
+                <a:solidFill>
+                  <a:srgbClr val="FFFFFF"/>
+                </a:solidFill>
+                <a:latin typeface="Calibri"/>
+                <a:ea typeface="Calibri"/>
+                <a:cs typeface="Calibri"/>
+              </a:defRPr>
+            </a:lvl1pPr>
+          </a:lstStyle>
+          <a:p>
+            <a:pPr algn="ctr"/>
+            <a:fld id="{F7021451-1387-4CA6-816F-3879F97B5CBC}" type="slidenum">
+              <a:rPr b="1" lang="en-US"/>
+              <a:t>46</a:t>
+            </a:fld>
+            <a:endParaRPr lang="en-US"/>
+          </a:p>
+        </p:txBody>
+      </p:sp>
+    </p:spTree>
+  </p:cSld>
+  <p:clrMapOvr>
+    <a:masterClrMapping/>
+  </p:clrMapOvr>
+</p:sld>
+</file>
+
+<file path=ppt/slides/slide47.xml><?xml version="1.0" encoding="utf-8"?>
+<p:sld xmlns:a="http://schemas.openxmlformats.org/drawingml/2006/main" xmlns:r="http://schemas.openxmlformats.org/officeDocument/2006/relationships" xmlns:p="http://schemas.openxmlformats.org/presentationml/2006/main">
+  <p:cSld name="Slide 47">
+    <p:spTree>
+      <p:nvGrpSpPr>
+        <p:cNvPr id="1" name=""/>
+        <p:cNvGrpSpPr/>
+        <p:nvPr/>
+      </p:nvGrpSpPr>
+      <p:grpSpPr>
+        <a:xfrm>
+          <a:off x="0" y="0"/>
+          <a:ext cx="0" cy="0"/>
+          <a:chOff x="0" y="0"/>
+          <a:chExt cx="0" cy="0"/>
+        </a:xfrm>
+      </p:grpSpPr>
+      <p:sp>
+        <p:nvSpPr>
+          <p:cNvPr id="2" name="Text 0"/>
+          <p:cNvSpPr/>
+          <p:nvPr/>
+        </p:nvSpPr>
+        <p:spPr>
+          <a:xfrm>
+            <a:off x="457200" y="713232"/>
+            <a:ext cx="11368735" cy="274320"/>
+          </a:xfrm>
+          <a:prstGeom prst="rect">
+            <a:avLst/>
+          </a:prstGeom>
+          <a:noFill/>
+          <a:ln/>
+        </p:spPr>
+        <p:txBody>
+          <a:bodyPr wrap="square" lIns="0" tIns="0" rIns="0" bIns="0" rtlCol="0" anchor="ctr"/>
+          <a:lstStyle/>
+          <a:p>
+            <a:pPr algn="r" indent="0" marL="0">
+              <a:buNone/>
+            </a:pPr>
+            <a:r>
+              <a:rPr lang="en-US" sz="1400" b="1" dirty="0">
+                <a:solidFill>
+                  <a:srgbClr val="1C3F6E"/>
+                </a:solidFill>
+                <a:latin typeface="Calibri" pitchFamily="34" charset="0"/>
+                <a:ea typeface="Calibri" pitchFamily="34" charset="-122"/>
+                <a:cs typeface="Calibri" pitchFamily="34" charset="-120"/>
+              </a:rPr>
+              <a:t>NEXT LESSON</a:t>
+            </a:r>
+            <a:endParaRPr lang="en-US" sz="1400" dirty="0"/>
+          </a:p>
+        </p:txBody>
+      </p:sp>
+      <p:pic>
+        <p:nvPicPr>
+          <p:cNvPr id="3" name="Image 0" descr="/home/claude/f4/img/minesec_sheet.png">    </p:cNvPr>
+          <p:cNvPicPr>
+            <a:picLocks noChangeAspect="1"/>
+          </p:cNvPicPr>
+          <p:nvPr/>
+        </p:nvPicPr>
+        <p:blipFill>
+          <a:blip r:embed="rId1"/>
+          <a:stretch>
+            <a:fillRect/>
+          </a:stretch>
+        </p:blipFill>
+        <p:spPr>
+          <a:xfrm>
+            <a:off x="0" y="658368"/>
+            <a:ext cx="5120640" cy="5833872"/>
+          </a:xfrm>
+          <a:prstGeom prst="rect">
+            <a:avLst/>
+          </a:prstGeom>
+        </p:spPr>
+      </p:pic>
+      <p:sp>
+        <p:nvSpPr>
+          <p:cNvPr id="4" name="Text 1"/>
+          <p:cNvSpPr/>
+          <p:nvPr/>
+        </p:nvSpPr>
+        <p:spPr>
+          <a:xfrm>
+            <a:off x="5349240" y="1005840"/>
+            <a:ext cx="6522415" cy="731520"/>
+          </a:xfrm>
+          <a:prstGeom prst="rect">
+            <a:avLst/>
+          </a:prstGeom>
+          <a:noFill/>
+          <a:ln/>
+        </p:spPr>
+        <p:txBody>
+          <a:bodyPr wrap="square" lIns="0" tIns="0" rIns="0" bIns="0" rtlCol="0" anchor="ctr">
+            <a:normAutofit/>
+          </a:bodyPr>
+          <a:lstStyle/>
+          <a:p>
+            <a:pPr algn="ctr" indent="0" marL="0">
+              <a:buNone/>
+            </a:pPr>
+            <a:r>
+              <a:rPr lang="en-US" sz="3600" b="1" dirty="0">
+                <a:solidFill>
+                  <a:srgbClr val="990011"/>
+                </a:solidFill>
+                <a:latin typeface="Times New Roman" pitchFamily="34" charset="0"/>
+                <a:ea typeface="Times New Roman" pitchFamily="34" charset="-122"/>
+                <a:cs typeface="Times New Roman" pitchFamily="34" charset="-120"/>
+              </a:rPr>
+              <a:t>Next Lesson</a:t>
+            </a:r>
+            <a:endParaRPr lang="en-US" sz="3600" dirty="0"/>
+          </a:p>
+        </p:txBody>
+      </p:sp>
+      <p:sp>
+        <p:nvSpPr>
+          <p:cNvPr id="5" name="Text 2"/>
+          <p:cNvSpPr/>
+          <p:nvPr/>
+        </p:nvSpPr>
+        <p:spPr>
+          <a:xfrm>
+            <a:off x="5349240" y="1783080"/>
+            <a:ext cx="6522415" cy="4663440"/>
+          </a:xfrm>
+          <a:prstGeom prst="rect">
+            <a:avLst/>
+          </a:prstGeom>
+          <a:noFill/>
+          <a:ln/>
+        </p:spPr>
+        <p:txBody>
+          <a:bodyPr wrap="square" lIns="0" tIns="0" rIns="0" bIns="0" rtlCol="0" anchor="ctr"/>
+          <a:lstStyle/>
+          <a:p>
+            <a:pPr algn="ctr" indent="0" marL="0">
+              <a:spcAft>
+                <a:spcPts val="800"/>
+              </a:spcAft>
+              <a:buNone/>
+            </a:pPr>
+            <a:r>
+              <a:rPr lang="en-US" sz="4000" b="1" dirty="0">
+                <a:solidFill>
+                  <a:srgbClr val="111111"/>
+                </a:solidFill>
+                <a:latin typeface="Times New Roman" pitchFamily="34" charset="0"/>
+                <a:ea typeface="Times New Roman" pitchFamily="34" charset="-122"/>
+                <a:cs typeface="Times New Roman" pitchFamily="34" charset="-120"/>
+              </a:rPr>
+              <a:t>Our next lesson will be on:</a:t>
+            </a:r>
+            <a:endParaRPr lang="en-US" sz="4000" dirty="0"/>
+          </a:p>
+          <a:p>
+            <a:pPr algn="ctr" indent="0" marL="0">
+              <a:spcAft>
+                <a:spcPts val="800"/>
+              </a:spcAft>
+              <a:buNone/>
+            </a:pPr>
+            <a:r>
+              <a:rPr lang="en-US" sz="4000" b="1" dirty="0">
+                <a:solidFill>
+                  <a:srgbClr val="990011"/>
+                </a:solidFill>
+                <a:latin typeface="Times New Roman" pitchFamily="34" charset="0"/>
+                <a:ea typeface="Times New Roman" pitchFamily="34" charset="-122"/>
+                <a:cs typeface="Times New Roman" pitchFamily="34" charset="-120"/>
+              </a:rPr>
+              <a:t>Lesson 23: Wave Action in Coastal Areas</a:t>
+            </a:r>
+            <a:endParaRPr lang="en-US" sz="4000" dirty="0"/>
+          </a:p>
+        </p:txBody>
+      </p:sp>
+      <p:sp>
+        <p:nvSpPr>
+          <p:cNvPr id="25" name="Slide Number Placeholder 0"/>
+          <p:cNvSpPr>
+            <a:spLocks noGrp="1"/>
+          </p:cNvSpPr>
+          <p:nvPr>
+            <p:ph type="sldNum" sz="quarter" idx="4294967295"/>
+          </p:nvPr>
+        </p:nvSpPr>
+        <p:spPr>
+          <a:xfrm>
+            <a:off x="27432" y="91440"/>
+            <a:ext cx="585216" cy="475488"/>
+          </a:xfrm>
+          <a:prstGeom prst="rect">
+            <a:avLst/>
+          </a:prstGeom>
+          <a:extLst>
+            <a:ext uri="{C572A759-6A51-4108-AA02-DFA0A04FC94B}">
+              <ma14:wrappingTextBoxFlag xmlns:ma14="http://schemas.microsoft.com/office/mac/drawingml/2011/main" val="0"/>
+            </a:ext>
+          </a:extLst>
+        </p:spPr>
+        <p:txBody>
+          <a:bodyPr/>
+          <a:lstStyle>
+            <a:lvl1pPr>
+              <a:defRPr sz="2000">
+                <a:solidFill>
+                  <a:srgbClr val="FFFFFF"/>
+                </a:solidFill>
+                <a:latin typeface="Calibri"/>
+                <a:ea typeface="Calibri"/>
+                <a:cs typeface="Calibri"/>
+              </a:defRPr>
+            </a:lvl1pPr>
+          </a:lstStyle>
+          <a:p>
+            <a:pPr algn="ctr"/>
+            <a:fld id="{F7021451-1387-4CA6-816F-3879F97B5CBC}" type="slidenum">
+              <a:rPr b="1" lang="en-US"/>
+              <a:t>47</a:t>
+            </a:fld>
+            <a:endParaRPr lang="en-US"/>
+          </a:p>
+        </p:txBody>
+      </p:sp>
+    </p:spTree>
+  </p:cSld>
+  <p:clrMapOvr>
+    <a:masterClrMapping/>
+  </p:clrMapOvr>
+</p:sld>
+</file>
+
+<file path=ppt/slides/slide48.xml><?xml version="1.0" encoding="utf-8"?>
+<p:sld xmlns:a="http://schemas.openxmlformats.org/drawingml/2006/main" xmlns:r="http://schemas.openxmlformats.org/officeDocument/2006/relationships" xmlns:p="http://schemas.openxmlformats.org/presentationml/2006/main">
+  <p:cSld name="Slide 48">
+    <p:spTree>
+      <p:nvGrpSpPr>
+        <p:cNvPr id="1" name=""/>
+        <p:cNvGrpSpPr/>
+        <p:nvPr/>
+      </p:nvGrpSpPr>
+      <p:grpSpPr>
+        <a:xfrm>
+          <a:off x="0" y="0"/>
+          <a:ext cx="0" cy="0"/>
+          <a:chOff x="0" y="0"/>
+          <a:chExt cx="0" cy="0"/>
+        </a:xfrm>
+      </p:grpSpPr>
+      <p:sp>
+        <p:nvSpPr>
+          <p:cNvPr id="2" name="Text 0"/>
+          <p:cNvSpPr/>
+          <p:nvPr/>
+        </p:nvSpPr>
+        <p:spPr>
+          <a:xfrm>
+            <a:off x="457200" y="713232"/>
+            <a:ext cx="11368735" cy="274320"/>
+          </a:xfrm>
+          <a:prstGeom prst="rect">
+            <a:avLst/>
+          </a:prstGeom>
+          <a:noFill/>
+          <a:ln/>
+        </p:spPr>
+        <p:txBody>
+          <a:bodyPr wrap="square" lIns="0" tIns="0" rIns="0" bIns="0" rtlCol="0" anchor="ctr"/>
+          <a:lstStyle/>
+          <a:p>
+            <a:pPr algn="r" indent="0" marL="0">
+              <a:buNone/>
+            </a:pPr>
+            <a:r>
+              <a:rPr lang="en-US" sz="1400" b="1" dirty="0">
+                <a:solidFill>
+                  <a:srgbClr val="1C3F6E"/>
+                </a:solidFill>
+                <a:latin typeface="Calibri" pitchFamily="34" charset="0"/>
+                <a:ea typeface="Calibri" pitchFamily="34" charset="-122"/>
+                <a:cs typeface="Calibri" pitchFamily="34" charset="-120"/>
+              </a:rPr>
               <a:t>BILINGUAL GAME</a:t>
             </a:r>
             <a:endParaRPr lang="en-US" sz="1400" dirty="0"/>
@@ -15565,7 +17460,7 @@
       </p:sp>
       <p:graphicFrame>
         <p:nvGraphicFramePr>
-          <p:cNvPr id="44" name="Table 0"/>
+          <p:cNvPr id="49" name="Table 0"/>
           <p:cNvGraphicFramePr>
             <a:graphicFrameLocks noGrp="1"/>
           </p:cNvGraphicFramePr>
@@ -16877,7 +18772,7 @@
             <a:pPr algn="ctr"/>
             <a:fld id="{F7021451-1387-4CA6-816F-3879F97B5CBC}" type="slidenum">
               <a:rPr b="1" lang="en-US"/>
-              <a:t>43</a:t>
+              <a:t>48</a:t>
             </a:fld>
             <a:endParaRPr lang="en-US"/>
           </a:p>
@@ -16891,9 +18786,9 @@
 </p:sld>
 </file>
 
-<file path=ppt/slides/slide44.xml><?xml version="1.0" encoding="utf-8"?>
+<file path=ppt/slides/slide49.xml><?xml version="1.0" encoding="utf-8"?>
 <p:sld xmlns:a="http://schemas.openxmlformats.org/drawingml/2006/main" xmlns:r="http://schemas.openxmlformats.org/officeDocument/2006/relationships" xmlns:p="http://schemas.openxmlformats.org/presentationml/2006/main">
-  <p:cSld name="Slide 44">
+  <p:cSld name="Slide 49">
     <p:spTree>
       <p:nvGrpSpPr>
         <p:cNvPr id="1" name=""/>
@@ -16988,7 +18883,7 @@
       </p:sp>
       <p:graphicFrame>
         <p:nvGraphicFramePr>
-          <p:cNvPr id="45" name="Table 0"/>
+          <p:cNvPr id="50" name="Table 0"/>
           <p:cNvGraphicFramePr>
             <a:graphicFrameLocks noGrp="1"/>
           </p:cNvGraphicFramePr>
@@ -17610,7 +19505,7 @@
             <a:pPr algn="ctr"/>
             <a:fld id="{F7021451-1387-4CA6-816F-3879F97B5CBC}" type="slidenum">
               <a:rPr b="1" lang="en-US"/>
-              <a:t>44</a:t>
+              <a:t>49</a:t>
             </a:fld>
             <a:endParaRPr lang="en-US"/>
           </a:p>
@@ -17624,9 +19519,9 @@
 </p:sld>
 </file>
 
-<file path=ppt/slides/slide45.xml><?xml version="1.0" encoding="utf-8"?>
+<file path=ppt/slides/slide5.xml><?xml version="1.0" encoding="utf-8"?>
 <p:sld xmlns:a="http://schemas.openxmlformats.org/drawingml/2006/main" xmlns:r="http://schemas.openxmlformats.org/officeDocument/2006/relationships" xmlns:p="http://schemas.openxmlformats.org/presentationml/2006/main">
-  <p:cSld name="Slide 45">
+  <p:cSld name="Slide 5">
     <p:spTree>
       <p:nvGrpSpPr>
         <p:cNvPr id="1" name=""/>
@@ -17674,6 +19569,225 @@
                 <a:ea typeface="Calibri" pitchFamily="34" charset="-122"/>
                 <a:cs typeface="Calibri" pitchFamily="34" charset="-120"/>
               </a:rPr>
+              <a:t>HOMEWORK CORRECTION</a:t>
+            </a:r>
+            <a:endParaRPr lang="en-US" sz="1400" dirty="0"/>
+          </a:p>
+        </p:txBody>
+      </p:sp>
+      <p:pic>
+        <p:nvPicPr>
+          <p:cNvPr id="3" name="Image 0" descr="/home/claude/f4/img/minesec_sheet.png">    </p:cNvPr>
+          <p:cNvPicPr>
+            <a:picLocks noChangeAspect="1"/>
+          </p:cNvPicPr>
+          <p:nvPr/>
+        </p:nvPicPr>
+        <p:blipFill>
+          <a:blip r:embed="rId1"/>
+          <a:stretch>
+            <a:fillRect/>
+          </a:stretch>
+        </p:blipFill>
+        <p:spPr>
+          <a:xfrm>
+            <a:off x="0" y="658368"/>
+            <a:ext cx="5120640" cy="5833872"/>
+          </a:xfrm>
+          <a:prstGeom prst="rect">
+            <a:avLst/>
+          </a:prstGeom>
+        </p:spPr>
+      </p:pic>
+      <p:sp>
+        <p:nvSpPr>
+          <p:cNvPr id="4" name="Text 1"/>
+          <p:cNvSpPr/>
+          <p:nvPr/>
+        </p:nvSpPr>
+        <p:spPr>
+          <a:xfrm>
+            <a:off x="5349240" y="1005840"/>
+            <a:ext cx="6522415" cy="731520"/>
+          </a:xfrm>
+          <a:prstGeom prst="rect">
+            <a:avLst/>
+          </a:prstGeom>
+          <a:noFill/>
+          <a:ln/>
+        </p:spPr>
+        <p:txBody>
+          <a:bodyPr wrap="square" lIns="0" tIns="0" rIns="0" bIns="0" rtlCol="0" anchor="ctr">
+            <a:normAutofit/>
+          </a:bodyPr>
+          <a:lstStyle/>
+          <a:p>
+            <a:pPr algn="ctr" indent="0" marL="0">
+              <a:buNone/>
+            </a:pPr>
+            <a:r>
+              <a:rPr lang="en-US" sz="3600" b="1" dirty="0">
+                <a:solidFill>
+                  <a:srgbClr val="990011"/>
+                </a:solidFill>
+                <a:latin typeface="Times New Roman" pitchFamily="34" charset="0"/>
+                <a:ea typeface="Times New Roman" pitchFamily="34" charset="-122"/>
+                <a:cs typeface="Times New Roman" pitchFamily="34" charset="-120"/>
+              </a:rPr>
+              <a:t>Correction: Possible Answer</a:t>
+            </a:r>
+            <a:endParaRPr lang="en-US" sz="3600" dirty="0"/>
+          </a:p>
+        </p:txBody>
+      </p:sp>
+      <p:sp>
+        <p:nvSpPr>
+          <p:cNvPr id="5" name="Text 2"/>
+          <p:cNvSpPr/>
+          <p:nvPr/>
+        </p:nvSpPr>
+        <p:spPr>
+          <a:xfrm>
+            <a:off x="5349240" y="1783080"/>
+            <a:ext cx="6522415" cy="4663440"/>
+          </a:xfrm>
+          <a:prstGeom prst="rect">
+            <a:avLst/>
+          </a:prstGeom>
+          <a:noFill/>
+          <a:ln/>
+        </p:spPr>
+        <p:txBody>
+          <a:bodyPr wrap="square" lIns="0" tIns="0" rIns="0" bIns="0" rtlCol="0" anchor="t"/>
+          <a:lstStyle/>
+          <a:p>
+            <a:pPr algn="l" indent="0" marL="0">
+              <a:spcAft>
+                <a:spcPts val="800"/>
+              </a:spcAft>
+              <a:buNone/>
+            </a:pPr>
+            <a:r>
+              <a:rPr lang="en-US" sz="4000" dirty="0">
+                <a:solidFill>
+                  <a:srgbClr val="111111"/>
+                </a:solidFill>
+                <a:latin typeface="Times New Roman" pitchFamily="34" charset="0"/>
+                <a:ea typeface="Times New Roman" pitchFamily="34" charset="-122"/>
+                <a:cs typeface="Times New Roman" pitchFamily="34" charset="-120"/>
+              </a:rPr>
+              <a:t>Advantages: fertile soil for rice and onions, water for animals and fishing. Problems: floods destroy houses and crops, and bring diseases like cholera and malaria.</a:t>
+            </a:r>
+            <a:endParaRPr lang="en-US" sz="4000" dirty="0"/>
+          </a:p>
+        </p:txBody>
+      </p:sp>
+      <p:sp>
+        <p:nvSpPr>
+          <p:cNvPr id="25" name="Slide Number Placeholder 0"/>
+          <p:cNvSpPr>
+            <a:spLocks noGrp="1"/>
+          </p:cNvSpPr>
+          <p:nvPr>
+            <p:ph type="sldNum" sz="quarter" idx="4294967295"/>
+          </p:nvPr>
+        </p:nvSpPr>
+        <p:spPr>
+          <a:xfrm>
+            <a:off x="27432" y="91440"/>
+            <a:ext cx="585216" cy="475488"/>
+          </a:xfrm>
+          <a:prstGeom prst="rect">
+            <a:avLst/>
+          </a:prstGeom>
+          <a:extLst>
+            <a:ext uri="{C572A759-6A51-4108-AA02-DFA0A04FC94B}">
+              <ma14:wrappingTextBoxFlag xmlns:ma14="http://schemas.microsoft.com/office/mac/drawingml/2011/main" val="0"/>
+            </a:ext>
+          </a:extLst>
+        </p:spPr>
+        <p:txBody>
+          <a:bodyPr/>
+          <a:lstStyle>
+            <a:lvl1pPr>
+              <a:defRPr sz="2000">
+                <a:solidFill>
+                  <a:srgbClr val="FFFFFF"/>
+                </a:solidFill>
+                <a:latin typeface="Calibri"/>
+                <a:ea typeface="Calibri"/>
+                <a:cs typeface="Calibri"/>
+              </a:defRPr>
+            </a:lvl1pPr>
+          </a:lstStyle>
+          <a:p>
+            <a:pPr algn="ctr"/>
+            <a:fld id="{F7021451-1387-4CA6-816F-3879F97B5CBC}" type="slidenum">
+              <a:rPr b="1" lang="en-US"/>
+              <a:t>5</a:t>
+            </a:fld>
+            <a:endParaRPr lang="en-US"/>
+          </a:p>
+        </p:txBody>
+      </p:sp>
+    </p:spTree>
+  </p:cSld>
+  <p:clrMapOvr>
+    <a:masterClrMapping/>
+  </p:clrMapOvr>
+</p:sld>
+</file>
+
+<file path=ppt/slides/slide50.xml><?xml version="1.0" encoding="utf-8"?>
+<p:sld xmlns:a="http://schemas.openxmlformats.org/drawingml/2006/main" xmlns:r="http://schemas.openxmlformats.org/officeDocument/2006/relationships" xmlns:p="http://schemas.openxmlformats.org/presentationml/2006/main">
+  <p:cSld name="Slide 50">
+    <p:spTree>
+      <p:nvGrpSpPr>
+        <p:cNvPr id="1" name=""/>
+        <p:cNvGrpSpPr/>
+        <p:nvPr/>
+      </p:nvGrpSpPr>
+      <p:grpSpPr>
+        <a:xfrm>
+          <a:off x="0" y="0"/>
+          <a:ext cx="0" cy="0"/>
+          <a:chOff x="0" y="0"/>
+          <a:chExt cx="0" cy="0"/>
+        </a:xfrm>
+      </p:grpSpPr>
+      <p:sp>
+        <p:nvSpPr>
+          <p:cNvPr id="2" name="Text 0"/>
+          <p:cNvSpPr/>
+          <p:nvPr/>
+        </p:nvSpPr>
+        <p:spPr>
+          <a:xfrm>
+            <a:off x="457200" y="713232"/>
+            <a:ext cx="11368735" cy="274320"/>
+          </a:xfrm>
+          <a:prstGeom prst="rect">
+            <a:avLst/>
+          </a:prstGeom>
+          <a:noFill/>
+          <a:ln/>
+        </p:spPr>
+        <p:txBody>
+          <a:bodyPr wrap="square" lIns="0" tIns="0" rIns="0" bIns="0" rtlCol="0" anchor="ctr"/>
+          <a:lstStyle/>
+          <a:p>
+            <a:pPr algn="r" indent="0" marL="0">
+              <a:buNone/>
+            </a:pPr>
+            <a:r>
+              <a:rPr lang="en-US" sz="1400" b="1" dirty="0">
+                <a:solidFill>
+                  <a:srgbClr val="1C3F6E"/>
+                </a:solidFill>
+                <a:latin typeface="Calibri" pitchFamily="34" charset="0"/>
+                <a:ea typeface="Calibri" pitchFamily="34" charset="-122"/>
+                <a:cs typeface="Calibri" pitchFamily="34" charset="-120"/>
+              </a:rPr>
               <a:t>LOGBOOK</a:t>
             </a:r>
             <a:endParaRPr lang="en-US" sz="1400" dirty="0"/>
@@ -17721,7 +19835,7 @@
       </p:sp>
       <p:graphicFrame>
         <p:nvGraphicFramePr>
-          <p:cNvPr id="46" name="Table 0"/>
+          <p:cNvPr id="51" name="Table 0"/>
           <p:cNvGraphicFramePr>
             <a:graphicFrameLocks noGrp="1"/>
           </p:cNvGraphicFramePr>
@@ -17831,7 +19945,7 @@
                           <a:ea typeface="Calibri" pitchFamily="34" charset="-122"/>
                           <a:cs typeface="Calibri" pitchFamily="34" charset="-120"/>
                         </a:rPr>
-                        <a:t>DEFINITIONS; Importance of Rivers and Floodplains; Problems of Living in Floodplains; Solutions.</a:t>
+                        <a:t>DEFINITIONS; Importance of Rivers and Floodplains to Man; Problems of Living in Floodplains; Solutions to the Problems of Living in Floodplains.</a:t>
                       </a:r>
                       <a:endParaRPr lang="en-US" sz="1600" dirty="0">
                         <a:latin typeface="Calibri" charset="0"/>
@@ -18481,7 +20595,7 @@
             <a:pPr algn="ctr"/>
             <a:fld id="{F7021451-1387-4CA6-816F-3879F97B5CBC}" type="slidenum">
               <a:rPr b="1" lang="en-US"/>
-              <a:t>45</a:t>
+              <a:t>50</a:t>
             </a:fld>
             <a:endParaRPr lang="en-US"/>
           </a:p>
@@ -18495,9 +20609,9 @@
 </p:sld>
 </file>
 
-<file path=ppt/slides/slide46.xml><?xml version="1.0" encoding="utf-8"?>
+<file path=ppt/slides/slide51.xml><?xml version="1.0" encoding="utf-8"?>
 <p:sld xmlns:a="http://schemas.openxmlformats.org/drawingml/2006/main" xmlns:r="http://schemas.openxmlformats.org/officeDocument/2006/relationships" xmlns:p="http://schemas.openxmlformats.org/presentationml/2006/main">
-  <p:cSld name="Slide 46">
+  <p:cSld name="Slide 51">
     <p:spTree>
       <p:nvGrpSpPr>
         <p:cNvPr id="1" name=""/>
@@ -18674,7 +20788,7 @@
                 <a:ea typeface="Calibri" pitchFamily="34" charset="-122"/>
                 <a:cs typeface="Calibri" pitchFamily="34" charset="-120"/>
               </a:rPr>
-              <a:t>Without the projector (Activity 1): ask learners what grows along the Benue.</a:t>
+              <a:t>Without the projector (Activity 1): name crops grown along the Benue.</a:t>
             </a:r>
             <a:endParaRPr lang="en-US" sz="2000" dirty="0"/>
           </a:p>
@@ -18695,7 +20809,7 @@
                 <a:ea typeface="Calibri" pitchFamily="34" charset="-122"/>
                 <a:cs typeface="Calibri" pitchFamily="34" charset="-120"/>
               </a:rPr>
-              <a:t>Without the projector (Activity 2): ask learners to describe the flood of 2012.</a:t>
+              <a:t>Without the projector (Activity 2): describe the flood of 2012.</a:t>
             </a:r>
             <a:endParaRPr lang="en-US" sz="2000" dirty="0"/>
           </a:p>
@@ -18716,7 +20830,7 @@
                 <a:ea typeface="Calibri" pitchFamily="34" charset="-122"/>
                 <a:cs typeface="Calibri" pitchFamily="34" charset="-120"/>
               </a:rPr>
-              <a:t>Without the projector (Activity 3): describe sandbags put along a river.</a:t>
+              <a:t>Without the projector (Activity 3): draw a river with a bank on each side.</a:t>
             </a:r>
             <a:endParaRPr lang="en-US" sz="2000" dirty="0"/>
           </a:p>
@@ -18764,7 +20878,7 @@
             <a:pPr algn="ctr"/>
             <a:fld id="{F7021451-1387-4CA6-816F-3879F97B5CBC}" type="slidenum">
               <a:rPr b="1" lang="en-US"/>
-              <a:t>46</a:t>
+              <a:t>51</a:t>
             </a:fld>
             <a:endParaRPr lang="en-US"/>
           </a:p>
@@ -18778,9 +20892,9 @@
 </p:sld>
 </file>
 
-<file path=ppt/slides/slide47.xml><?xml version="1.0" encoding="utf-8"?>
+<file path=ppt/slides/slide52.xml><?xml version="1.0" encoding="utf-8"?>
 <p:sld xmlns:a="http://schemas.openxmlformats.org/drawingml/2006/main" xmlns:r="http://schemas.openxmlformats.org/officeDocument/2006/relationships" xmlns:p="http://schemas.openxmlformats.org/presentationml/2006/main">
-  <p:cSld name="Slide 47">
+  <p:cSld name="Slide 52">
     <p:spTree>
       <p:nvGrpSpPr>
         <p:cNvPr id="1" name=""/>
@@ -18851,7 +20965,7 @@
         <p:spPr>
           <a:xfrm>
             <a:off x="0" y="658368"/>
-            <a:ext cx="3840480" cy="5833872"/>
+            <a:ext cx="1463040" cy="5833872"/>
           </a:xfrm>
           <a:prstGeom prst="rect">
             <a:avLst/>
@@ -18866,8 +20980,8 @@
         </p:nvSpPr>
         <p:spPr>
           <a:xfrm>
-            <a:off x="4069080" y="1005840"/>
-            <a:ext cx="7802575" cy="731520"/>
+            <a:off x="1691640" y="1005840"/>
+            <a:ext cx="10180015" cy="731520"/>
           </a:xfrm>
           <a:prstGeom prst="rect">
             <a:avLst/>
@@ -18907,8 +21021,8 @@
         </p:nvSpPr>
         <p:spPr>
           <a:xfrm>
-            <a:off x="4069080" y="1783080"/>
-            <a:ext cx="7802575" cy="4663440"/>
+            <a:off x="1691640" y="1783080"/>
+            <a:ext cx="10180015" cy="4663440"/>
           </a:xfrm>
           <a:prstGeom prst="rect">
             <a:avLst/>
@@ -19041,6 +21155,27 @@
                 <a:ea typeface="Calibri" pitchFamily="34" charset="-122"/>
                 <a:cs typeface="Calibri" pitchFamily="34" charset="-120"/>
               </a:rPr>
+              <a:t>Photo, board summary (Energy): “South Holston Lake, (Virginia-Tennessee border, USA)” by James St. John, CC BY 2.0, via Flickr (https://www.flickr.com/photos/47445767@N05/39221734762)</a:t>
+            </a:r>
+            <a:endParaRPr lang="en-US" sz="1800" dirty="0"/>
+          </a:p>
+          <a:p>
+            <a:pPr algn="l" marL="342900" indent="-342900">
+              <a:spcAft>
+                <a:spcPts val="800"/>
+              </a:spcAft>
+              <a:buSzPct val="100000"/>
+              <a:buChar char="•"/>
+            </a:pPr>
+            <a:r>
+              <a:rPr lang="en-US" sz="1800" dirty="0">
+                <a:solidFill>
+                  <a:srgbClr val="111111"/>
+                </a:solidFill>
+                <a:latin typeface="Calibri" pitchFamily="34" charset="0"/>
+                <a:ea typeface="Calibri" pitchFamily="34" charset="-122"/>
+                <a:cs typeface="Calibri" pitchFamily="34" charset="-120"/>
+              </a:rPr>
               <a:t>Diagrams and animations: drawn for this lesson (Geography Department).</a:t>
             </a:r>
             <a:endParaRPr lang="en-US" sz="1800" dirty="0"/>
@@ -19089,226 +21224,7 @@
             <a:pPr algn="ctr"/>
             <a:fld id="{F7021451-1387-4CA6-816F-3879F97B5CBC}" type="slidenum">
               <a:rPr b="1" lang="en-US"/>
-              <a:t>47</a:t>
-            </a:fld>
-            <a:endParaRPr lang="en-US"/>
-          </a:p>
-        </p:txBody>
-      </p:sp>
-    </p:spTree>
-  </p:cSld>
-  <p:clrMapOvr>
-    <a:masterClrMapping/>
-  </p:clrMapOvr>
-</p:sld>
-</file>
-
-<file path=ppt/slides/slide5.xml><?xml version="1.0" encoding="utf-8"?>
-<p:sld xmlns:a="http://schemas.openxmlformats.org/drawingml/2006/main" xmlns:r="http://schemas.openxmlformats.org/officeDocument/2006/relationships" xmlns:p="http://schemas.openxmlformats.org/presentationml/2006/main">
-  <p:cSld name="Slide 5">
-    <p:spTree>
-      <p:nvGrpSpPr>
-        <p:cNvPr id="1" name=""/>
-        <p:cNvGrpSpPr/>
-        <p:nvPr/>
-      </p:nvGrpSpPr>
-      <p:grpSpPr>
-        <a:xfrm>
-          <a:off x="0" y="0"/>
-          <a:ext cx="0" cy="0"/>
-          <a:chOff x="0" y="0"/>
-          <a:chExt cx="0" cy="0"/>
-        </a:xfrm>
-      </p:grpSpPr>
-      <p:sp>
-        <p:nvSpPr>
-          <p:cNvPr id="2" name="Text 0"/>
-          <p:cNvSpPr/>
-          <p:nvPr/>
-        </p:nvSpPr>
-        <p:spPr>
-          <a:xfrm>
-            <a:off x="457200" y="713232"/>
-            <a:ext cx="11368735" cy="274320"/>
-          </a:xfrm>
-          <a:prstGeom prst="rect">
-            <a:avLst/>
-          </a:prstGeom>
-          <a:noFill/>
-          <a:ln/>
-        </p:spPr>
-        <p:txBody>
-          <a:bodyPr wrap="square" lIns="0" tIns="0" rIns="0" bIns="0" rtlCol="0" anchor="ctr"/>
-          <a:lstStyle/>
-          <a:p>
-            <a:pPr algn="r" indent="0" marL="0">
-              <a:buNone/>
-            </a:pPr>
-            <a:r>
-              <a:rPr lang="en-US" sz="1400" b="1" dirty="0">
-                <a:solidFill>
-                  <a:srgbClr val="1C3F6E"/>
-                </a:solidFill>
-                <a:latin typeface="Calibri" pitchFamily="34" charset="0"/>
-                <a:ea typeface="Calibri" pitchFamily="34" charset="-122"/>
-                <a:cs typeface="Calibri" pitchFamily="34" charset="-120"/>
-              </a:rPr>
-              <a:t>HOMEWORK CORRECTION</a:t>
-            </a:r>
-            <a:endParaRPr lang="en-US" sz="1400" dirty="0"/>
-          </a:p>
-        </p:txBody>
-      </p:sp>
-      <p:pic>
-        <p:nvPicPr>
-          <p:cNvPr id="3" name="Image 0" descr="/home/claude/f4/img/minesec_sheet.png">    </p:cNvPr>
-          <p:cNvPicPr>
-            <a:picLocks noChangeAspect="1"/>
-          </p:cNvPicPr>
-          <p:nvPr/>
-        </p:nvPicPr>
-        <p:blipFill>
-          <a:blip r:embed="rId1"/>
-          <a:stretch>
-            <a:fillRect/>
-          </a:stretch>
-        </p:blipFill>
-        <p:spPr>
-          <a:xfrm>
-            <a:off x="0" y="658368"/>
-            <a:ext cx="5120640" cy="5833872"/>
-          </a:xfrm>
-          <a:prstGeom prst="rect">
-            <a:avLst/>
-          </a:prstGeom>
-        </p:spPr>
-      </p:pic>
-      <p:sp>
-        <p:nvSpPr>
-          <p:cNvPr id="4" name="Text 1"/>
-          <p:cNvSpPr/>
-          <p:nvPr/>
-        </p:nvSpPr>
-        <p:spPr>
-          <a:xfrm>
-            <a:off x="5349240" y="1005840"/>
-            <a:ext cx="6522415" cy="731520"/>
-          </a:xfrm>
-          <a:prstGeom prst="rect">
-            <a:avLst/>
-          </a:prstGeom>
-          <a:noFill/>
-          <a:ln/>
-        </p:spPr>
-        <p:txBody>
-          <a:bodyPr wrap="square" lIns="0" tIns="0" rIns="0" bIns="0" rtlCol="0" anchor="ctr">
-            <a:normAutofit/>
-          </a:bodyPr>
-          <a:lstStyle/>
-          <a:p>
-            <a:pPr algn="ctr" indent="0" marL="0">
-              <a:buNone/>
-            </a:pPr>
-            <a:r>
-              <a:rPr lang="en-US" sz="3600" b="1" dirty="0">
-                <a:solidFill>
-                  <a:srgbClr val="990011"/>
-                </a:solidFill>
-                <a:latin typeface="Times New Roman" pitchFamily="34" charset="0"/>
-                <a:ea typeface="Times New Roman" pitchFamily="34" charset="-122"/>
-                <a:cs typeface="Times New Roman" pitchFamily="34" charset="-120"/>
-              </a:rPr>
-              <a:t>Correction: Possible Answer</a:t>
-            </a:r>
-            <a:endParaRPr lang="en-US" sz="3600" dirty="0"/>
-          </a:p>
-        </p:txBody>
-      </p:sp>
-      <p:sp>
-        <p:nvSpPr>
-          <p:cNvPr id="5" name="Text 2"/>
-          <p:cNvSpPr/>
-          <p:nvPr/>
-        </p:nvSpPr>
-        <p:spPr>
-          <a:xfrm>
-            <a:off x="5349240" y="1783080"/>
-            <a:ext cx="6522415" cy="4663440"/>
-          </a:xfrm>
-          <a:prstGeom prst="rect">
-            <a:avLst/>
-          </a:prstGeom>
-          <a:noFill/>
-          <a:ln/>
-        </p:spPr>
-        <p:txBody>
-          <a:bodyPr wrap="square" lIns="0" tIns="0" rIns="0" bIns="0" rtlCol="0" anchor="t"/>
-          <a:lstStyle/>
-          <a:p>
-            <a:pPr algn="l" indent="0" marL="0">
-              <a:spcAft>
-                <a:spcPts val="800"/>
-              </a:spcAft>
-              <a:buNone/>
-            </a:pPr>
-            <a:r>
-              <a:rPr lang="en-US" sz="4000" dirty="0">
-                <a:solidFill>
-                  <a:srgbClr val="111111"/>
-                </a:solidFill>
-                <a:latin typeface="Times New Roman" pitchFamily="34" charset="0"/>
-                <a:ea typeface="Times New Roman" pitchFamily="34" charset="-122"/>
-                <a:cs typeface="Times New Roman" pitchFamily="34" charset="-120"/>
-              </a:rPr>
-              <a:t>Advantages: fertile soil for rice and onions, water for animals and fishing. Problems: floods destroy houses and crops, and bring diseases like cholera and malaria.</a:t>
-            </a:r>
-            <a:endParaRPr lang="en-US" sz="4000" dirty="0"/>
-          </a:p>
-        </p:txBody>
-      </p:sp>
-      <p:sp>
-        <p:nvSpPr>
-          <p:cNvPr id="25" name="Slide Number Placeholder 0"/>
-          <p:cNvSpPr>
-            <a:spLocks noGrp="1"/>
-          </p:cNvSpPr>
-          <p:nvPr>
-            <p:ph type="sldNum" sz="quarter" idx="4294967295"/>
-          </p:nvPr>
-        </p:nvSpPr>
-        <p:spPr>
-          <a:xfrm>
-            <a:off x="27432" y="91440"/>
-            <a:ext cx="585216" cy="475488"/>
-          </a:xfrm>
-          <a:prstGeom prst="rect">
-            <a:avLst/>
-          </a:prstGeom>
-          <a:extLst>
-            <a:ext uri="{C572A759-6A51-4108-AA02-DFA0A04FC94B}">
-              <ma14:wrappingTextBoxFlag xmlns:ma14="http://schemas.microsoft.com/office/mac/drawingml/2011/main" val="0"/>
-            </a:ext>
-          </a:extLst>
-        </p:spPr>
-        <p:txBody>
-          <a:bodyPr/>
-          <a:lstStyle>
-            <a:lvl1pPr>
-              <a:defRPr sz="2000">
-                <a:solidFill>
-                  <a:srgbClr val="FFFFFF"/>
-                </a:solidFill>
-                <a:latin typeface="Calibri"/>
-                <a:ea typeface="Calibri"/>
-                <a:cs typeface="Calibri"/>
-              </a:defRPr>
-            </a:lvl1pPr>
-          </a:lstStyle>
-          <a:p>
-            <a:pPr algn="ctr"/>
-            <a:fld id="{F7021451-1387-4CA6-816F-3879F97B5CBC}" type="slidenum">
-              <a:rPr b="1" lang="en-US"/>
-              <a:t>5</a:t>
+              <a:t>52</a:t>
             </a:fld>
             <a:endParaRPr lang="en-US"/>
           </a:p>

--- a/lecons/F3/26_FORM4_LESSON22_Man_and_Floodplain_Interactions.pptx
+++ b/lecons/F3/26_FORM4_LESSON22_Man_and_Floodplain_Interactions.pptx
@@ -11059,7 +11059,7 @@
               <a:buNone/>
             </a:pPr>
             <a:r>
-              <a:rPr lang="en-US" sz="4000" b="1" dirty="0">
+              <a:rPr lang="en-US" sz="3200" b="1" dirty="0">
                 <a:solidFill>
                   <a:srgbClr val="111111"/>
                 </a:solidFill>
@@ -11069,7 +11069,7 @@
               </a:rPr>
               <a:t>Topic: Denudation Processes, Landforms and Impacts on Man</a:t>
             </a:r>
-            <a:endParaRPr lang="en-US" sz="4000" dirty="0"/>
+            <a:endParaRPr lang="en-US" sz="3200" dirty="0"/>
           </a:p>
           <a:p>
             <a:pPr algn="l" indent="0" marL="0">
@@ -11079,7 +11079,7 @@
               <a:buNone/>
             </a:pPr>
             <a:r>
-              <a:rPr lang="en-US" sz="4000" b="1" dirty="0">
+              <a:rPr lang="en-US" sz="3200" b="1" dirty="0">
                 <a:solidFill>
                   <a:srgbClr val="111111"/>
                 </a:solidFill>
@@ -11089,7 +11089,7 @@
               </a:rPr>
               <a:t>Sub-topic: The Work of Rivers on the Landscape and Impacts on Man</a:t>
             </a:r>
-            <a:endParaRPr lang="en-US" sz="4000" dirty="0"/>
+            <a:endParaRPr lang="en-US" sz="3200" dirty="0"/>
           </a:p>
           <a:p>
             <a:pPr algn="l" indent="0" marL="0">
@@ -11099,7 +11099,7 @@
               <a:buNone/>
             </a:pPr>
             <a:r>
-              <a:rPr lang="en-US" sz="4000" b="1" dirty="0">
+              <a:rPr lang="en-US" sz="3200" b="1" dirty="0">
                 <a:solidFill>
                   <a:srgbClr val="990011"/>
                 </a:solidFill>
@@ -11109,7 +11109,7 @@
               </a:rPr>
               <a:t>Lesson 22: Man and Floodplain Interactions</a:t>
             </a:r>
-            <a:endParaRPr lang="en-US" sz="4000" dirty="0"/>
+            <a:endParaRPr lang="en-US" sz="3200" dirty="0"/>
           </a:p>
         </p:txBody>
       </p:sp>

--- a/lecons/F3/26_FORM4_LESSON22_Man_and_Floodplain_Interactions.pptx
+++ b/lecons/F3/26_FORM4_LESSON22_Man_and_Floodplain_Interactions.pptx
@@ -3457,7 +3457,7 @@
           <a:p>
             <a:r>
               <a:rPr lang="en-US" dirty="0"/>
-              <a:t>Before we start the new lesson, let us correct the homework I gave you at the end of Lesson 21: The Lower Course of a River. The question was: Ask two people who live or farm near the Benue: what are the advantages of the river, and what problems do the floods cause? Write their answers. Take out your exercise books.</a:t>
+              <a:t>Before we start the new lesson, let us correct the homework I gave you at the end of Lesson 21: The Lower Course of a River. The question was: Give two uses of floodplains. Take out your exercise books.</a:t>
             </a:r>
             <a:endParaRPr lang="en-US" dirty="0"/>
           </a:p>
@@ -4073,7 +4073,7 @@
           <a:p>
             <a:r>
               <a:rPr lang="en-US" dirty="0"/>
-              <a:t>For your homework: Watch the wind blowing on the water of the Benue or of a big basin of water. Write how the waves form and in which direction they move. We shall correct it at the beginning of our next lesson.</a:t>
+              <a:t>For your homework: Name the two types of waves. We shall correct it at the beginning of our next lesson.</a:t>
             </a:r>
             <a:endParaRPr lang="en-US" dirty="0"/>
           </a:p>
@@ -4425,7 +4425,7 @@
           <a:p>
             <a:r>
               <a:rPr lang="en-US" dirty="0"/>
-              <a:t>Here is a good answer. Advantages: fertile soil for rice and onions, water for animals and fishing. Problems: floods destroy houses and crops, and bring diseases like cholera and malaria. Compare it with your own answer and correct your work in red.</a:t>
+              <a:t>Here is a good answer. Farming on fertile alluvium and fishing (also water supply and settlement). Compare it with your own answer and correct your work in red.</a:t>
             </a:r>
             <a:endParaRPr lang="en-US" dirty="0"/>
           </a:p>
@@ -15342,7 +15342,7 @@
         <p:spPr>
           <a:xfrm>
             <a:off x="0" y="658368"/>
-            <a:ext cx="3840480" cy="5833872"/>
+            <a:ext cx="5120640" cy="5833872"/>
           </a:xfrm>
           <a:prstGeom prst="rect">
             <a:avLst/>
@@ -15357,8 +15357,8 @@
         </p:nvSpPr>
         <p:spPr>
           <a:xfrm>
-            <a:off x="4069080" y="1005840"/>
-            <a:ext cx="7802575" cy="731520"/>
+            <a:off x="5349240" y="1005840"/>
+            <a:ext cx="6522415" cy="731520"/>
           </a:xfrm>
           <a:prstGeom prst="rect">
             <a:avLst/>
@@ -15398,8 +15398,8 @@
         </p:nvSpPr>
         <p:spPr>
           <a:xfrm>
-            <a:off x="4069080" y="1783080"/>
-            <a:ext cx="7802575" cy="4663440"/>
+            <a:off x="5349240" y="1783080"/>
+            <a:ext cx="6522415" cy="4663440"/>
           </a:xfrm>
           <a:prstGeom prst="rect">
             <a:avLst/>
@@ -15446,7 +15446,7 @@
                 <a:ea typeface="Times New Roman" pitchFamily="34" charset="-122"/>
                 <a:cs typeface="Times New Roman" pitchFamily="34" charset="-120"/>
               </a:rPr>
-              <a:t>Ask two people who live or farm near the Benue: what are the advantages of the river, and what problems do the floods cause? Write their answers.</a:t>
+              <a:t>Give two uses of floodplains.</a:t>
             </a:r>
             <a:endParaRPr lang="en-US" sz="4000" dirty="0"/>
           </a:p>
@@ -17062,7 +17062,7 @@
                 <a:ea typeface="Times New Roman" pitchFamily="34" charset="-122"/>
                 <a:cs typeface="Times New Roman" pitchFamily="34" charset="-120"/>
               </a:rPr>
-              <a:t>Watch the wind blowing on the water of the Benue or of a big basin of water. Write how the waves form and in which direction they move.</a:t>
+              <a:t>Name the two types of waves.</a:t>
             </a:r>
             <a:endParaRPr lang="en-US" sz="4000" dirty="0"/>
           </a:p>
@@ -19676,7 +19676,7 @@
                 <a:ea typeface="Times New Roman" pitchFamily="34" charset="-122"/>
                 <a:cs typeface="Times New Roman" pitchFamily="34" charset="-120"/>
               </a:rPr>
-              <a:t>Advantages: fertile soil for rice and onions, water for animals and fishing. Problems: floods destroy houses and crops, and bring diseases like cholera and malaria.</a:t>
+              <a:t>Farming on fertile alluvium and fishing (also water supply and settlement).</a:t>
             </a:r>
             <a:endParaRPr lang="en-US" sz="4000" dirty="0"/>
           </a:p>
@@ -20221,7 +20221,7 @@
                           <a:ea typeface="Calibri" pitchFamily="34" charset="-122"/>
                           <a:cs typeface="Calibri" pitchFamily="34" charset="-120"/>
                         </a:rPr>
-                        <a:t>Watch the wind blowing on the water of the Benue or of a big basin of water. Write how the waves form and in which direction they move.</a:t>
+                        <a:t>Name the two types of waves.</a:t>
                       </a:r>
                       <a:endParaRPr lang="en-US" sz="1600" dirty="0">
                         <a:latin typeface="Calibri" charset="0"/>

--- a/lecons/F3/26_FORM4_LESSON22_Man_and_Floodplain_Interactions.pptx
+++ b/lecons/F3/26_FORM4_LESSON22_Man_and_Floodplain_Interactions.pptx
@@ -57,9 +57,10 @@
     <p:sldId id="305" r:id="rId51"/>
     <p:sldId id="306" r:id="rId52"/>
     <p:sldId id="307" r:id="rId53"/>
+    <p:sldId id="308" r:id="rId54"/>
   </p:sldIdLst>
   <p:notesMasterIdLst>
-    <p:notesMasterId r:id="rId54"/>
+    <p:notesMasterId r:id="rId55"/>
   </p:notesMasterIdLst>
   <p:sldSz cx="12192000" cy="6858000"/>
   <p:notesSz cx="6858000" cy="12192000"/>
@@ -641,7 +642,7 @@
           <a:p>
             <a:r>
               <a:rPr lang="en-US" dirty="0"/>
-              <a:t>Listen carefully to this situation from real life. In September 2012, heavy rain and water released from the Lagdo Dam flooded many villages along the Benue near Garoua, destroying farms and houses. Yet every year farmers come back to plant rice and onions there. A farmer asks: "Why do we stay on the floodplain, and how can we live there safely?" Think about it, because I am going to ask you some questions.</a:t>
+              <a:t>Take your time to copy this part; we will continue together.</a:t>
             </a:r>
             <a:endParaRPr lang="en-US" dirty="0"/>
           </a:p>
@@ -729,7 +730,7 @@
           <a:p>
             <a:r>
               <a:rPr lang="en-US" dirty="0"/>
-              <a:t>Question 1: What is the problem in the situation? Think for a moment, then raise your hand to answer.</a:t>
+              <a:t>Listen carefully to this situation from real life. In September 2012, heavy rain and water released from the Lagdo Dam flooded many villages along the Benue near Garoua, destroying farms and houses. Yet every year farmers come back to plant rice and onions there. A farmer asks: "Why do we stay on the floodplain, and how can we live there safely?" Think about it, because I am going to ask you some questions.</a:t>
             </a:r>
             <a:endParaRPr lang="en-US" dirty="0"/>
           </a:p>
@@ -817,7 +818,7 @@
           <a:p>
             <a:r>
               <a:rPr lang="en-US" dirty="0"/>
-              <a:t>Good. People farm and live on the floodplain although floods destroy their farms and houses.</a:t>
+              <a:t>Question 1: What is the problem in the situation? Think for a moment, then raise your hand to answer.</a:t>
             </a:r>
             <a:endParaRPr lang="en-US" dirty="0"/>
           </a:p>
@@ -905,7 +906,7 @@
           <a:p>
             <a:r>
               <a:rPr lang="en-US" dirty="0"/>
-              <a:t>Question 2: What caused the flood of 2012? Think for a moment, then raise your hand to answer.</a:t>
+              <a:t>Good. People farm and live on the floodplain although floods destroy their farms and houses.</a:t>
             </a:r>
             <a:endParaRPr lang="en-US" dirty="0"/>
           </a:p>
@@ -993,7 +994,7 @@
           <a:p>
             <a:r>
               <a:rPr lang="en-US" dirty="0"/>
-              <a:t>Good. Heavy rain and water released from the Lagdo Dam.</a:t>
+              <a:t>Question 2: What caused the flood of 2012? Think for a moment, then raise your hand to answer.</a:t>
             </a:r>
             <a:endParaRPr lang="en-US" dirty="0"/>
           </a:p>
@@ -1081,7 +1082,7 @@
           <a:p>
             <a:r>
               <a:rPr lang="en-US" dirty="0"/>
-              <a:t>Question 3: Why do farmers come back? Think for a moment, then raise your hand to answer.</a:t>
+              <a:t>Good. Heavy rain and water released from the Lagdo Dam.</a:t>
             </a:r>
             <a:endParaRPr lang="en-US" dirty="0"/>
           </a:p>
@@ -1169,7 +1170,7 @@
           <a:p>
             <a:r>
               <a:rPr lang="en-US" dirty="0"/>
-              <a:t>Good. The floodplain soil is fertile and there is water.</a:t>
+              <a:t>Question 3: Why do farmers come back? Think for a moment, then raise your hand to answer.</a:t>
             </a:r>
             <a:endParaRPr lang="en-US" dirty="0"/>
           </a:p>
@@ -1257,7 +1258,7 @@
           <a:p>
             <a:r>
               <a:rPr lang="en-US" dirty="0"/>
-              <a:t>From this situation, the action we are working towards in this lesson is the following: build away from rivers and follow flood warnings.</a:t>
+              <a:t>Good. The floodplain soil is fertile and there is water.</a:t>
             </a:r>
             <a:endParaRPr lang="en-US" dirty="0"/>
           </a:p>
@@ -1345,7 +1346,7 @@
           <a:p>
             <a:r>
               <a:rPr lang="en-US" dirty="0"/>
-              <a:t>Why is this lesson important for you? This lesson helps us to know the advantages and dangers of living near rivers.</a:t>
+              <a:t>From this situation, the action we are working towards in this lesson is the following: build away from rivers and follow flood warnings.</a:t>
             </a:r>
             <a:endParaRPr lang="en-US" dirty="0"/>
           </a:p>
@@ -1433,7 +1434,7 @@
           <a:p>
             <a:r>
               <a:rPr lang="en-US" dirty="0"/>
-              <a:t>Activity 1. Look carefully at this picture: rice fields on a floodplain. Observe every detail before I ask the question.</a:t>
+              <a:t>Why is this lesson important for you? This lesson helps us to know the advantages and dangers of living near rivers.</a:t>
             </a:r>
             <a:endParaRPr lang="en-US" dirty="0"/>
           </a:p>
@@ -1609,7 +1610,7 @@
           <a:p>
             <a:r>
               <a:rPr lang="en-US" dirty="0"/>
-              <a:t>Here is the question for Activity 1: Why are floodplains good for farming? Take one minute to think and write your answer in your rough notebook.</a:t>
+              <a:t>Activity 1. Look carefully at this picture: rice fields on a floodplain. Observe every detail before I ask the question.</a:t>
             </a:r>
             <a:endParaRPr lang="en-US" dirty="0"/>
           </a:p>
@@ -1697,7 +1698,7 @@
           <a:p>
             <a:r>
               <a:rPr lang="en-US" dirty="0"/>
-              <a:t>Let us check the answer together. The soil is fertile (alluvium) and there is water.</a:t>
+              <a:t>Here is the question for Activity 1: Why are floodplains good for farming? Take one minute to think and write your answer in your rough notebook.</a:t>
             </a:r>
             <a:endParaRPr lang="en-US" dirty="0"/>
           </a:p>
@@ -1785,7 +1786,7 @@
           <a:p>
             <a:r>
               <a:rPr lang="en-US" dirty="0"/>
-              <a:t>Activity 2. Look carefully at this picture: a flooded area. Observe every detail before I ask the question.</a:t>
+              <a:t>Let us check the answer together. The soil is fertile (alluvium) and there is water.</a:t>
             </a:r>
             <a:endParaRPr lang="en-US" dirty="0"/>
           </a:p>
@@ -1873,7 +1874,7 @@
           <a:p>
             <a:r>
               <a:rPr lang="en-US" dirty="0"/>
-              <a:t>Here is the question for Activity 2: What problems do floods cause to people? Take one minute to think and write your answer in your rough notebook.</a:t>
+              <a:t>Activity 2. Look carefully at this picture: a flooded area. Observe every detail before I ask the question.</a:t>
             </a:r>
             <a:endParaRPr lang="en-US" dirty="0"/>
           </a:p>
@@ -1961,7 +1962,7 @@
           <a:p>
             <a:r>
               <a:rPr lang="en-US" dirty="0"/>
-              <a:t>Let us check the answer together. They destroy houses and crops and spread diseases.</a:t>
+              <a:t>Here is the question for Activity 2: What problems do floods cause to people? Take one minute to think and write your answer in your rough notebook.</a:t>
             </a:r>
             <a:endParaRPr lang="en-US" dirty="0"/>
           </a:p>
@@ -2049,7 +2050,7 @@
           <a:p>
             <a:r>
               <a:rPr lang="en-US" dirty="0"/>
-              <a:t>Activity 3. Look carefully at this picture: a raised bank along a river. Observe every detail before I ask the question.</a:t>
+              <a:t>Let us check the answer together. They destroy houses and crops and spread diseases.</a:t>
             </a:r>
             <a:endParaRPr lang="en-US" dirty="0"/>
           </a:p>
@@ -2137,7 +2138,7 @@
           <a:p>
             <a:r>
               <a:rPr lang="en-US" dirty="0"/>
-              <a:t>Here is the question for Activity 3: How does this raised bank protect the land? Take one minute to think and write your answer in your rough notebook.</a:t>
+              <a:t>Activity 3. Look carefully at this picture: a raised bank along a river. Observe every detail before I ask the question.</a:t>
             </a:r>
             <a:endParaRPr lang="en-US" dirty="0"/>
           </a:p>
@@ -2225,7 +2226,7 @@
           <a:p>
             <a:r>
               <a:rPr lang="en-US" dirty="0"/>
-              <a:t>Let us check the answer together. It stops the river from flooding the land behind it.</a:t>
+              <a:t>Here is the question for Activity 3: How does this raised bank protect the land? Take one minute to think and write your answer in your rough notebook.</a:t>
             </a:r>
             <a:endParaRPr lang="en-US" dirty="0"/>
           </a:p>
@@ -2313,7 +2314,7 @@
           <a:p>
             <a:r>
               <a:rPr lang="en-US" dirty="0"/>
-              <a:t>Now we are going to copy the board summary. Write the title and the headings neatly in your notebooks. I will give you enough time for each slide, so do not rush.</a:t>
+              <a:t>Let us check the answer together. It stops the river from flooding the land behind it.</a:t>
             </a:r>
             <a:endParaRPr lang="en-US" dirty="0"/>
           </a:p>
@@ -2401,7 +2402,7 @@
           <a:p>
             <a:r>
               <a:rPr lang="en-US" dirty="0"/>
-              <a:t>Let us copy the definitions. The key terms of this lesson are defined as follows. On this slide we have Floodplain and Flood. Write each point on a new line, with the key term first, and explain it in your own words when we revise. When you finish, we go to the next slide.</a:t>
+              <a:t>Now we are going to copy the board summary. Write the title and the headings neatly in your notebooks. I will give you enough time for each slide, so do not rush.</a:t>
             </a:r>
             <a:endParaRPr lang="en-US" dirty="0"/>
           </a:p>
@@ -2577,7 +2578,7 @@
           <a:p>
             <a:r>
               <a:rPr lang="en-US" dirty="0"/>
-              <a:t>We continue with the definitions. On this slide we have Dyke. Write each point on a new line, with the key term first, and explain it in your own words when we revise.</a:t>
+              <a:t>Let us copy the definitions. The key terms of this lesson are defined as follows. On this slide we have Floodplain and Flood. Write each point on a new line, with the key term first, and explain it in your own words when we revise. When you finish, we go to the next slide.</a:t>
             </a:r>
             <a:endParaRPr lang="en-US" dirty="0"/>
           </a:p>
@@ -2665,7 +2666,7 @@
           <a:p>
             <a:r>
               <a:rPr lang="en-US" dirty="0"/>
-              <a:t>Let us copy Importance of Rivers and Floodplains to Man. Rivers and floodplains are important to man for the following reasons. Copy the point on Farming on the left, then draw the diagram on the right: rice fields on a floodplain. Give it a title and label it clearly.</a:t>
+              <a:t>We continue with the definitions. On this slide we have Dyke. Write each point on a new line, with the key term first, and explain it in your own words when we revise.</a:t>
             </a:r>
             <a:endParaRPr lang="en-US" dirty="0"/>
           </a:p>
@@ -2753,7 +2754,7 @@
           <a:p>
             <a:r>
               <a:rPr lang="en-US" dirty="0"/>
-              <a:t>We continue with Importance of Rivers and Floodplains to Man. On this slide we have Water supply and Fishing. Write each point on a new line, with the key term first, and explain it in your own words when we revise.</a:t>
+              <a:t>Let us copy Importance of Rivers and Floodplains to Man. Rivers and floodplains are important to man for the following reasons. Copy the point on Farming on the left, then draw the diagram on the right: rice fields on a floodplain. Give it a title and label it clearly.</a:t>
             </a:r>
             <a:endParaRPr lang="en-US" dirty="0"/>
           </a:p>
@@ -2841,7 +2842,7 @@
           <a:p>
             <a:r>
               <a:rPr lang="en-US" dirty="0"/>
-              <a:t>Copy the point on Energy on the left, then draw the diagram on the right: the Lagdo Dam. Give it a title and label it clearly.</a:t>
+              <a:t>We continue with Importance of Rivers and Floodplains to Man. On this slide we have Water supply and Fishing. Write each point on a new line, with the key term first, and explain it in your own words when we revise.</a:t>
             </a:r>
             <a:endParaRPr lang="en-US" dirty="0"/>
           </a:p>
@@ -2929,7 +2930,7 @@
           <a:p>
             <a:r>
               <a:rPr lang="en-US" dirty="0"/>
-              <a:t>We continue with Importance of Rivers and Floodplains to Man. On this slide we have Transport and Settlement. Write each point on a new line, with the key term first, and explain it in your own words when we revise.</a:t>
+              <a:t>Copy the point on Energy on the left, then draw the diagram on the right: the Lagdo Dam. Give it a title and label it clearly.</a:t>
             </a:r>
             <a:endParaRPr lang="en-US" dirty="0"/>
           </a:p>
@@ -3017,7 +3018,7 @@
           <a:p>
             <a:r>
               <a:rPr lang="en-US" dirty="0"/>
-              <a:t>Let us copy Problems of Living in Floodplains. People in floodplains face the following problems. Copy the point on Floods on the left, then draw the diagram on the right: a flooded area. Give it a title and label it clearly.</a:t>
+              <a:t>We continue with Importance of Rivers and Floodplains to Man. On this slide we have Transport and Settlement. Write each point on a new line, with the key term first, and explain it in your own words when we revise.</a:t>
             </a:r>
             <a:endParaRPr lang="en-US" dirty="0"/>
           </a:p>
@@ -3105,7 +3106,7 @@
           <a:p>
             <a:r>
               <a:rPr lang="en-US" dirty="0"/>
-              <a:t>We continue with Problems of Living in Floodplains. On this slide we have Loss of life, Diseases and Bank collapse and silting. Write each point on a new line, with the key term first, and explain it in your own words when we revise. When you finish, we go to the next slide.</a:t>
+              <a:t>Let us copy Problems of Living in Floodplains. People in floodplains face the following problems. Copy the point on Floods on the left, then draw the diagram on the right: a flooded area. Give it a title and label it clearly.</a:t>
             </a:r>
             <a:endParaRPr lang="en-US" dirty="0"/>
           </a:p>
@@ -3193,7 +3194,7 @@
           <a:p>
             <a:r>
               <a:rPr lang="en-US" dirty="0"/>
-              <a:t>We continue with Problems of Living in Floodplains. On this slide we have Displacement. Write each point on a new line, with the key term first, and explain it in your own words when we revise.</a:t>
+              <a:t>We continue with Problems of Living in Floodplains. On this slide we have Loss of life, Diseases and Bank collapse and silting. Write each point on a new line, with the key term first, and explain it in your own words when we revise. When you finish, we go to the next slide.</a:t>
             </a:r>
             <a:endParaRPr lang="en-US" dirty="0"/>
           </a:p>
@@ -3281,7 +3282,7 @@
           <a:p>
             <a:r>
               <a:rPr lang="en-US" dirty="0"/>
-              <a:t>Let us copy Solutions to the Problems of Living in Floodplains. The following solutions reduce these problems. Copy the point on Dykes and raised banks on the left, then draw the diagram on the right: a raised bank. Give it a title and label it clearly.</a:t>
+              <a:t>We continue with Problems of Living in Floodplains. On this slide we have Displacement. Write each point on a new line, with the key term first, and explain it in your own words when we revise.</a:t>
             </a:r>
             <a:endParaRPr lang="en-US" dirty="0"/>
           </a:p>
@@ -3369,7 +3370,7 @@
           <a:p>
             <a:r>
               <a:rPr lang="en-US" dirty="0"/>
-              <a:t>We continue with Solutions to the Problems of Living in Floodplains. On this slide we have Dams, Warnings and Safe building. Write each point on a new line, with the key term first, and explain it in your own words when we revise. When you finish, we go to the next slide.</a:t>
+              <a:t>Let us copy Solutions to the Problems of Living in Floodplains. The following solutions reduce these problems. Copy the point on Dykes and raised banks on the left, then draw the diagram on the right: a raised bank. Give it a title and label it clearly.</a:t>
             </a:r>
             <a:endParaRPr lang="en-US" dirty="0"/>
           </a:p>
@@ -3545,7 +3546,7 @@
           <a:p>
             <a:r>
               <a:rPr lang="en-US" dirty="0"/>
-              <a:t>We continue with Solutions to the Problems of Living in Floodplains. On this slide we have Trees and clean channels. Write each point on a new line, with the key term first, and explain it in your own words when we revise.</a:t>
+              <a:t>We continue with Solutions to the Problems of Living in Floodplains. On this slide we have Dams, Warnings and Safe building. Write each point on a new line, with the key term first, and explain it in your own words when we revise. When you finish, we go to the next slide.</a:t>
             </a:r>
             <a:endParaRPr lang="en-US" dirty="0"/>
           </a:p>
@@ -3633,7 +3634,7 @@
           <a:p>
             <a:r>
               <a:rPr lang="en-US" dirty="0"/>
-              <a:t>Now let us check what you have understood. Question 1: Give one advantage of living on a floodplain. Answer in your exercise book.</a:t>
+              <a:t>We continue with Solutions to the Problems of Living in Floodplains. On this slide we have Trees and clean channels. Write each point on a new line, with the key term first, and explain it in your own words when we revise.</a:t>
             </a:r>
             <a:endParaRPr lang="en-US" dirty="0"/>
           </a:p>
@@ -3721,7 +3722,7 @@
           <a:p>
             <a:r>
               <a:rPr lang="en-US" dirty="0"/>
-              <a:t>The expected answer is: the soil is fertile. If you got it right, well done.</a:t>
+              <a:t>Now let us check what you have understood. Question 1: Give one advantage of living on a floodplain. Answer in your exercise book.</a:t>
             </a:r>
             <a:endParaRPr lang="en-US" dirty="0"/>
           </a:p>
@@ -3809,7 +3810,7 @@
           <a:p>
             <a:r>
               <a:rPr lang="en-US" dirty="0"/>
-              <a:t>Now let us check what you have understood. Question 2: Give two solutions to floods. Answer in your exercise book.</a:t>
+              <a:t>The expected answer is: the soil is fertile. If you got it right, well done.</a:t>
             </a:r>
             <a:endParaRPr lang="en-US" dirty="0"/>
           </a:p>
@@ -3897,7 +3898,7 @@
           <a:p>
             <a:r>
               <a:rPr lang="en-US" dirty="0"/>
-              <a:t>The expected answer is: build dykes and give flood warnings. If you got it right, well done.</a:t>
+              <a:t>Now let us check what you have understood. Question 2: Give two solutions to floods. Answer in your exercise book.</a:t>
             </a:r>
             <a:endParaRPr lang="en-US" dirty="0"/>
           </a:p>
@@ -3985,7 +3986,7 @@
           <a:p>
             <a:r>
               <a:rPr lang="en-US" dirty="0"/>
-              <a:t>For those who need more practice, fill in the blanks in your exercise book. The answers are: number 1, alluvium; number 2, dyke; number 3, Lagdo.</a:t>
+              <a:t>The expected answer is: build dykes and give flood warnings. If you got it right, well done.</a:t>
             </a:r>
             <a:endParaRPr lang="en-US" dirty="0"/>
           </a:p>
@@ -4073,7 +4074,7 @@
           <a:p>
             <a:r>
               <a:rPr lang="en-US" dirty="0"/>
-              <a:t>For your homework: Name the two types of waves. We shall correct it at the beginning of our next lesson.</a:t>
+              <a:t>For those who need more practice, fill in the blanks in your exercise book. The answers are: number 1, alluvium; number 2, dyke; number 3, Lagdo.</a:t>
             </a:r>
             <a:endParaRPr lang="en-US" dirty="0"/>
           </a:p>
@@ -4161,7 +4162,7 @@
           <a:p>
             <a:r>
               <a:rPr lang="en-US" dirty="0"/>
-              <a:t>Our next lesson will be on Lesson 23: Wave Action in Coastal Areas. Thank you for your attention, and see you next time.</a:t>
+              <a:t>For your homework: Name the two types of waves. We shall correct it at the beginning of our next lesson.</a:t>
             </a:r>
             <a:endParaRPr lang="en-US" dirty="0"/>
           </a:p>
@@ -4249,7 +4250,7 @@
           <a:p>
             <a:r>
               <a:rPr lang="en-US" dirty="0"/>
-              <a:t>Let us play the bilingual game. I say a word in English, and you give me the French word. Then we do the reverse.</a:t>
+              <a:t>Our next lesson will be on Lesson 23: Wave Action in Coastal Areas. Thank you for your attention, and see you next time.</a:t>
             </a:r>
             <a:endParaRPr lang="en-US" dirty="0"/>
           </a:p>
@@ -4337,7 +4338,7 @@
           <a:p>
             <a:r>
               <a:rPr lang="en-US" dirty="0"/>
-              <a:t>I record this information in the official logbook of the class after the lesson.</a:t>
+              <a:t>Let us play the bilingual game. I say a word in English, and you give me the French word. Then we do the reverse.</a:t>
             </a:r>
             <a:endParaRPr lang="en-US" dirty="0"/>
           </a:p>
@@ -4513,7 +4514,7 @@
           <a:p>
             <a:r>
               <a:rPr lang="en-US" dirty="0"/>
-              <a:t>I complete the second page of the logbook: the matter taught, the evaluation, the homework and the attendance.</a:t>
+              <a:t>I record this information in the official logbook of the class after the lesson.</a:t>
             </a:r>
             <a:endParaRPr lang="en-US" dirty="0"/>
           </a:p>
@@ -4601,7 +4602,7 @@
           <a:p>
             <a:r>
               <a:rPr lang="en-US" dirty="0"/>
-              <a:t>This slide is for me, the teacher: it gives the timing of the lesson and what to do if the projector is not available.</a:t>
+              <a:t>I complete the second page of the logbook: the matter taught, the evaluation, the homework and the attendance.</a:t>
             </a:r>
             <a:endParaRPr lang="en-US" dirty="0"/>
           </a:p>
@@ -4689,7 +4690,7 @@
           <a:p>
             <a:r>
               <a:rPr lang="en-US" dirty="0"/>
-              <a:t>These are the references and picture credits used to prepare this lesson.</a:t>
+              <a:t>This slide is for me, the teacher: it gives the timing of the lesson and what to do if the projector is not available.</a:t>
             </a:r>
             <a:endParaRPr lang="en-US" dirty="0"/>
           </a:p>
@@ -4713,6 +4714,94 @@
             <a:fld id="{F7021451-1387-4CA6-816F-3879F97B5CBC}" type="slidenum">
               <a:rPr lang="en-US"/>
               <a:t>52</a:t>
+            </a:fld>
+            <a:endParaRPr lang="en-US"/>
+          </a:p>
+        </p:txBody>
+      </p:sp>
+    </p:spTree>
+    <p:extLst>
+      <p:ext uri="{BB962C8B-B14F-4D97-AF65-F5344CB8AC3E}">
+        <p14:creationId xmlns:p14="http://schemas.microsoft.com/office/powerpoint/2010/main" val="1024086991"/>
+      </p:ext>
+    </p:extLst>
+  </p:cSld>
+  <p:clrMapOvr>
+    <a:masterClrMapping/>
+  </p:clrMapOvr>
+</p:notes>
+</file>
+
+<file path=ppt/notesSlides/notesSlide53.xml><?xml version="1.0" encoding="utf-8"?>
+<p:notes xmlns:a="http://schemas.openxmlformats.org/drawingml/2006/main" xmlns:r="http://schemas.openxmlformats.org/officeDocument/2006/relationships" xmlns:p="http://schemas.openxmlformats.org/presentationml/2006/main">
+  <p:cSld>
+    <p:spTree>
+      <p:nvGrpSpPr>
+        <p:cNvPr id="1" name=""/>
+        <p:cNvGrpSpPr/>
+        <p:nvPr/>
+      </p:nvGrpSpPr>
+      <p:grpSpPr>
+        <a:xfrm>
+          <a:off x="0" y="0"/>
+          <a:ext cx="0" cy="0"/>
+          <a:chOff x="0" y="0"/>
+          <a:chExt cx="0" cy="0"/>
+        </a:xfrm>
+      </p:grpSpPr>
+      <p:sp>
+        <p:nvSpPr>
+          <p:cNvPr id="2" name="Slide Image Placeholder 1"/>
+          <p:cNvSpPr>
+            <a:spLocks noGrp="1" noRot="1" noChangeAspect="1"/>
+          </p:cNvSpPr>
+          <p:nvPr>
+            <p:ph type="sldImg"/>
+          </p:nvPr>
+        </p:nvSpPr>
+        <p:spPr/>
+      </p:sp>
+      <p:sp>
+        <p:nvSpPr>
+          <p:cNvPr id="3" name="Notes Placeholder 2"/>
+          <p:cNvSpPr>
+            <a:spLocks noGrp="1"/>
+          </p:cNvSpPr>
+          <p:nvPr>
+            <p:ph type="body" idx="1"/>
+          </p:nvPr>
+        </p:nvSpPr>
+        <p:spPr/>
+        <p:txBody>
+          <a:bodyPr/>
+          <a:lstStyle/>
+          <a:p>
+            <a:r>
+              <a:rPr lang="en-US" dirty="0"/>
+              <a:t>These are the references and picture credits used to prepare this lesson.</a:t>
+            </a:r>
+            <a:endParaRPr lang="en-US" dirty="0"/>
+          </a:p>
+        </p:txBody>
+      </p:sp>
+      <p:sp>
+        <p:nvSpPr>
+          <p:cNvPr id="4" name="Slide Number Placeholder 3"/>
+          <p:cNvSpPr>
+            <a:spLocks noGrp="1"/>
+          </p:cNvSpPr>
+          <p:nvPr>
+            <p:ph type="sldNum" sz="quarter" idx="10"/>
+          </p:nvPr>
+        </p:nvSpPr>
+        <p:spPr/>
+        <p:txBody>
+          <a:bodyPr/>
+          <a:lstStyle/>
+          <a:p>
+            <a:fld id="{F7021451-1387-4CA6-816F-3879F97B5CBC}" type="slidenum">
+              <a:rPr lang="en-US"/>
+              <a:t>53</a:t>
             </a:fld>
             <a:endParaRPr lang="en-US"/>
           </a:p>
@@ -6421,7 +6510,7 @@
         <p:spPr>
           <a:xfrm>
             <a:off x="0" y="658368"/>
-            <a:ext cx="2468880" cy="5833872"/>
+            <a:ext cx="3840480" cy="5833872"/>
           </a:xfrm>
           <a:prstGeom prst="rect">
             <a:avLst/>
@@ -6436,8 +6525,8 @@
         </p:nvSpPr>
         <p:spPr>
           <a:xfrm>
-            <a:off x="2697480" y="1005840"/>
-            <a:ext cx="9174175" cy="731520"/>
+            <a:off x="4069080" y="1005840"/>
+            <a:ext cx="7802575" cy="731520"/>
           </a:xfrm>
           <a:prstGeom prst="rect">
             <a:avLst/>
@@ -6477,8 +6566,8 @@
         </p:nvSpPr>
         <p:spPr>
           <a:xfrm>
-            <a:off x="2697480" y="1783080"/>
-            <a:ext cx="9174175" cy="4663440"/>
+            <a:off x="4069080" y="1783080"/>
+            <a:ext cx="7802575" cy="4663440"/>
           </a:xfrm>
           <a:prstGeom prst="rect">
             <a:avLst/>
@@ -6526,26 +6615,6 @@
                 <a:cs typeface="Times New Roman" pitchFamily="34" charset="-120"/>
               </a:rPr>
               <a:t>Yet every year farmers come back to plant rice and onions there.</a:t>
-            </a:r>
-            <a:endParaRPr lang="en-US" sz="4000" dirty="0"/>
-          </a:p>
-          <a:p>
-            <a:pPr algn="l" indent="0" marL="0">
-              <a:spcAft>
-                <a:spcPts val="800"/>
-              </a:spcAft>
-              <a:buNone/>
-            </a:pPr>
-            <a:r>
-              <a:rPr lang="en-US" sz="4000" dirty="0">
-                <a:solidFill>
-                  <a:srgbClr val="111111"/>
-                </a:solidFill>
-                <a:latin typeface="Times New Roman" pitchFamily="34" charset="0"/>
-                <a:ea typeface="Times New Roman" pitchFamily="34" charset="-122"/>
-                <a:cs typeface="Times New Roman" pitchFamily="34" charset="-120"/>
-              </a:rPr>
-              <a:t>"</a:t>
             </a:r>
             <a:endParaRPr lang="en-US" sz="4000" dirty="0"/>
           </a:p>
@@ -6722,7 +6791,7 @@
                 <a:ea typeface="Times New Roman" pitchFamily="34" charset="-122"/>
                 <a:cs typeface="Times New Roman" pitchFamily="34" charset="-120"/>
               </a:rPr>
-              <a:t>Situation: Question 1</a:t>
+              <a:t>Situation in Real Life (continued)</a:t>
             </a:r>
             <a:endParaRPr lang="en-US" sz="3600" dirty="0"/>
           </a:p>
@@ -6764,7 +6833,7 @@
                 <a:ea typeface="Times New Roman" pitchFamily="34" charset="-122"/>
                 <a:cs typeface="Times New Roman" pitchFamily="34" charset="-120"/>
               </a:rPr>
-              <a:t>What is the problem in the situation?</a:t>
+              <a:t>A farmer asks: "Why do we stay on the floodplain, and how can we live there safely?"</a:t>
             </a:r>
             <a:endParaRPr lang="en-US" sz="4000" dirty="0"/>
           </a:p>
@@ -6941,7 +7010,7 @@
                 <a:ea typeface="Times New Roman" pitchFamily="34" charset="-122"/>
                 <a:cs typeface="Times New Roman" pitchFamily="34" charset="-120"/>
               </a:rPr>
-              <a:t>Answer</a:t>
+              <a:t>Situation: Question 1</a:t>
             </a:r>
             <a:endParaRPr lang="en-US" sz="3600" dirty="0"/>
           </a:p>
@@ -6983,7 +7052,7 @@
                 <a:ea typeface="Times New Roman" pitchFamily="34" charset="-122"/>
                 <a:cs typeface="Times New Roman" pitchFamily="34" charset="-120"/>
               </a:rPr>
-              <a:t>People farm and live on the floodplain although floods destroy their farms and houses.</a:t>
+              <a:t>What is the problem in the situation?</a:t>
             </a:r>
             <a:endParaRPr lang="en-US" sz="4000" dirty="0"/>
           </a:p>
@@ -7160,7 +7229,7 @@
                 <a:ea typeface="Times New Roman" pitchFamily="34" charset="-122"/>
                 <a:cs typeface="Times New Roman" pitchFamily="34" charset="-120"/>
               </a:rPr>
-              <a:t>Situation: Question 2</a:t>
+              <a:t>Answer</a:t>
             </a:r>
             <a:endParaRPr lang="en-US" sz="3600" dirty="0"/>
           </a:p>
@@ -7202,7 +7271,7 @@
                 <a:ea typeface="Times New Roman" pitchFamily="34" charset="-122"/>
                 <a:cs typeface="Times New Roman" pitchFamily="34" charset="-120"/>
               </a:rPr>
-              <a:t>What caused the flood of 2012?</a:t>
+              <a:t>People farm and live on the floodplain although floods destroy their farms and houses.</a:t>
             </a:r>
             <a:endParaRPr lang="en-US" sz="4000" dirty="0"/>
           </a:p>
@@ -7379,7 +7448,7 @@
                 <a:ea typeface="Times New Roman" pitchFamily="34" charset="-122"/>
                 <a:cs typeface="Times New Roman" pitchFamily="34" charset="-120"/>
               </a:rPr>
-              <a:t>Answer</a:t>
+              <a:t>Situation: Question 2</a:t>
             </a:r>
             <a:endParaRPr lang="en-US" sz="3600" dirty="0"/>
           </a:p>
@@ -7421,7 +7490,7 @@
                 <a:ea typeface="Times New Roman" pitchFamily="34" charset="-122"/>
                 <a:cs typeface="Times New Roman" pitchFamily="34" charset="-120"/>
               </a:rPr>
-              <a:t>Heavy rain and water released from the Lagdo Dam.</a:t>
+              <a:t>What caused the flood of 2012?</a:t>
             </a:r>
             <a:endParaRPr lang="en-US" sz="4000" dirty="0"/>
           </a:p>
@@ -7598,7 +7667,7 @@
                 <a:ea typeface="Times New Roman" pitchFamily="34" charset="-122"/>
                 <a:cs typeface="Times New Roman" pitchFamily="34" charset="-120"/>
               </a:rPr>
-              <a:t>Situation: Question 3</a:t>
+              <a:t>Answer</a:t>
             </a:r>
             <a:endParaRPr lang="en-US" sz="3600" dirty="0"/>
           </a:p>
@@ -7640,7 +7709,7 @@
                 <a:ea typeface="Times New Roman" pitchFamily="34" charset="-122"/>
                 <a:cs typeface="Times New Roman" pitchFamily="34" charset="-120"/>
               </a:rPr>
-              <a:t>Why do farmers come back?</a:t>
+              <a:t>Heavy rain and water released from the Lagdo Dam.</a:t>
             </a:r>
             <a:endParaRPr lang="en-US" sz="4000" dirty="0"/>
           </a:p>
@@ -7817,7 +7886,7 @@
                 <a:ea typeface="Times New Roman" pitchFamily="34" charset="-122"/>
                 <a:cs typeface="Times New Roman" pitchFamily="34" charset="-120"/>
               </a:rPr>
-              <a:t>Possible Answer</a:t>
+              <a:t>Situation: Question 3</a:t>
             </a:r>
             <a:endParaRPr lang="en-US" sz="3600" dirty="0"/>
           </a:p>
@@ -7859,7 +7928,7 @@
                 <a:ea typeface="Times New Roman" pitchFamily="34" charset="-122"/>
                 <a:cs typeface="Times New Roman" pitchFamily="34" charset="-120"/>
               </a:rPr>
-              <a:t>The floodplain soil is fertile and there is water.</a:t>
+              <a:t>Why do farmers come back?</a:t>
             </a:r>
             <a:endParaRPr lang="en-US" sz="4000" dirty="0"/>
           </a:p>
@@ -7971,7 +8040,7 @@
                 <a:ea typeface="Calibri" pitchFamily="34" charset="-122"/>
                 <a:cs typeface="Calibri" pitchFamily="34" charset="-120"/>
               </a:rPr>
-              <a:t>ACTION TO TAKE</a:t>
+              <a:t>REAL-LIFE SITUATION</a:t>
             </a:r>
             <a:endParaRPr lang="en-US" sz="1400" dirty="0"/>
           </a:p>
@@ -8036,7 +8105,7 @@
                 <a:ea typeface="Times New Roman" pitchFamily="34" charset="-122"/>
                 <a:cs typeface="Times New Roman" pitchFamily="34" charset="-120"/>
               </a:rPr>
-              <a:t>Action to Take</a:t>
+              <a:t>Possible Answer</a:t>
             </a:r>
             <a:endParaRPr lang="en-US" sz="3600" dirty="0"/>
           </a:p>
@@ -8078,7 +8147,7 @@
                 <a:ea typeface="Times New Roman" pitchFamily="34" charset="-122"/>
                 <a:cs typeface="Times New Roman" pitchFamily="34" charset="-120"/>
               </a:rPr>
-              <a:t>Build away from rivers and follow flood warnings.</a:t>
+              <a:t>The floodplain soil is fertile and there is water.</a:t>
             </a:r>
             <a:endParaRPr lang="en-US" sz="4000" dirty="0"/>
           </a:p>
@@ -8190,7 +8259,7 @@
                 <a:ea typeface="Calibri" pitchFamily="34" charset="-122"/>
                 <a:cs typeface="Calibri" pitchFamily="34" charset="-120"/>
               </a:rPr>
-              <a:t>JUSTIFICATION</a:t>
+              <a:t>ACTION TO TAKE</a:t>
             </a:r>
             <a:endParaRPr lang="en-US" sz="1400" dirty="0"/>
           </a:p>
@@ -8255,7 +8324,7 @@
                 <a:ea typeface="Times New Roman" pitchFamily="34" charset="-122"/>
                 <a:cs typeface="Times New Roman" pitchFamily="34" charset="-120"/>
               </a:rPr>
-              <a:t>Justification of the Lesson</a:t>
+              <a:t>Action to Take</a:t>
             </a:r>
             <a:endParaRPr lang="en-US" sz="3600" dirty="0"/>
           </a:p>
@@ -8297,7 +8366,7 @@
                 <a:ea typeface="Times New Roman" pitchFamily="34" charset="-122"/>
                 <a:cs typeface="Times New Roman" pitchFamily="34" charset="-120"/>
               </a:rPr>
-              <a:t>This lesson helps us to know the advantages and dangers of living near rivers.</a:t>
+              <a:t>Build away from rivers and follow flood warnings.</a:t>
             </a:r>
             <a:endParaRPr lang="en-US" sz="4000" dirty="0"/>
           </a:p>
@@ -8409,54 +8478,15 @@
                 <a:ea typeface="Calibri" pitchFamily="34" charset="-122"/>
                 <a:cs typeface="Calibri" pitchFamily="34" charset="-120"/>
               </a:rPr>
-              <a:t>1. IMPORTANCE</a:t>
+              <a:t>JUSTIFICATION</a:t>
             </a:r>
             <a:endParaRPr lang="en-US" sz="1400" dirty="0"/>
-          </a:p>
-        </p:txBody>
-      </p:sp>
-      <p:sp>
-        <p:nvSpPr>
-          <p:cNvPr id="3" name="Text 1"/>
-          <p:cNvSpPr/>
-          <p:nvPr/>
-        </p:nvSpPr>
-        <p:spPr>
-          <a:xfrm>
-            <a:off x="457200" y="1005840"/>
-            <a:ext cx="11277295" cy="731520"/>
-          </a:xfrm>
-          <a:prstGeom prst="rect">
-            <a:avLst/>
-          </a:prstGeom>
-          <a:noFill/>
-          <a:ln/>
-        </p:spPr>
-        <p:txBody>
-          <a:bodyPr wrap="square" lIns="0" tIns="0" rIns="0" bIns="0" rtlCol="0" anchor="ctr"/>
-          <a:lstStyle/>
-          <a:p>
-            <a:pPr algn="ctr" indent="0" marL="0">
-              <a:buNone/>
-            </a:pPr>
-            <a:r>
-              <a:rPr lang="en-US" sz="3600" b="1" dirty="0">
-                <a:solidFill>
-                  <a:srgbClr val="990011"/>
-                </a:solidFill>
-                <a:latin typeface="Times New Roman" pitchFamily="34" charset="0"/>
-                <a:ea typeface="Times New Roman" pitchFamily="34" charset="-122"/>
-                <a:cs typeface="Times New Roman" pitchFamily="34" charset="-120"/>
-              </a:rPr>
-              <a:t>Activity 1</a:t>
-            </a:r>
-            <a:endParaRPr lang="en-US" sz="3600" dirty="0"/>
           </a:p>
         </p:txBody>
       </p:sp>
       <p:pic>
         <p:nvPicPr>
-          <p:cNvPr id="4" name="Image 0" descr="/home/claude/f4/img/v2/f4_ricefield.jpg">    </p:cNvPr>
+          <p:cNvPr id="3" name="Image 0" descr="/home/claude/f4/img/minesec_sheet.png">    </p:cNvPr>
           <p:cNvPicPr>
             <a:picLocks noChangeAspect="1"/>
           </p:cNvPicPr>
@@ -8470,8 +8500,8 @@
         </p:blipFill>
         <p:spPr>
           <a:xfrm>
-            <a:off x="2246610" y="1783080"/>
-            <a:ext cx="7698475" cy="4270248"/>
+            <a:off x="0" y="658368"/>
+            <a:ext cx="5120640" cy="5833872"/>
           </a:xfrm>
           <a:prstGeom prst="rect">
             <a:avLst/>
@@ -8480,14 +8510,14 @@
       </p:pic>
       <p:sp>
         <p:nvSpPr>
-          <p:cNvPr id="5" name="Text 2"/>
+          <p:cNvPr id="4" name="Text 1"/>
           <p:cNvSpPr/>
           <p:nvPr/>
         </p:nvSpPr>
         <p:spPr>
           <a:xfrm>
-            <a:off x="457200" y="6089904"/>
-            <a:ext cx="11277295" cy="347472"/>
+            <a:off x="5349240" y="1005840"/>
+            <a:ext cx="6522415" cy="731520"/>
           </a:xfrm>
           <a:prstGeom prst="rect">
             <a:avLst/>
@@ -8496,24 +8526,68 @@
           <a:ln/>
         </p:spPr>
         <p:txBody>
-          <a:bodyPr wrap="square" lIns="0" tIns="0" rIns="0" bIns="0" rtlCol="0" anchor="ctr"/>
+          <a:bodyPr wrap="square" lIns="0" tIns="0" rIns="0" bIns="0" rtlCol="0" anchor="ctr">
+            <a:normAutofit/>
+          </a:bodyPr>
           <a:lstStyle/>
           <a:p>
             <a:pPr algn="ctr" indent="0" marL="0">
               <a:buNone/>
             </a:pPr>
             <a:r>
-              <a:rPr lang="en-US" sz="1800" i="1" dirty="0">
-                <a:solidFill>
-                  <a:srgbClr val="555555"/>
+              <a:rPr lang="en-US" sz="3600" b="1" dirty="0">
+                <a:solidFill>
+                  <a:srgbClr val="990011"/>
                 </a:solidFill>
                 <a:latin typeface="Times New Roman" pitchFamily="34" charset="0"/>
                 <a:ea typeface="Times New Roman" pitchFamily="34" charset="-122"/>
                 <a:cs typeface="Times New Roman" pitchFamily="34" charset="-120"/>
               </a:rPr>
-              <a:t>Rice fields on a floodplain.</a:t>
-            </a:r>
-            <a:endParaRPr lang="en-US" sz="1800" dirty="0"/>
+              <a:t>Justification of the Lesson</a:t>
+            </a:r>
+            <a:endParaRPr lang="en-US" sz="3600" dirty="0"/>
+          </a:p>
+        </p:txBody>
+      </p:sp>
+      <p:sp>
+        <p:nvSpPr>
+          <p:cNvPr id="5" name="Text 2"/>
+          <p:cNvSpPr/>
+          <p:nvPr/>
+        </p:nvSpPr>
+        <p:spPr>
+          <a:xfrm>
+            <a:off x="5349240" y="1783080"/>
+            <a:ext cx="6522415" cy="4663440"/>
+          </a:xfrm>
+          <a:prstGeom prst="rect">
+            <a:avLst/>
+          </a:prstGeom>
+          <a:noFill/>
+          <a:ln/>
+        </p:spPr>
+        <p:txBody>
+          <a:bodyPr wrap="square" lIns="0" tIns="0" rIns="0" bIns="0" rtlCol="0" anchor="t"/>
+          <a:lstStyle/>
+          <a:p>
+            <a:pPr algn="l" indent="0" marL="0">
+              <a:spcAft>
+                <a:spcPts val="800"/>
+              </a:spcAft>
+              <a:buNone/>
+            </a:pPr>
+            <a:r>
+              <a:rPr lang="en-US" sz="4000" dirty="0">
+                <a:solidFill>
+                  <a:srgbClr val="111111"/>
+                </a:solidFill>
+                <a:latin typeface="Times New Roman" pitchFamily="34" charset="0"/>
+                <a:ea typeface="Times New Roman" pitchFamily="34" charset="-122"/>
+                <a:cs typeface="Times New Roman" pitchFamily="34" charset="-120"/>
+              </a:rPr>
+              <a:t>This lesson helps us to know the advantages and dangers of living near rivers.</a:t>
+            </a:r>
+            <a:endParaRPr lang="en-US" sz="4000" dirty="0"/>
           </a:p>
         </p:txBody>
       </p:sp>
@@ -9224,9 +9298,48 @@
           </a:p>
         </p:txBody>
       </p:sp>
+      <p:sp>
+        <p:nvSpPr>
+          <p:cNvPr id="3" name="Text 1"/>
+          <p:cNvSpPr/>
+          <p:nvPr/>
+        </p:nvSpPr>
+        <p:spPr>
+          <a:xfrm>
+            <a:off x="457200" y="1005840"/>
+            <a:ext cx="11277295" cy="731520"/>
+          </a:xfrm>
+          <a:prstGeom prst="rect">
+            <a:avLst/>
+          </a:prstGeom>
+          <a:noFill/>
+          <a:ln/>
+        </p:spPr>
+        <p:txBody>
+          <a:bodyPr wrap="square" lIns="0" tIns="0" rIns="0" bIns="0" rtlCol="0" anchor="ctr"/>
+          <a:lstStyle/>
+          <a:p>
+            <a:pPr algn="ctr" indent="0" marL="0">
+              <a:buNone/>
+            </a:pPr>
+            <a:r>
+              <a:rPr lang="en-US" sz="3600" b="1" dirty="0">
+                <a:solidFill>
+                  <a:srgbClr val="990011"/>
+                </a:solidFill>
+                <a:latin typeface="Times New Roman" pitchFamily="34" charset="0"/>
+                <a:ea typeface="Times New Roman" pitchFamily="34" charset="-122"/>
+                <a:cs typeface="Times New Roman" pitchFamily="34" charset="-120"/>
+              </a:rPr>
+              <a:t>Activity 1</a:t>
+            </a:r>
+            <a:endParaRPr lang="en-US" sz="3600" dirty="0"/>
+          </a:p>
+        </p:txBody>
+      </p:sp>
       <p:pic>
         <p:nvPicPr>
-          <p:cNvPr id="3" name="Image 0" descr="/home/claude/f4/img/minesec_sheet.png">    </p:cNvPr>
+          <p:cNvPr id="4" name="Image 0" descr="/home/claude/f4/img/v2/f4_ricefield.jpg">    </p:cNvPr>
           <p:cNvPicPr>
             <a:picLocks noChangeAspect="1"/>
           </p:cNvPicPr>
@@ -9240,8 +9353,8 @@
         </p:blipFill>
         <p:spPr>
           <a:xfrm>
-            <a:off x="0" y="658368"/>
-            <a:ext cx="5120640" cy="5833872"/>
+            <a:off x="2246610" y="1783080"/>
+            <a:ext cx="7698475" cy="4270248"/>
           </a:xfrm>
           <a:prstGeom prst="rect">
             <a:avLst/>
@@ -9250,14 +9363,14 @@
       </p:pic>
       <p:sp>
         <p:nvSpPr>
-          <p:cNvPr id="4" name="Text 1"/>
+          <p:cNvPr id="5" name="Text 2"/>
           <p:cNvSpPr/>
           <p:nvPr/>
         </p:nvSpPr>
         <p:spPr>
           <a:xfrm>
-            <a:off x="5349240" y="1005840"/>
-            <a:ext cx="6522415" cy="731520"/>
+            <a:off x="457200" y="6089904"/>
+            <a:ext cx="11277295" cy="347472"/>
           </a:xfrm>
           <a:prstGeom prst="rect">
             <a:avLst/>
@@ -9266,68 +9379,24 @@
           <a:ln/>
         </p:spPr>
         <p:txBody>
-          <a:bodyPr wrap="square" lIns="0" tIns="0" rIns="0" bIns="0" rtlCol="0" anchor="ctr">
-            <a:normAutofit/>
-          </a:bodyPr>
+          <a:bodyPr wrap="square" lIns="0" tIns="0" rIns="0" bIns="0" rtlCol="0" anchor="ctr"/>
           <a:lstStyle/>
           <a:p>
             <a:pPr algn="ctr" indent="0" marL="0">
               <a:buNone/>
             </a:pPr>
             <a:r>
-              <a:rPr lang="en-US" sz="3600" b="1" dirty="0">
-                <a:solidFill>
-                  <a:srgbClr val="990011"/>
+              <a:rPr lang="en-US" sz="1800" i="1" dirty="0">
+                <a:solidFill>
+                  <a:srgbClr val="555555"/>
                 </a:solidFill>
                 <a:latin typeface="Times New Roman" pitchFamily="34" charset="0"/>
                 <a:ea typeface="Times New Roman" pitchFamily="34" charset="-122"/>
                 <a:cs typeface="Times New Roman" pitchFamily="34" charset="-120"/>
               </a:rPr>
-              <a:t>Activity 1: Question</a:t>
-            </a:r>
-            <a:endParaRPr lang="en-US" sz="3600" dirty="0"/>
-          </a:p>
-        </p:txBody>
-      </p:sp>
-      <p:sp>
-        <p:nvSpPr>
-          <p:cNvPr id="5" name="Text 2"/>
-          <p:cNvSpPr/>
-          <p:nvPr/>
-        </p:nvSpPr>
-        <p:spPr>
-          <a:xfrm>
-            <a:off x="5349240" y="1783080"/>
-            <a:ext cx="6522415" cy="4663440"/>
-          </a:xfrm>
-          <a:prstGeom prst="rect">
-            <a:avLst/>
-          </a:prstGeom>
-          <a:noFill/>
-          <a:ln/>
-        </p:spPr>
-        <p:txBody>
-          <a:bodyPr wrap="square" lIns="0" tIns="0" rIns="0" bIns="0" rtlCol="0" anchor="t"/>
-          <a:lstStyle/>
-          <a:p>
-            <a:pPr algn="l" indent="0" marL="0">
-              <a:spcAft>
-                <a:spcPts val="800"/>
-              </a:spcAft>
-              <a:buNone/>
-            </a:pPr>
-            <a:r>
-              <a:rPr lang="en-US" sz="4000" dirty="0">
-                <a:solidFill>
-                  <a:srgbClr val="111111"/>
-                </a:solidFill>
-                <a:latin typeface="Times New Roman" pitchFamily="34" charset="0"/>
-                <a:ea typeface="Times New Roman" pitchFamily="34" charset="-122"/>
-                <a:cs typeface="Times New Roman" pitchFamily="34" charset="-120"/>
-              </a:rPr>
-              <a:t>Why are floodplains good for farming?</a:t>
-            </a:r>
-            <a:endParaRPr lang="en-US" sz="4000" dirty="0"/>
+              <a:t>Rice fields on a floodplain.</a:t>
+            </a:r>
+            <a:endParaRPr lang="en-US" sz="1800" dirty="0"/>
           </a:p>
         </p:txBody>
       </p:sp>
@@ -9502,7 +9571,7 @@
                 <a:ea typeface="Times New Roman" pitchFamily="34" charset="-122"/>
                 <a:cs typeface="Times New Roman" pitchFamily="34" charset="-120"/>
               </a:rPr>
-              <a:t>Activity 1: Answer</a:t>
+              <a:t>Activity 1: Question</a:t>
             </a:r>
             <a:endParaRPr lang="en-US" sz="3600" dirty="0"/>
           </a:p>
@@ -9544,7 +9613,7 @@
                 <a:ea typeface="Times New Roman" pitchFamily="34" charset="-122"/>
                 <a:cs typeface="Times New Roman" pitchFamily="34" charset="-120"/>
               </a:rPr>
-              <a:t>The soil is fertile (alluvium) and there is water.</a:t>
+              <a:t>Why are floodplains good for farming?</a:t>
             </a:r>
             <a:endParaRPr lang="en-US" sz="4000" dirty="0"/>
           </a:p>
@@ -9656,54 +9725,15 @@
                 <a:ea typeface="Calibri" pitchFamily="34" charset="-122"/>
                 <a:cs typeface="Calibri" pitchFamily="34" charset="-120"/>
               </a:rPr>
-              <a:t>2. PROBLEMS</a:t>
+              <a:t>1. IMPORTANCE</a:t>
             </a:r>
             <a:endParaRPr lang="en-US" sz="1400" dirty="0"/>
-          </a:p>
-        </p:txBody>
-      </p:sp>
-      <p:sp>
-        <p:nvSpPr>
-          <p:cNvPr id="3" name="Text 1"/>
-          <p:cNvSpPr/>
-          <p:nvPr/>
-        </p:nvSpPr>
-        <p:spPr>
-          <a:xfrm>
-            <a:off x="457200" y="1005840"/>
-            <a:ext cx="11277295" cy="731520"/>
-          </a:xfrm>
-          <a:prstGeom prst="rect">
-            <a:avLst/>
-          </a:prstGeom>
-          <a:noFill/>
-          <a:ln/>
-        </p:spPr>
-        <p:txBody>
-          <a:bodyPr wrap="square" lIns="0" tIns="0" rIns="0" bIns="0" rtlCol="0" anchor="ctr"/>
-          <a:lstStyle/>
-          <a:p>
-            <a:pPr algn="ctr" indent="0" marL="0">
-              <a:buNone/>
-            </a:pPr>
-            <a:r>
-              <a:rPr lang="en-US" sz="3600" b="1" dirty="0">
-                <a:solidFill>
-                  <a:srgbClr val="990011"/>
-                </a:solidFill>
-                <a:latin typeface="Times New Roman" pitchFamily="34" charset="0"/>
-                <a:ea typeface="Times New Roman" pitchFamily="34" charset="-122"/>
-                <a:cs typeface="Times New Roman" pitchFamily="34" charset="-120"/>
-              </a:rPr>
-              <a:t>Activity 2</a:t>
-            </a:r>
-            <a:endParaRPr lang="en-US" sz="3600" dirty="0"/>
           </a:p>
         </p:txBody>
       </p:sp>
       <p:pic>
         <p:nvPicPr>
-          <p:cNvPr id="4" name="Image 0" descr="/home/claude/f4/img/v2/f4_flood.jpg">    </p:cNvPr>
+          <p:cNvPr id="3" name="Image 0" descr="/home/claude/f4/img/minesec_sheet.png">    </p:cNvPr>
           <p:cNvPicPr>
             <a:picLocks noChangeAspect="1"/>
           </p:cNvPicPr>
@@ -9717,8 +9747,8 @@
         </p:blipFill>
         <p:spPr>
           <a:xfrm>
-            <a:off x="2246610" y="1783080"/>
-            <a:ext cx="7698475" cy="4270248"/>
+            <a:off x="0" y="658368"/>
+            <a:ext cx="5120640" cy="5833872"/>
           </a:xfrm>
           <a:prstGeom prst="rect">
             <a:avLst/>
@@ -9727,14 +9757,14 @@
       </p:pic>
       <p:sp>
         <p:nvSpPr>
-          <p:cNvPr id="5" name="Text 2"/>
+          <p:cNvPr id="4" name="Text 1"/>
           <p:cNvSpPr/>
           <p:nvPr/>
         </p:nvSpPr>
         <p:spPr>
           <a:xfrm>
-            <a:off x="457200" y="6089904"/>
-            <a:ext cx="11277295" cy="347472"/>
+            <a:off x="5349240" y="1005840"/>
+            <a:ext cx="6522415" cy="731520"/>
           </a:xfrm>
           <a:prstGeom prst="rect">
             <a:avLst/>
@@ -9743,24 +9773,68 @@
           <a:ln/>
         </p:spPr>
         <p:txBody>
-          <a:bodyPr wrap="square" lIns="0" tIns="0" rIns="0" bIns="0" rtlCol="0" anchor="ctr"/>
+          <a:bodyPr wrap="square" lIns="0" tIns="0" rIns="0" bIns="0" rtlCol="0" anchor="ctr">
+            <a:normAutofit/>
+          </a:bodyPr>
           <a:lstStyle/>
           <a:p>
             <a:pPr algn="ctr" indent="0" marL="0">
               <a:buNone/>
             </a:pPr>
             <a:r>
-              <a:rPr lang="en-US" sz="1800" i="1" dirty="0">
-                <a:solidFill>
-                  <a:srgbClr val="555555"/>
+              <a:rPr lang="en-US" sz="3600" b="1" dirty="0">
+                <a:solidFill>
+                  <a:srgbClr val="990011"/>
                 </a:solidFill>
                 <a:latin typeface="Times New Roman" pitchFamily="34" charset="0"/>
                 <a:ea typeface="Times New Roman" pitchFamily="34" charset="-122"/>
                 <a:cs typeface="Times New Roman" pitchFamily="34" charset="-120"/>
               </a:rPr>
-              <a:t>A flooded area.</a:t>
-            </a:r>
-            <a:endParaRPr lang="en-US" sz="1800" dirty="0"/>
+              <a:t>Activity 1: Answer</a:t>
+            </a:r>
+            <a:endParaRPr lang="en-US" sz="3600" dirty="0"/>
+          </a:p>
+        </p:txBody>
+      </p:sp>
+      <p:sp>
+        <p:nvSpPr>
+          <p:cNvPr id="5" name="Text 2"/>
+          <p:cNvSpPr/>
+          <p:nvPr/>
+        </p:nvSpPr>
+        <p:spPr>
+          <a:xfrm>
+            <a:off x="5349240" y="1783080"/>
+            <a:ext cx="6522415" cy="4663440"/>
+          </a:xfrm>
+          <a:prstGeom prst="rect">
+            <a:avLst/>
+          </a:prstGeom>
+          <a:noFill/>
+          <a:ln/>
+        </p:spPr>
+        <p:txBody>
+          <a:bodyPr wrap="square" lIns="0" tIns="0" rIns="0" bIns="0" rtlCol="0" anchor="t"/>
+          <a:lstStyle/>
+          <a:p>
+            <a:pPr algn="l" indent="0" marL="0">
+              <a:spcAft>
+                <a:spcPts val="800"/>
+              </a:spcAft>
+              <a:buNone/>
+            </a:pPr>
+            <a:r>
+              <a:rPr lang="en-US" sz="4000" dirty="0">
+                <a:solidFill>
+                  <a:srgbClr val="111111"/>
+                </a:solidFill>
+                <a:latin typeface="Times New Roman" pitchFamily="34" charset="0"/>
+                <a:ea typeface="Times New Roman" pitchFamily="34" charset="-122"/>
+                <a:cs typeface="Times New Roman" pitchFamily="34" charset="-120"/>
+              </a:rPr>
+              <a:t>The soil is fertile (alluvium) and there is water.</a:t>
+            </a:r>
+            <a:endParaRPr lang="en-US" sz="4000" dirty="0"/>
           </a:p>
         </p:txBody>
       </p:sp>
@@ -9876,9 +9950,48 @@
           </a:p>
         </p:txBody>
       </p:sp>
+      <p:sp>
+        <p:nvSpPr>
+          <p:cNvPr id="3" name="Text 1"/>
+          <p:cNvSpPr/>
+          <p:nvPr/>
+        </p:nvSpPr>
+        <p:spPr>
+          <a:xfrm>
+            <a:off x="457200" y="1005840"/>
+            <a:ext cx="11277295" cy="731520"/>
+          </a:xfrm>
+          <a:prstGeom prst="rect">
+            <a:avLst/>
+          </a:prstGeom>
+          <a:noFill/>
+          <a:ln/>
+        </p:spPr>
+        <p:txBody>
+          <a:bodyPr wrap="square" lIns="0" tIns="0" rIns="0" bIns="0" rtlCol="0" anchor="ctr"/>
+          <a:lstStyle/>
+          <a:p>
+            <a:pPr algn="ctr" indent="0" marL="0">
+              <a:buNone/>
+            </a:pPr>
+            <a:r>
+              <a:rPr lang="en-US" sz="3600" b="1" dirty="0">
+                <a:solidFill>
+                  <a:srgbClr val="990011"/>
+                </a:solidFill>
+                <a:latin typeface="Times New Roman" pitchFamily="34" charset="0"/>
+                <a:ea typeface="Times New Roman" pitchFamily="34" charset="-122"/>
+                <a:cs typeface="Times New Roman" pitchFamily="34" charset="-120"/>
+              </a:rPr>
+              <a:t>Activity 2</a:t>
+            </a:r>
+            <a:endParaRPr lang="en-US" sz="3600" dirty="0"/>
+          </a:p>
+        </p:txBody>
+      </p:sp>
       <p:pic>
         <p:nvPicPr>
-          <p:cNvPr id="3" name="Image 0" descr="/home/claude/f4/img/minesec_sheet.png">    </p:cNvPr>
+          <p:cNvPr id="4" name="Image 0" descr="/home/claude/f4/img/v2/f4_flood.jpg">    </p:cNvPr>
           <p:cNvPicPr>
             <a:picLocks noChangeAspect="1"/>
           </p:cNvPicPr>
@@ -9892,8 +10005,8 @@
         </p:blipFill>
         <p:spPr>
           <a:xfrm>
-            <a:off x="0" y="658368"/>
-            <a:ext cx="5120640" cy="5833872"/>
+            <a:off x="2246610" y="1783080"/>
+            <a:ext cx="7698475" cy="4270248"/>
           </a:xfrm>
           <a:prstGeom prst="rect">
             <a:avLst/>
@@ -9902,14 +10015,14 @@
       </p:pic>
       <p:sp>
         <p:nvSpPr>
-          <p:cNvPr id="4" name="Text 1"/>
+          <p:cNvPr id="5" name="Text 2"/>
           <p:cNvSpPr/>
           <p:nvPr/>
         </p:nvSpPr>
         <p:spPr>
           <a:xfrm>
-            <a:off x="5349240" y="1005840"/>
-            <a:ext cx="6522415" cy="731520"/>
+            <a:off x="457200" y="6089904"/>
+            <a:ext cx="11277295" cy="347472"/>
           </a:xfrm>
           <a:prstGeom prst="rect">
             <a:avLst/>
@@ -9918,68 +10031,24 @@
           <a:ln/>
         </p:spPr>
         <p:txBody>
-          <a:bodyPr wrap="square" lIns="0" tIns="0" rIns="0" bIns="0" rtlCol="0" anchor="ctr">
-            <a:normAutofit/>
-          </a:bodyPr>
+          <a:bodyPr wrap="square" lIns="0" tIns="0" rIns="0" bIns="0" rtlCol="0" anchor="ctr"/>
           <a:lstStyle/>
           <a:p>
             <a:pPr algn="ctr" indent="0" marL="0">
               <a:buNone/>
             </a:pPr>
             <a:r>
-              <a:rPr lang="en-US" sz="3600" b="1" dirty="0">
-                <a:solidFill>
-                  <a:srgbClr val="990011"/>
+              <a:rPr lang="en-US" sz="1800" i="1" dirty="0">
+                <a:solidFill>
+                  <a:srgbClr val="555555"/>
                 </a:solidFill>
                 <a:latin typeface="Times New Roman" pitchFamily="34" charset="0"/>
                 <a:ea typeface="Times New Roman" pitchFamily="34" charset="-122"/>
                 <a:cs typeface="Times New Roman" pitchFamily="34" charset="-120"/>
               </a:rPr>
-              <a:t>Activity 2: Question</a:t>
-            </a:r>
-            <a:endParaRPr lang="en-US" sz="3600" dirty="0"/>
-          </a:p>
-        </p:txBody>
-      </p:sp>
-      <p:sp>
-        <p:nvSpPr>
-          <p:cNvPr id="5" name="Text 2"/>
-          <p:cNvSpPr/>
-          <p:nvPr/>
-        </p:nvSpPr>
-        <p:spPr>
-          <a:xfrm>
-            <a:off x="5349240" y="1783080"/>
-            <a:ext cx="6522415" cy="4663440"/>
-          </a:xfrm>
-          <a:prstGeom prst="rect">
-            <a:avLst/>
-          </a:prstGeom>
-          <a:noFill/>
-          <a:ln/>
-        </p:spPr>
-        <p:txBody>
-          <a:bodyPr wrap="square" lIns="0" tIns="0" rIns="0" bIns="0" rtlCol="0" anchor="t"/>
-          <a:lstStyle/>
-          <a:p>
-            <a:pPr algn="l" indent="0" marL="0">
-              <a:spcAft>
-                <a:spcPts val="800"/>
-              </a:spcAft>
-              <a:buNone/>
-            </a:pPr>
-            <a:r>
-              <a:rPr lang="en-US" sz="4000" dirty="0">
-                <a:solidFill>
-                  <a:srgbClr val="111111"/>
-                </a:solidFill>
-                <a:latin typeface="Times New Roman" pitchFamily="34" charset="0"/>
-                <a:ea typeface="Times New Roman" pitchFamily="34" charset="-122"/>
-                <a:cs typeface="Times New Roman" pitchFamily="34" charset="-120"/>
-              </a:rPr>
-              <a:t>What problems do floods cause to people?</a:t>
-            </a:r>
-            <a:endParaRPr lang="en-US" sz="4000" dirty="0"/>
+              <a:t>A flooded area.</a:t>
+            </a:r>
+            <a:endParaRPr lang="en-US" sz="1800" dirty="0"/>
           </a:p>
         </p:txBody>
       </p:sp>
@@ -10154,7 +10223,7 @@
                 <a:ea typeface="Times New Roman" pitchFamily="34" charset="-122"/>
                 <a:cs typeface="Times New Roman" pitchFamily="34" charset="-120"/>
               </a:rPr>
-              <a:t>Activity 2: Answer</a:t>
+              <a:t>Activity 2: Question</a:t>
             </a:r>
             <a:endParaRPr lang="en-US" sz="3600" dirty="0"/>
           </a:p>
@@ -10196,7 +10265,7 @@
                 <a:ea typeface="Times New Roman" pitchFamily="34" charset="-122"/>
                 <a:cs typeface="Times New Roman" pitchFamily="34" charset="-120"/>
               </a:rPr>
-              <a:t>They destroy houses and crops and spread diseases.</a:t>
+              <a:t>What problems do floods cause to people?</a:t>
             </a:r>
             <a:endParaRPr lang="en-US" sz="4000" dirty="0"/>
           </a:p>
@@ -10308,54 +10377,15 @@
                 <a:ea typeface="Calibri" pitchFamily="34" charset="-122"/>
                 <a:cs typeface="Calibri" pitchFamily="34" charset="-120"/>
               </a:rPr>
-              <a:t>3. SOLUTIONS</a:t>
+              <a:t>2. PROBLEMS</a:t>
             </a:r>
             <a:endParaRPr lang="en-US" sz="1400" dirty="0"/>
-          </a:p>
-        </p:txBody>
-      </p:sp>
-      <p:sp>
-        <p:nvSpPr>
-          <p:cNvPr id="3" name="Text 1"/>
-          <p:cNvSpPr/>
-          <p:nvPr/>
-        </p:nvSpPr>
-        <p:spPr>
-          <a:xfrm>
-            <a:off x="457200" y="1005840"/>
-            <a:ext cx="11277295" cy="731520"/>
-          </a:xfrm>
-          <a:prstGeom prst="rect">
-            <a:avLst/>
-          </a:prstGeom>
-          <a:noFill/>
-          <a:ln/>
-        </p:spPr>
-        <p:txBody>
-          <a:bodyPr wrap="square" lIns="0" tIns="0" rIns="0" bIns="0" rtlCol="0" anchor="ctr"/>
-          <a:lstStyle/>
-          <a:p>
-            <a:pPr algn="ctr" indent="0" marL="0">
-              <a:buNone/>
-            </a:pPr>
-            <a:r>
-              <a:rPr lang="en-US" sz="3600" b="1" dirty="0">
-                <a:solidFill>
-                  <a:srgbClr val="990011"/>
-                </a:solidFill>
-                <a:latin typeface="Times New Roman" pitchFamily="34" charset="0"/>
-                <a:ea typeface="Times New Roman" pitchFamily="34" charset="-122"/>
-                <a:cs typeface="Times New Roman" pitchFamily="34" charset="-120"/>
-              </a:rPr>
-              <a:t>Activity 3</a:t>
-            </a:r>
-            <a:endParaRPr lang="en-US" sz="3600" dirty="0"/>
           </a:p>
         </p:txBody>
       </p:sp>
       <p:pic>
         <p:nvPicPr>
-          <p:cNvPr id="4" name="Image 0" descr="/home/claude/f4/img/v2/f4_dyke.jpg">    </p:cNvPr>
+          <p:cNvPr id="3" name="Image 0" descr="/home/claude/f4/img/minesec_sheet.png">    </p:cNvPr>
           <p:cNvPicPr>
             <a:picLocks noChangeAspect="1"/>
           </p:cNvPicPr>
@@ -10369,8 +10399,8 @@
         </p:blipFill>
         <p:spPr>
           <a:xfrm>
-            <a:off x="2250369" y="1783080"/>
-            <a:ext cx="7690957" cy="4270248"/>
+            <a:off x="0" y="658368"/>
+            <a:ext cx="5120640" cy="5833872"/>
           </a:xfrm>
           <a:prstGeom prst="rect">
             <a:avLst/>
@@ -10379,14 +10409,14 @@
       </p:pic>
       <p:sp>
         <p:nvSpPr>
-          <p:cNvPr id="5" name="Text 2"/>
+          <p:cNvPr id="4" name="Text 1"/>
           <p:cNvSpPr/>
           <p:nvPr/>
         </p:nvSpPr>
         <p:spPr>
           <a:xfrm>
-            <a:off x="457200" y="6089904"/>
-            <a:ext cx="11277295" cy="347472"/>
+            <a:off x="5349240" y="1005840"/>
+            <a:ext cx="6522415" cy="731520"/>
           </a:xfrm>
           <a:prstGeom prst="rect">
             <a:avLst/>
@@ -10395,24 +10425,68 @@
           <a:ln/>
         </p:spPr>
         <p:txBody>
-          <a:bodyPr wrap="square" lIns="0" tIns="0" rIns="0" bIns="0" rtlCol="0" anchor="ctr"/>
+          <a:bodyPr wrap="square" lIns="0" tIns="0" rIns="0" bIns="0" rtlCol="0" anchor="ctr">
+            <a:normAutofit/>
+          </a:bodyPr>
           <a:lstStyle/>
           <a:p>
             <a:pPr algn="ctr" indent="0" marL="0">
               <a:buNone/>
             </a:pPr>
             <a:r>
-              <a:rPr lang="en-US" sz="1800" i="1" dirty="0">
-                <a:solidFill>
-                  <a:srgbClr val="555555"/>
+              <a:rPr lang="en-US" sz="3600" b="1" dirty="0">
+                <a:solidFill>
+                  <a:srgbClr val="990011"/>
                 </a:solidFill>
                 <a:latin typeface="Times New Roman" pitchFamily="34" charset="0"/>
                 <a:ea typeface="Times New Roman" pitchFamily="34" charset="-122"/>
                 <a:cs typeface="Times New Roman" pitchFamily="34" charset="-120"/>
               </a:rPr>
-              <a:t>A raised bank along a river.</a:t>
-            </a:r>
-            <a:endParaRPr lang="en-US" sz="1800" dirty="0"/>
+              <a:t>Activity 2: Answer</a:t>
+            </a:r>
+            <a:endParaRPr lang="en-US" sz="3600" dirty="0"/>
+          </a:p>
+        </p:txBody>
+      </p:sp>
+      <p:sp>
+        <p:nvSpPr>
+          <p:cNvPr id="5" name="Text 2"/>
+          <p:cNvSpPr/>
+          <p:nvPr/>
+        </p:nvSpPr>
+        <p:spPr>
+          <a:xfrm>
+            <a:off x="5349240" y="1783080"/>
+            <a:ext cx="6522415" cy="4663440"/>
+          </a:xfrm>
+          <a:prstGeom prst="rect">
+            <a:avLst/>
+          </a:prstGeom>
+          <a:noFill/>
+          <a:ln/>
+        </p:spPr>
+        <p:txBody>
+          <a:bodyPr wrap="square" lIns="0" tIns="0" rIns="0" bIns="0" rtlCol="0" anchor="t"/>
+          <a:lstStyle/>
+          <a:p>
+            <a:pPr algn="l" indent="0" marL="0">
+              <a:spcAft>
+                <a:spcPts val="800"/>
+              </a:spcAft>
+              <a:buNone/>
+            </a:pPr>
+            <a:r>
+              <a:rPr lang="en-US" sz="4000" dirty="0">
+                <a:solidFill>
+                  <a:srgbClr val="111111"/>
+                </a:solidFill>
+                <a:latin typeface="Times New Roman" pitchFamily="34" charset="0"/>
+                <a:ea typeface="Times New Roman" pitchFamily="34" charset="-122"/>
+                <a:cs typeface="Times New Roman" pitchFamily="34" charset="-120"/>
+              </a:rPr>
+              <a:t>They destroy houses and crops and spread diseases.</a:t>
+            </a:r>
+            <a:endParaRPr lang="en-US" sz="4000" dirty="0"/>
           </a:p>
         </p:txBody>
       </p:sp>
@@ -10528,9 +10602,48 @@
           </a:p>
         </p:txBody>
       </p:sp>
+      <p:sp>
+        <p:nvSpPr>
+          <p:cNvPr id="3" name="Text 1"/>
+          <p:cNvSpPr/>
+          <p:nvPr/>
+        </p:nvSpPr>
+        <p:spPr>
+          <a:xfrm>
+            <a:off x="457200" y="1005840"/>
+            <a:ext cx="11277295" cy="731520"/>
+          </a:xfrm>
+          <a:prstGeom prst="rect">
+            <a:avLst/>
+          </a:prstGeom>
+          <a:noFill/>
+          <a:ln/>
+        </p:spPr>
+        <p:txBody>
+          <a:bodyPr wrap="square" lIns="0" tIns="0" rIns="0" bIns="0" rtlCol="0" anchor="ctr"/>
+          <a:lstStyle/>
+          <a:p>
+            <a:pPr algn="ctr" indent="0" marL="0">
+              <a:buNone/>
+            </a:pPr>
+            <a:r>
+              <a:rPr lang="en-US" sz="3600" b="1" dirty="0">
+                <a:solidFill>
+                  <a:srgbClr val="990011"/>
+                </a:solidFill>
+                <a:latin typeface="Times New Roman" pitchFamily="34" charset="0"/>
+                <a:ea typeface="Times New Roman" pitchFamily="34" charset="-122"/>
+                <a:cs typeface="Times New Roman" pitchFamily="34" charset="-120"/>
+              </a:rPr>
+              <a:t>Activity 3</a:t>
+            </a:r>
+            <a:endParaRPr lang="en-US" sz="3600" dirty="0"/>
+          </a:p>
+        </p:txBody>
+      </p:sp>
       <p:pic>
         <p:nvPicPr>
-          <p:cNvPr id="3" name="Image 0" descr="/home/claude/f4/img/minesec_sheet.png">    </p:cNvPr>
+          <p:cNvPr id="4" name="Image 0" descr="/home/claude/f4/img/v2/f4_dyke.jpg">    </p:cNvPr>
           <p:cNvPicPr>
             <a:picLocks noChangeAspect="1"/>
           </p:cNvPicPr>
@@ -10544,8 +10657,8 @@
         </p:blipFill>
         <p:spPr>
           <a:xfrm>
-            <a:off x="0" y="658368"/>
-            <a:ext cx="5120640" cy="5833872"/>
+            <a:off x="2250369" y="1783080"/>
+            <a:ext cx="7690957" cy="4270248"/>
           </a:xfrm>
           <a:prstGeom prst="rect">
             <a:avLst/>
@@ -10554,14 +10667,14 @@
       </p:pic>
       <p:sp>
         <p:nvSpPr>
-          <p:cNvPr id="4" name="Text 1"/>
+          <p:cNvPr id="5" name="Text 2"/>
           <p:cNvSpPr/>
           <p:nvPr/>
         </p:nvSpPr>
         <p:spPr>
           <a:xfrm>
-            <a:off x="5349240" y="1005840"/>
-            <a:ext cx="6522415" cy="731520"/>
+            <a:off x="457200" y="6089904"/>
+            <a:ext cx="11277295" cy="347472"/>
           </a:xfrm>
           <a:prstGeom prst="rect">
             <a:avLst/>
@@ -10570,68 +10683,24 @@
           <a:ln/>
         </p:spPr>
         <p:txBody>
-          <a:bodyPr wrap="square" lIns="0" tIns="0" rIns="0" bIns="0" rtlCol="0" anchor="ctr">
-            <a:normAutofit/>
-          </a:bodyPr>
+          <a:bodyPr wrap="square" lIns="0" tIns="0" rIns="0" bIns="0" rtlCol="0" anchor="ctr"/>
           <a:lstStyle/>
           <a:p>
             <a:pPr algn="ctr" indent="0" marL="0">
               <a:buNone/>
             </a:pPr>
             <a:r>
-              <a:rPr lang="en-US" sz="3600" b="1" dirty="0">
-                <a:solidFill>
-                  <a:srgbClr val="990011"/>
+              <a:rPr lang="en-US" sz="1800" i="1" dirty="0">
+                <a:solidFill>
+                  <a:srgbClr val="555555"/>
                 </a:solidFill>
                 <a:latin typeface="Times New Roman" pitchFamily="34" charset="0"/>
                 <a:ea typeface="Times New Roman" pitchFamily="34" charset="-122"/>
                 <a:cs typeface="Times New Roman" pitchFamily="34" charset="-120"/>
               </a:rPr>
-              <a:t>Activity 3: Question</a:t>
-            </a:r>
-            <a:endParaRPr lang="en-US" sz="3600" dirty="0"/>
-          </a:p>
-        </p:txBody>
-      </p:sp>
-      <p:sp>
-        <p:nvSpPr>
-          <p:cNvPr id="5" name="Text 2"/>
-          <p:cNvSpPr/>
-          <p:nvPr/>
-        </p:nvSpPr>
-        <p:spPr>
-          <a:xfrm>
-            <a:off x="5349240" y="1783080"/>
-            <a:ext cx="6522415" cy="4663440"/>
-          </a:xfrm>
-          <a:prstGeom prst="rect">
-            <a:avLst/>
-          </a:prstGeom>
-          <a:noFill/>
-          <a:ln/>
-        </p:spPr>
-        <p:txBody>
-          <a:bodyPr wrap="square" lIns="0" tIns="0" rIns="0" bIns="0" rtlCol="0" anchor="t"/>
-          <a:lstStyle/>
-          <a:p>
-            <a:pPr algn="l" indent="0" marL="0">
-              <a:spcAft>
-                <a:spcPts val="800"/>
-              </a:spcAft>
-              <a:buNone/>
-            </a:pPr>
-            <a:r>
-              <a:rPr lang="en-US" sz="4000" dirty="0">
-                <a:solidFill>
-                  <a:srgbClr val="111111"/>
-                </a:solidFill>
-                <a:latin typeface="Times New Roman" pitchFamily="34" charset="0"/>
-                <a:ea typeface="Times New Roman" pitchFamily="34" charset="-122"/>
-                <a:cs typeface="Times New Roman" pitchFamily="34" charset="-120"/>
-              </a:rPr>
-              <a:t>How does this raised bank protect the land?</a:t>
-            </a:r>
-            <a:endParaRPr lang="en-US" sz="4000" dirty="0"/>
+              <a:t>A raised bank along a river.</a:t>
+            </a:r>
+            <a:endParaRPr lang="en-US" sz="1800" dirty="0"/>
           </a:p>
         </p:txBody>
       </p:sp>
@@ -10806,7 +10875,7 @@
                 <a:ea typeface="Times New Roman" pitchFamily="34" charset="-122"/>
                 <a:cs typeface="Times New Roman" pitchFamily="34" charset="-120"/>
               </a:rPr>
-              <a:t>Activity 3: Answer</a:t>
+              <a:t>Activity 3: Question</a:t>
             </a:r>
             <a:endParaRPr lang="en-US" sz="3600" dirty="0"/>
           </a:p>
@@ -10848,7 +10917,7 @@
                 <a:ea typeface="Times New Roman" pitchFamily="34" charset="-122"/>
                 <a:cs typeface="Times New Roman" pitchFamily="34" charset="-120"/>
               </a:rPr>
-              <a:t>It stops the river from flooding the land behind it.</a:t>
+              <a:t>How does this raised bank protect the land?</a:t>
             </a:r>
             <a:endParaRPr lang="en-US" sz="4000" dirty="0"/>
           </a:p>
@@ -10960,7 +11029,7 @@
                 <a:ea typeface="Calibri" pitchFamily="34" charset="-122"/>
                 <a:cs typeface="Calibri" pitchFamily="34" charset="-120"/>
               </a:rPr>
-              <a:t>BOARD SUMMARY</a:t>
+              <a:t>3. SOLUTIONS</a:t>
             </a:r>
             <a:endParaRPr lang="en-US" sz="1400" dirty="0"/>
           </a:p>
@@ -11025,7 +11094,7 @@
                 <a:ea typeface="Times New Roman" pitchFamily="34" charset="-122"/>
                 <a:cs typeface="Times New Roman" pitchFamily="34" charset="-120"/>
               </a:rPr>
-              <a:t>Board Summary</a:t>
+              <a:t>Activity 3: Answer</a:t>
             </a:r>
             <a:endParaRPr lang="en-US" sz="3600" dirty="0"/>
           </a:p>
@@ -11059,7 +11128,7 @@
               <a:buNone/>
             </a:pPr>
             <a:r>
-              <a:rPr lang="en-US" sz="3200" b="1" dirty="0">
+              <a:rPr lang="en-US" sz="4000" dirty="0">
                 <a:solidFill>
                   <a:srgbClr val="111111"/>
                 </a:solidFill>
@@ -11067,49 +11136,9 @@
                 <a:ea typeface="Times New Roman" pitchFamily="34" charset="-122"/>
                 <a:cs typeface="Times New Roman" pitchFamily="34" charset="-120"/>
               </a:rPr>
-              <a:t>Topic: Denudation Processes, Landforms and Impacts on Man</a:t>
-            </a:r>
-            <a:endParaRPr lang="en-US" sz="3200" dirty="0"/>
-          </a:p>
-          <a:p>
-            <a:pPr algn="l" indent="0" marL="0">
-              <a:spcAft>
-                <a:spcPts val="800"/>
-              </a:spcAft>
-              <a:buNone/>
-            </a:pPr>
-            <a:r>
-              <a:rPr lang="en-US" sz="3200" b="1" dirty="0">
-                <a:solidFill>
-                  <a:srgbClr val="111111"/>
-                </a:solidFill>
-                <a:latin typeface="Times New Roman" pitchFamily="34" charset="0"/>
-                <a:ea typeface="Times New Roman" pitchFamily="34" charset="-122"/>
-                <a:cs typeface="Times New Roman" pitchFamily="34" charset="-120"/>
-              </a:rPr>
-              <a:t>Sub-topic: The Work of Rivers on the Landscape and Impacts on Man</a:t>
-            </a:r>
-            <a:endParaRPr lang="en-US" sz="3200" dirty="0"/>
-          </a:p>
-          <a:p>
-            <a:pPr algn="l" indent="0" marL="0">
-              <a:spcAft>
-                <a:spcPts val="800"/>
-              </a:spcAft>
-              <a:buNone/>
-            </a:pPr>
-            <a:r>
-              <a:rPr lang="en-US" sz="3200" b="1" dirty="0">
-                <a:solidFill>
-                  <a:srgbClr val="990011"/>
-                </a:solidFill>
-                <a:latin typeface="Times New Roman" pitchFamily="34" charset="0"/>
-                <a:ea typeface="Times New Roman" pitchFamily="34" charset="-122"/>
-                <a:cs typeface="Times New Roman" pitchFamily="34" charset="-120"/>
-              </a:rPr>
-              <a:t>Lesson 22: Man and Floodplain Interactions</a:t>
-            </a:r>
-            <a:endParaRPr lang="en-US" sz="3200" dirty="0"/>
+              <a:t>It stops the river from flooding the land behind it.</a:t>
+            </a:r>
+            <a:endParaRPr lang="en-US" sz="4000" dirty="0"/>
           </a:p>
         </p:txBody>
       </p:sp>
@@ -11242,7 +11271,7 @@
         <p:spPr>
           <a:xfrm>
             <a:off x="0" y="658368"/>
-            <a:ext cx="3840480" cy="5833872"/>
+            <a:ext cx="5120640" cy="5833872"/>
           </a:xfrm>
           <a:prstGeom prst="rect">
             <a:avLst/>
@@ -11257,8 +11286,8 @@
         </p:nvSpPr>
         <p:spPr>
           <a:xfrm>
-            <a:off x="4069080" y="1005840"/>
-            <a:ext cx="7802575" cy="731520"/>
+            <a:off x="5349240" y="1005840"/>
+            <a:ext cx="6522415" cy="731520"/>
           </a:xfrm>
           <a:prstGeom prst="rect">
             <a:avLst/>
@@ -11284,7 +11313,7 @@
                 <a:ea typeface="Times New Roman" pitchFamily="34" charset="-122"/>
                 <a:cs typeface="Times New Roman" pitchFamily="34" charset="-120"/>
               </a:rPr>
-              <a:t>DEFINITIONS</a:t>
+              <a:t>Board Summary</a:t>
             </a:r>
             <a:endParaRPr lang="en-US" sz="3600" dirty="0"/>
           </a:p>
@@ -11298,8 +11327,8 @@
         </p:nvSpPr>
         <p:spPr>
           <a:xfrm>
-            <a:off x="4069080" y="1783080"/>
-            <a:ext cx="7802575" cy="4663440"/>
+            <a:off x="5349240" y="1783080"/>
+            <a:ext cx="6522415" cy="4663440"/>
           </a:xfrm>
           <a:prstGeom prst="rect">
             <a:avLst/>
@@ -11318,7 +11347,7 @@
               <a:buNone/>
             </a:pPr>
             <a:r>
-              <a:rPr lang="en-US" sz="4000" i="1" dirty="0">
+              <a:rPr lang="en-US" sz="3200" b="1" dirty="0">
                 <a:solidFill>
                   <a:srgbClr val="111111"/>
                 </a:solidFill>
@@ -11326,9 +11355,9 @@
                 <a:ea typeface="Times New Roman" pitchFamily="34" charset="-122"/>
                 <a:cs typeface="Times New Roman" pitchFamily="34" charset="-120"/>
               </a:rPr>
-              <a:t>The key terms of this lesson are defined as follows:</a:t>
-            </a:r>
-            <a:endParaRPr lang="en-US" sz="4000" dirty="0"/>
+              <a:t>Topic: Denudation Processes, Landforms and Impacts on Man</a:t>
+            </a:r>
+            <a:endParaRPr lang="en-US" sz="3200" dirty="0"/>
           </a:p>
           <a:p>
             <a:pPr algn="l" indent="0" marL="0">
@@ -11338,7 +11367,7 @@
               <a:buNone/>
             </a:pPr>
             <a:r>
-              <a:rPr lang="en-US" sz="4000" b="1" dirty="0">
+              <a:rPr lang="en-US" sz="3200" b="1" dirty="0">
                 <a:solidFill>
                   <a:srgbClr val="111111"/>
                 </a:solidFill>
@@ -11346,8 +11375,11 @@
                 <a:ea typeface="Times New Roman" pitchFamily="34" charset="-122"/>
                 <a:cs typeface="Times New Roman" pitchFamily="34" charset="-120"/>
               </a:rPr>
-              <a:t>Floodplain: </a:t>
-            </a:r>
+              <a:t>Sub-topic: The Work of Rivers on the Landscape and Impacts on Man</a:t>
+            </a:r>
+            <a:endParaRPr lang="en-US" sz="3200" dirty="0"/>
+          </a:p>
+          <a:p>
             <a:pPr algn="l" indent="0" marL="0">
               <a:spcAft>
                 <a:spcPts val="800"/>
@@ -11355,54 +11387,17 @@
               <a:buNone/>
             </a:pPr>
             <a:r>
-              <a:rPr lang="en-US" sz="4000" dirty="0">
-                <a:solidFill>
-                  <a:srgbClr val="111111"/>
+              <a:rPr lang="en-US" sz="3200" b="1" dirty="0">
+                <a:solidFill>
+                  <a:srgbClr val="990011"/>
                 </a:solidFill>
                 <a:latin typeface="Times New Roman" pitchFamily="34" charset="0"/>
                 <a:ea typeface="Times New Roman" pitchFamily="34" charset="-122"/>
                 <a:cs typeface="Times New Roman" pitchFamily="34" charset="-120"/>
               </a:rPr>
-              <a:t>It is the flat land beside a river that is covered by water during floods.</a:t>
-            </a:r>
-            <a:endParaRPr lang="en-US" sz="4000" dirty="0"/>
-          </a:p>
-          <a:p>
-            <a:pPr algn="l" indent="0" marL="0">
-              <a:spcAft>
-                <a:spcPts val="800"/>
-              </a:spcAft>
-              <a:buNone/>
-            </a:pPr>
-            <a:r>
-              <a:rPr lang="en-US" sz="4000" b="1" dirty="0">
-                <a:solidFill>
-                  <a:srgbClr val="111111"/>
-                </a:solidFill>
-                <a:latin typeface="Times New Roman" pitchFamily="34" charset="0"/>
-                <a:ea typeface="Times New Roman" pitchFamily="34" charset="-122"/>
-                <a:cs typeface="Times New Roman" pitchFamily="34" charset="-120"/>
-              </a:rPr>
-              <a:t>Flood: </a:t>
-            </a:r>
-            <a:pPr algn="l" indent="0" marL="0">
-              <a:spcAft>
-                <a:spcPts val="800"/>
-              </a:spcAft>
-              <a:buNone/>
-            </a:pPr>
-            <a:r>
-              <a:rPr lang="en-US" sz="4000" dirty="0">
-                <a:solidFill>
-                  <a:srgbClr val="111111"/>
-                </a:solidFill>
-                <a:latin typeface="Times New Roman" pitchFamily="34" charset="0"/>
-                <a:ea typeface="Times New Roman" pitchFamily="34" charset="-122"/>
-                <a:cs typeface="Times New Roman" pitchFamily="34" charset="-120"/>
-              </a:rPr>
-              <a:t>It is the covering by water of land that is usually dry.</a:t>
-            </a:r>
-            <a:endParaRPr lang="en-US" sz="4000" dirty="0"/>
+              <a:t>Lesson 22: Man and Floodplain Interactions</a:t>
+            </a:r>
+            <a:endParaRPr lang="en-US" sz="3200" dirty="0"/>
           </a:p>
         </p:txBody>
       </p:sp>
@@ -12544,7 +12539,7 @@
         <p:spPr>
           <a:xfrm>
             <a:off x="0" y="658368"/>
-            <a:ext cx="5120640" cy="5833872"/>
+            <a:ext cx="3840480" cy="5833872"/>
           </a:xfrm>
           <a:prstGeom prst="rect">
             <a:avLst/>
@@ -12559,8 +12554,8 @@
         </p:nvSpPr>
         <p:spPr>
           <a:xfrm>
-            <a:off x="5349240" y="1005840"/>
-            <a:ext cx="6522415" cy="731520"/>
+            <a:off x="4069080" y="1005840"/>
+            <a:ext cx="7802575" cy="731520"/>
           </a:xfrm>
           <a:prstGeom prst="rect">
             <a:avLst/>
@@ -12586,7 +12581,7 @@
                 <a:ea typeface="Times New Roman" pitchFamily="34" charset="-122"/>
                 <a:cs typeface="Times New Roman" pitchFamily="34" charset="-120"/>
               </a:rPr>
-              <a:t>DEFINITIONS (continued)</a:t>
+              <a:t>DEFINITIONS</a:t>
             </a:r>
             <a:endParaRPr lang="en-US" sz="3600" dirty="0"/>
           </a:p>
@@ -12600,8 +12595,8 @@
         </p:nvSpPr>
         <p:spPr>
           <a:xfrm>
-            <a:off x="5349240" y="1783080"/>
-            <a:ext cx="6522415" cy="4663440"/>
+            <a:off x="4069080" y="1783080"/>
+            <a:ext cx="7802575" cy="4663440"/>
           </a:xfrm>
           <a:prstGeom prst="rect">
             <a:avLst/>
@@ -12620,7 +12615,7 @@
               <a:buNone/>
             </a:pPr>
             <a:r>
-              <a:rPr lang="en-US" sz="4000" b="1" dirty="0">
+              <a:rPr lang="en-US" sz="4000" i="1" dirty="0">
                 <a:solidFill>
                   <a:srgbClr val="111111"/>
                 </a:solidFill>
@@ -12628,8 +12623,11 @@
                 <a:ea typeface="Times New Roman" pitchFamily="34" charset="-122"/>
                 <a:cs typeface="Times New Roman" pitchFamily="34" charset="-120"/>
               </a:rPr>
-              <a:t>Dyke: </a:t>
-            </a:r>
+              <a:t>The key terms of this lesson are defined as follows:</a:t>
+            </a:r>
+            <a:endParaRPr lang="en-US" sz="4000" dirty="0"/>
+          </a:p>
+          <a:p>
             <a:pPr algn="l" indent="0" marL="0">
               <a:spcAft>
                 <a:spcPts val="800"/>
@@ -12637,7 +12635,7 @@
               <a:buNone/>
             </a:pPr>
             <a:r>
-              <a:rPr lang="en-US" sz="4000" dirty="0">
+              <a:rPr lang="en-US" sz="4000" b="1" dirty="0">
                 <a:solidFill>
                   <a:srgbClr val="111111"/>
                 </a:solidFill>
@@ -12645,7 +12643,61 @@
                 <a:ea typeface="Times New Roman" pitchFamily="34" charset="-122"/>
                 <a:cs typeface="Times New Roman" pitchFamily="34" charset="-120"/>
               </a:rPr>
-              <a:t>It is an artificial bank built to stop a river or the sea from flooding the land.</a:t>
+              <a:t>Floodplain: </a:t>
+            </a:r>
+            <a:pPr algn="l" indent="0" marL="0">
+              <a:spcAft>
+                <a:spcPts val="800"/>
+              </a:spcAft>
+              <a:buNone/>
+            </a:pPr>
+            <a:r>
+              <a:rPr lang="en-US" sz="4000" dirty="0">
+                <a:solidFill>
+                  <a:srgbClr val="111111"/>
+                </a:solidFill>
+                <a:latin typeface="Times New Roman" pitchFamily="34" charset="0"/>
+                <a:ea typeface="Times New Roman" pitchFamily="34" charset="-122"/>
+                <a:cs typeface="Times New Roman" pitchFamily="34" charset="-120"/>
+              </a:rPr>
+              <a:t>It is the flat land beside a river that is covered by water during floods.</a:t>
+            </a:r>
+            <a:endParaRPr lang="en-US" sz="4000" dirty="0"/>
+          </a:p>
+          <a:p>
+            <a:pPr algn="l" indent="0" marL="0">
+              <a:spcAft>
+                <a:spcPts val="800"/>
+              </a:spcAft>
+              <a:buNone/>
+            </a:pPr>
+            <a:r>
+              <a:rPr lang="en-US" sz="4000" b="1" dirty="0">
+                <a:solidFill>
+                  <a:srgbClr val="111111"/>
+                </a:solidFill>
+                <a:latin typeface="Times New Roman" pitchFamily="34" charset="0"/>
+                <a:ea typeface="Times New Roman" pitchFamily="34" charset="-122"/>
+                <a:cs typeface="Times New Roman" pitchFamily="34" charset="-120"/>
+              </a:rPr>
+              <a:t>Flood: </a:t>
+            </a:r>
+            <a:pPr algn="l" indent="0" marL="0">
+              <a:spcAft>
+                <a:spcPts val="800"/>
+              </a:spcAft>
+              <a:buNone/>
+            </a:pPr>
+            <a:r>
+              <a:rPr lang="en-US" sz="4000" dirty="0">
+                <a:solidFill>
+                  <a:srgbClr val="111111"/>
+                </a:solidFill>
+                <a:latin typeface="Times New Roman" pitchFamily="34" charset="0"/>
+                <a:ea typeface="Times New Roman" pitchFamily="34" charset="-122"/>
+                <a:cs typeface="Times New Roman" pitchFamily="34" charset="-120"/>
+              </a:rPr>
+              <a:t>It is the covering by water of land that is usually dry.</a:t>
             </a:r>
             <a:endParaRPr lang="en-US" sz="4000" dirty="0"/>
           </a:p>
@@ -12763,129 +12815,9 @@
           </a:p>
         </p:txBody>
       </p:sp>
-      <p:sp>
-        <p:nvSpPr>
-          <p:cNvPr id="3" name="Text 1"/>
-          <p:cNvSpPr/>
-          <p:nvPr/>
-        </p:nvSpPr>
-        <p:spPr>
-          <a:xfrm>
-            <a:off x="365760" y="1005840"/>
-            <a:ext cx="11460175" cy="731520"/>
-          </a:xfrm>
-          <a:prstGeom prst="rect">
-            <a:avLst/>
-          </a:prstGeom>
-          <a:noFill/>
-          <a:ln/>
-        </p:spPr>
-        <p:txBody>
-          <a:bodyPr wrap="square" lIns="0" tIns="0" rIns="0" bIns="0" rtlCol="0" anchor="ctr">
-            <a:normAutofit/>
-          </a:bodyPr>
-          <a:lstStyle/>
-          <a:p>
-            <a:pPr algn="ctr" indent="0" marL="0">
-              <a:buNone/>
-            </a:pPr>
-            <a:r>
-              <a:rPr lang="en-US" sz="3600" b="1" dirty="0">
-                <a:solidFill>
-                  <a:srgbClr val="990011"/>
-                </a:solidFill>
-                <a:latin typeface="Times New Roman" pitchFamily="34" charset="0"/>
-                <a:ea typeface="Times New Roman" pitchFamily="34" charset="-122"/>
-                <a:cs typeface="Times New Roman" pitchFamily="34" charset="-120"/>
-              </a:rPr>
-              <a:t>1. Importance of Rivers and Floodplains to Man</a:t>
-            </a:r>
-            <a:endParaRPr lang="en-US" sz="3600" dirty="0"/>
-          </a:p>
-        </p:txBody>
-      </p:sp>
-      <p:sp>
-        <p:nvSpPr>
-          <p:cNvPr id="4" name="Text 2"/>
-          <p:cNvSpPr/>
-          <p:nvPr/>
-        </p:nvSpPr>
-        <p:spPr>
-          <a:xfrm>
-            <a:off x="365760" y="1783080"/>
-            <a:ext cx="4846320" cy="4617720"/>
-          </a:xfrm>
-          <a:prstGeom prst="rect">
-            <a:avLst/>
-          </a:prstGeom>
-          <a:noFill/>
-          <a:ln/>
-        </p:spPr>
-        <p:txBody>
-          <a:bodyPr wrap="square" lIns="0" tIns="0" rIns="0" bIns="0" rtlCol="0" anchor="t"/>
-          <a:lstStyle/>
-          <a:p>
-            <a:pPr algn="l" indent="0" marL="0">
-              <a:spcAft>
-                <a:spcPts val="800"/>
-              </a:spcAft>
-              <a:buNone/>
-            </a:pPr>
-            <a:r>
-              <a:rPr lang="en-US" sz="3600" i="1" dirty="0">
-                <a:solidFill>
-                  <a:srgbClr val="111111"/>
-                </a:solidFill>
-                <a:latin typeface="Times New Roman" pitchFamily="34" charset="0"/>
-                <a:ea typeface="Times New Roman" pitchFamily="34" charset="-122"/>
-                <a:cs typeface="Times New Roman" pitchFamily="34" charset="-120"/>
-              </a:rPr>
-              <a:t>Rivers and floodplains are important to man for the following reasons:</a:t>
-            </a:r>
-            <a:endParaRPr lang="en-US" sz="3600" dirty="0"/>
-          </a:p>
-          <a:p>
-            <a:pPr algn="l" indent="0" marL="0">
-              <a:spcAft>
-                <a:spcPts val="800"/>
-              </a:spcAft>
-              <a:buNone/>
-            </a:pPr>
-            <a:r>
-              <a:rPr lang="en-US" sz="3600" b="1" dirty="0">
-                <a:solidFill>
-                  <a:srgbClr val="111111"/>
-                </a:solidFill>
-                <a:latin typeface="Times New Roman" pitchFamily="34" charset="0"/>
-                <a:ea typeface="Times New Roman" pitchFamily="34" charset="-122"/>
-                <a:cs typeface="Times New Roman" pitchFamily="34" charset="-120"/>
-              </a:rPr>
-              <a:t>Farming: </a:t>
-            </a:r>
-            <a:pPr algn="l" indent="0" marL="0">
-              <a:spcAft>
-                <a:spcPts val="800"/>
-              </a:spcAft>
-              <a:buNone/>
-            </a:pPr>
-            <a:r>
-              <a:rPr lang="en-US" sz="3600" dirty="0">
-                <a:solidFill>
-                  <a:srgbClr val="111111"/>
-                </a:solidFill>
-                <a:latin typeface="Times New Roman" pitchFamily="34" charset="0"/>
-                <a:ea typeface="Times New Roman" pitchFamily="34" charset="-122"/>
-                <a:cs typeface="Times New Roman" pitchFamily="34" charset="-120"/>
-              </a:rPr>
-              <a:t>Floodplains have fertile alluvium for rice, onions, maize and vegetables.</a:t>
-            </a:r>
-            <a:endParaRPr lang="en-US" sz="3600" dirty="0"/>
-          </a:p>
-        </p:txBody>
-      </p:sp>
       <p:pic>
         <p:nvPicPr>
-          <p:cNvPr id="5" name="Image 0" descr="/home/claude/f4/img/v2/f4_ricefield.jpg">    </p:cNvPr>
+          <p:cNvPr id="3" name="Image 0" descr="/home/claude/f4/img/minesec_sheet.png">    </p:cNvPr>
           <p:cNvPicPr>
             <a:picLocks noChangeAspect="1"/>
           </p:cNvPicPr>
@@ -12899,8 +12831,8 @@
         </p:blipFill>
         <p:spPr>
           <a:xfrm>
-            <a:off x="5349240" y="2071212"/>
-            <a:ext cx="6659575" cy="3693983"/>
+            <a:off x="0" y="658368"/>
+            <a:ext cx="5120640" cy="5833872"/>
           </a:xfrm>
           <a:prstGeom prst="rect">
             <a:avLst/>
@@ -12909,14 +12841,14 @@
       </p:pic>
       <p:sp>
         <p:nvSpPr>
-          <p:cNvPr id="6" name="Text 3"/>
+          <p:cNvPr id="4" name="Text 1"/>
           <p:cNvSpPr/>
           <p:nvPr/>
         </p:nvSpPr>
         <p:spPr>
           <a:xfrm>
-            <a:off x="5349240" y="6089904"/>
-            <a:ext cx="6659575" cy="347472"/>
+            <a:off x="5349240" y="1005840"/>
+            <a:ext cx="6522415" cy="731520"/>
           </a:xfrm>
           <a:prstGeom prst="rect">
             <a:avLst/>
@@ -12925,24 +12857,85 @@
           <a:ln/>
         </p:spPr>
         <p:txBody>
-          <a:bodyPr wrap="square" lIns="0" tIns="0" rIns="0" bIns="0" rtlCol="0" anchor="ctr"/>
+          <a:bodyPr wrap="square" lIns="0" tIns="0" rIns="0" bIns="0" rtlCol="0" anchor="ctr">
+            <a:normAutofit/>
+          </a:bodyPr>
           <a:lstStyle/>
           <a:p>
             <a:pPr algn="ctr" indent="0" marL="0">
               <a:buNone/>
             </a:pPr>
             <a:r>
-              <a:rPr lang="en-US" sz="1600" i="1" dirty="0">
-                <a:solidFill>
-                  <a:srgbClr val="555555"/>
+              <a:rPr lang="en-US" sz="3600" b="1" dirty="0">
+                <a:solidFill>
+                  <a:srgbClr val="990011"/>
                 </a:solidFill>
                 <a:latin typeface="Times New Roman" pitchFamily="34" charset="0"/>
                 <a:ea typeface="Times New Roman" pitchFamily="34" charset="-122"/>
                 <a:cs typeface="Times New Roman" pitchFamily="34" charset="-120"/>
               </a:rPr>
-              <a:t>Illustration: rice fields on a floodplain</a:t>
-            </a:r>
-            <a:endParaRPr lang="en-US" sz="1600" dirty="0"/>
+              <a:t>DEFINITIONS (continued)</a:t>
+            </a:r>
+            <a:endParaRPr lang="en-US" sz="3600" dirty="0"/>
+          </a:p>
+        </p:txBody>
+      </p:sp>
+      <p:sp>
+        <p:nvSpPr>
+          <p:cNvPr id="5" name="Text 2"/>
+          <p:cNvSpPr/>
+          <p:nvPr/>
+        </p:nvSpPr>
+        <p:spPr>
+          <a:xfrm>
+            <a:off x="5349240" y="1783080"/>
+            <a:ext cx="6522415" cy="4663440"/>
+          </a:xfrm>
+          <a:prstGeom prst="rect">
+            <a:avLst/>
+          </a:prstGeom>
+          <a:noFill/>
+          <a:ln/>
+        </p:spPr>
+        <p:txBody>
+          <a:bodyPr wrap="square" lIns="0" tIns="0" rIns="0" bIns="0" rtlCol="0" anchor="t"/>
+          <a:lstStyle/>
+          <a:p>
+            <a:pPr algn="l" indent="0" marL="0">
+              <a:spcAft>
+                <a:spcPts val="800"/>
+              </a:spcAft>
+              <a:buNone/>
+            </a:pPr>
+            <a:r>
+              <a:rPr lang="en-US" sz="4000" b="1" dirty="0">
+                <a:solidFill>
+                  <a:srgbClr val="111111"/>
+                </a:solidFill>
+                <a:latin typeface="Times New Roman" pitchFamily="34" charset="0"/>
+                <a:ea typeface="Times New Roman" pitchFamily="34" charset="-122"/>
+                <a:cs typeface="Times New Roman" pitchFamily="34" charset="-120"/>
+              </a:rPr>
+              <a:t>Dyke: </a:t>
+            </a:r>
+            <a:pPr algn="l" indent="0" marL="0">
+              <a:spcAft>
+                <a:spcPts val="800"/>
+              </a:spcAft>
+              <a:buNone/>
+            </a:pPr>
+            <a:r>
+              <a:rPr lang="en-US" sz="4000" dirty="0">
+                <a:solidFill>
+                  <a:srgbClr val="111111"/>
+                </a:solidFill>
+                <a:latin typeface="Times New Roman" pitchFamily="34" charset="0"/>
+                <a:ea typeface="Times New Roman" pitchFamily="34" charset="-122"/>
+                <a:cs typeface="Times New Roman" pitchFamily="34" charset="-120"/>
+              </a:rPr>
+              <a:t>It is an artificial bank built to stop a river or the sea from flooding the land.</a:t>
+            </a:r>
+            <a:endParaRPr lang="en-US" sz="4000" dirty="0"/>
           </a:p>
         </p:txBody>
       </p:sp>
@@ -13058,9 +13051,129 @@
           </a:p>
         </p:txBody>
       </p:sp>
+      <p:sp>
+        <p:nvSpPr>
+          <p:cNvPr id="3" name="Text 1"/>
+          <p:cNvSpPr/>
+          <p:nvPr/>
+        </p:nvSpPr>
+        <p:spPr>
+          <a:xfrm>
+            <a:off x="365760" y="1005840"/>
+            <a:ext cx="11460175" cy="731520"/>
+          </a:xfrm>
+          <a:prstGeom prst="rect">
+            <a:avLst/>
+          </a:prstGeom>
+          <a:noFill/>
+          <a:ln/>
+        </p:spPr>
+        <p:txBody>
+          <a:bodyPr wrap="square" lIns="0" tIns="0" rIns="0" bIns="0" rtlCol="0" anchor="ctr">
+            <a:normAutofit/>
+          </a:bodyPr>
+          <a:lstStyle/>
+          <a:p>
+            <a:pPr algn="ctr" indent="0" marL="0">
+              <a:buNone/>
+            </a:pPr>
+            <a:r>
+              <a:rPr lang="en-US" sz="3600" b="1" dirty="0">
+                <a:solidFill>
+                  <a:srgbClr val="990011"/>
+                </a:solidFill>
+                <a:latin typeface="Times New Roman" pitchFamily="34" charset="0"/>
+                <a:ea typeface="Times New Roman" pitchFamily="34" charset="-122"/>
+                <a:cs typeface="Times New Roman" pitchFamily="34" charset="-120"/>
+              </a:rPr>
+              <a:t>1. Importance of Rivers and Floodplains to Man</a:t>
+            </a:r>
+            <a:endParaRPr lang="en-US" sz="3600" dirty="0"/>
+          </a:p>
+        </p:txBody>
+      </p:sp>
+      <p:sp>
+        <p:nvSpPr>
+          <p:cNvPr id="4" name="Text 2"/>
+          <p:cNvSpPr/>
+          <p:nvPr/>
+        </p:nvSpPr>
+        <p:spPr>
+          <a:xfrm>
+            <a:off x="365760" y="1783080"/>
+            <a:ext cx="4846320" cy="4617720"/>
+          </a:xfrm>
+          <a:prstGeom prst="rect">
+            <a:avLst/>
+          </a:prstGeom>
+          <a:noFill/>
+          <a:ln/>
+        </p:spPr>
+        <p:txBody>
+          <a:bodyPr wrap="square" lIns="0" tIns="0" rIns="0" bIns="0" rtlCol="0" anchor="t"/>
+          <a:lstStyle/>
+          <a:p>
+            <a:pPr algn="l" indent="0" marL="0">
+              <a:spcAft>
+                <a:spcPts val="800"/>
+              </a:spcAft>
+              <a:buNone/>
+            </a:pPr>
+            <a:r>
+              <a:rPr lang="en-US" sz="3600" i="1" dirty="0">
+                <a:solidFill>
+                  <a:srgbClr val="111111"/>
+                </a:solidFill>
+                <a:latin typeface="Times New Roman" pitchFamily="34" charset="0"/>
+                <a:ea typeface="Times New Roman" pitchFamily="34" charset="-122"/>
+                <a:cs typeface="Times New Roman" pitchFamily="34" charset="-120"/>
+              </a:rPr>
+              <a:t>Rivers and floodplains are important to man for the following reasons:</a:t>
+            </a:r>
+            <a:endParaRPr lang="en-US" sz="3600" dirty="0"/>
+          </a:p>
+          <a:p>
+            <a:pPr algn="l" indent="0" marL="0">
+              <a:spcAft>
+                <a:spcPts val="800"/>
+              </a:spcAft>
+              <a:buNone/>
+            </a:pPr>
+            <a:r>
+              <a:rPr lang="en-US" sz="3600" b="1" dirty="0">
+                <a:solidFill>
+                  <a:srgbClr val="111111"/>
+                </a:solidFill>
+                <a:latin typeface="Times New Roman" pitchFamily="34" charset="0"/>
+                <a:ea typeface="Times New Roman" pitchFamily="34" charset="-122"/>
+                <a:cs typeface="Times New Roman" pitchFamily="34" charset="-120"/>
+              </a:rPr>
+              <a:t>Farming: </a:t>
+            </a:r>
+            <a:pPr algn="l" indent="0" marL="0">
+              <a:spcAft>
+                <a:spcPts val="800"/>
+              </a:spcAft>
+              <a:buNone/>
+            </a:pPr>
+            <a:r>
+              <a:rPr lang="en-US" sz="3600" dirty="0">
+                <a:solidFill>
+                  <a:srgbClr val="111111"/>
+                </a:solidFill>
+                <a:latin typeface="Times New Roman" pitchFamily="34" charset="0"/>
+                <a:ea typeface="Times New Roman" pitchFamily="34" charset="-122"/>
+                <a:cs typeface="Times New Roman" pitchFamily="34" charset="-120"/>
+              </a:rPr>
+              <a:t>Floodplains have fertile alluvium for rice, onions, maize and vegetables.</a:t>
+            </a:r>
+            <a:endParaRPr lang="en-US" sz="3600" dirty="0"/>
+          </a:p>
+        </p:txBody>
+      </p:sp>
       <p:pic>
         <p:nvPicPr>
-          <p:cNvPr id="3" name="Image 0" descr="/home/claude/f4/img/minesec_sheet.png">    </p:cNvPr>
+          <p:cNvPr id="5" name="Image 0" descr="/home/claude/f4/img/v2/f4_ricefield.jpg">    </p:cNvPr>
           <p:cNvPicPr>
             <a:picLocks noChangeAspect="1"/>
           </p:cNvPicPr>
@@ -13074,8 +13187,8 @@
         </p:blipFill>
         <p:spPr>
           <a:xfrm>
-            <a:off x="0" y="658368"/>
-            <a:ext cx="5120640" cy="5833872"/>
+            <a:off x="5349240" y="2071212"/>
+            <a:ext cx="6659575" cy="3693983"/>
           </a:xfrm>
           <a:prstGeom prst="rect">
             <a:avLst/>
@@ -13084,14 +13197,14 @@
       </p:pic>
       <p:sp>
         <p:nvSpPr>
-          <p:cNvPr id="4" name="Text 1"/>
+          <p:cNvPr id="6" name="Text 3"/>
           <p:cNvSpPr/>
           <p:nvPr/>
         </p:nvSpPr>
         <p:spPr>
           <a:xfrm>
-            <a:off x="5349240" y="1005840"/>
-            <a:ext cx="6522415" cy="731520"/>
+            <a:off x="5349240" y="6089904"/>
+            <a:ext cx="6659575" cy="347472"/>
           </a:xfrm>
           <a:prstGeom prst="rect">
             <a:avLst/>
@@ -13100,122 +13213,24 @@
           <a:ln/>
         </p:spPr>
         <p:txBody>
-          <a:bodyPr wrap="square" lIns="0" tIns="0" rIns="0" bIns="0" rtlCol="0" anchor="ctr">
-            <a:normAutofit/>
-          </a:bodyPr>
+          <a:bodyPr wrap="square" lIns="0" tIns="0" rIns="0" bIns="0" rtlCol="0" anchor="ctr"/>
           <a:lstStyle/>
           <a:p>
             <a:pPr algn="ctr" indent="0" marL="0">
               <a:buNone/>
             </a:pPr>
             <a:r>
-              <a:rPr lang="en-US" sz="3600" b="1" dirty="0">
-                <a:solidFill>
-                  <a:srgbClr val="990011"/>
+              <a:rPr lang="en-US" sz="1600" i="1" dirty="0">
+                <a:solidFill>
+                  <a:srgbClr val="555555"/>
                 </a:solidFill>
                 <a:latin typeface="Times New Roman" pitchFamily="34" charset="0"/>
                 <a:ea typeface="Times New Roman" pitchFamily="34" charset="-122"/>
                 <a:cs typeface="Times New Roman" pitchFamily="34" charset="-120"/>
               </a:rPr>
-              <a:t>1. Importance of Rivers and Floodplains to Man</a:t>
-            </a:r>
-            <a:endParaRPr lang="en-US" sz="3600" dirty="0"/>
-          </a:p>
-        </p:txBody>
-      </p:sp>
-      <p:sp>
-        <p:nvSpPr>
-          <p:cNvPr id="5" name="Text 2"/>
-          <p:cNvSpPr/>
-          <p:nvPr/>
-        </p:nvSpPr>
-        <p:spPr>
-          <a:xfrm>
-            <a:off x="5349240" y="1783080"/>
-            <a:ext cx="6522415" cy="4663440"/>
-          </a:xfrm>
-          <a:prstGeom prst="rect">
-            <a:avLst/>
-          </a:prstGeom>
-          <a:noFill/>
-          <a:ln/>
-        </p:spPr>
-        <p:txBody>
-          <a:bodyPr wrap="square" lIns="0" tIns="0" rIns="0" bIns="0" rtlCol="0" anchor="t"/>
-          <a:lstStyle/>
-          <a:p>
-            <a:pPr algn="l" indent="0" marL="0">
-              <a:spcAft>
-                <a:spcPts val="800"/>
-              </a:spcAft>
-              <a:buNone/>
-            </a:pPr>
-            <a:r>
-              <a:rPr lang="en-US" sz="4000" b="1" dirty="0">
-                <a:solidFill>
-                  <a:srgbClr val="111111"/>
-                </a:solidFill>
-                <a:latin typeface="Times New Roman" pitchFamily="34" charset="0"/>
-                <a:ea typeface="Times New Roman" pitchFamily="34" charset="-122"/>
-                <a:cs typeface="Times New Roman" pitchFamily="34" charset="-120"/>
-              </a:rPr>
-              <a:t>Water supply: </a:t>
-            </a:r>
-            <a:pPr algn="l" indent="0" marL="0">
-              <a:spcAft>
-                <a:spcPts val="800"/>
-              </a:spcAft>
-              <a:buNone/>
-            </a:pPr>
-            <a:r>
-              <a:rPr lang="en-US" sz="4000" dirty="0">
-                <a:solidFill>
-                  <a:srgbClr val="111111"/>
-                </a:solidFill>
-                <a:latin typeface="Times New Roman" pitchFamily="34" charset="0"/>
-                <a:ea typeface="Times New Roman" pitchFamily="34" charset="-122"/>
-                <a:cs typeface="Times New Roman" pitchFamily="34" charset="-120"/>
-              </a:rPr>
-              <a:t>Rivers supply water for drinking, animals and irrigation.</a:t>
-            </a:r>
-            <a:endParaRPr lang="en-US" sz="4000" dirty="0"/>
-          </a:p>
-          <a:p>
-            <a:pPr algn="l" indent="0" marL="0">
-              <a:spcAft>
-                <a:spcPts val="800"/>
-              </a:spcAft>
-              <a:buNone/>
-            </a:pPr>
-            <a:r>
-              <a:rPr lang="en-US" sz="4000" b="1" dirty="0">
-                <a:solidFill>
-                  <a:srgbClr val="111111"/>
-                </a:solidFill>
-                <a:latin typeface="Times New Roman" pitchFamily="34" charset="0"/>
-                <a:ea typeface="Times New Roman" pitchFamily="34" charset="-122"/>
-                <a:cs typeface="Times New Roman" pitchFamily="34" charset="-120"/>
-              </a:rPr>
-              <a:t>Fishing: </a:t>
-            </a:r>
-            <a:pPr algn="l" indent="0" marL="0">
-              <a:spcAft>
-                <a:spcPts val="800"/>
-              </a:spcAft>
-              <a:buNone/>
-            </a:pPr>
-            <a:r>
-              <a:rPr lang="en-US" sz="4000" dirty="0">
-                <a:solidFill>
-                  <a:srgbClr val="111111"/>
-                </a:solidFill>
-                <a:latin typeface="Times New Roman" pitchFamily="34" charset="0"/>
-                <a:ea typeface="Times New Roman" pitchFamily="34" charset="-122"/>
-                <a:cs typeface="Times New Roman" pitchFamily="34" charset="-120"/>
-              </a:rPr>
-              <a:t>Rivers and flooded lands are rich in fish.</a:t>
-            </a:r>
-            <a:endParaRPr lang="en-US" sz="4000" dirty="0"/>
+              <a:t>Illustration: rice fields on a floodplain</a:t>
+            </a:r>
+            <a:endParaRPr lang="en-US" sz="1600" dirty="0"/>
           </a:p>
         </p:txBody>
       </p:sp>
@@ -13331,109 +13346,9 @@
           </a:p>
         </p:txBody>
       </p:sp>
-      <p:sp>
-        <p:nvSpPr>
-          <p:cNvPr id="3" name="Text 1"/>
-          <p:cNvSpPr/>
-          <p:nvPr/>
-        </p:nvSpPr>
-        <p:spPr>
-          <a:xfrm>
-            <a:off x="365760" y="1005840"/>
-            <a:ext cx="11460175" cy="731520"/>
-          </a:xfrm>
-          <a:prstGeom prst="rect">
-            <a:avLst/>
-          </a:prstGeom>
-          <a:noFill/>
-          <a:ln/>
-        </p:spPr>
-        <p:txBody>
-          <a:bodyPr wrap="square" lIns="0" tIns="0" rIns="0" bIns="0" rtlCol="0" anchor="ctr">
-            <a:normAutofit/>
-          </a:bodyPr>
-          <a:lstStyle/>
-          <a:p>
-            <a:pPr algn="ctr" indent="0" marL="0">
-              <a:buNone/>
-            </a:pPr>
-            <a:r>
-              <a:rPr lang="en-US" sz="3600" b="1" dirty="0">
-                <a:solidFill>
-                  <a:srgbClr val="990011"/>
-                </a:solidFill>
-                <a:latin typeface="Times New Roman" pitchFamily="34" charset="0"/>
-                <a:ea typeface="Times New Roman" pitchFamily="34" charset="-122"/>
-                <a:cs typeface="Times New Roman" pitchFamily="34" charset="-120"/>
-              </a:rPr>
-              <a:t>1. Importance of Rivers and Floodplains to Man</a:t>
-            </a:r>
-            <a:endParaRPr lang="en-US" sz="3600" dirty="0"/>
-          </a:p>
-        </p:txBody>
-      </p:sp>
-      <p:sp>
-        <p:nvSpPr>
-          <p:cNvPr id="4" name="Text 2"/>
-          <p:cNvSpPr/>
-          <p:nvPr/>
-        </p:nvSpPr>
-        <p:spPr>
-          <a:xfrm>
-            <a:off x="365760" y="1783080"/>
-            <a:ext cx="4846320" cy="4617720"/>
-          </a:xfrm>
-          <a:prstGeom prst="rect">
-            <a:avLst/>
-          </a:prstGeom>
-          <a:noFill/>
-          <a:ln/>
-        </p:spPr>
-        <p:txBody>
-          <a:bodyPr wrap="square" lIns="0" tIns="0" rIns="0" bIns="0" rtlCol="0" anchor="t"/>
-          <a:lstStyle/>
-          <a:p>
-            <a:pPr algn="l" indent="0" marL="0">
-              <a:spcAft>
-                <a:spcPts val="800"/>
-              </a:spcAft>
-              <a:buNone/>
-            </a:pPr>
-            <a:r>
-              <a:rPr lang="en-US" sz="3600" b="1" dirty="0">
-                <a:solidFill>
-                  <a:srgbClr val="111111"/>
-                </a:solidFill>
-                <a:latin typeface="Times New Roman" pitchFamily="34" charset="0"/>
-                <a:ea typeface="Times New Roman" pitchFamily="34" charset="-122"/>
-                <a:cs typeface="Times New Roman" pitchFamily="34" charset="-120"/>
-              </a:rPr>
-              <a:t>Energy: </a:t>
-            </a:r>
-            <a:pPr algn="l" indent="0" marL="0">
-              <a:spcAft>
-                <a:spcPts val="800"/>
-              </a:spcAft>
-              <a:buNone/>
-            </a:pPr>
-            <a:r>
-              <a:rPr lang="en-US" sz="3600" dirty="0">
-                <a:solidFill>
-                  <a:srgbClr val="111111"/>
-                </a:solidFill>
-                <a:latin typeface="Times New Roman" pitchFamily="34" charset="0"/>
-                <a:ea typeface="Times New Roman" pitchFamily="34" charset="-122"/>
-                <a:cs typeface="Times New Roman" pitchFamily="34" charset="-120"/>
-              </a:rPr>
-              <a:t>Dams on rivers produce electricity, like the Lagdo Dam on the Benue.</a:t>
-            </a:r>
-            <a:endParaRPr lang="en-US" sz="3600" dirty="0"/>
-          </a:p>
-        </p:txBody>
-      </p:sp>
       <p:pic>
         <p:nvPicPr>
-          <p:cNvPr id="5" name="Image 0" descr="/home/claude/f4/img/v2/f2t_lagdo.jpg">    </p:cNvPr>
+          <p:cNvPr id="3" name="Image 0" descr="/home/claude/f4/img/minesec_sheet.png">    </p:cNvPr>
           <p:cNvPicPr>
             <a:picLocks noChangeAspect="1"/>
           </p:cNvPicPr>
@@ -13447,8 +13362,8 @@
         </p:blipFill>
         <p:spPr>
           <a:xfrm>
-            <a:off x="5349240" y="2071212"/>
-            <a:ext cx="6659575" cy="3693983"/>
+            <a:off x="0" y="658368"/>
+            <a:ext cx="5120640" cy="5833872"/>
           </a:xfrm>
           <a:prstGeom prst="rect">
             <a:avLst/>
@@ -13457,14 +13372,14 @@
       </p:pic>
       <p:sp>
         <p:nvSpPr>
-          <p:cNvPr id="6" name="Text 3"/>
+          <p:cNvPr id="4" name="Text 1"/>
           <p:cNvSpPr/>
           <p:nvPr/>
         </p:nvSpPr>
         <p:spPr>
           <a:xfrm>
-            <a:off x="5349240" y="6089904"/>
-            <a:ext cx="6659575" cy="347472"/>
+            <a:off x="5349240" y="1005840"/>
+            <a:ext cx="6522415" cy="731520"/>
           </a:xfrm>
           <a:prstGeom prst="rect">
             <a:avLst/>
@@ -13473,24 +13388,122 @@
           <a:ln/>
         </p:spPr>
         <p:txBody>
-          <a:bodyPr wrap="square" lIns="0" tIns="0" rIns="0" bIns="0" rtlCol="0" anchor="ctr"/>
+          <a:bodyPr wrap="square" lIns="0" tIns="0" rIns="0" bIns="0" rtlCol="0" anchor="ctr">
+            <a:normAutofit/>
+          </a:bodyPr>
           <a:lstStyle/>
           <a:p>
             <a:pPr algn="ctr" indent="0" marL="0">
               <a:buNone/>
             </a:pPr>
             <a:r>
-              <a:rPr lang="en-US" sz="1600" i="1" dirty="0">
-                <a:solidFill>
-                  <a:srgbClr val="555555"/>
+              <a:rPr lang="en-US" sz="3600" b="1" dirty="0">
+                <a:solidFill>
+                  <a:srgbClr val="990011"/>
                 </a:solidFill>
                 <a:latin typeface="Times New Roman" pitchFamily="34" charset="0"/>
                 <a:ea typeface="Times New Roman" pitchFamily="34" charset="-122"/>
                 <a:cs typeface="Times New Roman" pitchFamily="34" charset="-120"/>
               </a:rPr>
-              <a:t>Illustration: the Lagdo Dam</a:t>
-            </a:r>
-            <a:endParaRPr lang="en-US" sz="1600" dirty="0"/>
+              <a:t>1. Importance of Rivers and Floodplains to Man</a:t>
+            </a:r>
+            <a:endParaRPr lang="en-US" sz="3600" dirty="0"/>
+          </a:p>
+        </p:txBody>
+      </p:sp>
+      <p:sp>
+        <p:nvSpPr>
+          <p:cNvPr id="5" name="Text 2"/>
+          <p:cNvSpPr/>
+          <p:nvPr/>
+        </p:nvSpPr>
+        <p:spPr>
+          <a:xfrm>
+            <a:off x="5349240" y="1783080"/>
+            <a:ext cx="6522415" cy="4663440"/>
+          </a:xfrm>
+          <a:prstGeom prst="rect">
+            <a:avLst/>
+          </a:prstGeom>
+          <a:noFill/>
+          <a:ln/>
+        </p:spPr>
+        <p:txBody>
+          <a:bodyPr wrap="square" lIns="0" tIns="0" rIns="0" bIns="0" rtlCol="0" anchor="t"/>
+          <a:lstStyle/>
+          <a:p>
+            <a:pPr algn="l" indent="0" marL="0">
+              <a:spcAft>
+                <a:spcPts val="800"/>
+              </a:spcAft>
+              <a:buNone/>
+            </a:pPr>
+            <a:r>
+              <a:rPr lang="en-US" sz="4000" b="1" dirty="0">
+                <a:solidFill>
+                  <a:srgbClr val="111111"/>
+                </a:solidFill>
+                <a:latin typeface="Times New Roman" pitchFamily="34" charset="0"/>
+                <a:ea typeface="Times New Roman" pitchFamily="34" charset="-122"/>
+                <a:cs typeface="Times New Roman" pitchFamily="34" charset="-120"/>
+              </a:rPr>
+              <a:t>Water supply: </a:t>
+            </a:r>
+            <a:pPr algn="l" indent="0" marL="0">
+              <a:spcAft>
+                <a:spcPts val="800"/>
+              </a:spcAft>
+              <a:buNone/>
+            </a:pPr>
+            <a:r>
+              <a:rPr lang="en-US" sz="4000" dirty="0">
+                <a:solidFill>
+                  <a:srgbClr val="111111"/>
+                </a:solidFill>
+                <a:latin typeface="Times New Roman" pitchFamily="34" charset="0"/>
+                <a:ea typeface="Times New Roman" pitchFamily="34" charset="-122"/>
+                <a:cs typeface="Times New Roman" pitchFamily="34" charset="-120"/>
+              </a:rPr>
+              <a:t>Rivers supply water for drinking, animals and irrigation.</a:t>
+            </a:r>
+            <a:endParaRPr lang="en-US" sz="4000" dirty="0"/>
+          </a:p>
+          <a:p>
+            <a:pPr algn="l" indent="0" marL="0">
+              <a:spcAft>
+                <a:spcPts val="800"/>
+              </a:spcAft>
+              <a:buNone/>
+            </a:pPr>
+            <a:r>
+              <a:rPr lang="en-US" sz="4000" b="1" dirty="0">
+                <a:solidFill>
+                  <a:srgbClr val="111111"/>
+                </a:solidFill>
+                <a:latin typeface="Times New Roman" pitchFamily="34" charset="0"/>
+                <a:ea typeface="Times New Roman" pitchFamily="34" charset="-122"/>
+                <a:cs typeface="Times New Roman" pitchFamily="34" charset="-120"/>
+              </a:rPr>
+              <a:t>Fishing: </a:t>
+            </a:r>
+            <a:pPr algn="l" indent="0" marL="0">
+              <a:spcAft>
+                <a:spcPts val="800"/>
+              </a:spcAft>
+              <a:buNone/>
+            </a:pPr>
+            <a:r>
+              <a:rPr lang="en-US" sz="4000" dirty="0">
+                <a:solidFill>
+                  <a:srgbClr val="111111"/>
+                </a:solidFill>
+                <a:latin typeface="Times New Roman" pitchFamily="34" charset="0"/>
+                <a:ea typeface="Times New Roman" pitchFamily="34" charset="-122"/>
+                <a:cs typeface="Times New Roman" pitchFamily="34" charset="-120"/>
+              </a:rPr>
+              <a:t>Rivers and flooded lands are rich in fish.</a:t>
+            </a:r>
+            <a:endParaRPr lang="en-US" sz="4000" dirty="0"/>
           </a:p>
         </p:txBody>
       </p:sp>
@@ -13606,9 +13619,109 @@
           </a:p>
         </p:txBody>
       </p:sp>
+      <p:sp>
+        <p:nvSpPr>
+          <p:cNvPr id="3" name="Text 1"/>
+          <p:cNvSpPr/>
+          <p:nvPr/>
+        </p:nvSpPr>
+        <p:spPr>
+          <a:xfrm>
+            <a:off x="365760" y="1005840"/>
+            <a:ext cx="11460175" cy="731520"/>
+          </a:xfrm>
+          <a:prstGeom prst="rect">
+            <a:avLst/>
+          </a:prstGeom>
+          <a:noFill/>
+          <a:ln/>
+        </p:spPr>
+        <p:txBody>
+          <a:bodyPr wrap="square" lIns="0" tIns="0" rIns="0" bIns="0" rtlCol="0" anchor="ctr">
+            <a:normAutofit/>
+          </a:bodyPr>
+          <a:lstStyle/>
+          <a:p>
+            <a:pPr algn="ctr" indent="0" marL="0">
+              <a:buNone/>
+            </a:pPr>
+            <a:r>
+              <a:rPr lang="en-US" sz="3600" b="1" dirty="0">
+                <a:solidFill>
+                  <a:srgbClr val="990011"/>
+                </a:solidFill>
+                <a:latin typeface="Times New Roman" pitchFamily="34" charset="0"/>
+                <a:ea typeface="Times New Roman" pitchFamily="34" charset="-122"/>
+                <a:cs typeface="Times New Roman" pitchFamily="34" charset="-120"/>
+              </a:rPr>
+              <a:t>1. Importance of Rivers and Floodplains to Man</a:t>
+            </a:r>
+            <a:endParaRPr lang="en-US" sz="3600" dirty="0"/>
+          </a:p>
+        </p:txBody>
+      </p:sp>
+      <p:sp>
+        <p:nvSpPr>
+          <p:cNvPr id="4" name="Text 2"/>
+          <p:cNvSpPr/>
+          <p:nvPr/>
+        </p:nvSpPr>
+        <p:spPr>
+          <a:xfrm>
+            <a:off x="365760" y="1783080"/>
+            <a:ext cx="4846320" cy="4617720"/>
+          </a:xfrm>
+          <a:prstGeom prst="rect">
+            <a:avLst/>
+          </a:prstGeom>
+          <a:noFill/>
+          <a:ln/>
+        </p:spPr>
+        <p:txBody>
+          <a:bodyPr wrap="square" lIns="0" tIns="0" rIns="0" bIns="0" rtlCol="0" anchor="t"/>
+          <a:lstStyle/>
+          <a:p>
+            <a:pPr algn="l" indent="0" marL="0">
+              <a:spcAft>
+                <a:spcPts val="800"/>
+              </a:spcAft>
+              <a:buNone/>
+            </a:pPr>
+            <a:r>
+              <a:rPr lang="en-US" sz="3600" b="1" dirty="0">
+                <a:solidFill>
+                  <a:srgbClr val="111111"/>
+                </a:solidFill>
+                <a:latin typeface="Times New Roman" pitchFamily="34" charset="0"/>
+                <a:ea typeface="Times New Roman" pitchFamily="34" charset="-122"/>
+                <a:cs typeface="Times New Roman" pitchFamily="34" charset="-120"/>
+              </a:rPr>
+              <a:t>Energy: </a:t>
+            </a:r>
+            <a:pPr algn="l" indent="0" marL="0">
+              <a:spcAft>
+                <a:spcPts val="800"/>
+              </a:spcAft>
+              <a:buNone/>
+            </a:pPr>
+            <a:r>
+              <a:rPr lang="en-US" sz="3600" dirty="0">
+                <a:solidFill>
+                  <a:srgbClr val="111111"/>
+                </a:solidFill>
+                <a:latin typeface="Times New Roman" pitchFamily="34" charset="0"/>
+                <a:ea typeface="Times New Roman" pitchFamily="34" charset="-122"/>
+                <a:cs typeface="Times New Roman" pitchFamily="34" charset="-120"/>
+              </a:rPr>
+              <a:t>Dams on rivers produce electricity, like the Lagdo Dam on the Benue.</a:t>
+            </a:r>
+            <a:endParaRPr lang="en-US" sz="3600" dirty="0"/>
+          </a:p>
+        </p:txBody>
+      </p:sp>
       <p:pic>
         <p:nvPicPr>
-          <p:cNvPr id="3" name="Image 0" descr="/home/claude/f4/img/minesec_sheet.png">    </p:cNvPr>
+          <p:cNvPr id="5" name="Image 0" descr="/home/claude/f4/img/v2/f2t_lagdo.jpg">    </p:cNvPr>
           <p:cNvPicPr>
             <a:picLocks noChangeAspect="1"/>
           </p:cNvPicPr>
@@ -13622,8 +13735,8 @@
         </p:blipFill>
         <p:spPr>
           <a:xfrm>
-            <a:off x="0" y="658368"/>
-            <a:ext cx="5120640" cy="5833872"/>
+            <a:off x="5349240" y="2071212"/>
+            <a:ext cx="6659575" cy="3693983"/>
           </a:xfrm>
           <a:prstGeom prst="rect">
             <a:avLst/>
@@ -13632,14 +13745,14 @@
       </p:pic>
       <p:sp>
         <p:nvSpPr>
-          <p:cNvPr id="4" name="Text 1"/>
+          <p:cNvPr id="6" name="Text 3"/>
           <p:cNvSpPr/>
           <p:nvPr/>
         </p:nvSpPr>
         <p:spPr>
           <a:xfrm>
-            <a:off x="5349240" y="1005840"/>
-            <a:ext cx="6522415" cy="731520"/>
+            <a:off x="5349240" y="6089904"/>
+            <a:ext cx="6659575" cy="347472"/>
           </a:xfrm>
           <a:prstGeom prst="rect">
             <a:avLst/>
@@ -13648,122 +13761,24 @@
           <a:ln/>
         </p:spPr>
         <p:txBody>
-          <a:bodyPr wrap="square" lIns="0" tIns="0" rIns="0" bIns="0" rtlCol="0" anchor="ctr">
-            <a:normAutofit/>
-          </a:bodyPr>
+          <a:bodyPr wrap="square" lIns="0" tIns="0" rIns="0" bIns="0" rtlCol="0" anchor="ctr"/>
           <a:lstStyle/>
           <a:p>
             <a:pPr algn="ctr" indent="0" marL="0">
               <a:buNone/>
             </a:pPr>
             <a:r>
-              <a:rPr lang="en-US" sz="3600" b="1" dirty="0">
-                <a:solidFill>
-                  <a:srgbClr val="990011"/>
+              <a:rPr lang="en-US" sz="1600" i="1" dirty="0">
+                <a:solidFill>
+                  <a:srgbClr val="555555"/>
                 </a:solidFill>
                 <a:latin typeface="Times New Roman" pitchFamily="34" charset="0"/>
                 <a:ea typeface="Times New Roman" pitchFamily="34" charset="-122"/>
                 <a:cs typeface="Times New Roman" pitchFamily="34" charset="-120"/>
               </a:rPr>
-              <a:t>1. Importance of Rivers and Floodplains to Man</a:t>
-            </a:r>
-            <a:endParaRPr lang="en-US" sz="3600" dirty="0"/>
-          </a:p>
-        </p:txBody>
-      </p:sp>
-      <p:sp>
-        <p:nvSpPr>
-          <p:cNvPr id="5" name="Text 2"/>
-          <p:cNvSpPr/>
-          <p:nvPr/>
-        </p:nvSpPr>
-        <p:spPr>
-          <a:xfrm>
-            <a:off x="5349240" y="1783080"/>
-            <a:ext cx="6522415" cy="4663440"/>
-          </a:xfrm>
-          <a:prstGeom prst="rect">
-            <a:avLst/>
-          </a:prstGeom>
-          <a:noFill/>
-          <a:ln/>
-        </p:spPr>
-        <p:txBody>
-          <a:bodyPr wrap="square" lIns="0" tIns="0" rIns="0" bIns="0" rtlCol="0" anchor="t"/>
-          <a:lstStyle/>
-          <a:p>
-            <a:pPr algn="l" indent="0" marL="0">
-              <a:spcAft>
-                <a:spcPts val="800"/>
-              </a:spcAft>
-              <a:buNone/>
-            </a:pPr>
-            <a:r>
-              <a:rPr lang="en-US" sz="4000" b="1" dirty="0">
-                <a:solidFill>
-                  <a:srgbClr val="111111"/>
-                </a:solidFill>
-                <a:latin typeface="Times New Roman" pitchFamily="34" charset="0"/>
-                <a:ea typeface="Times New Roman" pitchFamily="34" charset="-122"/>
-                <a:cs typeface="Times New Roman" pitchFamily="34" charset="-120"/>
-              </a:rPr>
-              <a:t>Transport: </a:t>
-            </a:r>
-            <a:pPr algn="l" indent="0" marL="0">
-              <a:spcAft>
-                <a:spcPts val="800"/>
-              </a:spcAft>
-              <a:buNone/>
-            </a:pPr>
-            <a:r>
-              <a:rPr lang="en-US" sz="4000" dirty="0">
-                <a:solidFill>
-                  <a:srgbClr val="111111"/>
-                </a:solidFill>
-                <a:latin typeface="Times New Roman" pitchFamily="34" charset="0"/>
-                <a:ea typeface="Times New Roman" pitchFamily="34" charset="-122"/>
-                <a:cs typeface="Times New Roman" pitchFamily="34" charset="-120"/>
-              </a:rPr>
-              <a:t>Rivers are used to carry people and goods, as on the Benue to Nigeria in the rainy season.</a:t>
-            </a:r>
-            <a:endParaRPr lang="en-US" sz="4000" dirty="0"/>
-          </a:p>
-          <a:p>
-            <a:pPr algn="l" indent="0" marL="0">
-              <a:spcAft>
-                <a:spcPts val="800"/>
-              </a:spcAft>
-              <a:buNone/>
-            </a:pPr>
-            <a:r>
-              <a:rPr lang="en-US" sz="4000" b="1" dirty="0">
-                <a:solidFill>
-                  <a:srgbClr val="111111"/>
-                </a:solidFill>
-                <a:latin typeface="Times New Roman" pitchFamily="34" charset="0"/>
-                <a:ea typeface="Times New Roman" pitchFamily="34" charset="-122"/>
-                <a:cs typeface="Times New Roman" pitchFamily="34" charset="-120"/>
-              </a:rPr>
-              <a:t>Settlement: </a:t>
-            </a:r>
-            <a:pPr algn="l" indent="0" marL="0">
-              <a:spcAft>
-                <a:spcPts val="800"/>
-              </a:spcAft>
-              <a:buNone/>
-            </a:pPr>
-            <a:r>
-              <a:rPr lang="en-US" sz="4000" dirty="0">
-                <a:solidFill>
-                  <a:srgbClr val="111111"/>
-                </a:solidFill>
-                <a:latin typeface="Times New Roman" pitchFamily="34" charset="0"/>
-                <a:ea typeface="Times New Roman" pitchFamily="34" charset="-122"/>
-                <a:cs typeface="Times New Roman" pitchFamily="34" charset="-120"/>
-              </a:rPr>
-              <a:t>Flat, fertile land near water attracts villages and towns.</a:t>
-            </a:r>
-            <a:endParaRPr lang="en-US" sz="4000" dirty="0"/>
+              <a:t>Illustration: the Lagdo Dam</a:t>
+            </a:r>
+            <a:endParaRPr lang="en-US" sz="1600" dirty="0"/>
           </a:p>
         </p:txBody>
       </p:sp>
@@ -13879,129 +13894,9 @@
           </a:p>
         </p:txBody>
       </p:sp>
-      <p:sp>
-        <p:nvSpPr>
-          <p:cNvPr id="3" name="Text 1"/>
-          <p:cNvSpPr/>
-          <p:nvPr/>
-        </p:nvSpPr>
-        <p:spPr>
-          <a:xfrm>
-            <a:off x="365760" y="1005840"/>
-            <a:ext cx="11460175" cy="731520"/>
-          </a:xfrm>
-          <a:prstGeom prst="rect">
-            <a:avLst/>
-          </a:prstGeom>
-          <a:noFill/>
-          <a:ln/>
-        </p:spPr>
-        <p:txBody>
-          <a:bodyPr wrap="square" lIns="0" tIns="0" rIns="0" bIns="0" rtlCol="0" anchor="ctr">
-            <a:normAutofit/>
-          </a:bodyPr>
-          <a:lstStyle/>
-          <a:p>
-            <a:pPr algn="ctr" indent="0" marL="0">
-              <a:buNone/>
-            </a:pPr>
-            <a:r>
-              <a:rPr lang="en-US" sz="3600" b="1" dirty="0">
-                <a:solidFill>
-                  <a:srgbClr val="990011"/>
-                </a:solidFill>
-                <a:latin typeface="Times New Roman" pitchFamily="34" charset="0"/>
-                <a:ea typeface="Times New Roman" pitchFamily="34" charset="-122"/>
-                <a:cs typeface="Times New Roman" pitchFamily="34" charset="-120"/>
-              </a:rPr>
-              <a:t>2. Problems of Living in Floodplains</a:t>
-            </a:r>
-            <a:endParaRPr lang="en-US" sz="3600" dirty="0"/>
-          </a:p>
-        </p:txBody>
-      </p:sp>
-      <p:sp>
-        <p:nvSpPr>
-          <p:cNvPr id="4" name="Text 2"/>
-          <p:cNvSpPr/>
-          <p:nvPr/>
-        </p:nvSpPr>
-        <p:spPr>
-          <a:xfrm>
-            <a:off x="365760" y="1783080"/>
-            <a:ext cx="4846320" cy="4617720"/>
-          </a:xfrm>
-          <a:prstGeom prst="rect">
-            <a:avLst/>
-          </a:prstGeom>
-          <a:noFill/>
-          <a:ln/>
-        </p:spPr>
-        <p:txBody>
-          <a:bodyPr wrap="square" lIns="0" tIns="0" rIns="0" bIns="0" rtlCol="0" anchor="t"/>
-          <a:lstStyle/>
-          <a:p>
-            <a:pPr algn="l" indent="0" marL="0">
-              <a:spcAft>
-                <a:spcPts val="800"/>
-              </a:spcAft>
-              <a:buNone/>
-            </a:pPr>
-            <a:r>
-              <a:rPr lang="en-US" sz="3600" i="1" dirty="0">
-                <a:solidFill>
-                  <a:srgbClr val="111111"/>
-                </a:solidFill>
-                <a:latin typeface="Times New Roman" pitchFamily="34" charset="0"/>
-                <a:ea typeface="Times New Roman" pitchFamily="34" charset="-122"/>
-                <a:cs typeface="Times New Roman" pitchFamily="34" charset="-120"/>
-              </a:rPr>
-              <a:t>People in floodplains face the following problems:</a:t>
-            </a:r>
-            <a:endParaRPr lang="en-US" sz="3600" dirty="0"/>
-          </a:p>
-          <a:p>
-            <a:pPr algn="l" indent="0" marL="0">
-              <a:spcAft>
-                <a:spcPts val="800"/>
-              </a:spcAft>
-              <a:buNone/>
-            </a:pPr>
-            <a:r>
-              <a:rPr lang="en-US" sz="3600" b="1" dirty="0">
-                <a:solidFill>
-                  <a:srgbClr val="111111"/>
-                </a:solidFill>
-                <a:latin typeface="Times New Roman" pitchFamily="34" charset="0"/>
-                <a:ea typeface="Times New Roman" pitchFamily="34" charset="-122"/>
-                <a:cs typeface="Times New Roman" pitchFamily="34" charset="-120"/>
-              </a:rPr>
-              <a:t>Floods: </a:t>
-            </a:r>
-            <a:pPr algn="l" indent="0" marL="0">
-              <a:spcAft>
-                <a:spcPts val="800"/>
-              </a:spcAft>
-              <a:buNone/>
-            </a:pPr>
-            <a:r>
-              <a:rPr lang="en-US" sz="3600" dirty="0">
-                <a:solidFill>
-                  <a:srgbClr val="111111"/>
-                </a:solidFill>
-                <a:latin typeface="Times New Roman" pitchFamily="34" charset="0"/>
-                <a:ea typeface="Times New Roman" pitchFamily="34" charset="-122"/>
-                <a:cs typeface="Times New Roman" pitchFamily="34" charset="-120"/>
-              </a:rPr>
-              <a:t>Floods destroy houses, crops, roads and bridges.</a:t>
-            </a:r>
-            <a:endParaRPr lang="en-US" sz="3600" dirty="0"/>
-          </a:p>
-        </p:txBody>
-      </p:sp>
       <p:pic>
         <p:nvPicPr>
-          <p:cNvPr id="5" name="Image 0" descr="/home/claude/f4/img/v2/f4_flood.jpg">    </p:cNvPr>
+          <p:cNvPr id="3" name="Image 0" descr="/home/claude/f4/img/minesec_sheet.png">    </p:cNvPr>
           <p:cNvPicPr>
             <a:picLocks noChangeAspect="1"/>
           </p:cNvPicPr>
@@ -14015,8 +13910,8 @@
         </p:blipFill>
         <p:spPr>
           <a:xfrm>
-            <a:off x="5349240" y="2071212"/>
-            <a:ext cx="6659575" cy="3693983"/>
+            <a:off x="0" y="658368"/>
+            <a:ext cx="5120640" cy="5833872"/>
           </a:xfrm>
           <a:prstGeom prst="rect">
             <a:avLst/>
@@ -14025,14 +13920,14 @@
       </p:pic>
       <p:sp>
         <p:nvSpPr>
-          <p:cNvPr id="6" name="Text 3"/>
+          <p:cNvPr id="4" name="Text 1"/>
           <p:cNvSpPr/>
           <p:nvPr/>
         </p:nvSpPr>
         <p:spPr>
           <a:xfrm>
-            <a:off x="5349240" y="6089904"/>
-            <a:ext cx="6659575" cy="347472"/>
+            <a:off x="5349240" y="1005840"/>
+            <a:ext cx="6522415" cy="731520"/>
           </a:xfrm>
           <a:prstGeom prst="rect">
             <a:avLst/>
@@ -14041,24 +13936,122 @@
           <a:ln/>
         </p:spPr>
         <p:txBody>
-          <a:bodyPr wrap="square" lIns="0" tIns="0" rIns="0" bIns="0" rtlCol="0" anchor="ctr"/>
+          <a:bodyPr wrap="square" lIns="0" tIns="0" rIns="0" bIns="0" rtlCol="0" anchor="ctr">
+            <a:normAutofit/>
+          </a:bodyPr>
           <a:lstStyle/>
           <a:p>
             <a:pPr algn="ctr" indent="0" marL="0">
               <a:buNone/>
             </a:pPr>
             <a:r>
-              <a:rPr lang="en-US" sz="1600" i="1" dirty="0">
-                <a:solidFill>
-                  <a:srgbClr val="555555"/>
+              <a:rPr lang="en-US" sz="3600" b="1" dirty="0">
+                <a:solidFill>
+                  <a:srgbClr val="990011"/>
                 </a:solidFill>
                 <a:latin typeface="Times New Roman" pitchFamily="34" charset="0"/>
                 <a:ea typeface="Times New Roman" pitchFamily="34" charset="-122"/>
                 <a:cs typeface="Times New Roman" pitchFamily="34" charset="-120"/>
               </a:rPr>
-              <a:t>Illustration: a flooded area</a:t>
-            </a:r>
-            <a:endParaRPr lang="en-US" sz="1600" dirty="0"/>
+              <a:t>1. Importance of Rivers and Floodplains to Man</a:t>
+            </a:r>
+            <a:endParaRPr lang="en-US" sz="3600" dirty="0"/>
+          </a:p>
+        </p:txBody>
+      </p:sp>
+      <p:sp>
+        <p:nvSpPr>
+          <p:cNvPr id="5" name="Text 2"/>
+          <p:cNvSpPr/>
+          <p:nvPr/>
+        </p:nvSpPr>
+        <p:spPr>
+          <a:xfrm>
+            <a:off x="5349240" y="1783080"/>
+            <a:ext cx="6522415" cy="4663440"/>
+          </a:xfrm>
+          <a:prstGeom prst="rect">
+            <a:avLst/>
+          </a:prstGeom>
+          <a:noFill/>
+          <a:ln/>
+        </p:spPr>
+        <p:txBody>
+          <a:bodyPr wrap="square" lIns="0" tIns="0" rIns="0" bIns="0" rtlCol="0" anchor="t"/>
+          <a:lstStyle/>
+          <a:p>
+            <a:pPr algn="l" indent="0" marL="0">
+              <a:spcAft>
+                <a:spcPts val="800"/>
+              </a:spcAft>
+              <a:buNone/>
+            </a:pPr>
+            <a:r>
+              <a:rPr lang="en-US" sz="4000" b="1" dirty="0">
+                <a:solidFill>
+                  <a:srgbClr val="111111"/>
+                </a:solidFill>
+                <a:latin typeface="Times New Roman" pitchFamily="34" charset="0"/>
+                <a:ea typeface="Times New Roman" pitchFamily="34" charset="-122"/>
+                <a:cs typeface="Times New Roman" pitchFamily="34" charset="-120"/>
+              </a:rPr>
+              <a:t>Transport: </a:t>
+            </a:r>
+            <a:pPr algn="l" indent="0" marL="0">
+              <a:spcAft>
+                <a:spcPts val="800"/>
+              </a:spcAft>
+              <a:buNone/>
+            </a:pPr>
+            <a:r>
+              <a:rPr lang="en-US" sz="4000" dirty="0">
+                <a:solidFill>
+                  <a:srgbClr val="111111"/>
+                </a:solidFill>
+                <a:latin typeface="Times New Roman" pitchFamily="34" charset="0"/>
+                <a:ea typeface="Times New Roman" pitchFamily="34" charset="-122"/>
+                <a:cs typeface="Times New Roman" pitchFamily="34" charset="-120"/>
+              </a:rPr>
+              <a:t>Rivers are used to carry people and goods, as on the Benue to Nigeria in the rainy season.</a:t>
+            </a:r>
+            <a:endParaRPr lang="en-US" sz="4000" dirty="0"/>
+          </a:p>
+          <a:p>
+            <a:pPr algn="l" indent="0" marL="0">
+              <a:spcAft>
+                <a:spcPts val="800"/>
+              </a:spcAft>
+              <a:buNone/>
+            </a:pPr>
+            <a:r>
+              <a:rPr lang="en-US" sz="4000" b="1" dirty="0">
+                <a:solidFill>
+                  <a:srgbClr val="111111"/>
+                </a:solidFill>
+                <a:latin typeface="Times New Roman" pitchFamily="34" charset="0"/>
+                <a:ea typeface="Times New Roman" pitchFamily="34" charset="-122"/>
+                <a:cs typeface="Times New Roman" pitchFamily="34" charset="-120"/>
+              </a:rPr>
+              <a:t>Settlement: </a:t>
+            </a:r>
+            <a:pPr algn="l" indent="0" marL="0">
+              <a:spcAft>
+                <a:spcPts val="800"/>
+              </a:spcAft>
+              <a:buNone/>
+            </a:pPr>
+            <a:r>
+              <a:rPr lang="en-US" sz="4000" dirty="0">
+                <a:solidFill>
+                  <a:srgbClr val="111111"/>
+                </a:solidFill>
+                <a:latin typeface="Times New Roman" pitchFamily="34" charset="0"/>
+                <a:ea typeface="Times New Roman" pitchFamily="34" charset="-122"/>
+                <a:cs typeface="Times New Roman" pitchFamily="34" charset="-120"/>
+              </a:rPr>
+              <a:t>Flat, fertile land near water attracts villages and towns.</a:t>
+            </a:r>
+            <a:endParaRPr lang="en-US" sz="4000" dirty="0"/>
           </a:p>
         </p:txBody>
       </p:sp>
@@ -14174,9 +14167,129 @@
           </a:p>
         </p:txBody>
       </p:sp>
+      <p:sp>
+        <p:nvSpPr>
+          <p:cNvPr id="3" name="Text 1"/>
+          <p:cNvSpPr/>
+          <p:nvPr/>
+        </p:nvSpPr>
+        <p:spPr>
+          <a:xfrm>
+            <a:off x="365760" y="1005840"/>
+            <a:ext cx="11460175" cy="731520"/>
+          </a:xfrm>
+          <a:prstGeom prst="rect">
+            <a:avLst/>
+          </a:prstGeom>
+          <a:noFill/>
+          <a:ln/>
+        </p:spPr>
+        <p:txBody>
+          <a:bodyPr wrap="square" lIns="0" tIns="0" rIns="0" bIns="0" rtlCol="0" anchor="ctr">
+            <a:normAutofit/>
+          </a:bodyPr>
+          <a:lstStyle/>
+          <a:p>
+            <a:pPr algn="ctr" indent="0" marL="0">
+              <a:buNone/>
+            </a:pPr>
+            <a:r>
+              <a:rPr lang="en-US" sz="3600" b="1" dirty="0">
+                <a:solidFill>
+                  <a:srgbClr val="990011"/>
+                </a:solidFill>
+                <a:latin typeface="Times New Roman" pitchFamily="34" charset="0"/>
+                <a:ea typeface="Times New Roman" pitchFamily="34" charset="-122"/>
+                <a:cs typeface="Times New Roman" pitchFamily="34" charset="-120"/>
+              </a:rPr>
+              <a:t>2. Problems of Living in Floodplains</a:t>
+            </a:r>
+            <a:endParaRPr lang="en-US" sz="3600" dirty="0"/>
+          </a:p>
+        </p:txBody>
+      </p:sp>
+      <p:sp>
+        <p:nvSpPr>
+          <p:cNvPr id="4" name="Text 2"/>
+          <p:cNvSpPr/>
+          <p:nvPr/>
+        </p:nvSpPr>
+        <p:spPr>
+          <a:xfrm>
+            <a:off x="365760" y="1783080"/>
+            <a:ext cx="4846320" cy="4617720"/>
+          </a:xfrm>
+          <a:prstGeom prst="rect">
+            <a:avLst/>
+          </a:prstGeom>
+          <a:noFill/>
+          <a:ln/>
+        </p:spPr>
+        <p:txBody>
+          <a:bodyPr wrap="square" lIns="0" tIns="0" rIns="0" bIns="0" rtlCol="0" anchor="t"/>
+          <a:lstStyle/>
+          <a:p>
+            <a:pPr algn="l" indent="0" marL="0">
+              <a:spcAft>
+                <a:spcPts val="800"/>
+              </a:spcAft>
+              <a:buNone/>
+            </a:pPr>
+            <a:r>
+              <a:rPr lang="en-US" sz="3600" i="1" dirty="0">
+                <a:solidFill>
+                  <a:srgbClr val="111111"/>
+                </a:solidFill>
+                <a:latin typeface="Times New Roman" pitchFamily="34" charset="0"/>
+                <a:ea typeface="Times New Roman" pitchFamily="34" charset="-122"/>
+                <a:cs typeface="Times New Roman" pitchFamily="34" charset="-120"/>
+              </a:rPr>
+              <a:t>People in floodplains face the following problems:</a:t>
+            </a:r>
+            <a:endParaRPr lang="en-US" sz="3600" dirty="0"/>
+          </a:p>
+          <a:p>
+            <a:pPr algn="l" indent="0" marL="0">
+              <a:spcAft>
+                <a:spcPts val="800"/>
+              </a:spcAft>
+              <a:buNone/>
+            </a:pPr>
+            <a:r>
+              <a:rPr lang="en-US" sz="3600" b="1" dirty="0">
+                <a:solidFill>
+                  <a:srgbClr val="111111"/>
+                </a:solidFill>
+                <a:latin typeface="Times New Roman" pitchFamily="34" charset="0"/>
+                <a:ea typeface="Times New Roman" pitchFamily="34" charset="-122"/>
+                <a:cs typeface="Times New Roman" pitchFamily="34" charset="-120"/>
+              </a:rPr>
+              <a:t>Floods: </a:t>
+            </a:r>
+            <a:pPr algn="l" indent="0" marL="0">
+              <a:spcAft>
+                <a:spcPts val="800"/>
+              </a:spcAft>
+              <a:buNone/>
+            </a:pPr>
+            <a:r>
+              <a:rPr lang="en-US" sz="3600" dirty="0">
+                <a:solidFill>
+                  <a:srgbClr val="111111"/>
+                </a:solidFill>
+                <a:latin typeface="Times New Roman" pitchFamily="34" charset="0"/>
+                <a:ea typeface="Times New Roman" pitchFamily="34" charset="-122"/>
+                <a:cs typeface="Times New Roman" pitchFamily="34" charset="-120"/>
+              </a:rPr>
+              <a:t>Floods destroy houses, crops, roads and bridges.</a:t>
+            </a:r>
+            <a:endParaRPr lang="en-US" sz="3600" dirty="0"/>
+          </a:p>
+        </p:txBody>
+      </p:sp>
       <p:pic>
         <p:nvPicPr>
-          <p:cNvPr id="3" name="Image 0" descr="/home/claude/f4/img/minesec_sheet.png">    </p:cNvPr>
+          <p:cNvPr id="5" name="Image 0" descr="/home/claude/f4/img/v2/f4_flood.jpg">    </p:cNvPr>
           <p:cNvPicPr>
             <a:picLocks noChangeAspect="1"/>
           </p:cNvPicPr>
@@ -14190,8 +14303,8 @@
         </p:blipFill>
         <p:spPr>
           <a:xfrm>
-            <a:off x="0" y="658368"/>
-            <a:ext cx="3840480" cy="5833872"/>
+            <a:off x="5349240" y="2071212"/>
+            <a:ext cx="6659575" cy="3693983"/>
           </a:xfrm>
           <a:prstGeom prst="rect">
             <a:avLst/>
@@ -14200,14 +14313,14 @@
       </p:pic>
       <p:sp>
         <p:nvSpPr>
-          <p:cNvPr id="4" name="Text 1"/>
+          <p:cNvPr id="6" name="Text 3"/>
           <p:cNvSpPr/>
           <p:nvPr/>
         </p:nvSpPr>
         <p:spPr>
           <a:xfrm>
-            <a:off x="4069080" y="1005840"/>
-            <a:ext cx="7802575" cy="731520"/>
+            <a:off x="5349240" y="6089904"/>
+            <a:ext cx="6659575" cy="347472"/>
           </a:xfrm>
           <a:prstGeom prst="rect">
             <a:avLst/>
@@ -14216,159 +14329,24 @@
           <a:ln/>
         </p:spPr>
         <p:txBody>
-          <a:bodyPr wrap="square" lIns="0" tIns="0" rIns="0" bIns="0" rtlCol="0" anchor="ctr">
-            <a:normAutofit/>
-          </a:bodyPr>
+          <a:bodyPr wrap="square" lIns="0" tIns="0" rIns="0" bIns="0" rtlCol="0" anchor="ctr"/>
           <a:lstStyle/>
           <a:p>
             <a:pPr algn="ctr" indent="0" marL="0">
               <a:buNone/>
             </a:pPr>
             <a:r>
-              <a:rPr lang="en-US" sz="3600" b="1" dirty="0">
-                <a:solidFill>
-                  <a:srgbClr val="990011"/>
+              <a:rPr lang="en-US" sz="1600" i="1" dirty="0">
+                <a:solidFill>
+                  <a:srgbClr val="555555"/>
                 </a:solidFill>
                 <a:latin typeface="Times New Roman" pitchFamily="34" charset="0"/>
                 <a:ea typeface="Times New Roman" pitchFamily="34" charset="-122"/>
                 <a:cs typeface="Times New Roman" pitchFamily="34" charset="-120"/>
               </a:rPr>
-              <a:t>2. Problems of Living in Floodplains</a:t>
-            </a:r>
-            <a:endParaRPr lang="en-US" sz="3600" dirty="0"/>
-          </a:p>
-        </p:txBody>
-      </p:sp>
-      <p:sp>
-        <p:nvSpPr>
-          <p:cNvPr id="5" name="Text 2"/>
-          <p:cNvSpPr/>
-          <p:nvPr/>
-        </p:nvSpPr>
-        <p:spPr>
-          <a:xfrm>
-            <a:off x="4069080" y="1783080"/>
-            <a:ext cx="7802575" cy="4663440"/>
-          </a:xfrm>
-          <a:prstGeom prst="rect">
-            <a:avLst/>
-          </a:prstGeom>
-          <a:noFill/>
-          <a:ln/>
-        </p:spPr>
-        <p:txBody>
-          <a:bodyPr wrap="square" lIns="0" tIns="0" rIns="0" bIns="0" rtlCol="0" anchor="t"/>
-          <a:lstStyle/>
-          <a:p>
-            <a:pPr algn="l" indent="0" marL="0">
-              <a:spcAft>
-                <a:spcPts val="800"/>
-              </a:spcAft>
-              <a:buNone/>
-            </a:pPr>
-            <a:r>
-              <a:rPr lang="en-US" sz="4000" b="1" dirty="0">
-                <a:solidFill>
-                  <a:srgbClr val="111111"/>
-                </a:solidFill>
-                <a:latin typeface="Times New Roman" pitchFamily="34" charset="0"/>
-                <a:ea typeface="Times New Roman" pitchFamily="34" charset="-122"/>
-                <a:cs typeface="Times New Roman" pitchFamily="34" charset="-120"/>
-              </a:rPr>
-              <a:t>Loss of life: </a:t>
-            </a:r>
-            <a:pPr algn="l" indent="0" marL="0">
-              <a:spcAft>
-                <a:spcPts val="800"/>
-              </a:spcAft>
-              <a:buNone/>
-            </a:pPr>
-            <a:r>
-              <a:rPr lang="en-US" sz="4000" dirty="0">
-                <a:solidFill>
-                  <a:srgbClr val="111111"/>
-                </a:solidFill>
-                <a:latin typeface="Times New Roman" pitchFamily="34" charset="0"/>
-                <a:ea typeface="Times New Roman" pitchFamily="34" charset="-122"/>
-                <a:cs typeface="Times New Roman" pitchFamily="34" charset="-120"/>
-              </a:rPr>
-              <a:t>People and animals can drown during floods.</a:t>
-            </a:r>
-            <a:endParaRPr lang="en-US" sz="4000" dirty="0"/>
-          </a:p>
-          <a:p>
-            <a:pPr algn="l" indent="0" marL="0">
-              <a:spcAft>
-                <a:spcPts val="800"/>
-              </a:spcAft>
-              <a:buNone/>
-            </a:pPr>
-            <a:r>
-              <a:rPr lang="en-US" sz="4000" b="1" dirty="0">
-                <a:solidFill>
-                  <a:srgbClr val="111111"/>
-                </a:solidFill>
-                <a:latin typeface="Times New Roman" pitchFamily="34" charset="0"/>
-                <a:ea typeface="Times New Roman" pitchFamily="34" charset="-122"/>
-                <a:cs typeface="Times New Roman" pitchFamily="34" charset="-120"/>
-              </a:rPr>
-              <a:t>Diseases: </a:t>
-            </a:r>
-            <a:pPr algn="l" indent="0" marL="0">
-              <a:spcAft>
-                <a:spcPts val="800"/>
-              </a:spcAft>
-              <a:buNone/>
-            </a:pPr>
-            <a:r>
-              <a:rPr lang="en-US" sz="4000" dirty="0">
-                <a:solidFill>
-                  <a:srgbClr val="111111"/>
-                </a:solidFill>
-                <a:latin typeface="Times New Roman" pitchFamily="34" charset="0"/>
-                <a:ea typeface="Times New Roman" pitchFamily="34" charset="-122"/>
-                <a:cs typeface="Times New Roman" pitchFamily="34" charset="-120"/>
-              </a:rPr>
-              <a:t>Stagnant water spreads cholera, malaria and bilharzia.</a:t>
-            </a:r>
-            <a:endParaRPr lang="en-US" sz="4000" dirty="0"/>
-          </a:p>
-          <a:p>
-            <a:pPr algn="l" indent="0" marL="0">
-              <a:spcAft>
-                <a:spcPts val="800"/>
-              </a:spcAft>
-              <a:buNone/>
-            </a:pPr>
-            <a:r>
-              <a:rPr lang="en-US" sz="4000" b="1" dirty="0">
-                <a:solidFill>
-                  <a:srgbClr val="111111"/>
-                </a:solidFill>
-                <a:latin typeface="Times New Roman" pitchFamily="34" charset="0"/>
-                <a:ea typeface="Times New Roman" pitchFamily="34" charset="-122"/>
-                <a:cs typeface="Times New Roman" pitchFamily="34" charset="-120"/>
-              </a:rPr>
-              <a:t>Bank collapse and silting: </a:t>
-            </a:r>
-            <a:pPr algn="l" indent="0" marL="0">
-              <a:spcAft>
-                <a:spcPts val="800"/>
-              </a:spcAft>
-              <a:buNone/>
-            </a:pPr>
-            <a:r>
-              <a:rPr lang="en-US" sz="4000" dirty="0">
-                <a:solidFill>
-                  <a:srgbClr val="111111"/>
-                </a:solidFill>
-                <a:latin typeface="Times New Roman" pitchFamily="34" charset="0"/>
-                <a:ea typeface="Times New Roman" pitchFamily="34" charset="-122"/>
-                <a:cs typeface="Times New Roman" pitchFamily="34" charset="-120"/>
-              </a:rPr>
-              <a:t>River banks collapse, and silt fills drains and river beds.</a:t>
-            </a:r>
-            <a:endParaRPr lang="en-US" sz="4000" dirty="0"/>
+              <a:t>Illustration: a flooded area</a:t>
+            </a:r>
+            <a:endParaRPr lang="en-US" sz="1600" dirty="0"/>
           </a:p>
         </p:txBody>
       </p:sp>
@@ -14501,7 +14479,7 @@
         <p:spPr>
           <a:xfrm>
             <a:off x="0" y="658368"/>
-            <a:ext cx="5120640" cy="5833872"/>
+            <a:ext cx="3840480" cy="5833872"/>
           </a:xfrm>
           <a:prstGeom prst="rect">
             <a:avLst/>
@@ -14516,8 +14494,8 @@
         </p:nvSpPr>
         <p:spPr>
           <a:xfrm>
-            <a:off x="5349240" y="1005840"/>
-            <a:ext cx="6522415" cy="731520"/>
+            <a:off x="4069080" y="1005840"/>
+            <a:ext cx="7802575" cy="731520"/>
           </a:xfrm>
           <a:prstGeom prst="rect">
             <a:avLst/>
@@ -14543,7 +14521,7 @@
                 <a:ea typeface="Times New Roman" pitchFamily="34" charset="-122"/>
                 <a:cs typeface="Times New Roman" pitchFamily="34" charset="-120"/>
               </a:rPr>
-              <a:t>2. Problems of Living in Floodplains (continued)</a:t>
+              <a:t>2. Problems of Living in Floodplains</a:t>
             </a:r>
             <a:endParaRPr lang="en-US" sz="3600" dirty="0"/>
           </a:p>
@@ -14557,8 +14535,8 @@
         </p:nvSpPr>
         <p:spPr>
           <a:xfrm>
-            <a:off x="5349240" y="1783080"/>
-            <a:ext cx="6522415" cy="4663440"/>
+            <a:off x="4069080" y="1783080"/>
+            <a:ext cx="7802575" cy="4663440"/>
           </a:xfrm>
           <a:prstGeom prst="rect">
             <a:avLst/>
@@ -14585,7 +14563,7 @@
                 <a:ea typeface="Times New Roman" pitchFamily="34" charset="-122"/>
                 <a:cs typeface="Times New Roman" pitchFamily="34" charset="-120"/>
               </a:rPr>
-              <a:t>Displacement: </a:t>
+              <a:t>Loss of life: </a:t>
             </a:r>
             <a:pPr algn="l" indent="0" marL="0">
               <a:spcAft>
@@ -14602,7 +14580,81 @@
                 <a:ea typeface="Times New Roman" pitchFamily="34" charset="-122"/>
                 <a:cs typeface="Times New Roman" pitchFamily="34" charset="-120"/>
               </a:rPr>
-              <a:t>Families lose their homes and must move.</a:t>
+              <a:t>People and animals can drown during floods.</a:t>
+            </a:r>
+            <a:endParaRPr lang="en-US" sz="4000" dirty="0"/>
+          </a:p>
+          <a:p>
+            <a:pPr algn="l" indent="0" marL="0">
+              <a:spcAft>
+                <a:spcPts val="800"/>
+              </a:spcAft>
+              <a:buNone/>
+            </a:pPr>
+            <a:r>
+              <a:rPr lang="en-US" sz="4000" b="1" dirty="0">
+                <a:solidFill>
+                  <a:srgbClr val="111111"/>
+                </a:solidFill>
+                <a:latin typeface="Times New Roman" pitchFamily="34" charset="0"/>
+                <a:ea typeface="Times New Roman" pitchFamily="34" charset="-122"/>
+                <a:cs typeface="Times New Roman" pitchFamily="34" charset="-120"/>
+              </a:rPr>
+              <a:t>Diseases: </a:t>
+            </a:r>
+            <a:pPr algn="l" indent="0" marL="0">
+              <a:spcAft>
+                <a:spcPts val="800"/>
+              </a:spcAft>
+              <a:buNone/>
+            </a:pPr>
+            <a:r>
+              <a:rPr lang="en-US" sz="4000" dirty="0">
+                <a:solidFill>
+                  <a:srgbClr val="111111"/>
+                </a:solidFill>
+                <a:latin typeface="Times New Roman" pitchFamily="34" charset="0"/>
+                <a:ea typeface="Times New Roman" pitchFamily="34" charset="-122"/>
+                <a:cs typeface="Times New Roman" pitchFamily="34" charset="-120"/>
+              </a:rPr>
+              <a:t>Stagnant water spreads cholera, malaria and bilharzia.</a:t>
+            </a:r>
+            <a:endParaRPr lang="en-US" sz="4000" dirty="0"/>
+          </a:p>
+          <a:p>
+            <a:pPr algn="l" indent="0" marL="0">
+              <a:spcAft>
+                <a:spcPts val="800"/>
+              </a:spcAft>
+              <a:buNone/>
+            </a:pPr>
+            <a:r>
+              <a:rPr lang="en-US" sz="4000" b="1" dirty="0">
+                <a:solidFill>
+                  <a:srgbClr val="111111"/>
+                </a:solidFill>
+                <a:latin typeface="Times New Roman" pitchFamily="34" charset="0"/>
+                <a:ea typeface="Times New Roman" pitchFamily="34" charset="-122"/>
+                <a:cs typeface="Times New Roman" pitchFamily="34" charset="-120"/>
+              </a:rPr>
+              <a:t>Bank collapse and silting: </a:t>
+            </a:r>
+            <a:pPr algn="l" indent="0" marL="0">
+              <a:spcAft>
+                <a:spcPts val="800"/>
+              </a:spcAft>
+              <a:buNone/>
+            </a:pPr>
+            <a:r>
+              <a:rPr lang="en-US" sz="4000" dirty="0">
+                <a:solidFill>
+                  <a:srgbClr val="111111"/>
+                </a:solidFill>
+                <a:latin typeface="Times New Roman" pitchFamily="34" charset="0"/>
+                <a:ea typeface="Times New Roman" pitchFamily="34" charset="-122"/>
+                <a:cs typeface="Times New Roman" pitchFamily="34" charset="-120"/>
+              </a:rPr>
+              <a:t>River banks collapse, and silt fills drains and river beds.</a:t>
             </a:r>
             <a:endParaRPr lang="en-US" sz="4000" dirty="0"/>
           </a:p>
@@ -14720,129 +14772,9 @@
           </a:p>
         </p:txBody>
       </p:sp>
-      <p:sp>
-        <p:nvSpPr>
-          <p:cNvPr id="3" name="Text 1"/>
-          <p:cNvSpPr/>
-          <p:nvPr/>
-        </p:nvSpPr>
-        <p:spPr>
-          <a:xfrm>
-            <a:off x="365760" y="1005840"/>
-            <a:ext cx="11460175" cy="731520"/>
-          </a:xfrm>
-          <a:prstGeom prst="rect">
-            <a:avLst/>
-          </a:prstGeom>
-          <a:noFill/>
-          <a:ln/>
-        </p:spPr>
-        <p:txBody>
-          <a:bodyPr wrap="square" lIns="0" tIns="0" rIns="0" bIns="0" rtlCol="0" anchor="ctr">
-            <a:normAutofit/>
-          </a:bodyPr>
-          <a:lstStyle/>
-          <a:p>
-            <a:pPr algn="ctr" indent="0" marL="0">
-              <a:buNone/>
-            </a:pPr>
-            <a:r>
-              <a:rPr lang="en-US" sz="3600" b="1" dirty="0">
-                <a:solidFill>
-                  <a:srgbClr val="990011"/>
-                </a:solidFill>
-                <a:latin typeface="Times New Roman" pitchFamily="34" charset="0"/>
-                <a:ea typeface="Times New Roman" pitchFamily="34" charset="-122"/>
-                <a:cs typeface="Times New Roman" pitchFamily="34" charset="-120"/>
-              </a:rPr>
-              <a:t>3. Solutions to the Problems of Living in Floodplains</a:t>
-            </a:r>
-            <a:endParaRPr lang="en-US" sz="3600" dirty="0"/>
-          </a:p>
-        </p:txBody>
-      </p:sp>
-      <p:sp>
-        <p:nvSpPr>
-          <p:cNvPr id="4" name="Text 2"/>
-          <p:cNvSpPr/>
-          <p:nvPr/>
-        </p:nvSpPr>
-        <p:spPr>
-          <a:xfrm>
-            <a:off x="365760" y="1783080"/>
-            <a:ext cx="4846320" cy="4617720"/>
-          </a:xfrm>
-          <a:prstGeom prst="rect">
-            <a:avLst/>
-          </a:prstGeom>
-          <a:noFill/>
-          <a:ln/>
-        </p:spPr>
-        <p:txBody>
-          <a:bodyPr wrap="square" lIns="0" tIns="0" rIns="0" bIns="0" rtlCol="0" anchor="t"/>
-          <a:lstStyle/>
-          <a:p>
-            <a:pPr algn="l" indent="0" marL="0">
-              <a:spcAft>
-                <a:spcPts val="800"/>
-              </a:spcAft>
-              <a:buNone/>
-            </a:pPr>
-            <a:r>
-              <a:rPr lang="en-US" sz="3600" i="1" dirty="0">
-                <a:solidFill>
-                  <a:srgbClr val="111111"/>
-                </a:solidFill>
-                <a:latin typeface="Times New Roman" pitchFamily="34" charset="0"/>
-                <a:ea typeface="Times New Roman" pitchFamily="34" charset="-122"/>
-                <a:cs typeface="Times New Roman" pitchFamily="34" charset="-120"/>
-              </a:rPr>
-              <a:t>The following solutions reduce these problems:</a:t>
-            </a:r>
-            <a:endParaRPr lang="en-US" sz="3600" dirty="0"/>
-          </a:p>
-          <a:p>
-            <a:pPr algn="l" indent="0" marL="0">
-              <a:spcAft>
-                <a:spcPts val="800"/>
-              </a:spcAft>
-              <a:buNone/>
-            </a:pPr>
-            <a:r>
-              <a:rPr lang="en-US" sz="3600" b="1" dirty="0">
-                <a:solidFill>
-                  <a:srgbClr val="111111"/>
-                </a:solidFill>
-                <a:latin typeface="Times New Roman" pitchFamily="34" charset="0"/>
-                <a:ea typeface="Times New Roman" pitchFamily="34" charset="-122"/>
-                <a:cs typeface="Times New Roman" pitchFamily="34" charset="-120"/>
-              </a:rPr>
-              <a:t>Dykes and raised banks: </a:t>
-            </a:r>
-            <a:pPr algn="l" indent="0" marL="0">
-              <a:spcAft>
-                <a:spcPts val="800"/>
-              </a:spcAft>
-              <a:buNone/>
-            </a:pPr>
-            <a:r>
-              <a:rPr lang="en-US" sz="3600" dirty="0">
-                <a:solidFill>
-                  <a:srgbClr val="111111"/>
-                </a:solidFill>
-                <a:latin typeface="Times New Roman" pitchFamily="34" charset="0"/>
-                <a:ea typeface="Times New Roman" pitchFamily="34" charset="-122"/>
-                <a:cs typeface="Times New Roman" pitchFamily="34" charset="-120"/>
-              </a:rPr>
-              <a:t>They hold back the river during floods.</a:t>
-            </a:r>
-            <a:endParaRPr lang="en-US" sz="3600" dirty="0"/>
-          </a:p>
-        </p:txBody>
-      </p:sp>
       <p:pic>
         <p:nvPicPr>
-          <p:cNvPr id="5" name="Image 0" descr="/home/claude/f4/img/v2/f4_dyke.jpg">    </p:cNvPr>
+          <p:cNvPr id="3" name="Image 0" descr="/home/claude/f4/img/minesec_sheet.png">    </p:cNvPr>
           <p:cNvPicPr>
             <a:picLocks noChangeAspect="1"/>
           </p:cNvPicPr>
@@ -14856,8 +14788,8 @@
         </p:blipFill>
         <p:spPr>
           <a:xfrm>
-            <a:off x="5349240" y="2069407"/>
-            <a:ext cx="6659575" cy="3697594"/>
+            <a:off x="0" y="658368"/>
+            <a:ext cx="5120640" cy="5833872"/>
           </a:xfrm>
           <a:prstGeom prst="rect">
             <a:avLst/>
@@ -14866,14 +14798,14 @@
       </p:pic>
       <p:sp>
         <p:nvSpPr>
-          <p:cNvPr id="6" name="Text 3"/>
+          <p:cNvPr id="4" name="Text 1"/>
           <p:cNvSpPr/>
           <p:nvPr/>
         </p:nvSpPr>
         <p:spPr>
           <a:xfrm>
-            <a:off x="5349240" y="6089904"/>
-            <a:ext cx="6659575" cy="347472"/>
+            <a:off x="5349240" y="1005840"/>
+            <a:ext cx="6522415" cy="731520"/>
           </a:xfrm>
           <a:prstGeom prst="rect">
             <a:avLst/>
@@ -14882,24 +14814,85 @@
           <a:ln/>
         </p:spPr>
         <p:txBody>
-          <a:bodyPr wrap="square" lIns="0" tIns="0" rIns="0" bIns="0" rtlCol="0" anchor="ctr"/>
+          <a:bodyPr wrap="square" lIns="0" tIns="0" rIns="0" bIns="0" rtlCol="0" anchor="ctr">
+            <a:normAutofit/>
+          </a:bodyPr>
           <a:lstStyle/>
           <a:p>
             <a:pPr algn="ctr" indent="0" marL="0">
               <a:buNone/>
             </a:pPr>
             <a:r>
-              <a:rPr lang="en-US" sz="1600" i="1" dirty="0">
-                <a:solidFill>
-                  <a:srgbClr val="555555"/>
+              <a:rPr lang="en-US" sz="3600" b="1" dirty="0">
+                <a:solidFill>
+                  <a:srgbClr val="990011"/>
                 </a:solidFill>
                 <a:latin typeface="Times New Roman" pitchFamily="34" charset="0"/>
                 <a:ea typeface="Times New Roman" pitchFamily="34" charset="-122"/>
                 <a:cs typeface="Times New Roman" pitchFamily="34" charset="-120"/>
               </a:rPr>
-              <a:t>Illustration: a raised bank</a:t>
-            </a:r>
-            <a:endParaRPr lang="en-US" sz="1600" dirty="0"/>
+              <a:t>2. Problems of Living in Floodplains (continued)</a:t>
+            </a:r>
+            <a:endParaRPr lang="en-US" sz="3600" dirty="0"/>
+          </a:p>
+        </p:txBody>
+      </p:sp>
+      <p:sp>
+        <p:nvSpPr>
+          <p:cNvPr id="5" name="Text 2"/>
+          <p:cNvSpPr/>
+          <p:nvPr/>
+        </p:nvSpPr>
+        <p:spPr>
+          <a:xfrm>
+            <a:off x="5349240" y="1783080"/>
+            <a:ext cx="6522415" cy="4663440"/>
+          </a:xfrm>
+          <a:prstGeom prst="rect">
+            <a:avLst/>
+          </a:prstGeom>
+          <a:noFill/>
+          <a:ln/>
+        </p:spPr>
+        <p:txBody>
+          <a:bodyPr wrap="square" lIns="0" tIns="0" rIns="0" bIns="0" rtlCol="0" anchor="t"/>
+          <a:lstStyle/>
+          <a:p>
+            <a:pPr algn="l" indent="0" marL="0">
+              <a:spcAft>
+                <a:spcPts val="800"/>
+              </a:spcAft>
+              <a:buNone/>
+            </a:pPr>
+            <a:r>
+              <a:rPr lang="en-US" sz="4000" b="1" dirty="0">
+                <a:solidFill>
+                  <a:srgbClr val="111111"/>
+                </a:solidFill>
+                <a:latin typeface="Times New Roman" pitchFamily="34" charset="0"/>
+                <a:ea typeface="Times New Roman" pitchFamily="34" charset="-122"/>
+                <a:cs typeface="Times New Roman" pitchFamily="34" charset="-120"/>
+              </a:rPr>
+              <a:t>Displacement: </a:t>
+            </a:r>
+            <a:pPr algn="l" indent="0" marL="0">
+              <a:spcAft>
+                <a:spcPts val="800"/>
+              </a:spcAft>
+              <a:buNone/>
+            </a:pPr>
+            <a:r>
+              <a:rPr lang="en-US" sz="4000" dirty="0">
+                <a:solidFill>
+                  <a:srgbClr val="111111"/>
+                </a:solidFill>
+                <a:latin typeface="Times New Roman" pitchFamily="34" charset="0"/>
+                <a:ea typeface="Times New Roman" pitchFamily="34" charset="-122"/>
+                <a:cs typeface="Times New Roman" pitchFamily="34" charset="-120"/>
+              </a:rPr>
+              <a:t>Families lose their homes and must move.</a:t>
+            </a:r>
+            <a:endParaRPr lang="en-US" sz="4000" dirty="0"/>
           </a:p>
         </p:txBody>
       </p:sp>
@@ -15015,9 +15008,129 @@
           </a:p>
         </p:txBody>
       </p:sp>
+      <p:sp>
+        <p:nvSpPr>
+          <p:cNvPr id="3" name="Text 1"/>
+          <p:cNvSpPr/>
+          <p:nvPr/>
+        </p:nvSpPr>
+        <p:spPr>
+          <a:xfrm>
+            <a:off x="365760" y="1005840"/>
+            <a:ext cx="11460175" cy="731520"/>
+          </a:xfrm>
+          <a:prstGeom prst="rect">
+            <a:avLst/>
+          </a:prstGeom>
+          <a:noFill/>
+          <a:ln/>
+        </p:spPr>
+        <p:txBody>
+          <a:bodyPr wrap="square" lIns="0" tIns="0" rIns="0" bIns="0" rtlCol="0" anchor="ctr">
+            <a:normAutofit/>
+          </a:bodyPr>
+          <a:lstStyle/>
+          <a:p>
+            <a:pPr algn="ctr" indent="0" marL="0">
+              <a:buNone/>
+            </a:pPr>
+            <a:r>
+              <a:rPr lang="en-US" sz="3600" b="1" dirty="0">
+                <a:solidFill>
+                  <a:srgbClr val="990011"/>
+                </a:solidFill>
+                <a:latin typeface="Times New Roman" pitchFamily="34" charset="0"/>
+                <a:ea typeface="Times New Roman" pitchFamily="34" charset="-122"/>
+                <a:cs typeface="Times New Roman" pitchFamily="34" charset="-120"/>
+              </a:rPr>
+              <a:t>3. Solutions to the Problems of Living in Floodplains</a:t>
+            </a:r>
+            <a:endParaRPr lang="en-US" sz="3600" dirty="0"/>
+          </a:p>
+        </p:txBody>
+      </p:sp>
+      <p:sp>
+        <p:nvSpPr>
+          <p:cNvPr id="4" name="Text 2"/>
+          <p:cNvSpPr/>
+          <p:nvPr/>
+        </p:nvSpPr>
+        <p:spPr>
+          <a:xfrm>
+            <a:off x="365760" y="1783080"/>
+            <a:ext cx="4846320" cy="4617720"/>
+          </a:xfrm>
+          <a:prstGeom prst="rect">
+            <a:avLst/>
+          </a:prstGeom>
+          <a:noFill/>
+          <a:ln/>
+        </p:spPr>
+        <p:txBody>
+          <a:bodyPr wrap="square" lIns="0" tIns="0" rIns="0" bIns="0" rtlCol="0" anchor="t"/>
+          <a:lstStyle/>
+          <a:p>
+            <a:pPr algn="l" indent="0" marL="0">
+              <a:spcAft>
+                <a:spcPts val="800"/>
+              </a:spcAft>
+              <a:buNone/>
+            </a:pPr>
+            <a:r>
+              <a:rPr lang="en-US" sz="3600" i="1" dirty="0">
+                <a:solidFill>
+                  <a:srgbClr val="111111"/>
+                </a:solidFill>
+                <a:latin typeface="Times New Roman" pitchFamily="34" charset="0"/>
+                <a:ea typeface="Times New Roman" pitchFamily="34" charset="-122"/>
+                <a:cs typeface="Times New Roman" pitchFamily="34" charset="-120"/>
+              </a:rPr>
+              <a:t>The following solutions reduce these problems:</a:t>
+            </a:r>
+            <a:endParaRPr lang="en-US" sz="3600" dirty="0"/>
+          </a:p>
+          <a:p>
+            <a:pPr algn="l" indent="0" marL="0">
+              <a:spcAft>
+                <a:spcPts val="800"/>
+              </a:spcAft>
+              <a:buNone/>
+            </a:pPr>
+            <a:r>
+              <a:rPr lang="en-US" sz="3600" b="1" dirty="0">
+                <a:solidFill>
+                  <a:srgbClr val="111111"/>
+                </a:solidFill>
+                <a:latin typeface="Times New Roman" pitchFamily="34" charset="0"/>
+                <a:ea typeface="Times New Roman" pitchFamily="34" charset="-122"/>
+                <a:cs typeface="Times New Roman" pitchFamily="34" charset="-120"/>
+              </a:rPr>
+              <a:t>Dykes and raised banks: </a:t>
+            </a:r>
+            <a:pPr algn="l" indent="0" marL="0">
+              <a:spcAft>
+                <a:spcPts val="800"/>
+              </a:spcAft>
+              <a:buNone/>
+            </a:pPr>
+            <a:r>
+              <a:rPr lang="en-US" sz="3600" dirty="0">
+                <a:solidFill>
+                  <a:srgbClr val="111111"/>
+                </a:solidFill>
+                <a:latin typeface="Times New Roman" pitchFamily="34" charset="0"/>
+                <a:ea typeface="Times New Roman" pitchFamily="34" charset="-122"/>
+                <a:cs typeface="Times New Roman" pitchFamily="34" charset="-120"/>
+              </a:rPr>
+              <a:t>They hold back the river during floods.</a:t>
+            </a:r>
+            <a:endParaRPr lang="en-US" sz="3600" dirty="0"/>
+          </a:p>
+        </p:txBody>
+      </p:sp>
       <p:pic>
         <p:nvPicPr>
-          <p:cNvPr id="3" name="Image 0" descr="/home/claude/f4/img/minesec_sheet.png">    </p:cNvPr>
+          <p:cNvPr id="5" name="Image 0" descr="/home/claude/f4/img/v2/f4_dyke.jpg">    </p:cNvPr>
           <p:cNvPicPr>
             <a:picLocks noChangeAspect="1"/>
           </p:cNvPicPr>
@@ -15031,8 +15144,8 @@
         </p:blipFill>
         <p:spPr>
           <a:xfrm>
-            <a:off x="0" y="658368"/>
-            <a:ext cx="2468880" cy="5833872"/>
+            <a:off x="5349240" y="2069407"/>
+            <a:ext cx="6659575" cy="3697594"/>
           </a:xfrm>
           <a:prstGeom prst="rect">
             <a:avLst/>
@@ -15041,14 +15154,14 @@
       </p:pic>
       <p:sp>
         <p:nvSpPr>
-          <p:cNvPr id="4" name="Text 1"/>
+          <p:cNvPr id="6" name="Text 3"/>
           <p:cNvSpPr/>
           <p:nvPr/>
         </p:nvSpPr>
         <p:spPr>
           <a:xfrm>
-            <a:off x="2697480" y="1005840"/>
-            <a:ext cx="9174175" cy="731520"/>
+            <a:off x="5349240" y="6089904"/>
+            <a:ext cx="6659575" cy="347472"/>
           </a:xfrm>
           <a:prstGeom prst="rect">
             <a:avLst/>
@@ -15057,159 +15170,24 @@
           <a:ln/>
         </p:spPr>
         <p:txBody>
-          <a:bodyPr wrap="square" lIns="0" tIns="0" rIns="0" bIns="0" rtlCol="0" anchor="ctr">
-            <a:normAutofit/>
-          </a:bodyPr>
+          <a:bodyPr wrap="square" lIns="0" tIns="0" rIns="0" bIns="0" rtlCol="0" anchor="ctr"/>
           <a:lstStyle/>
           <a:p>
             <a:pPr algn="ctr" indent="0" marL="0">
               <a:buNone/>
             </a:pPr>
             <a:r>
-              <a:rPr lang="en-US" sz="3600" b="1" dirty="0">
-                <a:solidFill>
-                  <a:srgbClr val="990011"/>
+              <a:rPr lang="en-US" sz="1600" i="1" dirty="0">
+                <a:solidFill>
+                  <a:srgbClr val="555555"/>
                 </a:solidFill>
                 <a:latin typeface="Times New Roman" pitchFamily="34" charset="0"/>
                 <a:ea typeface="Times New Roman" pitchFamily="34" charset="-122"/>
                 <a:cs typeface="Times New Roman" pitchFamily="34" charset="-120"/>
               </a:rPr>
-              <a:t>3. Solutions to the Problems of Living in Floodplains</a:t>
-            </a:r>
-            <a:endParaRPr lang="en-US" sz="3600" dirty="0"/>
-          </a:p>
-        </p:txBody>
-      </p:sp>
-      <p:sp>
-        <p:nvSpPr>
-          <p:cNvPr id="5" name="Text 2"/>
-          <p:cNvSpPr/>
-          <p:nvPr/>
-        </p:nvSpPr>
-        <p:spPr>
-          <a:xfrm>
-            <a:off x="2697480" y="1783080"/>
-            <a:ext cx="9174175" cy="4663440"/>
-          </a:xfrm>
-          <a:prstGeom prst="rect">
-            <a:avLst/>
-          </a:prstGeom>
-          <a:noFill/>
-          <a:ln/>
-        </p:spPr>
-        <p:txBody>
-          <a:bodyPr wrap="square" lIns="0" tIns="0" rIns="0" bIns="0" rtlCol="0" anchor="t"/>
-          <a:lstStyle/>
-          <a:p>
-            <a:pPr algn="l" indent="0" marL="0">
-              <a:spcAft>
-                <a:spcPts val="800"/>
-              </a:spcAft>
-              <a:buNone/>
-            </a:pPr>
-            <a:r>
-              <a:rPr lang="en-US" sz="4000" b="1" dirty="0">
-                <a:solidFill>
-                  <a:srgbClr val="111111"/>
-                </a:solidFill>
-                <a:latin typeface="Times New Roman" pitchFamily="34" charset="0"/>
-                <a:ea typeface="Times New Roman" pitchFamily="34" charset="-122"/>
-                <a:cs typeface="Times New Roman" pitchFamily="34" charset="-120"/>
-              </a:rPr>
-              <a:t>Dams: </a:t>
-            </a:r>
-            <a:pPr algn="l" indent="0" marL="0">
-              <a:spcAft>
-                <a:spcPts val="800"/>
-              </a:spcAft>
-              <a:buNone/>
-            </a:pPr>
-            <a:r>
-              <a:rPr lang="en-US" sz="4000" dirty="0">
-                <a:solidFill>
-                  <a:srgbClr val="111111"/>
-                </a:solidFill>
-                <a:latin typeface="Times New Roman" pitchFamily="34" charset="0"/>
-                <a:ea typeface="Times New Roman" pitchFamily="34" charset="-122"/>
-                <a:cs typeface="Times New Roman" pitchFamily="34" charset="-120"/>
-              </a:rPr>
-              <a:t>Dams store flood water and release it slowly, with warnings to people downstream.</a:t>
-            </a:r>
-            <a:endParaRPr lang="en-US" sz="4000" dirty="0"/>
-          </a:p>
-          <a:p>
-            <a:pPr algn="l" indent="0" marL="0">
-              <a:spcAft>
-                <a:spcPts val="800"/>
-              </a:spcAft>
-              <a:buNone/>
-            </a:pPr>
-            <a:r>
-              <a:rPr lang="en-US" sz="4000" b="1" dirty="0">
-                <a:solidFill>
-                  <a:srgbClr val="111111"/>
-                </a:solidFill>
-                <a:latin typeface="Times New Roman" pitchFamily="34" charset="0"/>
-                <a:ea typeface="Times New Roman" pitchFamily="34" charset="-122"/>
-                <a:cs typeface="Times New Roman" pitchFamily="34" charset="-120"/>
-              </a:rPr>
-              <a:t>Warnings: </a:t>
-            </a:r>
-            <a:pPr algn="l" indent="0" marL="0">
-              <a:spcAft>
-                <a:spcPts val="800"/>
-              </a:spcAft>
-              <a:buNone/>
-            </a:pPr>
-            <a:r>
-              <a:rPr lang="en-US" sz="4000" dirty="0">
-                <a:solidFill>
-                  <a:srgbClr val="111111"/>
-                </a:solidFill>
-                <a:latin typeface="Times New Roman" pitchFamily="34" charset="0"/>
-                <a:ea typeface="Times New Roman" pitchFamily="34" charset="-122"/>
-                <a:cs typeface="Times New Roman" pitchFamily="34" charset="-120"/>
-              </a:rPr>
-              <a:t>Radio and phone messages warn people before floods.</a:t>
-            </a:r>
-            <a:endParaRPr lang="en-US" sz="4000" dirty="0"/>
-          </a:p>
-          <a:p>
-            <a:pPr algn="l" indent="0" marL="0">
-              <a:spcAft>
-                <a:spcPts val="800"/>
-              </a:spcAft>
-              <a:buNone/>
-            </a:pPr>
-            <a:r>
-              <a:rPr lang="en-US" sz="4000" b="1" dirty="0">
-                <a:solidFill>
-                  <a:srgbClr val="111111"/>
-                </a:solidFill>
-                <a:latin typeface="Times New Roman" pitchFamily="34" charset="0"/>
-                <a:ea typeface="Times New Roman" pitchFamily="34" charset="-122"/>
-                <a:cs typeface="Times New Roman" pitchFamily="34" charset="-120"/>
-              </a:rPr>
-              <a:t>Safe building: </a:t>
-            </a:r>
-            <a:pPr algn="l" indent="0" marL="0">
-              <a:spcAft>
-                <a:spcPts val="800"/>
-              </a:spcAft>
-              <a:buNone/>
-            </a:pPr>
-            <a:r>
-              <a:rPr lang="en-US" sz="4000" dirty="0">
-                <a:solidFill>
-                  <a:srgbClr val="111111"/>
-                </a:solidFill>
-                <a:latin typeface="Times New Roman" pitchFamily="34" charset="0"/>
-                <a:ea typeface="Times New Roman" pitchFamily="34" charset="-122"/>
-                <a:cs typeface="Times New Roman" pitchFamily="34" charset="-120"/>
-              </a:rPr>
-              <a:t>Houses should be built on higher ground or on raised foundations.</a:t>
-            </a:r>
-            <a:endParaRPr lang="en-US" sz="4000" dirty="0"/>
+              <a:t>Illustration: a raised bank</a:t>
+            </a:r>
+            <a:endParaRPr lang="en-US" sz="1600" dirty="0"/>
           </a:p>
         </p:txBody>
       </p:sp>
@@ -15581,7 +15559,7 @@
         <p:spPr>
           <a:xfrm>
             <a:off x="0" y="658368"/>
-            <a:ext cx="5120640" cy="5833872"/>
+            <a:ext cx="2468880" cy="5833872"/>
           </a:xfrm>
           <a:prstGeom prst="rect">
             <a:avLst/>
@@ -15596,8 +15574,8 @@
         </p:nvSpPr>
         <p:spPr>
           <a:xfrm>
-            <a:off x="5349240" y="1005840"/>
-            <a:ext cx="6522415" cy="731520"/>
+            <a:off x="2697480" y="1005840"/>
+            <a:ext cx="9174175" cy="731520"/>
           </a:xfrm>
           <a:prstGeom prst="rect">
             <a:avLst/>
@@ -15623,7 +15601,7 @@
                 <a:ea typeface="Times New Roman" pitchFamily="34" charset="-122"/>
                 <a:cs typeface="Times New Roman" pitchFamily="34" charset="-120"/>
               </a:rPr>
-              <a:t>3. Solutions to the Problems of Living in Floodplains (continued)</a:t>
+              <a:t>3. Solutions to the Problems of Living in Floodplains</a:t>
             </a:r>
             <a:endParaRPr lang="en-US" sz="3600" dirty="0"/>
           </a:p>
@@ -15637,8 +15615,8 @@
         </p:nvSpPr>
         <p:spPr>
           <a:xfrm>
-            <a:off x="5349240" y="1783080"/>
-            <a:ext cx="6522415" cy="4663440"/>
+            <a:off x="2697480" y="1783080"/>
+            <a:ext cx="9174175" cy="4663440"/>
           </a:xfrm>
           <a:prstGeom prst="rect">
             <a:avLst/>
@@ -15665,7 +15643,7 @@
                 <a:ea typeface="Times New Roman" pitchFamily="34" charset="-122"/>
                 <a:cs typeface="Times New Roman" pitchFamily="34" charset="-120"/>
               </a:rPr>
-              <a:t>Trees and clean channels: </a:t>
+              <a:t>Dams: </a:t>
             </a:r>
             <a:pPr algn="l" indent="0" marL="0">
               <a:spcAft>
@@ -15682,7 +15660,81 @@
                 <a:ea typeface="Times New Roman" pitchFamily="34" charset="-122"/>
                 <a:cs typeface="Times New Roman" pitchFamily="34" charset="-120"/>
               </a:rPr>
-              <a:t>Trees along the banks hold the soil, and clearing silt from drains and river beds lets water flow.</a:t>
+              <a:t>Dams store flood water and release it slowly, with warnings to people downstream.</a:t>
+            </a:r>
+            <a:endParaRPr lang="en-US" sz="4000" dirty="0"/>
+          </a:p>
+          <a:p>
+            <a:pPr algn="l" indent="0" marL="0">
+              <a:spcAft>
+                <a:spcPts val="800"/>
+              </a:spcAft>
+              <a:buNone/>
+            </a:pPr>
+            <a:r>
+              <a:rPr lang="en-US" sz="4000" b="1" dirty="0">
+                <a:solidFill>
+                  <a:srgbClr val="111111"/>
+                </a:solidFill>
+                <a:latin typeface="Times New Roman" pitchFamily="34" charset="0"/>
+                <a:ea typeface="Times New Roman" pitchFamily="34" charset="-122"/>
+                <a:cs typeface="Times New Roman" pitchFamily="34" charset="-120"/>
+              </a:rPr>
+              <a:t>Warnings: </a:t>
+            </a:r>
+            <a:pPr algn="l" indent="0" marL="0">
+              <a:spcAft>
+                <a:spcPts val="800"/>
+              </a:spcAft>
+              <a:buNone/>
+            </a:pPr>
+            <a:r>
+              <a:rPr lang="en-US" sz="4000" dirty="0">
+                <a:solidFill>
+                  <a:srgbClr val="111111"/>
+                </a:solidFill>
+                <a:latin typeface="Times New Roman" pitchFamily="34" charset="0"/>
+                <a:ea typeface="Times New Roman" pitchFamily="34" charset="-122"/>
+                <a:cs typeface="Times New Roman" pitchFamily="34" charset="-120"/>
+              </a:rPr>
+              <a:t>Radio and phone messages warn people before floods.</a:t>
+            </a:r>
+            <a:endParaRPr lang="en-US" sz="4000" dirty="0"/>
+          </a:p>
+          <a:p>
+            <a:pPr algn="l" indent="0" marL="0">
+              <a:spcAft>
+                <a:spcPts val="800"/>
+              </a:spcAft>
+              <a:buNone/>
+            </a:pPr>
+            <a:r>
+              <a:rPr lang="en-US" sz="4000" b="1" dirty="0">
+                <a:solidFill>
+                  <a:srgbClr val="111111"/>
+                </a:solidFill>
+                <a:latin typeface="Times New Roman" pitchFamily="34" charset="0"/>
+                <a:ea typeface="Times New Roman" pitchFamily="34" charset="-122"/>
+                <a:cs typeface="Times New Roman" pitchFamily="34" charset="-120"/>
+              </a:rPr>
+              <a:t>Safe building: </a:t>
+            </a:r>
+            <a:pPr algn="l" indent="0" marL="0">
+              <a:spcAft>
+                <a:spcPts val="800"/>
+              </a:spcAft>
+              <a:buNone/>
+            </a:pPr>
+            <a:r>
+              <a:rPr lang="en-US" sz="4000" dirty="0">
+                <a:solidFill>
+                  <a:srgbClr val="111111"/>
+                </a:solidFill>
+                <a:latin typeface="Times New Roman" pitchFamily="34" charset="0"/>
+                <a:ea typeface="Times New Roman" pitchFamily="34" charset="-122"/>
+                <a:cs typeface="Times New Roman" pitchFamily="34" charset="-120"/>
+              </a:rPr>
+              <a:t>Houses should be built on higher ground or on raised foundations.</a:t>
             </a:r>
             <a:endParaRPr lang="en-US" sz="4000" dirty="0"/>
           </a:p>
@@ -15794,7 +15846,7 @@
                 <a:ea typeface="Calibri" pitchFamily="34" charset="-122"/>
                 <a:cs typeface="Calibri" pitchFamily="34" charset="-120"/>
               </a:rPr>
-              <a:t>FORMATIVE EVALUATION</a:t>
+              <a:t>BOARD SUMMARY</a:t>
             </a:r>
             <a:endParaRPr lang="en-US" sz="1400" dirty="0"/>
           </a:p>
@@ -15859,7 +15911,7 @@
                 <a:ea typeface="Times New Roman" pitchFamily="34" charset="-122"/>
                 <a:cs typeface="Times New Roman" pitchFamily="34" charset="-120"/>
               </a:rPr>
-              <a:t>Evaluation 1</a:t>
+              <a:t>3. Solutions to the Problems of Living in Floodplains (continued)</a:t>
             </a:r>
             <a:endParaRPr lang="en-US" sz="3600" dirty="0"/>
           </a:p>
@@ -15893,7 +15945,7 @@
               <a:buNone/>
             </a:pPr>
             <a:r>
-              <a:rPr lang="en-US" sz="4000" dirty="0">
+              <a:rPr lang="en-US" sz="4000" b="1" dirty="0">
                 <a:solidFill>
                   <a:srgbClr val="111111"/>
                 </a:solidFill>
@@ -15901,7 +15953,24 @@
                 <a:ea typeface="Times New Roman" pitchFamily="34" charset="-122"/>
                 <a:cs typeface="Times New Roman" pitchFamily="34" charset="-120"/>
               </a:rPr>
-              <a:t>Give one advantage of living on a floodplain.</a:t>
+              <a:t>Trees and clean channels: </a:t>
+            </a:r>
+            <a:pPr algn="l" indent="0" marL="0">
+              <a:spcAft>
+                <a:spcPts val="800"/>
+              </a:spcAft>
+              <a:buNone/>
+            </a:pPr>
+            <a:r>
+              <a:rPr lang="en-US" sz="4000" dirty="0">
+                <a:solidFill>
+                  <a:srgbClr val="111111"/>
+                </a:solidFill>
+                <a:latin typeface="Times New Roman" pitchFamily="34" charset="0"/>
+                <a:ea typeface="Times New Roman" pitchFamily="34" charset="-122"/>
+                <a:cs typeface="Times New Roman" pitchFamily="34" charset="-120"/>
+              </a:rPr>
+              <a:t>Trees along the banks hold the soil, and clearing silt from drains and river beds lets water flow.</a:t>
             </a:r>
             <a:endParaRPr lang="en-US" sz="4000" dirty="0"/>
           </a:p>
@@ -16078,7 +16147,7 @@
                 <a:ea typeface="Times New Roman" pitchFamily="34" charset="-122"/>
                 <a:cs typeface="Times New Roman" pitchFamily="34" charset="-120"/>
               </a:rPr>
-              <a:t>Expected Answer</a:t>
+              <a:t>Evaluation 1</a:t>
             </a:r>
             <a:endParaRPr lang="en-US" sz="3600" dirty="0"/>
           </a:p>
@@ -16120,7 +16189,7 @@
                 <a:ea typeface="Times New Roman" pitchFamily="34" charset="-122"/>
                 <a:cs typeface="Times New Roman" pitchFamily="34" charset="-120"/>
               </a:rPr>
-              <a:t>The soil is fertile.</a:t>
+              <a:t>Give one advantage of living on a floodplain.</a:t>
             </a:r>
             <a:endParaRPr lang="en-US" sz="4000" dirty="0"/>
           </a:p>
@@ -16297,7 +16366,7 @@
                 <a:ea typeface="Times New Roman" pitchFamily="34" charset="-122"/>
                 <a:cs typeface="Times New Roman" pitchFamily="34" charset="-120"/>
               </a:rPr>
-              <a:t>Evaluation 2</a:t>
+              <a:t>Expected Answer</a:t>
             </a:r>
             <a:endParaRPr lang="en-US" sz="3600" dirty="0"/>
           </a:p>
@@ -16339,7 +16408,7 @@
                 <a:ea typeface="Times New Roman" pitchFamily="34" charset="-122"/>
                 <a:cs typeface="Times New Roman" pitchFamily="34" charset="-120"/>
               </a:rPr>
-              <a:t>Give two solutions to floods.</a:t>
+              <a:t>The soil is fertile.</a:t>
             </a:r>
             <a:endParaRPr lang="en-US" sz="4000" dirty="0"/>
           </a:p>
@@ -16516,7 +16585,7 @@
                 <a:ea typeface="Times New Roman" pitchFamily="34" charset="-122"/>
                 <a:cs typeface="Times New Roman" pitchFamily="34" charset="-120"/>
               </a:rPr>
-              <a:t>Expected Answer</a:t>
+              <a:t>Evaluation 2</a:t>
             </a:r>
             <a:endParaRPr lang="en-US" sz="3600" dirty="0"/>
           </a:p>
@@ -16558,7 +16627,7 @@
                 <a:ea typeface="Times New Roman" pitchFamily="34" charset="-122"/>
                 <a:cs typeface="Times New Roman" pitchFamily="34" charset="-120"/>
               </a:rPr>
-              <a:t>Build dykes and give flood warnings.</a:t>
+              <a:t>Give two solutions to floods.</a:t>
             </a:r>
             <a:endParaRPr lang="en-US" sz="4000" dirty="0"/>
           </a:p>
@@ -16670,7 +16739,7 @@
                 <a:ea typeface="Calibri" pitchFamily="34" charset="-122"/>
                 <a:cs typeface="Calibri" pitchFamily="34" charset="-120"/>
               </a:rPr>
-              <a:t>REMEDIATION</a:t>
+              <a:t>FORMATIVE EVALUATION</a:t>
             </a:r>
             <a:endParaRPr lang="en-US" sz="1400" dirty="0"/>
           </a:p>
@@ -16693,7 +16762,7 @@
         <p:spPr>
           <a:xfrm>
             <a:off x="0" y="658368"/>
-            <a:ext cx="1463040" cy="5833872"/>
+            <a:ext cx="5120640" cy="5833872"/>
           </a:xfrm>
           <a:prstGeom prst="rect">
             <a:avLst/>
@@ -16708,8 +16777,8 @@
         </p:nvSpPr>
         <p:spPr>
           <a:xfrm>
-            <a:off x="1691640" y="1005840"/>
-            <a:ext cx="10180015" cy="731520"/>
+            <a:off x="5349240" y="1005840"/>
+            <a:ext cx="6522415" cy="731520"/>
           </a:xfrm>
           <a:prstGeom prst="rect">
             <a:avLst/>
@@ -16735,7 +16804,7 @@
                 <a:ea typeface="Times New Roman" pitchFamily="34" charset="-122"/>
                 <a:cs typeface="Times New Roman" pitchFamily="34" charset="-120"/>
               </a:rPr>
-              <a:t>Remediation</a:t>
+              <a:t>Expected Answer</a:t>
             </a:r>
             <a:endParaRPr lang="en-US" sz="3600" dirty="0"/>
           </a:p>
@@ -16749,8 +16818,8 @@
         </p:nvSpPr>
         <p:spPr>
           <a:xfrm>
-            <a:off x="1691640" y="1783080"/>
-            <a:ext cx="10180015" cy="4663440"/>
+            <a:off x="5349240" y="1783080"/>
+            <a:ext cx="6522415" cy="4663440"/>
           </a:xfrm>
           <a:prstGeom prst="rect">
             <a:avLst/>
@@ -16769,7 +16838,7 @@
               <a:buNone/>
             </a:pPr>
             <a:r>
-              <a:rPr lang="en-US" sz="4000" b="1" dirty="0">
+              <a:rPr lang="en-US" sz="4000" dirty="0">
                 <a:solidFill>
                   <a:srgbClr val="111111"/>
                 </a:solidFill>
@@ -16777,73 +16846,7 @@
                 <a:ea typeface="Times New Roman" pitchFamily="34" charset="-122"/>
                 <a:cs typeface="Times New Roman" pitchFamily="34" charset="-120"/>
               </a:rPr>
-              <a:t>Fill in the blanks:</a:t>
-            </a:r>
-            <a:endParaRPr lang="en-US" sz="4000" dirty="0"/>
-          </a:p>
-          <a:p>
-            <a:pPr algn="l" marL="342900" indent="-342900">
-              <a:spcAft>
-                <a:spcPts val="800"/>
-              </a:spcAft>
-              <a:buSzPct val="100000"/>
-              <a:buFont typeface="+mj-lt"/>
-              <a:buAutoNum type="arabicPeriod" startAt="1"/>
-            </a:pPr>
-            <a:r>
-              <a:rPr lang="en-US" sz="4000" dirty="0">
-                <a:solidFill>
-                  <a:srgbClr val="111111"/>
-                </a:solidFill>
-                <a:latin typeface="Times New Roman" pitchFamily="34" charset="0"/>
-                <a:ea typeface="Times New Roman" pitchFamily="34" charset="-122"/>
-                <a:cs typeface="Times New Roman" pitchFamily="34" charset="-120"/>
-              </a:rPr>
-              <a:t>Fertile mud dropped by a river is ______.</a:t>
-            </a:r>
-            <a:endParaRPr lang="en-US" sz="4000" dirty="0"/>
-          </a:p>
-          <a:p>
-            <a:pPr algn="l" marL="342900" indent="-342900">
-              <a:spcAft>
-                <a:spcPts val="800"/>
-              </a:spcAft>
-              <a:buSzPct val="100000"/>
-              <a:buFont typeface="+mj-lt"/>
-              <a:buAutoNum type="arabicPeriod" startAt="1"/>
-            </a:pPr>
-            <a:r>
-              <a:rPr lang="en-US" sz="4000" dirty="0">
-                <a:solidFill>
-                  <a:srgbClr val="111111"/>
-                </a:solidFill>
-                <a:latin typeface="Times New Roman" pitchFamily="34" charset="0"/>
-                <a:ea typeface="Times New Roman" pitchFamily="34" charset="-122"/>
-                <a:cs typeface="Times New Roman" pitchFamily="34" charset="-120"/>
-              </a:rPr>
-              <a:t>A high bank built to stop floods is a ______.</a:t>
-            </a:r>
-            <a:endParaRPr lang="en-US" sz="4000" dirty="0"/>
-          </a:p>
-          <a:p>
-            <a:pPr algn="l" marL="342900" indent="-342900">
-              <a:spcAft>
-                <a:spcPts val="800"/>
-              </a:spcAft>
-              <a:buSzPct val="100000"/>
-              <a:buFont typeface="+mj-lt"/>
-              <a:buAutoNum type="arabicPeriod" startAt="1"/>
-            </a:pPr>
-            <a:r>
-              <a:rPr lang="en-US" sz="4000" dirty="0">
-                <a:solidFill>
-                  <a:srgbClr val="111111"/>
-                </a:solidFill>
-                <a:latin typeface="Times New Roman" pitchFamily="34" charset="0"/>
-                <a:ea typeface="Times New Roman" pitchFamily="34" charset="-122"/>
-                <a:cs typeface="Times New Roman" pitchFamily="34" charset="-120"/>
-              </a:rPr>
-              <a:t>In 2012, water from the ______ Dam flooded villages.</a:t>
+              <a:t>Build dykes and give flood warnings.</a:t>
             </a:r>
             <a:endParaRPr lang="en-US" sz="4000" dirty="0"/>
           </a:p>
@@ -16955,7 +16958,7 @@
                 <a:ea typeface="Calibri" pitchFamily="34" charset="-122"/>
                 <a:cs typeface="Calibri" pitchFamily="34" charset="-120"/>
               </a:rPr>
-              <a:t>HOMEWORK</a:t>
+              <a:t>REMEDIATION</a:t>
             </a:r>
             <a:endParaRPr lang="en-US" sz="1400" dirty="0"/>
           </a:p>
@@ -16978,7 +16981,7 @@
         <p:spPr>
           <a:xfrm>
             <a:off x="0" y="658368"/>
-            <a:ext cx="5120640" cy="5833872"/>
+            <a:ext cx="1463040" cy="5833872"/>
           </a:xfrm>
           <a:prstGeom prst="rect">
             <a:avLst/>
@@ -16993,8 +16996,8 @@
         </p:nvSpPr>
         <p:spPr>
           <a:xfrm>
-            <a:off x="5349240" y="1005840"/>
-            <a:ext cx="6522415" cy="731520"/>
+            <a:off x="1691640" y="1005840"/>
+            <a:ext cx="10180015" cy="731520"/>
           </a:xfrm>
           <a:prstGeom prst="rect">
             <a:avLst/>
@@ -17020,7 +17023,7 @@
                 <a:ea typeface="Times New Roman" pitchFamily="34" charset="-122"/>
                 <a:cs typeface="Times New Roman" pitchFamily="34" charset="-120"/>
               </a:rPr>
-              <a:t>Homework</a:t>
+              <a:t>Remediation</a:t>
             </a:r>
             <a:endParaRPr lang="en-US" sz="3600" dirty="0"/>
           </a:p>
@@ -17034,8 +17037,8 @@
         </p:nvSpPr>
         <p:spPr>
           <a:xfrm>
-            <a:off x="5349240" y="1783080"/>
-            <a:ext cx="6522415" cy="4663440"/>
+            <a:off x="1691640" y="1783080"/>
+            <a:ext cx="10180015" cy="4663440"/>
           </a:xfrm>
           <a:prstGeom prst="rect">
             <a:avLst/>
@@ -17054,7 +17057,7 @@
               <a:buNone/>
             </a:pPr>
             <a:r>
-              <a:rPr lang="en-US" sz="4000" dirty="0">
+              <a:rPr lang="en-US" sz="4000" b="1" dirty="0">
                 <a:solidFill>
                   <a:srgbClr val="111111"/>
                 </a:solidFill>
@@ -17062,7 +17065,73 @@
                 <a:ea typeface="Times New Roman" pitchFamily="34" charset="-122"/>
                 <a:cs typeface="Times New Roman" pitchFamily="34" charset="-120"/>
               </a:rPr>
-              <a:t>Name the two types of waves.</a:t>
+              <a:t>Fill in the blanks:</a:t>
+            </a:r>
+            <a:endParaRPr lang="en-US" sz="4000" dirty="0"/>
+          </a:p>
+          <a:p>
+            <a:pPr algn="l" marL="342900" indent="-342900">
+              <a:spcAft>
+                <a:spcPts val="800"/>
+              </a:spcAft>
+              <a:buSzPct val="100000"/>
+              <a:buFont typeface="+mj-lt"/>
+              <a:buAutoNum type="arabicPeriod" startAt="1"/>
+            </a:pPr>
+            <a:r>
+              <a:rPr lang="en-US" sz="4000" dirty="0">
+                <a:solidFill>
+                  <a:srgbClr val="111111"/>
+                </a:solidFill>
+                <a:latin typeface="Times New Roman" pitchFamily="34" charset="0"/>
+                <a:ea typeface="Times New Roman" pitchFamily="34" charset="-122"/>
+                <a:cs typeface="Times New Roman" pitchFamily="34" charset="-120"/>
+              </a:rPr>
+              <a:t>Fertile mud dropped by a river is ______.</a:t>
+            </a:r>
+            <a:endParaRPr lang="en-US" sz="4000" dirty="0"/>
+          </a:p>
+          <a:p>
+            <a:pPr algn="l" marL="342900" indent="-342900">
+              <a:spcAft>
+                <a:spcPts val="800"/>
+              </a:spcAft>
+              <a:buSzPct val="100000"/>
+              <a:buFont typeface="+mj-lt"/>
+              <a:buAutoNum type="arabicPeriod" startAt="1"/>
+            </a:pPr>
+            <a:r>
+              <a:rPr lang="en-US" sz="4000" dirty="0">
+                <a:solidFill>
+                  <a:srgbClr val="111111"/>
+                </a:solidFill>
+                <a:latin typeface="Times New Roman" pitchFamily="34" charset="0"/>
+                <a:ea typeface="Times New Roman" pitchFamily="34" charset="-122"/>
+                <a:cs typeface="Times New Roman" pitchFamily="34" charset="-120"/>
+              </a:rPr>
+              <a:t>A high bank built to stop floods is a ______.</a:t>
+            </a:r>
+            <a:endParaRPr lang="en-US" sz="4000" dirty="0"/>
+          </a:p>
+          <a:p>
+            <a:pPr algn="l" marL="342900" indent="-342900">
+              <a:spcAft>
+                <a:spcPts val="800"/>
+              </a:spcAft>
+              <a:buSzPct val="100000"/>
+              <a:buFont typeface="+mj-lt"/>
+              <a:buAutoNum type="arabicPeriod" startAt="1"/>
+            </a:pPr>
+            <a:r>
+              <a:rPr lang="en-US" sz="4000" dirty="0">
+                <a:solidFill>
+                  <a:srgbClr val="111111"/>
+                </a:solidFill>
+                <a:latin typeface="Times New Roman" pitchFamily="34" charset="0"/>
+                <a:ea typeface="Times New Roman" pitchFamily="34" charset="-122"/>
+                <a:cs typeface="Times New Roman" pitchFamily="34" charset="-120"/>
+              </a:rPr>
+              <a:t>In 2012, water from the ______ Dam flooded villages.</a:t>
             </a:r>
             <a:endParaRPr lang="en-US" sz="4000" dirty="0"/>
           </a:p>
@@ -17174,7 +17243,7 @@
                 <a:ea typeface="Calibri" pitchFamily="34" charset="-122"/>
                 <a:cs typeface="Calibri" pitchFamily="34" charset="-120"/>
               </a:rPr>
-              <a:t>NEXT LESSON</a:t>
+              <a:t>HOMEWORK</a:t>
             </a:r>
             <a:endParaRPr lang="en-US" sz="1400" dirty="0"/>
           </a:p>
@@ -17239,7 +17308,7 @@
                 <a:ea typeface="Times New Roman" pitchFamily="34" charset="-122"/>
                 <a:cs typeface="Times New Roman" pitchFamily="34" charset="-120"/>
               </a:rPr>
-              <a:t>Next Lesson</a:t>
+              <a:t>Homework</a:t>
             </a:r>
             <a:endParaRPr lang="en-US" sz="3600" dirty="0"/>
           </a:p>
@@ -17263,17 +17332,17 @@
           <a:ln/>
         </p:spPr>
         <p:txBody>
-          <a:bodyPr wrap="square" lIns="0" tIns="0" rIns="0" bIns="0" rtlCol="0" anchor="ctr"/>
-          <a:lstStyle/>
-          <a:p>
-            <a:pPr algn="ctr" indent="0" marL="0">
+          <a:bodyPr wrap="square" lIns="0" tIns="0" rIns="0" bIns="0" rtlCol="0" anchor="t"/>
+          <a:lstStyle/>
+          <a:p>
+            <a:pPr algn="l" indent="0" marL="0">
               <a:spcAft>
                 <a:spcPts val="800"/>
               </a:spcAft>
               <a:buNone/>
             </a:pPr>
             <a:r>
-              <a:rPr lang="en-US" sz="4000" b="1" dirty="0">
+              <a:rPr lang="en-US" sz="4000" dirty="0">
                 <a:solidFill>
                   <a:srgbClr val="111111"/>
                 </a:solidFill>
@@ -17281,27 +17350,7 @@
                 <a:ea typeface="Times New Roman" pitchFamily="34" charset="-122"/>
                 <a:cs typeface="Times New Roman" pitchFamily="34" charset="-120"/>
               </a:rPr>
-              <a:t>Our next lesson will be on:</a:t>
-            </a:r>
-            <a:endParaRPr lang="en-US" sz="4000" dirty="0"/>
-          </a:p>
-          <a:p>
-            <a:pPr algn="ctr" indent="0" marL="0">
-              <a:spcAft>
-                <a:spcPts val="800"/>
-              </a:spcAft>
-              <a:buNone/>
-            </a:pPr>
-            <a:r>
-              <a:rPr lang="en-US" sz="4000" b="1" dirty="0">
-                <a:solidFill>
-                  <a:srgbClr val="990011"/>
-                </a:solidFill>
-                <a:latin typeface="Times New Roman" pitchFamily="34" charset="0"/>
-                <a:ea typeface="Times New Roman" pitchFamily="34" charset="-122"/>
-                <a:cs typeface="Times New Roman" pitchFamily="34" charset="-120"/>
-              </a:rPr>
-              <a:t>Lesson 23: Wave Action in Coastal Areas</a:t>
+              <a:t>Name the two types of waves.</a:t>
             </a:r>
             <a:endParaRPr lang="en-US" sz="4000" dirty="0"/>
           </a:p>
@@ -17413,6 +17462,245 @@
                 <a:ea typeface="Calibri" pitchFamily="34" charset="-122"/>
                 <a:cs typeface="Calibri" pitchFamily="34" charset="-120"/>
               </a:rPr>
+              <a:t>NEXT LESSON</a:t>
+            </a:r>
+            <a:endParaRPr lang="en-US" sz="1400" dirty="0"/>
+          </a:p>
+        </p:txBody>
+      </p:sp>
+      <p:pic>
+        <p:nvPicPr>
+          <p:cNvPr id="3" name="Image 0" descr="/home/claude/f4/img/minesec_sheet.png">    </p:cNvPr>
+          <p:cNvPicPr>
+            <a:picLocks noChangeAspect="1"/>
+          </p:cNvPicPr>
+          <p:nvPr/>
+        </p:nvPicPr>
+        <p:blipFill>
+          <a:blip r:embed="rId1"/>
+          <a:stretch>
+            <a:fillRect/>
+          </a:stretch>
+        </p:blipFill>
+        <p:spPr>
+          <a:xfrm>
+            <a:off x="0" y="658368"/>
+            <a:ext cx="5120640" cy="5833872"/>
+          </a:xfrm>
+          <a:prstGeom prst="rect">
+            <a:avLst/>
+          </a:prstGeom>
+        </p:spPr>
+      </p:pic>
+      <p:sp>
+        <p:nvSpPr>
+          <p:cNvPr id="4" name="Text 1"/>
+          <p:cNvSpPr/>
+          <p:nvPr/>
+        </p:nvSpPr>
+        <p:spPr>
+          <a:xfrm>
+            <a:off x="5349240" y="1005840"/>
+            <a:ext cx="6522415" cy="731520"/>
+          </a:xfrm>
+          <a:prstGeom prst="rect">
+            <a:avLst/>
+          </a:prstGeom>
+          <a:noFill/>
+          <a:ln/>
+        </p:spPr>
+        <p:txBody>
+          <a:bodyPr wrap="square" lIns="0" tIns="0" rIns="0" bIns="0" rtlCol="0" anchor="ctr">
+            <a:normAutofit/>
+          </a:bodyPr>
+          <a:lstStyle/>
+          <a:p>
+            <a:pPr algn="ctr" indent="0" marL="0">
+              <a:buNone/>
+            </a:pPr>
+            <a:r>
+              <a:rPr lang="en-US" sz="3600" b="1" dirty="0">
+                <a:solidFill>
+                  <a:srgbClr val="990011"/>
+                </a:solidFill>
+                <a:latin typeface="Times New Roman" pitchFamily="34" charset="0"/>
+                <a:ea typeface="Times New Roman" pitchFamily="34" charset="-122"/>
+                <a:cs typeface="Times New Roman" pitchFamily="34" charset="-120"/>
+              </a:rPr>
+              <a:t>Next Lesson</a:t>
+            </a:r>
+            <a:endParaRPr lang="en-US" sz="3600" dirty="0"/>
+          </a:p>
+        </p:txBody>
+      </p:sp>
+      <p:sp>
+        <p:nvSpPr>
+          <p:cNvPr id="5" name="Text 2"/>
+          <p:cNvSpPr/>
+          <p:nvPr/>
+        </p:nvSpPr>
+        <p:spPr>
+          <a:xfrm>
+            <a:off x="5349240" y="1783080"/>
+            <a:ext cx="6522415" cy="4663440"/>
+          </a:xfrm>
+          <a:prstGeom prst="rect">
+            <a:avLst/>
+          </a:prstGeom>
+          <a:noFill/>
+          <a:ln/>
+        </p:spPr>
+        <p:txBody>
+          <a:bodyPr wrap="square" lIns="0" tIns="0" rIns="0" bIns="0" rtlCol="0" anchor="ctr"/>
+          <a:lstStyle/>
+          <a:p>
+            <a:pPr algn="ctr" indent="0" marL="0">
+              <a:spcAft>
+                <a:spcPts val="800"/>
+              </a:spcAft>
+              <a:buNone/>
+            </a:pPr>
+            <a:r>
+              <a:rPr lang="en-US" sz="4000" b="1" dirty="0">
+                <a:solidFill>
+                  <a:srgbClr val="111111"/>
+                </a:solidFill>
+                <a:latin typeface="Times New Roman" pitchFamily="34" charset="0"/>
+                <a:ea typeface="Times New Roman" pitchFamily="34" charset="-122"/>
+                <a:cs typeface="Times New Roman" pitchFamily="34" charset="-120"/>
+              </a:rPr>
+              <a:t>Our next lesson will be on:</a:t>
+            </a:r>
+            <a:endParaRPr lang="en-US" sz="4000" dirty="0"/>
+          </a:p>
+          <a:p>
+            <a:pPr algn="ctr" indent="0" marL="0">
+              <a:spcAft>
+                <a:spcPts val="800"/>
+              </a:spcAft>
+              <a:buNone/>
+            </a:pPr>
+            <a:r>
+              <a:rPr lang="en-US" sz="4000" b="1" dirty="0">
+                <a:solidFill>
+                  <a:srgbClr val="990011"/>
+                </a:solidFill>
+                <a:latin typeface="Times New Roman" pitchFamily="34" charset="0"/>
+                <a:ea typeface="Times New Roman" pitchFamily="34" charset="-122"/>
+                <a:cs typeface="Times New Roman" pitchFamily="34" charset="-120"/>
+              </a:rPr>
+              <a:t>Lesson 23: Wave Action in Coastal Areas</a:t>
+            </a:r>
+            <a:endParaRPr lang="en-US" sz="4000" dirty="0"/>
+          </a:p>
+        </p:txBody>
+      </p:sp>
+      <p:sp>
+        <p:nvSpPr>
+          <p:cNvPr id="25" name="Slide Number Placeholder 0"/>
+          <p:cNvSpPr>
+            <a:spLocks noGrp="1"/>
+          </p:cNvSpPr>
+          <p:nvPr>
+            <p:ph type="sldNum" sz="quarter" idx="4294967295"/>
+          </p:nvPr>
+        </p:nvSpPr>
+        <p:spPr>
+          <a:xfrm>
+            <a:off x="27432" y="91440"/>
+            <a:ext cx="585216" cy="475488"/>
+          </a:xfrm>
+          <a:prstGeom prst="rect">
+            <a:avLst/>
+          </a:prstGeom>
+          <a:extLst>
+            <a:ext uri="{C572A759-6A51-4108-AA02-DFA0A04FC94B}">
+              <ma14:wrappingTextBoxFlag xmlns:ma14="http://schemas.microsoft.com/office/mac/drawingml/2011/main" val="0"/>
+            </a:ext>
+          </a:extLst>
+        </p:spPr>
+        <p:txBody>
+          <a:bodyPr/>
+          <a:lstStyle>
+            <a:lvl1pPr>
+              <a:defRPr sz="2000">
+                <a:solidFill>
+                  <a:srgbClr val="FFFFFF"/>
+                </a:solidFill>
+                <a:latin typeface="Calibri"/>
+                <a:ea typeface="Calibri"/>
+                <a:cs typeface="Calibri"/>
+              </a:defRPr>
+            </a:lvl1pPr>
+          </a:lstStyle>
+          <a:p>
+            <a:pPr algn="ctr"/>
+            <a:fld id="{F7021451-1387-4CA6-816F-3879F97B5CBC}" type="slidenum">
+              <a:rPr b="1" lang="en-US"/>
+              <a:t>48</a:t>
+            </a:fld>
+            <a:endParaRPr lang="en-US"/>
+          </a:p>
+        </p:txBody>
+      </p:sp>
+    </p:spTree>
+  </p:cSld>
+  <p:clrMapOvr>
+    <a:masterClrMapping/>
+  </p:clrMapOvr>
+</p:sld>
+</file>
+
+<file path=ppt/slides/slide49.xml><?xml version="1.0" encoding="utf-8"?>
+<p:sld xmlns:a="http://schemas.openxmlformats.org/drawingml/2006/main" xmlns:r="http://schemas.openxmlformats.org/officeDocument/2006/relationships" xmlns:p="http://schemas.openxmlformats.org/presentationml/2006/main">
+  <p:cSld name="Slide 49">
+    <p:spTree>
+      <p:nvGrpSpPr>
+        <p:cNvPr id="1" name=""/>
+        <p:cNvGrpSpPr/>
+        <p:nvPr/>
+      </p:nvGrpSpPr>
+      <p:grpSpPr>
+        <a:xfrm>
+          <a:off x="0" y="0"/>
+          <a:ext cx="0" cy="0"/>
+          <a:chOff x="0" y="0"/>
+          <a:chExt cx="0" cy="0"/>
+        </a:xfrm>
+      </p:grpSpPr>
+      <p:sp>
+        <p:nvSpPr>
+          <p:cNvPr id="2" name="Text 0"/>
+          <p:cNvSpPr/>
+          <p:nvPr/>
+        </p:nvSpPr>
+        <p:spPr>
+          <a:xfrm>
+            <a:off x="457200" y="713232"/>
+            <a:ext cx="11368735" cy="274320"/>
+          </a:xfrm>
+          <a:prstGeom prst="rect">
+            <a:avLst/>
+          </a:prstGeom>
+          <a:noFill/>
+          <a:ln/>
+        </p:spPr>
+        <p:txBody>
+          <a:bodyPr wrap="square" lIns="0" tIns="0" rIns="0" bIns="0" rtlCol="0" anchor="ctr"/>
+          <a:lstStyle/>
+          <a:p>
+            <a:pPr algn="r" indent="0" marL="0">
+              <a:buNone/>
+            </a:pPr>
+            <a:r>
+              <a:rPr lang="en-US" sz="1400" b="1" dirty="0">
+                <a:solidFill>
+                  <a:srgbClr val="1C3F6E"/>
+                </a:solidFill>
+                <a:latin typeface="Calibri" pitchFamily="34" charset="0"/>
+                <a:ea typeface="Calibri" pitchFamily="34" charset="-122"/>
+                <a:cs typeface="Calibri" pitchFamily="34" charset="-120"/>
+              </a:rPr>
               <a:t>BILINGUAL GAME</a:t>
             </a:r>
             <a:endParaRPr lang="en-US" sz="1400" dirty="0"/>
@@ -17460,7 +17748,7 @@
       </p:sp>
       <p:graphicFrame>
         <p:nvGraphicFramePr>
-          <p:cNvPr id="49" name="Table 0"/>
+          <p:cNvPr id="50" name="Table 0"/>
           <p:cNvGraphicFramePr>
             <a:graphicFrameLocks noGrp="1"/>
           </p:cNvGraphicFramePr>
@@ -18772,7 +19060,7 @@
             <a:pPr algn="ctr"/>
             <a:fld id="{F7021451-1387-4CA6-816F-3879F97B5CBC}" type="slidenum">
               <a:rPr b="1" lang="en-US"/>
-              <a:t>48</a:t>
+              <a:t>49</a:t>
             </a:fld>
             <a:endParaRPr lang="en-US"/>
           </a:p>
@@ -18786,9 +19074,9 @@
 </p:sld>
 </file>
 
-<file path=ppt/slides/slide49.xml><?xml version="1.0" encoding="utf-8"?>
+<file path=ppt/slides/slide5.xml><?xml version="1.0" encoding="utf-8"?>
 <p:sld xmlns:a="http://schemas.openxmlformats.org/drawingml/2006/main" xmlns:r="http://schemas.openxmlformats.org/officeDocument/2006/relationships" xmlns:p="http://schemas.openxmlformats.org/presentationml/2006/main">
-  <p:cSld name="Slide 49">
+  <p:cSld name="Slide 5">
     <p:spTree>
       <p:nvGrpSpPr>
         <p:cNvPr id="1" name=""/>
@@ -18836,6 +19124,225 @@
                 <a:ea typeface="Calibri" pitchFamily="34" charset="-122"/>
                 <a:cs typeface="Calibri" pitchFamily="34" charset="-120"/>
               </a:rPr>
+              <a:t>HOMEWORK CORRECTION</a:t>
+            </a:r>
+            <a:endParaRPr lang="en-US" sz="1400" dirty="0"/>
+          </a:p>
+        </p:txBody>
+      </p:sp>
+      <p:pic>
+        <p:nvPicPr>
+          <p:cNvPr id="3" name="Image 0" descr="/home/claude/f4/img/minesec_sheet.png">    </p:cNvPr>
+          <p:cNvPicPr>
+            <a:picLocks noChangeAspect="1"/>
+          </p:cNvPicPr>
+          <p:nvPr/>
+        </p:nvPicPr>
+        <p:blipFill>
+          <a:blip r:embed="rId1"/>
+          <a:stretch>
+            <a:fillRect/>
+          </a:stretch>
+        </p:blipFill>
+        <p:spPr>
+          <a:xfrm>
+            <a:off x="0" y="658368"/>
+            <a:ext cx="5120640" cy="5833872"/>
+          </a:xfrm>
+          <a:prstGeom prst="rect">
+            <a:avLst/>
+          </a:prstGeom>
+        </p:spPr>
+      </p:pic>
+      <p:sp>
+        <p:nvSpPr>
+          <p:cNvPr id="4" name="Text 1"/>
+          <p:cNvSpPr/>
+          <p:nvPr/>
+        </p:nvSpPr>
+        <p:spPr>
+          <a:xfrm>
+            <a:off x="5349240" y="1005840"/>
+            <a:ext cx="6522415" cy="731520"/>
+          </a:xfrm>
+          <a:prstGeom prst="rect">
+            <a:avLst/>
+          </a:prstGeom>
+          <a:noFill/>
+          <a:ln/>
+        </p:spPr>
+        <p:txBody>
+          <a:bodyPr wrap="square" lIns="0" tIns="0" rIns="0" bIns="0" rtlCol="0" anchor="ctr">
+            <a:normAutofit/>
+          </a:bodyPr>
+          <a:lstStyle/>
+          <a:p>
+            <a:pPr algn="ctr" indent="0" marL="0">
+              <a:buNone/>
+            </a:pPr>
+            <a:r>
+              <a:rPr lang="en-US" sz="3600" b="1" dirty="0">
+                <a:solidFill>
+                  <a:srgbClr val="990011"/>
+                </a:solidFill>
+                <a:latin typeface="Times New Roman" pitchFamily="34" charset="0"/>
+                <a:ea typeface="Times New Roman" pitchFamily="34" charset="-122"/>
+                <a:cs typeface="Times New Roman" pitchFamily="34" charset="-120"/>
+              </a:rPr>
+              <a:t>Correction: Possible Answer</a:t>
+            </a:r>
+            <a:endParaRPr lang="en-US" sz="3600" dirty="0"/>
+          </a:p>
+        </p:txBody>
+      </p:sp>
+      <p:sp>
+        <p:nvSpPr>
+          <p:cNvPr id="5" name="Text 2"/>
+          <p:cNvSpPr/>
+          <p:nvPr/>
+        </p:nvSpPr>
+        <p:spPr>
+          <a:xfrm>
+            <a:off x="5349240" y="1783080"/>
+            <a:ext cx="6522415" cy="4663440"/>
+          </a:xfrm>
+          <a:prstGeom prst="rect">
+            <a:avLst/>
+          </a:prstGeom>
+          <a:noFill/>
+          <a:ln/>
+        </p:spPr>
+        <p:txBody>
+          <a:bodyPr wrap="square" lIns="0" tIns="0" rIns="0" bIns="0" rtlCol="0" anchor="t"/>
+          <a:lstStyle/>
+          <a:p>
+            <a:pPr algn="l" indent="0" marL="0">
+              <a:spcAft>
+                <a:spcPts val="800"/>
+              </a:spcAft>
+              <a:buNone/>
+            </a:pPr>
+            <a:r>
+              <a:rPr lang="en-US" sz="4000" dirty="0">
+                <a:solidFill>
+                  <a:srgbClr val="111111"/>
+                </a:solidFill>
+                <a:latin typeface="Times New Roman" pitchFamily="34" charset="0"/>
+                <a:ea typeface="Times New Roman" pitchFamily="34" charset="-122"/>
+                <a:cs typeface="Times New Roman" pitchFamily="34" charset="-120"/>
+              </a:rPr>
+              <a:t>Farming on fertile alluvium and fishing (also water supply and settlement).</a:t>
+            </a:r>
+            <a:endParaRPr lang="en-US" sz="4000" dirty="0"/>
+          </a:p>
+        </p:txBody>
+      </p:sp>
+      <p:sp>
+        <p:nvSpPr>
+          <p:cNvPr id="25" name="Slide Number Placeholder 0"/>
+          <p:cNvSpPr>
+            <a:spLocks noGrp="1"/>
+          </p:cNvSpPr>
+          <p:nvPr>
+            <p:ph type="sldNum" sz="quarter" idx="4294967295"/>
+          </p:nvPr>
+        </p:nvSpPr>
+        <p:spPr>
+          <a:xfrm>
+            <a:off x="27432" y="91440"/>
+            <a:ext cx="585216" cy="475488"/>
+          </a:xfrm>
+          <a:prstGeom prst="rect">
+            <a:avLst/>
+          </a:prstGeom>
+          <a:extLst>
+            <a:ext uri="{C572A759-6A51-4108-AA02-DFA0A04FC94B}">
+              <ma14:wrappingTextBoxFlag xmlns:ma14="http://schemas.microsoft.com/office/mac/drawingml/2011/main" val="0"/>
+            </a:ext>
+          </a:extLst>
+        </p:spPr>
+        <p:txBody>
+          <a:bodyPr/>
+          <a:lstStyle>
+            <a:lvl1pPr>
+              <a:defRPr sz="2000">
+                <a:solidFill>
+                  <a:srgbClr val="FFFFFF"/>
+                </a:solidFill>
+                <a:latin typeface="Calibri"/>
+                <a:ea typeface="Calibri"/>
+                <a:cs typeface="Calibri"/>
+              </a:defRPr>
+            </a:lvl1pPr>
+          </a:lstStyle>
+          <a:p>
+            <a:pPr algn="ctr"/>
+            <a:fld id="{F7021451-1387-4CA6-816F-3879F97B5CBC}" type="slidenum">
+              <a:rPr b="1" lang="en-US"/>
+              <a:t>5</a:t>
+            </a:fld>
+            <a:endParaRPr lang="en-US"/>
+          </a:p>
+        </p:txBody>
+      </p:sp>
+    </p:spTree>
+  </p:cSld>
+  <p:clrMapOvr>
+    <a:masterClrMapping/>
+  </p:clrMapOvr>
+</p:sld>
+</file>
+
+<file path=ppt/slides/slide50.xml><?xml version="1.0" encoding="utf-8"?>
+<p:sld xmlns:a="http://schemas.openxmlformats.org/drawingml/2006/main" xmlns:r="http://schemas.openxmlformats.org/officeDocument/2006/relationships" xmlns:p="http://schemas.openxmlformats.org/presentationml/2006/main">
+  <p:cSld name="Slide 50">
+    <p:spTree>
+      <p:nvGrpSpPr>
+        <p:cNvPr id="1" name=""/>
+        <p:cNvGrpSpPr/>
+        <p:nvPr/>
+      </p:nvGrpSpPr>
+      <p:grpSpPr>
+        <a:xfrm>
+          <a:off x="0" y="0"/>
+          <a:ext cx="0" cy="0"/>
+          <a:chOff x="0" y="0"/>
+          <a:chExt cx="0" cy="0"/>
+        </a:xfrm>
+      </p:grpSpPr>
+      <p:sp>
+        <p:nvSpPr>
+          <p:cNvPr id="2" name="Text 0"/>
+          <p:cNvSpPr/>
+          <p:nvPr/>
+        </p:nvSpPr>
+        <p:spPr>
+          <a:xfrm>
+            <a:off x="457200" y="713232"/>
+            <a:ext cx="11368735" cy="274320"/>
+          </a:xfrm>
+          <a:prstGeom prst="rect">
+            <a:avLst/>
+          </a:prstGeom>
+          <a:noFill/>
+          <a:ln/>
+        </p:spPr>
+        <p:txBody>
+          <a:bodyPr wrap="square" lIns="0" tIns="0" rIns="0" bIns="0" rtlCol="0" anchor="ctr"/>
+          <a:lstStyle/>
+          <a:p>
+            <a:pPr algn="r" indent="0" marL="0">
+              <a:buNone/>
+            </a:pPr>
+            <a:r>
+              <a:rPr lang="en-US" sz="1400" b="1" dirty="0">
+                <a:solidFill>
+                  <a:srgbClr val="1C3F6E"/>
+                </a:solidFill>
+                <a:latin typeface="Calibri" pitchFamily="34" charset="0"/>
+                <a:ea typeface="Calibri" pitchFamily="34" charset="-122"/>
+                <a:cs typeface="Calibri" pitchFamily="34" charset="-120"/>
+              </a:rPr>
               <a:t>LOGBOOK</a:t>
             </a:r>
             <a:endParaRPr lang="en-US" sz="1400" dirty="0"/>
@@ -18883,7 +19390,7 @@
       </p:sp>
       <p:graphicFrame>
         <p:nvGraphicFramePr>
-          <p:cNvPr id="50" name="Table 0"/>
+          <p:cNvPr id="51" name="Table 0"/>
           <p:cNvGraphicFramePr>
             <a:graphicFrameLocks noGrp="1"/>
           </p:cNvGraphicFramePr>
@@ -19505,7 +20012,7 @@
             <a:pPr algn="ctr"/>
             <a:fld id="{F7021451-1387-4CA6-816F-3879F97B5CBC}" type="slidenum">
               <a:rPr b="1" lang="en-US"/>
-              <a:t>49</a:t>
+              <a:t>50</a:t>
             </a:fld>
             <a:endParaRPr lang="en-US"/>
           </a:p>
@@ -19519,9 +20026,9 @@
 </p:sld>
 </file>
 
-<file path=ppt/slides/slide5.xml><?xml version="1.0" encoding="utf-8"?>
+<file path=ppt/slides/slide51.xml><?xml version="1.0" encoding="utf-8"?>
 <p:sld xmlns:a="http://schemas.openxmlformats.org/drawingml/2006/main" xmlns:r="http://schemas.openxmlformats.org/officeDocument/2006/relationships" xmlns:p="http://schemas.openxmlformats.org/presentationml/2006/main">
-  <p:cSld name="Slide 5">
+  <p:cSld name="Slide 51">
     <p:spTree>
       <p:nvGrpSpPr>
         <p:cNvPr id="1" name=""/>
@@ -19569,225 +20076,6 @@
                 <a:ea typeface="Calibri" pitchFamily="34" charset="-122"/>
                 <a:cs typeface="Calibri" pitchFamily="34" charset="-120"/>
               </a:rPr>
-              <a:t>HOMEWORK CORRECTION</a:t>
-            </a:r>
-            <a:endParaRPr lang="en-US" sz="1400" dirty="0"/>
-          </a:p>
-        </p:txBody>
-      </p:sp>
-      <p:pic>
-        <p:nvPicPr>
-          <p:cNvPr id="3" name="Image 0" descr="/home/claude/f4/img/minesec_sheet.png">    </p:cNvPr>
-          <p:cNvPicPr>
-            <a:picLocks noChangeAspect="1"/>
-          </p:cNvPicPr>
-          <p:nvPr/>
-        </p:nvPicPr>
-        <p:blipFill>
-          <a:blip r:embed="rId1"/>
-          <a:stretch>
-            <a:fillRect/>
-          </a:stretch>
-        </p:blipFill>
-        <p:spPr>
-          <a:xfrm>
-            <a:off x="0" y="658368"/>
-            <a:ext cx="5120640" cy="5833872"/>
-          </a:xfrm>
-          <a:prstGeom prst="rect">
-            <a:avLst/>
-          </a:prstGeom>
-        </p:spPr>
-      </p:pic>
-      <p:sp>
-        <p:nvSpPr>
-          <p:cNvPr id="4" name="Text 1"/>
-          <p:cNvSpPr/>
-          <p:nvPr/>
-        </p:nvSpPr>
-        <p:spPr>
-          <a:xfrm>
-            <a:off x="5349240" y="1005840"/>
-            <a:ext cx="6522415" cy="731520"/>
-          </a:xfrm>
-          <a:prstGeom prst="rect">
-            <a:avLst/>
-          </a:prstGeom>
-          <a:noFill/>
-          <a:ln/>
-        </p:spPr>
-        <p:txBody>
-          <a:bodyPr wrap="square" lIns="0" tIns="0" rIns="0" bIns="0" rtlCol="0" anchor="ctr">
-            <a:normAutofit/>
-          </a:bodyPr>
-          <a:lstStyle/>
-          <a:p>
-            <a:pPr algn="ctr" indent="0" marL="0">
-              <a:buNone/>
-            </a:pPr>
-            <a:r>
-              <a:rPr lang="en-US" sz="3600" b="1" dirty="0">
-                <a:solidFill>
-                  <a:srgbClr val="990011"/>
-                </a:solidFill>
-                <a:latin typeface="Times New Roman" pitchFamily="34" charset="0"/>
-                <a:ea typeface="Times New Roman" pitchFamily="34" charset="-122"/>
-                <a:cs typeface="Times New Roman" pitchFamily="34" charset="-120"/>
-              </a:rPr>
-              <a:t>Correction: Possible Answer</a:t>
-            </a:r>
-            <a:endParaRPr lang="en-US" sz="3600" dirty="0"/>
-          </a:p>
-        </p:txBody>
-      </p:sp>
-      <p:sp>
-        <p:nvSpPr>
-          <p:cNvPr id="5" name="Text 2"/>
-          <p:cNvSpPr/>
-          <p:nvPr/>
-        </p:nvSpPr>
-        <p:spPr>
-          <a:xfrm>
-            <a:off x="5349240" y="1783080"/>
-            <a:ext cx="6522415" cy="4663440"/>
-          </a:xfrm>
-          <a:prstGeom prst="rect">
-            <a:avLst/>
-          </a:prstGeom>
-          <a:noFill/>
-          <a:ln/>
-        </p:spPr>
-        <p:txBody>
-          <a:bodyPr wrap="square" lIns="0" tIns="0" rIns="0" bIns="0" rtlCol="0" anchor="t"/>
-          <a:lstStyle/>
-          <a:p>
-            <a:pPr algn="l" indent="0" marL="0">
-              <a:spcAft>
-                <a:spcPts val="800"/>
-              </a:spcAft>
-              <a:buNone/>
-            </a:pPr>
-            <a:r>
-              <a:rPr lang="en-US" sz="4000" dirty="0">
-                <a:solidFill>
-                  <a:srgbClr val="111111"/>
-                </a:solidFill>
-                <a:latin typeface="Times New Roman" pitchFamily="34" charset="0"/>
-                <a:ea typeface="Times New Roman" pitchFamily="34" charset="-122"/>
-                <a:cs typeface="Times New Roman" pitchFamily="34" charset="-120"/>
-              </a:rPr>
-              <a:t>Farming on fertile alluvium and fishing (also water supply and settlement).</a:t>
-            </a:r>
-            <a:endParaRPr lang="en-US" sz="4000" dirty="0"/>
-          </a:p>
-        </p:txBody>
-      </p:sp>
-      <p:sp>
-        <p:nvSpPr>
-          <p:cNvPr id="25" name="Slide Number Placeholder 0"/>
-          <p:cNvSpPr>
-            <a:spLocks noGrp="1"/>
-          </p:cNvSpPr>
-          <p:nvPr>
-            <p:ph type="sldNum" sz="quarter" idx="4294967295"/>
-          </p:nvPr>
-        </p:nvSpPr>
-        <p:spPr>
-          <a:xfrm>
-            <a:off x="27432" y="91440"/>
-            <a:ext cx="585216" cy="475488"/>
-          </a:xfrm>
-          <a:prstGeom prst="rect">
-            <a:avLst/>
-          </a:prstGeom>
-          <a:extLst>
-            <a:ext uri="{C572A759-6A51-4108-AA02-DFA0A04FC94B}">
-              <ma14:wrappingTextBoxFlag xmlns:ma14="http://schemas.microsoft.com/office/mac/drawingml/2011/main" val="0"/>
-            </a:ext>
-          </a:extLst>
-        </p:spPr>
-        <p:txBody>
-          <a:bodyPr/>
-          <a:lstStyle>
-            <a:lvl1pPr>
-              <a:defRPr sz="2000">
-                <a:solidFill>
-                  <a:srgbClr val="FFFFFF"/>
-                </a:solidFill>
-                <a:latin typeface="Calibri"/>
-                <a:ea typeface="Calibri"/>
-                <a:cs typeface="Calibri"/>
-              </a:defRPr>
-            </a:lvl1pPr>
-          </a:lstStyle>
-          <a:p>
-            <a:pPr algn="ctr"/>
-            <a:fld id="{F7021451-1387-4CA6-816F-3879F97B5CBC}" type="slidenum">
-              <a:rPr b="1" lang="en-US"/>
-              <a:t>5</a:t>
-            </a:fld>
-            <a:endParaRPr lang="en-US"/>
-          </a:p>
-        </p:txBody>
-      </p:sp>
-    </p:spTree>
-  </p:cSld>
-  <p:clrMapOvr>
-    <a:masterClrMapping/>
-  </p:clrMapOvr>
-</p:sld>
-</file>
-
-<file path=ppt/slides/slide50.xml><?xml version="1.0" encoding="utf-8"?>
-<p:sld xmlns:a="http://schemas.openxmlformats.org/drawingml/2006/main" xmlns:r="http://schemas.openxmlformats.org/officeDocument/2006/relationships" xmlns:p="http://schemas.openxmlformats.org/presentationml/2006/main">
-  <p:cSld name="Slide 50">
-    <p:spTree>
-      <p:nvGrpSpPr>
-        <p:cNvPr id="1" name=""/>
-        <p:cNvGrpSpPr/>
-        <p:nvPr/>
-      </p:nvGrpSpPr>
-      <p:grpSpPr>
-        <a:xfrm>
-          <a:off x="0" y="0"/>
-          <a:ext cx="0" cy="0"/>
-          <a:chOff x="0" y="0"/>
-          <a:chExt cx="0" cy="0"/>
-        </a:xfrm>
-      </p:grpSpPr>
-      <p:sp>
-        <p:nvSpPr>
-          <p:cNvPr id="2" name="Text 0"/>
-          <p:cNvSpPr/>
-          <p:nvPr/>
-        </p:nvSpPr>
-        <p:spPr>
-          <a:xfrm>
-            <a:off x="457200" y="713232"/>
-            <a:ext cx="11368735" cy="274320"/>
-          </a:xfrm>
-          <a:prstGeom prst="rect">
-            <a:avLst/>
-          </a:prstGeom>
-          <a:noFill/>
-          <a:ln/>
-        </p:spPr>
-        <p:txBody>
-          <a:bodyPr wrap="square" lIns="0" tIns="0" rIns="0" bIns="0" rtlCol="0" anchor="ctr"/>
-          <a:lstStyle/>
-          <a:p>
-            <a:pPr algn="r" indent="0" marL="0">
-              <a:buNone/>
-            </a:pPr>
-            <a:r>
-              <a:rPr lang="en-US" sz="1400" b="1" dirty="0">
-                <a:solidFill>
-                  <a:srgbClr val="1C3F6E"/>
-                </a:solidFill>
-                <a:latin typeface="Calibri" pitchFamily="34" charset="0"/>
-                <a:ea typeface="Calibri" pitchFamily="34" charset="-122"/>
-                <a:cs typeface="Calibri" pitchFamily="34" charset="-120"/>
-              </a:rPr>
               <a:t>LOGBOOK</a:t>
             </a:r>
             <a:endParaRPr lang="en-US" sz="1400" dirty="0"/>
@@ -19835,7 +20123,7 @@
       </p:sp>
       <p:graphicFrame>
         <p:nvGraphicFramePr>
-          <p:cNvPr id="51" name="Table 0"/>
+          <p:cNvPr id="52" name="Table 0"/>
           <p:cNvGraphicFramePr>
             <a:graphicFrameLocks noGrp="1"/>
           </p:cNvGraphicFramePr>
@@ -20595,289 +20883,6 @@
             <a:pPr algn="ctr"/>
             <a:fld id="{F7021451-1387-4CA6-816F-3879F97B5CBC}" type="slidenum">
               <a:rPr b="1" lang="en-US"/>
-              <a:t>50</a:t>
-            </a:fld>
-            <a:endParaRPr lang="en-US"/>
-          </a:p>
-        </p:txBody>
-      </p:sp>
-    </p:spTree>
-  </p:cSld>
-  <p:clrMapOvr>
-    <a:masterClrMapping/>
-  </p:clrMapOvr>
-</p:sld>
-</file>
-
-<file path=ppt/slides/slide51.xml><?xml version="1.0" encoding="utf-8"?>
-<p:sld xmlns:a="http://schemas.openxmlformats.org/drawingml/2006/main" xmlns:r="http://schemas.openxmlformats.org/officeDocument/2006/relationships" xmlns:p="http://schemas.openxmlformats.org/presentationml/2006/main">
-  <p:cSld name="Slide 51">
-    <p:spTree>
-      <p:nvGrpSpPr>
-        <p:cNvPr id="1" name=""/>
-        <p:cNvGrpSpPr/>
-        <p:nvPr/>
-      </p:nvGrpSpPr>
-      <p:grpSpPr>
-        <a:xfrm>
-          <a:off x="0" y="0"/>
-          <a:ext cx="0" cy="0"/>
-          <a:chOff x="0" y="0"/>
-          <a:chExt cx="0" cy="0"/>
-        </a:xfrm>
-      </p:grpSpPr>
-      <p:sp>
-        <p:nvSpPr>
-          <p:cNvPr id="2" name="Text 0"/>
-          <p:cNvSpPr/>
-          <p:nvPr/>
-        </p:nvSpPr>
-        <p:spPr>
-          <a:xfrm>
-            <a:off x="457200" y="713232"/>
-            <a:ext cx="11368735" cy="274320"/>
-          </a:xfrm>
-          <a:prstGeom prst="rect">
-            <a:avLst/>
-          </a:prstGeom>
-          <a:noFill/>
-          <a:ln/>
-        </p:spPr>
-        <p:txBody>
-          <a:bodyPr wrap="square" lIns="0" tIns="0" rIns="0" bIns="0" rtlCol="0" anchor="ctr"/>
-          <a:lstStyle/>
-          <a:p>
-            <a:pPr algn="r" indent="0" marL="0">
-              <a:buNone/>
-            </a:pPr>
-            <a:r>
-              <a:rPr lang="en-US" sz="1400" b="1" dirty="0">
-                <a:solidFill>
-                  <a:srgbClr val="1C3F6E"/>
-                </a:solidFill>
-                <a:latin typeface="Calibri" pitchFamily="34" charset="0"/>
-                <a:ea typeface="Calibri" pitchFamily="34" charset="-122"/>
-                <a:cs typeface="Calibri" pitchFamily="34" charset="-120"/>
-              </a:rPr>
-              <a:t>TEACHER'S NOTE</a:t>
-            </a:r>
-            <a:endParaRPr lang="en-US" sz="1400" dirty="0"/>
-          </a:p>
-        </p:txBody>
-      </p:sp>
-      <p:pic>
-        <p:nvPicPr>
-          <p:cNvPr id="3" name="Image 0" descr="/home/claude/f4/img/minesec_sheet.png">    </p:cNvPr>
-          <p:cNvPicPr>
-            <a:picLocks noChangeAspect="1"/>
-          </p:cNvPicPr>
-          <p:nvPr/>
-        </p:nvPicPr>
-        <p:blipFill>
-          <a:blip r:embed="rId1"/>
-          <a:stretch>
-            <a:fillRect/>
-          </a:stretch>
-        </p:blipFill>
-        <p:spPr>
-          <a:xfrm>
-            <a:off x="0" y="658368"/>
-            <a:ext cx="5120640" cy="5833872"/>
-          </a:xfrm>
-          <a:prstGeom prst="rect">
-            <a:avLst/>
-          </a:prstGeom>
-        </p:spPr>
-      </p:pic>
-      <p:sp>
-        <p:nvSpPr>
-          <p:cNvPr id="4" name="Text 1"/>
-          <p:cNvSpPr/>
-          <p:nvPr/>
-        </p:nvSpPr>
-        <p:spPr>
-          <a:xfrm>
-            <a:off x="5349240" y="1005840"/>
-            <a:ext cx="6522415" cy="731520"/>
-          </a:xfrm>
-          <a:prstGeom prst="rect">
-            <a:avLst/>
-          </a:prstGeom>
-          <a:noFill/>
-          <a:ln/>
-        </p:spPr>
-        <p:txBody>
-          <a:bodyPr wrap="square" lIns="0" tIns="0" rIns="0" bIns="0" rtlCol="0" anchor="ctr">
-            <a:normAutofit/>
-          </a:bodyPr>
-          <a:lstStyle/>
-          <a:p>
-            <a:pPr algn="ctr" indent="0" marL="0">
-              <a:buNone/>
-            </a:pPr>
-            <a:r>
-              <a:rPr lang="en-US" sz="3600" b="1" dirty="0">
-                <a:solidFill>
-                  <a:srgbClr val="990011"/>
-                </a:solidFill>
-                <a:latin typeface="Times New Roman" pitchFamily="34" charset="0"/>
-                <a:ea typeface="Times New Roman" pitchFamily="34" charset="-122"/>
-                <a:cs typeface="Times New Roman" pitchFamily="34" charset="-120"/>
-              </a:rPr>
-              <a:t>Teacher's Note</a:t>
-            </a:r>
-            <a:endParaRPr lang="en-US" sz="3600" dirty="0"/>
-          </a:p>
-        </p:txBody>
-      </p:sp>
-      <p:sp>
-        <p:nvSpPr>
-          <p:cNvPr id="5" name="Text 2"/>
-          <p:cNvSpPr/>
-          <p:nvPr/>
-        </p:nvSpPr>
-        <p:spPr>
-          <a:xfrm>
-            <a:off x="5349240" y="1783080"/>
-            <a:ext cx="6522415" cy="4663440"/>
-          </a:xfrm>
-          <a:prstGeom prst="rect">
-            <a:avLst/>
-          </a:prstGeom>
-          <a:noFill/>
-          <a:ln/>
-        </p:spPr>
-        <p:txBody>
-          <a:bodyPr wrap="square" lIns="0" tIns="0" rIns="0" bIns="0" rtlCol="0" anchor="t"/>
-          <a:lstStyle/>
-          <a:p>
-            <a:pPr algn="l" marL="342900" indent="-342900">
-              <a:spcAft>
-                <a:spcPts val="800"/>
-              </a:spcAft>
-              <a:buSzPct val="100000"/>
-              <a:buChar char="•"/>
-            </a:pPr>
-            <a:r>
-              <a:rPr lang="en-US" sz="2000" dirty="0">
-                <a:solidFill>
-                  <a:srgbClr val="111111"/>
-                </a:solidFill>
-                <a:latin typeface="Calibri" pitchFamily="34" charset="0"/>
-                <a:ea typeface="Calibri" pitchFamily="34" charset="-122"/>
-                <a:cs typeface="Calibri" pitchFamily="34" charset="-120"/>
-              </a:rPr>
-              <a:t>Timing: Homework correction, plan, objectives 4 min | Recall, situation, action 6 min | 3 activities 12 min | Board summary (copying) 15 min | Evaluation, remediation 5 min | Homework, next lesson 3 min | Logbook 5 min</a:t>
-            </a:r>
-            <a:endParaRPr lang="en-US" sz="2000" dirty="0"/>
-          </a:p>
-          <a:p>
-            <a:pPr algn="l" marL="342900" indent="-342900">
-              <a:spcAft>
-                <a:spcPts val="800"/>
-              </a:spcAft>
-              <a:buSzPct val="100000"/>
-              <a:buChar char="•"/>
-            </a:pPr>
-            <a:r>
-              <a:rPr lang="en-US" sz="2000" dirty="0">
-                <a:solidFill>
-                  <a:srgbClr val="111111"/>
-                </a:solidFill>
-                <a:latin typeface="Calibri" pitchFamily="34" charset="0"/>
-                <a:ea typeface="Calibri" pitchFamily="34" charset="-122"/>
-                <a:cs typeface="Calibri" pitchFamily="34" charset="-120"/>
-              </a:rPr>
-              <a:t>Without the projector (Activity 1): name crops grown along the Benue.</a:t>
-            </a:r>
-            <a:endParaRPr lang="en-US" sz="2000" dirty="0"/>
-          </a:p>
-          <a:p>
-            <a:pPr algn="l" marL="342900" indent="-342900">
-              <a:spcAft>
-                <a:spcPts val="800"/>
-              </a:spcAft>
-              <a:buSzPct val="100000"/>
-              <a:buChar char="•"/>
-            </a:pPr>
-            <a:r>
-              <a:rPr lang="en-US" sz="2000" dirty="0">
-                <a:solidFill>
-                  <a:srgbClr val="111111"/>
-                </a:solidFill>
-                <a:latin typeface="Calibri" pitchFamily="34" charset="0"/>
-                <a:ea typeface="Calibri" pitchFamily="34" charset="-122"/>
-                <a:cs typeface="Calibri" pitchFamily="34" charset="-120"/>
-              </a:rPr>
-              <a:t>Without the projector (Activity 2): describe the flood of 2012.</a:t>
-            </a:r>
-            <a:endParaRPr lang="en-US" sz="2000" dirty="0"/>
-          </a:p>
-          <a:p>
-            <a:pPr algn="l" marL="342900" indent="-342900">
-              <a:spcAft>
-                <a:spcPts val="800"/>
-              </a:spcAft>
-              <a:buSzPct val="100000"/>
-              <a:buChar char="•"/>
-            </a:pPr>
-            <a:r>
-              <a:rPr lang="en-US" sz="2000" dirty="0">
-                <a:solidFill>
-                  <a:srgbClr val="111111"/>
-                </a:solidFill>
-                <a:latin typeface="Calibri" pitchFamily="34" charset="0"/>
-                <a:ea typeface="Calibri" pitchFamily="34" charset="-122"/>
-                <a:cs typeface="Calibri" pitchFamily="34" charset="-120"/>
-              </a:rPr>
-              <a:t>Without the projector (Activity 3): draw a river with a bank on each side.</a:t>
-            </a:r>
-            <a:endParaRPr lang="en-US" sz="2000" dirty="0"/>
-          </a:p>
-        </p:txBody>
-      </p:sp>
-      <p:sp>
-        <p:nvSpPr>
-          <p:cNvPr id="25" name="Slide Number Placeholder 0"/>
-          <p:cNvSpPr>
-            <a:spLocks noGrp="1"/>
-          </p:cNvSpPr>
-          <p:nvPr>
-            <p:ph type="sldNum" sz="quarter" idx="4294967295"/>
-          </p:nvPr>
-        </p:nvSpPr>
-        <p:spPr>
-          <a:xfrm>
-            <a:off x="27432" y="91440"/>
-            <a:ext cx="585216" cy="475488"/>
-          </a:xfrm>
-          <a:prstGeom prst="rect">
-            <a:avLst/>
-          </a:prstGeom>
-          <a:extLst>
-            <a:ext uri="{C572A759-6A51-4108-AA02-DFA0A04FC94B}">
-              <ma14:wrappingTextBoxFlag xmlns:ma14="http://schemas.microsoft.com/office/mac/drawingml/2011/main" val="0"/>
-            </a:ext>
-          </a:extLst>
-        </p:spPr>
-        <p:txBody>
-          <a:bodyPr/>
-          <a:lstStyle>
-            <a:lvl1pPr>
-              <a:defRPr sz="2000">
-                <a:solidFill>
-                  <a:srgbClr val="FFFFFF"/>
-                </a:solidFill>
-                <a:latin typeface="Calibri"/>
-                <a:ea typeface="Calibri"/>
-                <a:cs typeface="Calibri"/>
-              </a:defRPr>
-            </a:lvl1pPr>
-          </a:lstStyle>
-          <a:p>
-            <a:pPr algn="ctr"/>
-            <a:fld id="{F7021451-1387-4CA6-816F-3879F97B5CBC}" type="slidenum">
-              <a:rPr b="1" lang="en-US"/>
               <a:t>51</a:t>
             </a:fld>
             <a:endParaRPr lang="en-US"/>
@@ -20942,7 +20947,7 @@
                 <a:ea typeface="Calibri" pitchFamily="34" charset="-122"/>
                 <a:cs typeface="Calibri" pitchFamily="34" charset="-120"/>
               </a:rPr>
-              <a:t>REFERENCES</a:t>
+              <a:t>TEACHER'S NOTE</a:t>
             </a:r>
             <a:endParaRPr lang="en-US" sz="1400" dirty="0"/>
           </a:p>
@@ -20965,7 +20970,7 @@
         <p:spPr>
           <a:xfrm>
             <a:off x="0" y="658368"/>
-            <a:ext cx="1463040" cy="5833872"/>
+            <a:ext cx="5120640" cy="5833872"/>
           </a:xfrm>
           <a:prstGeom prst="rect">
             <a:avLst/>
@@ -20980,8 +20985,8 @@
         </p:nvSpPr>
         <p:spPr>
           <a:xfrm>
-            <a:off x="1691640" y="1005840"/>
-            <a:ext cx="10180015" cy="731520"/>
+            <a:off x="5349240" y="1005840"/>
+            <a:ext cx="6522415" cy="731520"/>
           </a:xfrm>
           <a:prstGeom prst="rect">
             <a:avLst/>
@@ -21007,7 +21012,7 @@
                 <a:ea typeface="Times New Roman" pitchFamily="34" charset="-122"/>
                 <a:cs typeface="Times New Roman" pitchFamily="34" charset="-120"/>
               </a:rPr>
-              <a:t>References</a:t>
+              <a:t>Teacher's Note</a:t>
             </a:r>
             <a:endParaRPr lang="en-US" sz="3600" dirty="0"/>
           </a:p>
@@ -21021,8 +21026,8 @@
         </p:nvSpPr>
         <p:spPr>
           <a:xfrm>
-            <a:off x="1691640" y="1783080"/>
-            <a:ext cx="10180015" cy="4663440"/>
+            <a:off x="5349240" y="1783080"/>
+            <a:ext cx="6522415" cy="4663440"/>
           </a:xfrm>
           <a:prstGeom prst="rect">
             <a:avLst/>
@@ -21042,7 +21047,7 @@
               <a:buChar char="•"/>
             </a:pPr>
             <a:r>
-              <a:rPr lang="en-US" sz="1800" dirty="0">
+              <a:rPr lang="en-US" sz="2000" dirty="0">
                 <a:solidFill>
                   <a:srgbClr val="111111"/>
                 </a:solidFill>
@@ -21050,9 +21055,9 @@
                 <a:ea typeface="Calibri" pitchFamily="34" charset="-122"/>
                 <a:cs typeface="Calibri" pitchFamily="34" charset="-120"/>
               </a:rPr>
-              <a:t>National Geography Syllabus (MINESEC), Form 4 — Denudation Processes, Landforms and Impacts on Man.</a:t>
-            </a:r>
-            <a:endParaRPr lang="en-US" sz="1800" dirty="0"/>
+              <a:t>Timing: Homework correction, plan, objectives 4 min | Recall, situation, action 6 min | 3 activities 12 min | Board summary (copying) 15 min | Evaluation, remediation 5 min | Homework, next lesson 3 min | Logbook 5 min</a:t>
+            </a:r>
+            <a:endParaRPr lang="en-US" sz="2000" dirty="0"/>
           </a:p>
           <a:p>
             <a:pPr algn="l" marL="342900" indent="-342900">
@@ -21063,7 +21068,7 @@
               <a:buChar char="•"/>
             </a:pPr>
             <a:r>
-              <a:rPr lang="en-US" sz="1800" dirty="0">
+              <a:rPr lang="en-US" sz="2000" dirty="0">
                 <a:solidFill>
                   <a:srgbClr val="111111"/>
                 </a:solidFill>
@@ -21071,9 +21076,9 @@
                 <a:ea typeface="Calibri" pitchFamily="34" charset="-122"/>
                 <a:cs typeface="Calibri" pitchFamily="34" charset="-120"/>
               </a:rPr>
-              <a:t>Teacher's lesson notes (Form 4), checked and corrected where necessary.</a:t>
-            </a:r>
-            <a:endParaRPr lang="en-US" sz="1800" dirty="0"/>
+              <a:t>Without the projector (Activity 1): name crops grown along the Benue.</a:t>
+            </a:r>
+            <a:endParaRPr lang="en-US" sz="2000" dirty="0"/>
           </a:p>
           <a:p>
             <a:pPr algn="l" marL="342900" indent="-342900">
@@ -21084,7 +21089,7 @@
               <a:buChar char="•"/>
             </a:pPr>
             <a:r>
-              <a:rPr lang="en-US" sz="1800" dirty="0">
+              <a:rPr lang="en-US" sz="2000" dirty="0">
                 <a:solidFill>
                   <a:srgbClr val="111111"/>
                 </a:solidFill>
@@ -21092,9 +21097,9 @@
                 <a:ea typeface="Calibri" pitchFamily="34" charset="-122"/>
                 <a:cs typeface="Calibri" pitchFamily="34" charset="-120"/>
               </a:rPr>
-              <a:t>Photo, Activity 1: “A woman harvesting rice, Barotse floodplain, Zambia. Photo by Georgina” by WorldFish, CC BY-NC-ND 2.0, via Flickr (https://www.flickr.com/photos/61545321@N06/7848727138)</a:t>
-            </a:r>
-            <a:endParaRPr lang="en-US" sz="1800" dirty="0"/>
+              <a:t>Without the projector (Activity 2): describe the flood of 2012.</a:t>
+            </a:r>
+            <a:endParaRPr lang="en-US" sz="2000" dirty="0"/>
           </a:p>
           <a:p>
             <a:pPr algn="l" marL="342900" indent="-342900">
@@ -21105,7 +21110,7 @@
               <a:buChar char="•"/>
             </a:pPr>
             <a:r>
-              <a:rPr lang="en-US" sz="1800" dirty="0">
+              <a:rPr lang="en-US" sz="2000" dirty="0">
                 <a:solidFill>
                   <a:srgbClr val="111111"/>
                 </a:solidFill>
@@ -21113,10 +21118,209 @@
                 <a:ea typeface="Calibri" pitchFamily="34" charset="-122"/>
                 <a:cs typeface="Calibri" pitchFamily="34" charset="-120"/>
               </a:rPr>
-              <a:t>Photo, Activity 2: “Flood in Accra” by Stig Nygaard, CC BY 2.0, via Flickr (https://www.flickr.com/photos/10259776@N00/181742000)</a:t>
-            </a:r>
-            <a:endParaRPr lang="en-US" sz="1800" dirty="0"/>
-          </a:p>
+              <a:t>Without the projector (Activity 3): draw a river with a bank on each side.</a:t>
+            </a:r>
+            <a:endParaRPr lang="en-US" sz="2000" dirty="0"/>
+          </a:p>
+        </p:txBody>
+      </p:sp>
+      <p:sp>
+        <p:nvSpPr>
+          <p:cNvPr id="25" name="Slide Number Placeholder 0"/>
+          <p:cNvSpPr>
+            <a:spLocks noGrp="1"/>
+          </p:cNvSpPr>
+          <p:nvPr>
+            <p:ph type="sldNum" sz="quarter" idx="4294967295"/>
+          </p:nvPr>
+        </p:nvSpPr>
+        <p:spPr>
+          <a:xfrm>
+            <a:off x="27432" y="91440"/>
+            <a:ext cx="585216" cy="475488"/>
+          </a:xfrm>
+          <a:prstGeom prst="rect">
+            <a:avLst/>
+          </a:prstGeom>
+          <a:extLst>
+            <a:ext uri="{C572A759-6A51-4108-AA02-DFA0A04FC94B}">
+              <ma14:wrappingTextBoxFlag xmlns:ma14="http://schemas.microsoft.com/office/mac/drawingml/2011/main" val="0"/>
+            </a:ext>
+          </a:extLst>
+        </p:spPr>
+        <p:txBody>
+          <a:bodyPr/>
+          <a:lstStyle>
+            <a:lvl1pPr>
+              <a:defRPr sz="2000">
+                <a:solidFill>
+                  <a:srgbClr val="FFFFFF"/>
+                </a:solidFill>
+                <a:latin typeface="Calibri"/>
+                <a:ea typeface="Calibri"/>
+                <a:cs typeface="Calibri"/>
+              </a:defRPr>
+            </a:lvl1pPr>
+          </a:lstStyle>
+          <a:p>
+            <a:pPr algn="ctr"/>
+            <a:fld id="{F7021451-1387-4CA6-816F-3879F97B5CBC}" type="slidenum">
+              <a:rPr b="1" lang="en-US"/>
+              <a:t>52</a:t>
+            </a:fld>
+            <a:endParaRPr lang="en-US"/>
+          </a:p>
+        </p:txBody>
+      </p:sp>
+    </p:spTree>
+  </p:cSld>
+  <p:clrMapOvr>
+    <a:masterClrMapping/>
+  </p:clrMapOvr>
+</p:sld>
+</file>
+
+<file path=ppt/slides/slide53.xml><?xml version="1.0" encoding="utf-8"?>
+<p:sld xmlns:a="http://schemas.openxmlformats.org/drawingml/2006/main" xmlns:r="http://schemas.openxmlformats.org/officeDocument/2006/relationships" xmlns:p="http://schemas.openxmlformats.org/presentationml/2006/main">
+  <p:cSld name="Slide 53">
+    <p:spTree>
+      <p:nvGrpSpPr>
+        <p:cNvPr id="1" name=""/>
+        <p:cNvGrpSpPr/>
+        <p:nvPr/>
+      </p:nvGrpSpPr>
+      <p:grpSpPr>
+        <a:xfrm>
+          <a:off x="0" y="0"/>
+          <a:ext cx="0" cy="0"/>
+          <a:chOff x="0" y="0"/>
+          <a:chExt cx="0" cy="0"/>
+        </a:xfrm>
+      </p:grpSpPr>
+      <p:sp>
+        <p:nvSpPr>
+          <p:cNvPr id="2" name="Text 0"/>
+          <p:cNvSpPr/>
+          <p:nvPr/>
+        </p:nvSpPr>
+        <p:spPr>
+          <a:xfrm>
+            <a:off x="457200" y="713232"/>
+            <a:ext cx="11368735" cy="274320"/>
+          </a:xfrm>
+          <a:prstGeom prst="rect">
+            <a:avLst/>
+          </a:prstGeom>
+          <a:noFill/>
+          <a:ln/>
+        </p:spPr>
+        <p:txBody>
+          <a:bodyPr wrap="square" lIns="0" tIns="0" rIns="0" bIns="0" rtlCol="0" anchor="ctr"/>
+          <a:lstStyle/>
+          <a:p>
+            <a:pPr algn="r" indent="0" marL="0">
+              <a:buNone/>
+            </a:pPr>
+            <a:r>
+              <a:rPr lang="en-US" sz="1400" b="1" dirty="0">
+                <a:solidFill>
+                  <a:srgbClr val="1C3F6E"/>
+                </a:solidFill>
+                <a:latin typeface="Calibri" pitchFamily="34" charset="0"/>
+                <a:ea typeface="Calibri" pitchFamily="34" charset="-122"/>
+                <a:cs typeface="Calibri" pitchFamily="34" charset="-120"/>
+              </a:rPr>
+              <a:t>REFERENCES</a:t>
+            </a:r>
+            <a:endParaRPr lang="en-US" sz="1400" dirty="0"/>
+          </a:p>
+        </p:txBody>
+      </p:sp>
+      <p:pic>
+        <p:nvPicPr>
+          <p:cNvPr id="3" name="Image 0" descr="/home/claude/f4/img/minesec_sheet.png">    </p:cNvPr>
+          <p:cNvPicPr>
+            <a:picLocks noChangeAspect="1"/>
+          </p:cNvPicPr>
+          <p:nvPr/>
+        </p:nvPicPr>
+        <p:blipFill>
+          <a:blip r:embed="rId1"/>
+          <a:stretch>
+            <a:fillRect/>
+          </a:stretch>
+        </p:blipFill>
+        <p:spPr>
+          <a:xfrm>
+            <a:off x="0" y="658368"/>
+            <a:ext cx="1463040" cy="5833872"/>
+          </a:xfrm>
+          <a:prstGeom prst="rect">
+            <a:avLst/>
+          </a:prstGeom>
+        </p:spPr>
+      </p:pic>
+      <p:sp>
+        <p:nvSpPr>
+          <p:cNvPr id="4" name="Text 1"/>
+          <p:cNvSpPr/>
+          <p:nvPr/>
+        </p:nvSpPr>
+        <p:spPr>
+          <a:xfrm>
+            <a:off x="1691640" y="1005840"/>
+            <a:ext cx="10180015" cy="731520"/>
+          </a:xfrm>
+          <a:prstGeom prst="rect">
+            <a:avLst/>
+          </a:prstGeom>
+          <a:noFill/>
+          <a:ln/>
+        </p:spPr>
+        <p:txBody>
+          <a:bodyPr wrap="square" lIns="0" tIns="0" rIns="0" bIns="0" rtlCol="0" anchor="ctr">
+            <a:normAutofit/>
+          </a:bodyPr>
+          <a:lstStyle/>
+          <a:p>
+            <a:pPr algn="ctr" indent="0" marL="0">
+              <a:buNone/>
+            </a:pPr>
+            <a:r>
+              <a:rPr lang="en-US" sz="3600" b="1" dirty="0">
+                <a:solidFill>
+                  <a:srgbClr val="990011"/>
+                </a:solidFill>
+                <a:latin typeface="Times New Roman" pitchFamily="34" charset="0"/>
+                <a:ea typeface="Times New Roman" pitchFamily="34" charset="-122"/>
+                <a:cs typeface="Times New Roman" pitchFamily="34" charset="-120"/>
+              </a:rPr>
+              <a:t>References</a:t>
+            </a:r>
+            <a:endParaRPr lang="en-US" sz="3600" dirty="0"/>
+          </a:p>
+        </p:txBody>
+      </p:sp>
+      <p:sp>
+        <p:nvSpPr>
+          <p:cNvPr id="5" name="Text 2"/>
+          <p:cNvSpPr/>
+          <p:nvPr/>
+        </p:nvSpPr>
+        <p:spPr>
+          <a:xfrm>
+            <a:off x="1691640" y="1783080"/>
+            <a:ext cx="10180015" cy="4663440"/>
+          </a:xfrm>
+          <a:prstGeom prst="rect">
+            <a:avLst/>
+          </a:prstGeom>
+          <a:noFill/>
+          <a:ln/>
+        </p:spPr>
+        <p:txBody>
+          <a:bodyPr wrap="square" lIns="0" tIns="0" rIns="0" bIns="0" rtlCol="0" anchor="t"/>
+          <a:lstStyle/>
           <a:p>
             <a:pPr algn="l" marL="342900" indent="-342900">
               <a:spcAft>
@@ -21134,7 +21338,7 @@
                 <a:ea typeface="Calibri" pitchFamily="34" charset="-122"/>
                 <a:cs typeface="Calibri" pitchFamily="34" charset="-120"/>
               </a:rPr>
-              <a:t>Photo, Activity 3: “Williams Levee on Kankakee River near Shelby, Indiana, May 1912” by Shook Photos, CC BY 2.0, via Flickr (https://www.flickr.com/photos/24724221@N07/18458778016)</a:t>
+              <a:t>National Geography Syllabus (MINESEC), Form 4 — Denudation Processes, Landforms and Impacts on Man.</a:t>
             </a:r>
             <a:endParaRPr lang="en-US" sz="1800" dirty="0"/>
           </a:p>
@@ -21155,7 +21359,7 @@
                 <a:ea typeface="Calibri" pitchFamily="34" charset="-122"/>
                 <a:cs typeface="Calibri" pitchFamily="34" charset="-120"/>
               </a:rPr>
-              <a:t>Photo, board summary (Energy): “South Holston Lake, (Virginia-Tennessee border, USA)” by James St. John, CC BY 2.0, via Flickr (https://www.flickr.com/photos/47445767@N05/39221734762)</a:t>
+              <a:t>Teacher's lesson notes (Form 4), checked and corrected where necessary.</a:t>
             </a:r>
             <a:endParaRPr lang="en-US" sz="1800" dirty="0"/>
           </a:p>
@@ -21176,6 +21380,90 @@
                 <a:ea typeface="Calibri" pitchFamily="34" charset="-122"/>
                 <a:cs typeface="Calibri" pitchFamily="34" charset="-120"/>
               </a:rPr>
+              <a:t>Photo, Activity 1: “A woman harvesting rice, Barotse floodplain, Zambia. Photo by Georgina” by WorldFish, CC BY-NC-ND 2.0, via Flickr (https://www.flickr.com/photos/61545321@N06/7848727138)</a:t>
+            </a:r>
+            <a:endParaRPr lang="en-US" sz="1800" dirty="0"/>
+          </a:p>
+          <a:p>
+            <a:pPr algn="l" marL="342900" indent="-342900">
+              <a:spcAft>
+                <a:spcPts val="800"/>
+              </a:spcAft>
+              <a:buSzPct val="100000"/>
+              <a:buChar char="•"/>
+            </a:pPr>
+            <a:r>
+              <a:rPr lang="en-US" sz="1800" dirty="0">
+                <a:solidFill>
+                  <a:srgbClr val="111111"/>
+                </a:solidFill>
+                <a:latin typeface="Calibri" pitchFamily="34" charset="0"/>
+                <a:ea typeface="Calibri" pitchFamily="34" charset="-122"/>
+                <a:cs typeface="Calibri" pitchFamily="34" charset="-120"/>
+              </a:rPr>
+              <a:t>Photo, Activity 2: “Flood in Accra” by Stig Nygaard, CC BY 2.0, via Flickr (https://www.flickr.com/photos/10259776@N00/181742000)</a:t>
+            </a:r>
+            <a:endParaRPr lang="en-US" sz="1800" dirty="0"/>
+          </a:p>
+          <a:p>
+            <a:pPr algn="l" marL="342900" indent="-342900">
+              <a:spcAft>
+                <a:spcPts val="800"/>
+              </a:spcAft>
+              <a:buSzPct val="100000"/>
+              <a:buChar char="•"/>
+            </a:pPr>
+            <a:r>
+              <a:rPr lang="en-US" sz="1800" dirty="0">
+                <a:solidFill>
+                  <a:srgbClr val="111111"/>
+                </a:solidFill>
+                <a:latin typeface="Calibri" pitchFamily="34" charset="0"/>
+                <a:ea typeface="Calibri" pitchFamily="34" charset="-122"/>
+                <a:cs typeface="Calibri" pitchFamily="34" charset="-120"/>
+              </a:rPr>
+              <a:t>Photo, Activity 3: “Williams Levee on Kankakee River near Shelby, Indiana, May 1912” by Shook Photos, CC BY 2.0, via Flickr (https://www.flickr.com/photos/24724221@N07/18458778016)</a:t>
+            </a:r>
+            <a:endParaRPr lang="en-US" sz="1800" dirty="0"/>
+          </a:p>
+          <a:p>
+            <a:pPr algn="l" marL="342900" indent="-342900">
+              <a:spcAft>
+                <a:spcPts val="800"/>
+              </a:spcAft>
+              <a:buSzPct val="100000"/>
+              <a:buChar char="•"/>
+            </a:pPr>
+            <a:r>
+              <a:rPr lang="en-US" sz="1800" dirty="0">
+                <a:solidFill>
+                  <a:srgbClr val="111111"/>
+                </a:solidFill>
+                <a:latin typeface="Calibri" pitchFamily="34" charset="0"/>
+                <a:ea typeface="Calibri" pitchFamily="34" charset="-122"/>
+                <a:cs typeface="Calibri" pitchFamily="34" charset="-120"/>
+              </a:rPr>
+              <a:t>Photo, board summary (Energy): “South Holston Lake, (Virginia-Tennessee border, USA)” by James St. John, CC BY 2.0, via Flickr (https://www.flickr.com/photos/47445767@N05/39221734762)</a:t>
+            </a:r>
+            <a:endParaRPr lang="en-US" sz="1800" dirty="0"/>
+          </a:p>
+          <a:p>
+            <a:pPr algn="l" marL="342900" indent="-342900">
+              <a:spcAft>
+                <a:spcPts val="800"/>
+              </a:spcAft>
+              <a:buSzPct val="100000"/>
+              <a:buChar char="•"/>
+            </a:pPr>
+            <a:r>
+              <a:rPr lang="en-US" sz="1800" dirty="0">
+                <a:solidFill>
+                  <a:srgbClr val="111111"/>
+                </a:solidFill>
+                <a:latin typeface="Calibri" pitchFamily="34" charset="0"/>
+                <a:ea typeface="Calibri" pitchFamily="34" charset="-122"/>
+                <a:cs typeface="Calibri" pitchFamily="34" charset="-120"/>
+              </a:rPr>
               <a:t>Diagrams and animations: drawn for this lesson (Geography Department).</a:t>
             </a:r>
             <a:endParaRPr lang="en-US" sz="1800" dirty="0"/>
@@ -21224,7 +21512,7 @@
             <a:pPr algn="ctr"/>
             <a:fld id="{F7021451-1387-4CA6-816F-3879F97B5CBC}" type="slidenum">
               <a:rPr b="1" lang="en-US"/>
-              <a:t>52</a:t>
+              <a:t>53</a:t>
             </a:fld>
             <a:endParaRPr lang="en-US"/>
           </a:p>
